--- a/reference_material/slides/018_Hypothesis_Test.pptx
+++ b/reference_material/slides/018_Hypothesis_Test.pptx
@@ -5,28 +5,56 @@
     <p:sldMasterId id="2147483660" r:id="rId1"/>
   </p:sldMasterIdLst>
   <p:notesMasterIdLst>
-    <p:notesMasterId r:id="rId21"/>
+    <p:notesMasterId r:id="rId49"/>
   </p:notesMasterIdLst>
   <p:sldIdLst>
     <p:sldId id="274" r:id="rId2"/>
-    <p:sldId id="256" r:id="rId3"/>
-    <p:sldId id="257" r:id="rId4"/>
-    <p:sldId id="264" r:id="rId5"/>
-    <p:sldId id="262" r:id="rId6"/>
-    <p:sldId id="270" r:id="rId7"/>
-    <p:sldId id="272" r:id="rId8"/>
-    <p:sldId id="268" r:id="rId9"/>
-    <p:sldId id="263" r:id="rId10"/>
-    <p:sldId id="269" r:id="rId11"/>
-    <p:sldId id="265" r:id="rId12"/>
-    <p:sldId id="271" r:id="rId13"/>
-    <p:sldId id="266" r:id="rId14"/>
-    <p:sldId id="267" r:id="rId15"/>
-    <p:sldId id="273" r:id="rId16"/>
-    <p:sldId id="258" r:id="rId17"/>
-    <p:sldId id="259" r:id="rId18"/>
-    <p:sldId id="260" r:id="rId19"/>
-    <p:sldId id="261" r:id="rId20"/>
+    <p:sldId id="295" r:id="rId3"/>
+    <p:sldId id="256" r:id="rId4"/>
+    <p:sldId id="280" r:id="rId5"/>
+    <p:sldId id="298" r:id="rId6"/>
+    <p:sldId id="299" r:id="rId7"/>
+    <p:sldId id="300" r:id="rId8"/>
+    <p:sldId id="301" r:id="rId9"/>
+    <p:sldId id="286" r:id="rId10"/>
+    <p:sldId id="287" r:id="rId11"/>
+    <p:sldId id="297" r:id="rId12"/>
+    <p:sldId id="288" r:id="rId13"/>
+    <p:sldId id="281" r:id="rId14"/>
+    <p:sldId id="282" r:id="rId15"/>
+    <p:sldId id="283" r:id="rId16"/>
+    <p:sldId id="284" r:id="rId17"/>
+    <p:sldId id="302" r:id="rId18"/>
+    <p:sldId id="257" r:id="rId19"/>
+    <p:sldId id="296" r:id="rId20"/>
+    <p:sldId id="289" r:id="rId21"/>
+    <p:sldId id="290" r:id="rId22"/>
+    <p:sldId id="291" r:id="rId23"/>
+    <p:sldId id="293" r:id="rId24"/>
+    <p:sldId id="292" r:id="rId25"/>
+    <p:sldId id="294" r:id="rId26"/>
+    <p:sldId id="285" r:id="rId27"/>
+    <p:sldId id="275" r:id="rId28"/>
+    <p:sldId id="264" r:id="rId29"/>
+    <p:sldId id="279" r:id="rId30"/>
+    <p:sldId id="262" r:id="rId31"/>
+    <p:sldId id="270" r:id="rId32"/>
+    <p:sldId id="272" r:id="rId33"/>
+    <p:sldId id="268" r:id="rId34"/>
+    <p:sldId id="263" r:id="rId35"/>
+    <p:sldId id="269" r:id="rId36"/>
+    <p:sldId id="265" r:id="rId37"/>
+    <p:sldId id="271" r:id="rId38"/>
+    <p:sldId id="278" r:id="rId39"/>
+    <p:sldId id="277" r:id="rId40"/>
+    <p:sldId id="266" r:id="rId41"/>
+    <p:sldId id="267" r:id="rId42"/>
+    <p:sldId id="273" r:id="rId43"/>
+    <p:sldId id="258" r:id="rId44"/>
+    <p:sldId id="259" r:id="rId45"/>
+    <p:sldId id="260" r:id="rId46"/>
+    <p:sldId id="261" r:id="rId47"/>
+    <p:sldId id="276" r:id="rId48"/>
   </p:sldIdLst>
   <p:sldSz cx="12192000" cy="6858000"/>
   <p:notesSz cx="6858000" cy="9144000"/>
@@ -126,6 +154,93 @@
     </a:lvl9pPr>
   </p:defaultTextStyle>
   <p:extLst>
+    <p:ext uri="{521415D9-36F7-43E2-AB2F-B90AF26B5E84}">
+      <p14:sectionLst xmlns:p14="http://schemas.microsoft.com/office/powerpoint/2010/main">
+        <p14:section name="Default Section" id="{E563C269-5786-C244-B0B8-ECA227A0178C}">
+          <p14:sldIdLst>
+            <p14:sldId id="274"/>
+            <p14:sldId id="295"/>
+            <p14:sldId id="256"/>
+            <p14:sldId id="280"/>
+          </p14:sldIdLst>
+        </p14:section>
+        <p14:section name="Recap - estimation" id="{D1136178-9B7A-8C41-BBDD-DEA1FA7E5CD0}">
+          <p14:sldIdLst>
+            <p14:sldId id="298"/>
+            <p14:sldId id="299"/>
+            <p14:sldId id="300"/>
+            <p14:sldId id="301"/>
+          </p14:sldIdLst>
+        </p14:section>
+        <p14:section name="Effect and intro" id="{4652116E-77C5-3D45-B6A2-2DDC6D3F1749}">
+          <p14:sldIdLst>
+            <p14:sldId id="286"/>
+            <p14:sldId id="287"/>
+            <p14:sldId id="297"/>
+            <p14:sldId id="288"/>
+          </p14:sldIdLst>
+        </p14:section>
+        <p14:section name="from scratch" id="{1C52BECE-D636-1E44-A3D1-AE1E1C24ADAC}">
+          <p14:sldIdLst>
+            <p14:sldId id="281"/>
+            <p14:sldId id="282"/>
+            <p14:sldId id="283"/>
+            <p14:sldId id="284"/>
+            <p14:sldId id="302"/>
+            <p14:sldId id="257"/>
+            <p14:sldId id="296"/>
+          </p14:sldIdLst>
+        </p14:section>
+        <p14:section name="Classes" id="{141EB2E9-FC80-D441-9AE9-8E444C99A653}">
+          <p14:sldIdLst>
+            <p14:sldId id="289"/>
+            <p14:sldId id="290"/>
+            <p14:sldId id="291"/>
+            <p14:sldId id="293"/>
+            <p14:sldId id="292"/>
+            <p14:sldId id="294"/>
+          </p14:sldIdLst>
+        </p14:section>
+        <p14:section name="Old hyp tests" id="{587513C8-59F6-DC46-BC83-B980CDCEFA5E}">
+          <p14:sldIdLst>
+            <p14:sldId id="285"/>
+            <p14:sldId id="275"/>
+          </p14:sldIdLst>
+        </p14:section>
+        <p14:section name="math tests" id="{032D7B8D-A861-364B-9C61-C0D56F4E9F7A}">
+          <p14:sldIdLst>
+            <p14:sldId id="264"/>
+            <p14:sldId id="279"/>
+            <p14:sldId id="262"/>
+            <p14:sldId id="270"/>
+            <p14:sldId id="272"/>
+            <p14:sldId id="268"/>
+            <p14:sldId id="263"/>
+            <p14:sldId id="269"/>
+            <p14:sldId id="265"/>
+            <p14:sldId id="271"/>
+            <p14:sldId id="278"/>
+            <p14:sldId id="277"/>
+            <p14:sldId id="266"/>
+          </p14:sldIdLst>
+        </p14:section>
+        <p14:section name="phacking" id="{E3EFF888-5E9A-6D48-81BC-09DD3E25EAEA}">
+          <p14:sldIdLst>
+            <p14:sldId id="267"/>
+            <p14:sldId id="273"/>
+            <p14:sldId id="258"/>
+            <p14:sldId id="259"/>
+            <p14:sldId id="260"/>
+            <p14:sldId id="261"/>
+          </p14:sldIdLst>
+        </p14:section>
+        <p14:section name="Conclusion" id="{5A1FA9C0-297A-1B49-BCB2-0547A886D778}">
+          <p14:sldIdLst>
+            <p14:sldId id="276"/>
+          </p14:sldIdLst>
+        </p14:section>
+      </p14:sectionLst>
+    </p:ext>
     <p:ext uri="{EFAFB233-063F-42B5-8137-9DF3F51BA10A}">
       <p15:sldGuideLst xmlns:p15="http://schemas.microsoft.com/office/powerpoint/2012/main"/>
     </p:ext>
@@ -223,7 +338,7 @@
           <a:p>
             <a:fld id="{F9CDC526-F730-724D-AA0D-326EFC56D561}" type="datetimeFigureOut">
               <a:rPr lang="en-US" smtClean="0"/>
-              <a:t>10/26/22</a:t>
+              <a:t>10/20/25</a:t>
             </a:fld>
             <a:endParaRPr lang="en-US"/>
           </a:p>
@@ -574,7 +689,7 @@
           <a:p>
             <a:fld id="{E36F3295-E463-C64D-A388-E45D36324975}" type="slidenum">
               <a:rPr lang="en-US" smtClean="0"/>
-              <a:t>17</a:t>
+              <a:t>44</a:t>
             </a:fld>
             <a:endParaRPr lang="en-US"/>
           </a:p>
@@ -732,7 +847,7 @@
           <a:p>
             <a:fld id="{B2D8FCA8-E96D-1F41-985D-25A168D67D2E}" type="datetimeFigureOut">
               <a:rPr lang="en-US" smtClean="0"/>
-              <a:t>10/26/22</a:t>
+              <a:t>10/20/25</a:t>
             </a:fld>
             <a:endParaRPr lang="en-US"/>
           </a:p>
@@ -943,7 +1058,7 @@
           <a:p>
             <a:fld id="{B2D8FCA8-E96D-1F41-985D-25A168D67D2E}" type="datetimeFigureOut">
               <a:rPr lang="en-US" smtClean="0"/>
-              <a:t>10/26/22</a:t>
+              <a:t>10/20/25</a:t>
             </a:fld>
             <a:endParaRPr lang="en-US"/>
           </a:p>
@@ -1158,7 +1273,7 @@
           <a:p>
             <a:fld id="{B2D8FCA8-E96D-1F41-985D-25A168D67D2E}" type="datetimeFigureOut">
               <a:rPr lang="en-US" smtClean="0"/>
-              <a:t>10/26/22</a:t>
+              <a:t>10/20/25</a:t>
             </a:fld>
             <a:endParaRPr lang="en-US"/>
           </a:p>
@@ -1359,7 +1474,7 @@
           <a:p>
             <a:fld id="{B2D8FCA8-E96D-1F41-985D-25A168D67D2E}" type="datetimeFigureOut">
               <a:rPr lang="en-US" smtClean="0"/>
-              <a:t>10/26/22</a:t>
+              <a:t>10/20/25</a:t>
             </a:fld>
             <a:endParaRPr lang="en-US"/>
           </a:p>
@@ -1638,7 +1753,7 @@
           <a:p>
             <a:fld id="{B2D8FCA8-E96D-1F41-985D-25A168D67D2E}" type="datetimeFigureOut">
               <a:rPr lang="en-US" smtClean="0"/>
-              <a:t>10/26/22</a:t>
+              <a:t>10/20/25</a:t>
             </a:fld>
             <a:endParaRPr lang="en-US"/>
           </a:p>
@@ -1906,7 +2021,7 @@
           <a:p>
             <a:fld id="{B2D8FCA8-E96D-1F41-985D-25A168D67D2E}" type="datetimeFigureOut">
               <a:rPr lang="en-US" smtClean="0"/>
-              <a:t>10/26/22</a:t>
+              <a:t>10/20/25</a:t>
             </a:fld>
             <a:endParaRPr lang="en-US"/>
           </a:p>
@@ -2322,7 +2437,7 @@
           <a:p>
             <a:fld id="{B2D8FCA8-E96D-1F41-985D-25A168D67D2E}" type="datetimeFigureOut">
               <a:rPr lang="en-US" smtClean="0"/>
-              <a:t>10/26/22</a:t>
+              <a:t>10/20/25</a:t>
             </a:fld>
             <a:endParaRPr lang="en-US"/>
           </a:p>
@@ -2471,7 +2586,7 @@
           <a:p>
             <a:fld id="{B2D8FCA8-E96D-1F41-985D-25A168D67D2E}" type="datetimeFigureOut">
               <a:rPr lang="en-US" smtClean="0"/>
-              <a:t>10/26/22</a:t>
+              <a:t>10/20/25</a:t>
             </a:fld>
             <a:endParaRPr lang="en-US"/>
           </a:p>
@@ -2597,7 +2712,7 @@
           <a:p>
             <a:fld id="{B2D8FCA8-E96D-1F41-985D-25A168D67D2E}" type="datetimeFigureOut">
               <a:rPr lang="en-US" smtClean="0"/>
-              <a:t>10/26/22</a:t>
+              <a:t>10/20/25</a:t>
             </a:fld>
             <a:endParaRPr lang="en-US"/>
           </a:p>
@@ -2848,7 +2963,7 @@
           <a:p>
             <a:fld id="{B2D8FCA8-E96D-1F41-985D-25A168D67D2E}" type="datetimeFigureOut">
               <a:rPr lang="en-US" smtClean="0"/>
-              <a:t>10/26/22</a:t>
+              <a:t>10/20/25</a:t>
             </a:fld>
             <a:endParaRPr lang="en-US"/>
           </a:p>
@@ -3293,7 +3408,7 @@
           <a:p>
             <a:fld id="{B2D8FCA8-E96D-1F41-985D-25A168D67D2E}" type="datetimeFigureOut">
               <a:rPr lang="en-US" smtClean="0"/>
-              <a:t>10/26/22</a:t>
+              <a:t>10/20/25</a:t>
             </a:fld>
             <a:endParaRPr lang="en-US"/>
           </a:p>
@@ -3460,6 +3575,13 @@
             <a:schemeClr val="lt1"/>
           </a:fontRef>
         </p:style>
+        <p:txBody>
+          <a:bodyPr/>
+          <a:lstStyle/>
+          <a:p>
+            <a:endParaRPr lang="en-US"/>
+          </a:p>
+        </p:txBody>
       </p:sp>
       <p:pic>
         <p:nvPicPr>
@@ -3620,7 +3742,7 @@
           <a:p>
             <a:fld id="{B2D8FCA8-E96D-1F41-985D-25A168D67D2E}" type="datetimeFigureOut">
               <a:rPr lang="en-US" smtClean="0"/>
-              <a:t>10/26/22</a:t>
+              <a:t>10/20/25</a:t>
             </a:fld>
             <a:endParaRPr lang="en-US"/>
           </a:p>
@@ -4090,7 +4212,7 @@
 </file>
 
 <file path=ppt/slides/slide1.xml><?xml version="1.0" encoding="utf-8"?>
-<p:sld xmlns:a="http://schemas.openxmlformats.org/drawingml/2006/main" xmlns:r="http://schemas.openxmlformats.org/officeDocument/2006/relationships" xmlns:p="http://schemas.openxmlformats.org/presentationml/2006/main">
+<p:sld xmlns:a="http://schemas.openxmlformats.org/drawingml/2006/main" xmlns:r="http://schemas.openxmlformats.org/officeDocument/2006/relationships" xmlns:p="http://schemas.openxmlformats.org/presentationml/2006/main" show="0">
   <p:cSld>
     <p:spTree>
       <p:nvGrpSpPr>
@@ -4229,10 +4351,10 @@
       </p:grpSpPr>
       <p:sp>
         <p:nvSpPr>
-          <p:cNvPr id="4" name="Title 3">
+          <p:cNvPr id="2" name="Title 1">
             <a:extLst>
               <a:ext uri="{FF2B5EF4-FFF2-40B4-BE49-F238E27FC236}">
-                <a16:creationId xmlns:a16="http://schemas.microsoft.com/office/drawing/2014/main" id="{93D8206E-559D-CE45-85C5-85695AB37A13}"/>
+                <a16:creationId xmlns:a16="http://schemas.microsoft.com/office/drawing/2014/main" id="{22F8F6B6-A700-23AE-D6C2-580B93E058C9}"/>
               </a:ext>
             </a:extLst>
           </p:cNvPr>
@@ -4248,16 +4370,19 @@
           <a:bodyPr/>
           <a:lstStyle/>
           <a:p>
-            <a:endParaRPr lang="en-US"/>
-          </a:p>
-        </p:txBody>
-      </p:sp>
-      <p:sp>
-        <p:nvSpPr>
-          <p:cNvPr id="5" name="Content Placeholder 4">
+            <a:r>
+              <a:rPr lang="en-US" dirty="0"/>
+              <a:t>Inferencing Effects</a:t>
+            </a:r>
+          </a:p>
+        </p:txBody>
+      </p:sp>
+      <p:sp>
+        <p:nvSpPr>
+          <p:cNvPr id="3" name="Content Placeholder 2">
             <a:extLst>
               <a:ext uri="{FF2B5EF4-FFF2-40B4-BE49-F238E27FC236}">
-                <a16:creationId xmlns:a16="http://schemas.microsoft.com/office/drawing/2014/main" id="{40E82067-9C80-8E4E-ABC3-85AB34A50B0A}"/>
+                <a16:creationId xmlns:a16="http://schemas.microsoft.com/office/drawing/2014/main" id="{BEE2A5EC-D8B7-F419-D2BC-B1C3F32F2DF3}"/>
               </a:ext>
             </a:extLst>
           </p:cNvPr>
@@ -4265,141 +4390,93 @@
             <a:spLocks noGrp="1"/>
           </p:cNvSpPr>
           <p:nvPr>
-            <p:ph sz="half" idx="1"/>
-          </p:nvPr>
-        </p:nvSpPr>
-        <p:spPr/>
-        <p:txBody>
-          <a:bodyPr/>
-          <a:lstStyle/>
-          <a:p>
-            <a:endParaRPr lang="en-US"/>
-          </a:p>
-        </p:txBody>
-      </p:sp>
-      <p:sp>
-        <p:nvSpPr>
-          <p:cNvPr id="6" name="Content Placeholder 5">
-            <a:extLst>
-              <a:ext uri="{FF2B5EF4-FFF2-40B4-BE49-F238E27FC236}">
-                <a16:creationId xmlns:a16="http://schemas.microsoft.com/office/drawing/2014/main" id="{9DFA7AFC-CBC7-3E4A-B817-222F190353DB}"/>
-              </a:ext>
-            </a:extLst>
-          </p:cNvPr>
-          <p:cNvSpPr>
-            <a:spLocks noGrp="1"/>
-          </p:cNvSpPr>
-          <p:nvPr>
-            <p:ph sz="half" idx="2"/>
-          </p:nvPr>
-        </p:nvSpPr>
-        <p:spPr/>
-        <p:txBody>
-          <a:bodyPr/>
-          <a:lstStyle/>
-          <a:p>
-            <a:endParaRPr lang="en-US"/>
-          </a:p>
-        </p:txBody>
-      </p:sp>
-      <p:pic>
-        <p:nvPicPr>
-          <p:cNvPr id="5122" name="Picture 2">
-            <a:extLst>
-              <a:ext uri="{FF2B5EF4-FFF2-40B4-BE49-F238E27FC236}">
-                <a16:creationId xmlns:a16="http://schemas.microsoft.com/office/drawing/2014/main" id="{C87F644B-A903-D247-8667-BB7C3B8C95CA}"/>
-              </a:ext>
-            </a:extLst>
-          </p:cNvPr>
-          <p:cNvPicPr>
-            <a:picLocks noChangeAspect="1" noChangeArrowheads="1"/>
-          </p:cNvPicPr>
-          <p:nvPr/>
-        </p:nvPicPr>
-        <p:blipFill>
-          <a:blip r:embed="rId2">
-            <a:extLst>
-              <a:ext uri="{28A0092B-C50C-407E-A947-70E740481C1C}">
-                <a14:useLocalDpi xmlns:a14="http://schemas.microsoft.com/office/drawing/2010/main" val="0"/>
-              </a:ext>
-            </a:extLst>
-          </a:blip>
-          <a:srcRect/>
-          <a:stretch>
-            <a:fillRect/>
-          </a:stretch>
-        </p:blipFill>
-        <p:spPr bwMode="auto">
+            <p:ph idx="1"/>
+          </p:nvPr>
+        </p:nvSpPr>
+        <p:spPr>
           <a:xfrm>
-            <a:off x="0" y="-241300"/>
-            <a:ext cx="7416800" cy="3670300"/>
+            <a:off x="1451579" y="1853754"/>
+            <a:ext cx="9603275" cy="4095101"/>
           </a:xfrm>
-          <a:prstGeom prst="rect">
-            <a:avLst/>
-          </a:prstGeom>
-          <a:noFill/>
-          <a:extLst>
-            <a:ext uri="{909E8E84-426E-40DD-AFC4-6F175D3DCCD1}">
-              <a14:hiddenFill xmlns:a14="http://schemas.microsoft.com/office/drawing/2010/main">
-                <a:solidFill>
-                  <a:srgbClr val="FFFFFF"/>
-                </a:solidFill>
-              </a14:hiddenFill>
-            </a:ext>
-          </a:extLst>
         </p:spPr>
-      </p:pic>
-      <p:pic>
-        <p:nvPicPr>
-          <p:cNvPr id="5124" name="Picture 4">
-            <a:extLst>
-              <a:ext uri="{FF2B5EF4-FFF2-40B4-BE49-F238E27FC236}">
-                <a16:creationId xmlns:a16="http://schemas.microsoft.com/office/drawing/2014/main" id="{97187806-CB83-874B-8736-4A0895D65308}"/>
-              </a:ext>
-            </a:extLst>
-          </p:cNvPr>
-          <p:cNvPicPr>
-            <a:picLocks noChangeAspect="1" noChangeArrowheads="1"/>
-          </p:cNvPicPr>
-          <p:nvPr/>
-        </p:nvPicPr>
-        <p:blipFill>
-          <a:blip r:embed="rId3">
-            <a:extLst>
-              <a:ext uri="{28A0092B-C50C-407E-A947-70E740481C1C}">
-                <a14:useLocalDpi xmlns:a14="http://schemas.microsoft.com/office/drawing/2010/main" val="0"/>
-              </a:ext>
-            </a:extLst>
-          </a:blip>
-          <a:srcRect/>
-          <a:stretch>
-            <a:fillRect/>
-          </a:stretch>
-        </p:blipFill>
-        <p:spPr bwMode="auto">
-          <a:xfrm>
-            <a:off x="4675740" y="3165007"/>
-            <a:ext cx="7569200" cy="3657600"/>
-          </a:xfrm>
-          <a:prstGeom prst="rect">
-            <a:avLst/>
-          </a:prstGeom>
-          <a:noFill/>
-          <a:extLst>
-            <a:ext uri="{909E8E84-426E-40DD-AFC4-6F175D3DCCD1}">
-              <a14:hiddenFill xmlns:a14="http://schemas.microsoft.com/office/drawing/2010/main">
-                <a:solidFill>
-                  <a:srgbClr val="FFFFFF"/>
-                </a:solidFill>
-              </a14:hiddenFill>
-            </a:ext>
-          </a:extLst>
-        </p:spPr>
-      </p:pic>
+        <p:txBody>
+          <a:bodyPr>
+            <a:normAutofit lnSpcReduction="10000"/>
+          </a:bodyPr>
+          <a:lstStyle/>
+          <a:p>
+            <a:r>
+              <a:rPr lang="en-US" dirty="0"/>
+              <a:t>One big thing we want to do in stats is project these effects to a population. </a:t>
+            </a:r>
+          </a:p>
+          <a:p>
+            <a:pPr lvl="1"/>
+            <a:r>
+              <a:rPr lang="en-US" dirty="0"/>
+              <a:t>If people treated with drugs live longer than people in control group, is that difference real?</a:t>
+            </a:r>
+          </a:p>
+          <a:p>
+            <a:pPr lvl="1"/>
+            <a:r>
+              <a:rPr lang="en-US" dirty="0"/>
+              <a:t>If we tutor one group of students extra, is their grade change due to randomness or learning? </a:t>
+            </a:r>
+          </a:p>
+          <a:p>
+            <a:r>
+              <a:rPr lang="en-US" dirty="0"/>
+              <a:t>Like with generalizing, this isn’t direct, it is probabilistic. </a:t>
+            </a:r>
+          </a:p>
+          <a:p>
+            <a:pPr lvl="1"/>
+            <a:r>
+              <a:rPr lang="en-US" dirty="0"/>
+              <a:t>We have natural variance in data, and each sample may differ slightly normally. </a:t>
+            </a:r>
+          </a:p>
+          <a:p>
+            <a:pPr lvl="1"/>
+            <a:r>
+              <a:rPr lang="en-US" dirty="0"/>
+              <a:t>Depending on sample size, we might see swings in means that are random. </a:t>
+            </a:r>
+          </a:p>
+          <a:p>
+            <a:pPr lvl="1"/>
+            <a:r>
+              <a:rPr lang="en-US" dirty="0"/>
+              <a:t>Real life things are often limited in sample size, so variations can be big. </a:t>
+            </a:r>
+          </a:p>
+          <a:p>
+            <a:r>
+              <a:rPr lang="en-US" dirty="0"/>
+              <a:t>So… if we see some effect in our samples, can we trust that effect is in the population? </a:t>
+            </a:r>
+          </a:p>
+          <a:p>
+            <a:pPr lvl="1"/>
+            <a:r>
+              <a:rPr lang="en-US" dirty="0"/>
+              <a:t>Is what we see in our samples real? </a:t>
+            </a:r>
+          </a:p>
+          <a:p>
+            <a:pPr lvl="1"/>
+            <a:r>
+              <a:rPr lang="en-US" dirty="0"/>
+              <a:t>Our hypothesis test will give us a probability it was due to random variation. </a:t>
+            </a:r>
+          </a:p>
+        </p:txBody>
+      </p:sp>
     </p:spTree>
     <p:extLst>
       <p:ext uri="{BB962C8B-B14F-4D97-AF65-F5344CB8AC3E}">
-        <p14:creationId xmlns:p14="http://schemas.microsoft.com/office/powerpoint/2010/main" val="3073410795"/>
+        <p14:creationId xmlns:p14="http://schemas.microsoft.com/office/powerpoint/2010/main" val="2153975072"/>
       </p:ext>
     </p:extLst>
   </p:cSld>
@@ -4410,6 +4487,154 @@
 </file>
 
 <file path=ppt/slides/slide11.xml><?xml version="1.0" encoding="utf-8"?>
+<p:sld xmlns:a="http://schemas.openxmlformats.org/drawingml/2006/main" xmlns:r="http://schemas.openxmlformats.org/officeDocument/2006/relationships" xmlns:p="http://schemas.openxmlformats.org/presentationml/2006/main">
+  <p:cSld>
+    <p:spTree>
+      <p:nvGrpSpPr>
+        <p:cNvPr id="1" name="">
+          <a:extLst>
+            <a:ext uri="{FF2B5EF4-FFF2-40B4-BE49-F238E27FC236}">
+              <a16:creationId xmlns:a16="http://schemas.microsoft.com/office/drawing/2014/main" id="{F39E827A-F36A-E2CA-36D2-E27215414F24}"/>
+            </a:ext>
+          </a:extLst>
+        </p:cNvPr>
+        <p:cNvGrpSpPr/>
+        <p:nvPr/>
+      </p:nvGrpSpPr>
+      <p:grpSpPr>
+        <a:xfrm>
+          <a:off x="0" y="0"/>
+          <a:ext cx="0" cy="0"/>
+          <a:chOff x="0" y="0"/>
+          <a:chExt cx="0" cy="0"/>
+        </a:xfrm>
+      </p:grpSpPr>
+      <p:sp>
+        <p:nvSpPr>
+          <p:cNvPr id="2" name="Title 1">
+            <a:extLst>
+              <a:ext uri="{FF2B5EF4-FFF2-40B4-BE49-F238E27FC236}">
+                <a16:creationId xmlns:a16="http://schemas.microsoft.com/office/drawing/2014/main" id="{40A6A509-3720-8CB2-D880-D93688039566}"/>
+              </a:ext>
+            </a:extLst>
+          </p:cNvPr>
+          <p:cNvSpPr>
+            <a:spLocks noGrp="1"/>
+          </p:cNvSpPr>
+          <p:nvPr>
+            <p:ph type="title"/>
+          </p:nvPr>
+        </p:nvSpPr>
+        <p:spPr/>
+        <p:txBody>
+          <a:bodyPr/>
+          <a:lstStyle/>
+          <a:p>
+            <a:r>
+              <a:rPr lang="en-US" dirty="0"/>
+              <a:t>What’s a Hypothesis Test?</a:t>
+            </a:r>
+          </a:p>
+        </p:txBody>
+      </p:sp>
+      <p:sp>
+        <p:nvSpPr>
+          <p:cNvPr id="3" name="Content Placeholder 2">
+            <a:extLst>
+              <a:ext uri="{FF2B5EF4-FFF2-40B4-BE49-F238E27FC236}">
+                <a16:creationId xmlns:a16="http://schemas.microsoft.com/office/drawing/2014/main" id="{7897E578-0879-9E1F-8B10-E0832E0C7299}"/>
+              </a:ext>
+            </a:extLst>
+          </p:cNvPr>
+          <p:cNvSpPr>
+            <a:spLocks noGrp="1"/>
+          </p:cNvSpPr>
+          <p:nvPr>
+            <p:ph idx="1"/>
+          </p:nvPr>
+        </p:nvSpPr>
+        <p:spPr>
+          <a:xfrm>
+            <a:off x="1451579" y="1933904"/>
+            <a:ext cx="9603275" cy="4119578"/>
+          </a:xfrm>
+        </p:spPr>
+        <p:txBody>
+          <a:bodyPr/>
+          <a:lstStyle/>
+          <a:p>
+            <a:r>
+              <a:rPr lang="en-US" dirty="0"/>
+              <a:t>A hypothesis test evaluates two mutually exclusive statements about a population to determine which statement the sample data best supports. </a:t>
+            </a:r>
+          </a:p>
+          <a:p>
+            <a:pPr lvl="1"/>
+            <a:r>
+              <a:rPr lang="en-US" dirty="0"/>
+              <a:t>Null Hypothesis: The effect does not exist in the population.</a:t>
+            </a:r>
+          </a:p>
+          <a:p>
+            <a:pPr lvl="1"/>
+            <a:r>
+              <a:rPr lang="en-US" dirty="0"/>
+              <a:t>Alternative Hypothesis: The effect does exist in the population.</a:t>
+            </a:r>
+          </a:p>
+          <a:p>
+            <a:pPr lvl="1"/>
+            <a:r>
+              <a:rPr lang="en-US" dirty="0"/>
+              <a:t>Effect = difference. Specifically, here it is the difference we see between the samples. </a:t>
+            </a:r>
+          </a:p>
+          <a:p>
+            <a:r>
+              <a:rPr lang="en-US" dirty="0"/>
+              <a:t>Hypothesis testing lets us say that effects have statistical significance, indicating that an effect in sample data also likely exists in the population after accounting for:</a:t>
+            </a:r>
+          </a:p>
+          <a:p>
+            <a:pPr lvl="1"/>
+            <a:r>
+              <a:rPr lang="en-US" dirty="0"/>
+              <a:t>Random sampling error.</a:t>
+            </a:r>
+          </a:p>
+          <a:p>
+            <a:pPr lvl="1"/>
+            <a:r>
+              <a:rPr lang="en-US" dirty="0"/>
+              <a:t>Variability in the data. </a:t>
+            </a:r>
+          </a:p>
+          <a:p>
+            <a:pPr lvl="1"/>
+            <a:r>
+              <a:rPr lang="en-US" dirty="0"/>
+              <a:t>Sample size. </a:t>
+            </a:r>
+          </a:p>
+          <a:p>
+            <a:endParaRPr lang="en-US" dirty="0"/>
+          </a:p>
+        </p:txBody>
+      </p:sp>
+    </p:spTree>
+    <p:extLst>
+      <p:ext uri="{BB962C8B-B14F-4D97-AF65-F5344CB8AC3E}">
+        <p14:creationId xmlns:p14="http://schemas.microsoft.com/office/powerpoint/2010/main" val="93985515"/>
+      </p:ext>
+    </p:extLst>
+  </p:cSld>
+  <p:clrMapOvr>
+    <a:masterClrMapping/>
+  </p:clrMapOvr>
+</p:sld>
+</file>
+
+<file path=ppt/slides/slide12.xml><?xml version="1.0" encoding="utf-8"?>
 <p:sld xmlns:a="http://schemas.openxmlformats.org/drawingml/2006/main" xmlns:r="http://schemas.openxmlformats.org/officeDocument/2006/relationships" xmlns:p="http://schemas.openxmlformats.org/presentationml/2006/main">
   <p:cSld>
     <p:spTree>
@@ -4431,7 +4656,7 @@
           <p:cNvPr id="2" name="Title 1">
             <a:extLst>
               <a:ext uri="{FF2B5EF4-FFF2-40B4-BE49-F238E27FC236}">
-                <a16:creationId xmlns:a16="http://schemas.microsoft.com/office/drawing/2014/main" id="{ED7B2C08-E1A8-C144-8E09-2D73345AD7C2}"/>
+                <a16:creationId xmlns:a16="http://schemas.microsoft.com/office/drawing/2014/main" id="{FA40493A-F1BC-7E49-1897-3A5238079639}"/>
               </a:ext>
             </a:extLst>
           </p:cNvPr>
@@ -4449,7 +4674,7 @@
           <a:p>
             <a:r>
               <a:rPr lang="en-US" dirty="0"/>
-              <a:t>Z-tests</a:t>
+              <a:t>Don’t Get too Confident</a:t>
             </a:r>
           </a:p>
         </p:txBody>
@@ -4459,7 +4684,7 @@
           <p:cNvPr id="3" name="Content Placeholder 2">
             <a:extLst>
               <a:ext uri="{FF2B5EF4-FFF2-40B4-BE49-F238E27FC236}">
-                <a16:creationId xmlns:a16="http://schemas.microsoft.com/office/drawing/2014/main" id="{DDD1D357-DDDA-BE40-A4A5-256F756EE88E}"/>
+                <a16:creationId xmlns:a16="http://schemas.microsoft.com/office/drawing/2014/main" id="{29AD3248-E13C-1595-6D51-ED37B4A2964C}"/>
               </a:ext>
             </a:extLst>
           </p:cNvPr>
@@ -4470,43 +4695,45 @@
             <p:ph idx="1"/>
           </p:nvPr>
         </p:nvSpPr>
-        <p:spPr/>
+        <p:spPr>
+          <a:xfrm>
+            <a:off x="1451579" y="2015732"/>
+            <a:ext cx="9603275" cy="4037749"/>
+          </a:xfrm>
+        </p:spPr>
         <p:txBody>
           <a:bodyPr/>
           <a:lstStyle/>
           <a:p>
             <a:r>
               <a:rPr lang="en-US" dirty="0"/>
-              <a:t>Z-tests do the same basic thing as t-tests, they can be used when:</a:t>
-            </a:r>
-          </a:p>
-          <a:p>
-            <a:pPr lvl="1"/>
-            <a:r>
-              <a:rPr lang="en-US" dirty="0"/>
-              <a:t>Sample size is large. (50ish is a rule of thumb), or…</a:t>
-            </a:r>
-          </a:p>
-          <a:p>
-            <a:pPr lvl="1"/>
-            <a:r>
-              <a:rPr lang="en-US" dirty="0"/>
-              <a:t>Population variance is known.</a:t>
-            </a:r>
-          </a:p>
-          <a:p>
-            <a:r>
-              <a:rPr lang="en-US" dirty="0"/>
-              <a:t>If that’s not true, use a t-test. (Results will converge with larger samples)</a:t>
-            </a:r>
-          </a:p>
-          <a:p>
-            <a:endParaRPr lang="en-US" dirty="0"/>
-          </a:p>
-          <a:p>
-            <a:r>
-              <a:rPr lang="en-US" dirty="0"/>
-              <a:t>More simple if calculating by hand, we kind of don’t really need to care about it…</a:t>
+              <a:t>Like with generalizing to a population, this is probabilistic. </a:t>
+            </a:r>
+          </a:p>
+          <a:p>
+            <a:r>
+              <a:rPr lang="en-US" dirty="0"/>
+              <a:t>Our findings here are evidence, not assertions. </a:t>
+            </a:r>
+          </a:p>
+          <a:p>
+            <a:pPr lvl="1"/>
+            <a:r>
+              <a:rPr lang="en-US" dirty="0"/>
+              <a:t>E.g. if we do a hypothesis test that shows an effect is real, that’s only an indicator. </a:t>
+            </a:r>
+          </a:p>
+          <a:p>
+            <a:r>
+              <a:rPr lang="en-US" dirty="0"/>
+              <a:t>To make solid findings, we probably want several pieces of evidence. </a:t>
+            </a:r>
+          </a:p>
+          <a:p>
+            <a:pPr lvl="1"/>
+            <a:r>
+              <a:rPr lang="en-US" dirty="0"/>
+              <a:t>More is better, as we’ll see…</a:t>
             </a:r>
           </a:p>
         </p:txBody>
@@ -4514,401 +4741,7 @@
     </p:spTree>
     <p:extLst>
       <p:ext uri="{BB962C8B-B14F-4D97-AF65-F5344CB8AC3E}">
-        <p14:creationId xmlns:p14="http://schemas.microsoft.com/office/powerpoint/2010/main" val="2318308049"/>
-      </p:ext>
-    </p:extLst>
-  </p:cSld>
-  <p:clrMapOvr>
-    <a:masterClrMapping/>
-  </p:clrMapOvr>
-</p:sld>
-</file>
-
-<file path=ppt/slides/slide12.xml><?xml version="1.0" encoding="utf-8"?>
-<p:sld xmlns:a="http://schemas.openxmlformats.org/drawingml/2006/main" xmlns:r="http://schemas.openxmlformats.org/officeDocument/2006/relationships" xmlns:p="http://schemas.openxmlformats.org/presentationml/2006/main">
-  <p:cSld>
-    <p:bg>
-      <p:bgPr>
-        <a:gradFill rotWithShape="1">
-          <a:gsLst>
-            <a:gs pos="0">
-              <a:schemeClr val="bg2">
-                <a:tint val="94000"/>
-                <a:satMod val="80000"/>
-                <a:lumMod val="106000"/>
-              </a:schemeClr>
-            </a:gs>
-            <a:gs pos="100000">
-              <a:schemeClr val="bg2">
-                <a:shade val="80000"/>
-              </a:schemeClr>
-            </a:gs>
-          </a:gsLst>
-          <a:path path="circle">
-            <a:fillToRect l="43000" r="43000" b="100000"/>
-          </a:path>
-        </a:gradFill>
-        <a:effectLst/>
-      </p:bgPr>
-    </p:bg>
-    <p:spTree>
-      <p:nvGrpSpPr>
-        <p:cNvPr id="1" name=""/>
-        <p:cNvGrpSpPr/>
-        <p:nvPr/>
-      </p:nvGrpSpPr>
-      <p:grpSpPr>
-        <a:xfrm>
-          <a:off x="0" y="0"/>
-          <a:ext cx="0" cy="0"/>
-          <a:chOff x="0" y="0"/>
-          <a:chExt cx="0" cy="0"/>
-        </a:xfrm>
-      </p:grpSpPr>
-      <p:sp>
-        <p:nvSpPr>
-          <p:cNvPr id="71" name="Rectangle 70">
-            <a:extLst>
-              <a:ext uri="{FF2B5EF4-FFF2-40B4-BE49-F238E27FC236}">
-                <a16:creationId xmlns:a16="http://schemas.microsoft.com/office/drawing/2014/main" id="{CDDE5CDF-1512-4CDA-B956-23D223F8DE44}"/>
-              </a:ext>
-              <a:ext uri="{C183D7F6-B498-43B3-948B-1728B52AA6E4}">
-                <adec:decorative xmlns:adec="http://schemas.microsoft.com/office/drawing/2017/decorative" val="1"/>
-              </a:ext>
-            </a:extLst>
-          </p:cNvPr>
-          <p:cNvSpPr>
-            <a:spLocks noGrp="1" noRot="1" noChangeAspect="1" noMove="1" noResize="1" noEditPoints="1" noAdjustHandles="1" noChangeArrowheads="1" noChangeShapeType="1" noTextEdit="1"/>
-          </p:cNvSpPr>
-          <p:nvPr>
-            <p:extLst>
-              <p:ext uri="{386F3935-93C4-4BCD-93E2-E3B085C9AB24}">
-                <p16:designElem xmlns:p16="http://schemas.microsoft.com/office/powerpoint/2015/main" val="1"/>
-              </p:ext>
-            </p:extLst>
-          </p:nvPr>
-        </p:nvSpPr>
-        <p:spPr>
-          <a:xfrm>
-            <a:off x="0" y="2019476"/>
-            <a:ext cx="12192000" cy="4105941"/>
-          </a:xfrm>
-          <a:prstGeom prst="rect">
-            <a:avLst/>
-          </a:prstGeom>
-          <a:gradFill flip="none" rotWithShape="1">
-            <a:gsLst>
-              <a:gs pos="0">
-                <a:schemeClr val="bg2">
-                  <a:alpha val="0"/>
-                </a:schemeClr>
-              </a:gs>
-              <a:gs pos="100000">
-                <a:schemeClr val="bg2"/>
-              </a:gs>
-            </a:gsLst>
-            <a:lin ang="5400000" scaled="0"/>
-            <a:tileRect/>
-          </a:gradFill>
-          <a:ln>
-            <a:noFill/>
-          </a:ln>
-        </p:spPr>
-        <p:style>
-          <a:lnRef idx="2">
-            <a:schemeClr val="accent1">
-              <a:shade val="50000"/>
-            </a:schemeClr>
-          </a:lnRef>
-          <a:fillRef idx="1">
-            <a:schemeClr val="accent1"/>
-          </a:fillRef>
-          <a:effectRef idx="0">
-            <a:schemeClr val="accent1"/>
-          </a:effectRef>
-          <a:fontRef idx="minor">
-            <a:schemeClr val="lt1"/>
-          </a:fontRef>
-        </p:style>
-      </p:sp>
-      <p:pic>
-        <p:nvPicPr>
-          <p:cNvPr id="73" name="Picture 72">
-            <a:extLst>
-              <a:ext uri="{FF2B5EF4-FFF2-40B4-BE49-F238E27FC236}">
-                <a16:creationId xmlns:a16="http://schemas.microsoft.com/office/drawing/2014/main" id="{B029D7D8-5A6B-4C76-94C8-15798C6C5ADB}"/>
-              </a:ext>
-              <a:ext uri="{C183D7F6-B498-43B3-948B-1728B52AA6E4}">
-                <adec:decorative xmlns:adec="http://schemas.microsoft.com/office/drawing/2017/decorative" val="1"/>
-              </a:ext>
-            </a:extLst>
-          </p:cNvPr>
-          <p:cNvPicPr>
-            <a:picLocks noGrp="1" noRot="1" noChangeAspect="1" noMove="1" noResize="1" noEditPoints="1" noAdjustHandles="1" noChangeArrowheads="1" noChangeShapeType="1" noCrop="1"/>
-          </p:cNvPicPr>
-          <p:nvPr>
-            <p:extLst>
-              <p:ext uri="{386F3935-93C4-4BCD-93E2-E3B085C9AB24}">
-                <p16:designElem xmlns:p16="http://schemas.microsoft.com/office/powerpoint/2015/main" val="1"/>
-              </p:ext>
-            </p:extLst>
-          </p:nvPr>
-        </p:nvPicPr>
-        <p:blipFill rotWithShape="1">
-          <a:blip r:embed="rId2">
-            <a:extLst>
-              <a:ext uri="{28A0092B-C50C-407E-A947-70E740481C1C}">
-                <a14:useLocalDpi xmlns:a14="http://schemas.microsoft.com/office/drawing/2010/main" val="0"/>
-              </a:ext>
-            </a:extLst>
-          </a:blip>
-          <a:srcRect t="1538" b="-1538"/>
-          <a:stretch/>
-        </p:blipFill>
-        <p:spPr bwMode="black">
-          <a:xfrm>
-            <a:off x="0" y="6126480"/>
-            <a:ext cx="12192000" cy="742950"/>
-          </a:xfrm>
-          <a:prstGeom prst="rect">
-            <a:avLst/>
-          </a:prstGeom>
-        </p:spPr>
-      </p:pic>
-      <p:cxnSp>
-        <p:nvCxnSpPr>
-          <p:cNvPr id="75" name="Straight Connector 74">
-            <a:extLst>
-              <a:ext uri="{FF2B5EF4-FFF2-40B4-BE49-F238E27FC236}">
-                <a16:creationId xmlns:a16="http://schemas.microsoft.com/office/drawing/2014/main" id="{A5C9319C-E20D-4884-952F-60B6A58C3E34}"/>
-              </a:ext>
-              <a:ext uri="{C183D7F6-B498-43B3-948B-1728B52AA6E4}">
-                <adec:decorative xmlns:adec="http://schemas.microsoft.com/office/drawing/2017/decorative" val="1"/>
-              </a:ext>
-            </a:extLst>
-          </p:cNvPr>
-          <p:cNvCxnSpPr>
-            <a:cxnSpLocks noGrp="1" noRot="1" noChangeAspect="1" noMove="1" noResize="1" noEditPoints="1" noAdjustHandles="1" noChangeArrowheads="1" noChangeShapeType="1"/>
-          </p:cNvCxnSpPr>
-          <p:nvPr>
-            <p:extLst>
-              <p:ext uri="{386F3935-93C4-4BCD-93E2-E3B085C9AB24}">
-                <p16:designElem xmlns:p16="http://schemas.microsoft.com/office/powerpoint/2015/main" val="1"/>
-              </p:ext>
-            </p:extLst>
-          </p:nvPr>
-        </p:nvCxnSpPr>
-        <p:spPr>
-          <a:xfrm>
-            <a:off x="0" y="6128413"/>
-            <a:ext cx="12192000" cy="0"/>
-          </a:xfrm>
-          <a:prstGeom prst="line">
-            <a:avLst/>
-          </a:prstGeom>
-          <a:ln w="12700">
-            <a:solidFill>
-              <a:srgbClr val="000001">
-                <a:alpha val="20000"/>
-              </a:srgbClr>
-            </a:solidFill>
-          </a:ln>
-        </p:spPr>
-        <p:style>
-          <a:lnRef idx="1">
-            <a:schemeClr val="accent1"/>
-          </a:lnRef>
-          <a:fillRef idx="0">
-            <a:schemeClr val="accent1"/>
-          </a:fillRef>
-          <a:effectRef idx="0">
-            <a:schemeClr val="accent1"/>
-          </a:effectRef>
-          <a:fontRef idx="minor">
-            <a:schemeClr val="tx1"/>
-          </a:fontRef>
-        </p:style>
-      </p:cxnSp>
-      <p:sp useBgFill="1">
-        <p:nvSpPr>
-          <p:cNvPr id="77" name="Rectangle 76">
-            <a:extLst>
-              <a:ext uri="{FF2B5EF4-FFF2-40B4-BE49-F238E27FC236}">
-                <a16:creationId xmlns:a16="http://schemas.microsoft.com/office/drawing/2014/main" id="{F1176DA6-4BBF-42A4-9C94-E6613CCD6B37}"/>
-              </a:ext>
-              <a:ext uri="{C183D7F6-B498-43B3-948B-1728B52AA6E4}">
-                <adec:decorative xmlns:adec="http://schemas.microsoft.com/office/drawing/2017/decorative" val="1"/>
-              </a:ext>
-            </a:extLst>
-          </p:cNvPr>
-          <p:cNvSpPr>
-            <a:spLocks noGrp="1" noRot="1" noChangeAspect="1" noMove="1" noResize="1" noEditPoints="1" noAdjustHandles="1" noChangeArrowheads="1" noChangeShapeType="1" noTextEdit="1"/>
-          </p:cNvSpPr>
-          <p:nvPr>
-            <p:extLst>
-              <p:ext uri="{386F3935-93C4-4BCD-93E2-E3B085C9AB24}">
-                <p16:designElem xmlns:p16="http://schemas.microsoft.com/office/powerpoint/2015/main" val="1"/>
-              </p:ext>
-            </p:extLst>
-          </p:nvPr>
-        </p:nvSpPr>
-        <p:spPr>
-          <a:xfrm>
-            <a:off x="0" y="0"/>
-            <a:ext cx="12192000" cy="6858000"/>
-          </a:xfrm>
-          <a:prstGeom prst="rect">
-            <a:avLst/>
-          </a:prstGeom>
-          <a:ln>
-            <a:noFill/>
-          </a:ln>
-        </p:spPr>
-        <p:style>
-          <a:lnRef idx="2">
-            <a:schemeClr val="accent1">
-              <a:shade val="50000"/>
-            </a:schemeClr>
-          </a:lnRef>
-          <a:fillRef idx="1">
-            <a:schemeClr val="accent1"/>
-          </a:fillRef>
-          <a:effectRef idx="0">
-            <a:schemeClr val="accent1"/>
-          </a:effectRef>
-          <a:fontRef idx="minor">
-            <a:schemeClr val="lt1"/>
-          </a:fontRef>
-        </p:style>
-        <p:txBody>
-          <a:bodyPr rtlCol="0" anchor="ctr"/>
-          <a:lstStyle/>
-          <a:p>
-            <a:pPr algn="ctr"/>
-            <a:endParaRPr lang="en-US"/>
-          </a:p>
-        </p:txBody>
-      </p:sp>
-      <p:sp>
-        <p:nvSpPr>
-          <p:cNvPr id="79" name="Rectangle 78">
-            <a:extLst>
-              <a:ext uri="{FF2B5EF4-FFF2-40B4-BE49-F238E27FC236}">
-                <a16:creationId xmlns:a16="http://schemas.microsoft.com/office/drawing/2014/main" id="{99AAB0AE-172B-4FB4-80C2-86CD6B824220}"/>
-              </a:ext>
-              <a:ext uri="{C183D7F6-B498-43B3-948B-1728B52AA6E4}">
-                <adec:decorative xmlns:adec="http://schemas.microsoft.com/office/drawing/2017/decorative" val="1"/>
-              </a:ext>
-            </a:extLst>
-          </p:cNvPr>
-          <p:cNvSpPr>
-            <a:spLocks noGrp="1" noRot="1" noChangeAspect="1" noMove="1" noResize="1" noEditPoints="1" noAdjustHandles="1" noChangeArrowheads="1" noChangeShapeType="1" noTextEdit="1"/>
-          </p:cNvSpPr>
-          <p:nvPr>
-            <p:extLst>
-              <p:ext uri="{386F3935-93C4-4BCD-93E2-E3B085C9AB24}">
-                <p16:designElem xmlns:p16="http://schemas.microsoft.com/office/powerpoint/2015/main" val="1"/>
-              </p:ext>
-            </p:extLst>
-          </p:nvPr>
-        </p:nvSpPr>
-        <p:spPr>
-          <a:xfrm>
-            <a:off x="477012" y="480060"/>
-            <a:ext cx="11237976" cy="5897880"/>
-          </a:xfrm>
-          <a:prstGeom prst="rect">
-            <a:avLst/>
-          </a:prstGeom>
-          <a:solidFill>
-            <a:schemeClr val="bg1"/>
-          </a:solidFill>
-          <a:ln w="22225">
-            <a:solidFill>
-              <a:schemeClr val="tx1">
-                <a:lumMod val="50000"/>
-                <a:lumOff val="50000"/>
-              </a:schemeClr>
-            </a:solidFill>
-          </a:ln>
-        </p:spPr>
-        <p:style>
-          <a:lnRef idx="2">
-            <a:schemeClr val="accent1">
-              <a:shade val="50000"/>
-            </a:schemeClr>
-          </a:lnRef>
-          <a:fillRef idx="1">
-            <a:schemeClr val="accent1"/>
-          </a:fillRef>
-          <a:effectRef idx="0">
-            <a:schemeClr val="accent1"/>
-          </a:effectRef>
-          <a:fontRef idx="minor">
-            <a:schemeClr val="lt1"/>
-          </a:fontRef>
-        </p:style>
-        <p:txBody>
-          <a:bodyPr rtlCol="0" anchor="ctr"/>
-          <a:lstStyle/>
-          <a:p>
-            <a:pPr algn="ctr"/>
-            <a:endParaRPr lang="en-US"/>
-          </a:p>
-        </p:txBody>
-      </p:sp>
-      <p:pic>
-        <p:nvPicPr>
-          <p:cNvPr id="6146" name="Picture 2">
-            <a:extLst>
-              <a:ext uri="{FF2B5EF4-FFF2-40B4-BE49-F238E27FC236}">
-                <a16:creationId xmlns:a16="http://schemas.microsoft.com/office/drawing/2014/main" id="{8D98FC15-87F0-4843-B3F3-DD1B04498763}"/>
-              </a:ext>
-            </a:extLst>
-          </p:cNvPr>
-          <p:cNvPicPr>
-            <a:picLocks noGrp="1" noChangeAspect="1" noChangeArrowheads="1"/>
-          </p:cNvPicPr>
-          <p:nvPr>
-            <p:ph idx="1"/>
-          </p:nvPr>
-        </p:nvPicPr>
-        <p:blipFill>
-          <a:blip r:embed="rId3">
-            <a:extLst>
-              <a:ext uri="{28A0092B-C50C-407E-A947-70E740481C1C}">
-                <a14:useLocalDpi xmlns:a14="http://schemas.microsoft.com/office/drawing/2010/main" val="0"/>
-              </a:ext>
-            </a:extLst>
-          </a:blip>
-          <a:stretch>
-            <a:fillRect/>
-          </a:stretch>
-        </p:blipFill>
-        <p:spPr bwMode="auto">
-          <a:xfrm>
-            <a:off x="643467" y="975360"/>
-            <a:ext cx="10905066" cy="4907279"/>
-          </a:xfrm>
-          <a:prstGeom prst="rect">
-            <a:avLst/>
-          </a:prstGeom>
-          <a:noFill/>
-          <a:extLst>
-            <a:ext uri="{909E8E84-426E-40DD-AFC4-6F175D3DCCD1}">
-              <a14:hiddenFill xmlns:a14="http://schemas.microsoft.com/office/drawing/2010/main">
-                <a:solidFill>
-                  <a:srgbClr val="FFFFFF"/>
-                </a:solidFill>
-              </a14:hiddenFill>
-            </a:ext>
-          </a:extLst>
-        </p:spPr>
-      </p:pic>
-    </p:spTree>
-    <p:extLst>
-      <p:ext uri="{BB962C8B-B14F-4D97-AF65-F5344CB8AC3E}">
-        <p14:creationId xmlns:p14="http://schemas.microsoft.com/office/powerpoint/2010/main" val="2654219470"/>
+        <p14:creationId xmlns:p14="http://schemas.microsoft.com/office/powerpoint/2010/main" val="1526678658"/>
       </p:ext>
     </p:extLst>
   </p:cSld>
@@ -4940,7 +4773,7 @@
           <p:cNvPr id="2" name="Title 1">
             <a:extLst>
               <a:ext uri="{FF2B5EF4-FFF2-40B4-BE49-F238E27FC236}">
-                <a16:creationId xmlns:a16="http://schemas.microsoft.com/office/drawing/2014/main" id="{5F240032-86EE-D042-A41F-F73A666B9CB7}"/>
+                <a16:creationId xmlns:a16="http://schemas.microsoft.com/office/drawing/2014/main" id="{AE07D908-A850-3560-95FD-8C539921A59D}"/>
               </a:ext>
             </a:extLst>
           </p:cNvPr>
@@ -4958,13 +4791,8 @@
           <a:p>
             <a:r>
               <a:rPr lang="en-US" dirty="0"/>
-              <a:t>Test Assumptions – Parametric </a:t>
-            </a:r>
-            <a:r>
-              <a:rPr lang="en-US" dirty="0" err="1"/>
-              <a:t>TEst</a:t>
-            </a:r>
-            <a:endParaRPr lang="en-US" dirty="0"/>
+              <a:t>Hypothesis Testing From Scratch</a:t>
+            </a:r>
           </a:p>
         </p:txBody>
       </p:sp>
@@ -4973,7 +4801,7 @@
           <p:cNvPr id="3" name="Content Placeholder 2">
             <a:extLst>
               <a:ext uri="{FF2B5EF4-FFF2-40B4-BE49-F238E27FC236}">
-                <a16:creationId xmlns:a16="http://schemas.microsoft.com/office/drawing/2014/main" id="{38AA6E6A-2A74-D642-A764-13B0702EDB9D}"/>
+                <a16:creationId xmlns:a16="http://schemas.microsoft.com/office/drawing/2014/main" id="{D2544162-9761-6E7C-99FE-70C4B3473F0B}"/>
               </a:ext>
             </a:extLst>
           </p:cNvPr>
@@ -4986,88 +4814,73 @@
         </p:nvSpPr>
         <p:spPr>
           <a:xfrm>
-            <a:off x="1451579" y="2015732"/>
-            <a:ext cx="9603275" cy="4171708"/>
+            <a:off x="1451579" y="1853754"/>
+            <a:ext cx="9603275" cy="4199727"/>
           </a:xfrm>
         </p:spPr>
         <p:txBody>
           <a:bodyPr>
-            <a:normAutofit lnSpcReduction="10000"/>
+            <a:normAutofit/>
           </a:bodyPr>
           <a:lstStyle/>
           <a:p>
             <a:r>
               <a:rPr lang="en-US" dirty="0"/>
-              <a:t>Data is normally distributed. </a:t>
-            </a:r>
-          </a:p>
-          <a:p>
-            <a:pPr lvl="1"/>
-            <a:r>
-              <a:rPr lang="en-US" dirty="0"/>
-              <a:t>Central limit theorem (more on this later) – as you get more data, samples of many things become more normal. </a:t>
-            </a:r>
-          </a:p>
-          <a:p>
-            <a:pPr lvl="1"/>
-            <a:r>
-              <a:rPr lang="en-US" dirty="0"/>
-              <a:t>Non-normal data can sometimes be transformed (e.g. log income from last week)</a:t>
-            </a:r>
-          </a:p>
-          <a:p>
-            <a:r>
-              <a:rPr lang="en-US" dirty="0"/>
-              <a:t>Equal variance:</a:t>
-            </a:r>
-          </a:p>
-          <a:p>
-            <a:pPr lvl="1"/>
-            <a:r>
-              <a:rPr lang="en-US" dirty="0"/>
-              <a:t>Argument in </a:t>
+              <a:t>We can use fast computers and coding </a:t>
             </a:r>
             <a:r>
               <a:rPr lang="en-US" dirty="0" err="1"/>
-              <a:t>scipy</a:t>
-            </a:r>
-            <a:r>
-              <a:rPr lang="en-US" dirty="0"/>
-              <a:t> t-test. </a:t>
-            </a:r>
-          </a:p>
-          <a:p>
-            <a:pPr lvl="1"/>
-            <a:r>
-              <a:rPr lang="en-US" dirty="0"/>
-              <a:t>Normal t-test assumes true, Welch’s does not. </a:t>
-            </a:r>
-          </a:p>
-          <a:p>
-            <a:r>
-              <a:rPr lang="en-US" dirty="0"/>
-              <a:t>Observations are independent. </a:t>
-            </a:r>
-          </a:p>
-          <a:p>
-            <a:r>
-              <a:rPr lang="en-US" dirty="0"/>
-              <a:t>No/minimal outliers. </a:t>
-            </a:r>
-          </a:p>
-          <a:p>
-            <a:pPr lvl="1"/>
-            <a:r>
-              <a:rPr lang="en-US" dirty="0"/>
-              <a:t>There’s a “trim” option to take out outliers in the </a:t>
-            </a:r>
-            <a:r>
-              <a:rPr lang="en-US" dirty="0" err="1"/>
-              <a:t>scipy</a:t>
-            </a:r>
-            <a:r>
-              <a:rPr lang="en-US" dirty="0"/>
-              <a:t> stuff. </a:t>
+              <a:t>skillz</a:t>
+            </a:r>
+            <a:r>
+              <a:rPr lang="en-US" dirty="0"/>
+              <a:t> to do some hypothesis testing from scratch. </a:t>
+            </a:r>
+          </a:p>
+          <a:p>
+            <a:r>
+              <a:rPr lang="en-US" dirty="0"/>
+              <a:t>To start, we see some effect – such as a difference in our samples. </a:t>
+            </a:r>
+          </a:p>
+          <a:p>
+            <a:r>
+              <a:rPr lang="en-US" dirty="0"/>
+              <a:t>We can do a sort of two-part check:</a:t>
+            </a:r>
+          </a:p>
+          <a:p>
+            <a:pPr lvl="1"/>
+            <a:r>
+              <a:rPr lang="en-US" dirty="0"/>
+              <a:t>Comparison between two things (e.g. sample means). </a:t>
+            </a:r>
+          </a:p>
+          <a:p>
+            <a:pPr lvl="1"/>
+            <a:r>
+              <a:rPr lang="en-US" dirty="0"/>
+              <a:t>Generalization to the population. </a:t>
+            </a:r>
+          </a:p>
+          <a:p>
+            <a:r>
+              <a:rPr lang="en-US" dirty="0"/>
+              <a:t>Our hypothesis test answers the question, “Given this effect we see in our sample, what is the probability of the same effect existing in the population by chance (randomly)?”. </a:t>
+            </a:r>
+          </a:p>
+          <a:p>
+            <a:pPr lvl="1"/>
+            <a:r>
+              <a:rPr lang="en-US" dirty="0"/>
+              <a:t>We see X thing in the sample data (the effect). </a:t>
+            </a:r>
+          </a:p>
+          <a:p>
+            <a:pPr lvl="1"/>
+            <a:r>
+              <a:rPr lang="en-US" dirty="0"/>
+              <a:t>Is effect ‘real’ in the population or could it just be randomness due to sample and variance?</a:t>
             </a:r>
           </a:p>
         </p:txBody>
@@ -5075,7 +4888,7 @@
     </p:spTree>
     <p:extLst>
       <p:ext uri="{BB962C8B-B14F-4D97-AF65-F5344CB8AC3E}">
-        <p14:creationId xmlns:p14="http://schemas.microsoft.com/office/powerpoint/2010/main" val="3336447634"/>
+        <p14:creationId xmlns:p14="http://schemas.microsoft.com/office/powerpoint/2010/main" val="3725665083"/>
       </p:ext>
     </p:extLst>
   </p:cSld>
@@ -5107,7 +4920,7 @@
           <p:cNvPr id="2" name="Title 1">
             <a:extLst>
               <a:ext uri="{FF2B5EF4-FFF2-40B4-BE49-F238E27FC236}">
-                <a16:creationId xmlns:a16="http://schemas.microsoft.com/office/drawing/2014/main" id="{C16DE78B-CAB7-B840-A8D2-2FF5E9523193}"/>
+                <a16:creationId xmlns:a16="http://schemas.microsoft.com/office/drawing/2014/main" id="{42DBD3D8-17EC-4727-F753-F8A1F5E9A88E}"/>
               </a:ext>
             </a:extLst>
           </p:cNvPr>
@@ -5125,7 +4938,7 @@
           <a:p>
             <a:r>
               <a:rPr lang="en-US" dirty="0"/>
-              <a:t>Other Tests</a:t>
+              <a:t>Realistic Example</a:t>
             </a:r>
           </a:p>
         </p:txBody>
@@ -5135,7 +4948,7 @@
           <p:cNvPr id="3" name="Content Placeholder 2">
             <a:extLst>
               <a:ext uri="{FF2B5EF4-FFF2-40B4-BE49-F238E27FC236}">
-                <a16:creationId xmlns:a16="http://schemas.microsoft.com/office/drawing/2014/main" id="{7F83A866-680A-0A46-BAC5-898B2DB87A2D}"/>
+                <a16:creationId xmlns:a16="http://schemas.microsoft.com/office/drawing/2014/main" id="{65A4BDE6-2576-A2D0-0903-C569C03FF09B}"/>
               </a:ext>
             </a:extLst>
           </p:cNvPr>
@@ -5146,55 +4959,80 @@
             <p:ph idx="1"/>
           </p:nvPr>
         </p:nvSpPr>
-        <p:spPr/>
+        <p:spPr>
+          <a:xfrm>
+            <a:off x="1451579" y="1933903"/>
+            <a:ext cx="9603275" cy="4119577"/>
+          </a:xfrm>
+        </p:spPr>
         <p:txBody>
           <a:bodyPr/>
           <a:lstStyle/>
           <a:p>
             <a:r>
               <a:rPr lang="en-US" dirty="0"/>
-              <a:t>There are many other statistical tests that can be useful in other scenarios. </a:t>
-            </a:r>
-          </a:p>
-          <a:p>
-            <a:r>
-              <a:rPr lang="en-US" dirty="0"/>
-              <a:t>We can look one up based on our scenario, if needed. Some common ones:</a:t>
-            </a:r>
-          </a:p>
-          <a:p>
-            <a:pPr lvl="1"/>
-            <a:r>
-              <a:rPr lang="en-US" dirty="0"/>
-              <a:t>ANOVA (analysis of variance) – Test means of 3+ groups. </a:t>
-            </a:r>
-          </a:p>
-          <a:p>
-            <a:pPr lvl="1"/>
-            <a:r>
-              <a:rPr lang="en-US" dirty="0"/>
-              <a:t>Mann-Whitney – T-test equivalent with no assumption of distributions. </a:t>
-            </a:r>
-          </a:p>
-          <a:p>
-            <a:pPr lvl="1"/>
-            <a:endParaRPr lang="en-US" dirty="0"/>
-          </a:p>
-          <a:p>
-            <a:r>
-              <a:rPr lang="en-US" dirty="0"/>
-              <a:t>Application to ML – can test if an individual variable/feature matters to a model. </a:t>
-            </a:r>
-          </a:p>
-          <a:p>
-            <a:endParaRPr lang="en-US" dirty="0"/>
+              <a:t>We are conducting a drug trial and have two separate samples:</a:t>
+            </a:r>
+          </a:p>
+          <a:p>
+            <a:pPr lvl="1"/>
+            <a:r>
+              <a:rPr lang="en-US" dirty="0"/>
+              <a:t>Treatment group – count 31, average life expectancy 12.5 years. </a:t>
+            </a:r>
+          </a:p>
+          <a:p>
+            <a:pPr lvl="1"/>
+            <a:r>
+              <a:rPr lang="en-US" dirty="0"/>
+              <a:t>Control group – count 39, average life expectancy 11.1 years. </a:t>
+            </a:r>
+          </a:p>
+          <a:p>
+            <a:r>
+              <a:rPr lang="en-US" dirty="0"/>
+              <a:t>The treated people live longer, but is that difference significant? </a:t>
+            </a:r>
+          </a:p>
+          <a:p>
+            <a:pPr lvl="1"/>
+            <a:r>
+              <a:rPr lang="en-US" dirty="0"/>
+              <a:t>Given the sample size and variance of data, could the observed sample effect be random? </a:t>
+            </a:r>
+          </a:p>
+          <a:p>
+            <a:r>
+              <a:rPr lang="en-US" dirty="0"/>
+              <a:t>This is a probabilistic decision. </a:t>
+            </a:r>
+          </a:p>
+          <a:p>
+            <a:pPr lvl="1"/>
+            <a:r>
+              <a:rPr lang="en-US" dirty="0"/>
+              <a:t>The effect we see in the sample could be real, or could be just random variation. </a:t>
+            </a:r>
+          </a:p>
+          <a:p>
+            <a:pPr lvl="1"/>
+            <a:r>
+              <a:rPr lang="en-US" dirty="0"/>
+              <a:t>The hypothesis test tests the likelihood it is random. </a:t>
+            </a:r>
+          </a:p>
+          <a:p>
+            <a:r>
+              <a:rPr lang="en-US" dirty="0"/>
+              <a:t>If the likelihood this effect is random is low enough, we judge it to be significant - real. </a:t>
+            </a:r>
           </a:p>
         </p:txBody>
       </p:sp>
     </p:spTree>
     <p:extLst>
       <p:ext uri="{BB962C8B-B14F-4D97-AF65-F5344CB8AC3E}">
-        <p14:creationId xmlns:p14="http://schemas.microsoft.com/office/powerpoint/2010/main" val="1530674256"/>
+        <p14:creationId xmlns:p14="http://schemas.microsoft.com/office/powerpoint/2010/main" val="488682165"/>
       </p:ext>
     </p:extLst>
   </p:cSld>
@@ -5207,30 +5045,6 @@
 <file path=ppt/slides/slide15.xml><?xml version="1.0" encoding="utf-8"?>
 <p:sld xmlns:a="http://schemas.openxmlformats.org/drawingml/2006/main" xmlns:r="http://schemas.openxmlformats.org/officeDocument/2006/relationships" xmlns:p="http://schemas.openxmlformats.org/presentationml/2006/main">
   <p:cSld>
-    <p:bg>
-      <p:bgPr>
-        <a:gradFill rotWithShape="1">
-          <a:gsLst>
-            <a:gs pos="0">
-              <a:schemeClr val="bg2">
-                <a:tint val="94000"/>
-                <a:satMod val="80000"/>
-                <a:lumMod val="106000"/>
-              </a:schemeClr>
-            </a:gs>
-            <a:gs pos="100000">
-              <a:schemeClr val="bg2">
-                <a:shade val="80000"/>
-              </a:schemeClr>
-            </a:gs>
-          </a:gsLst>
-          <a:path path="circle">
-            <a:fillToRect l="43000" r="43000" b="100000"/>
-          </a:path>
-        </a:gradFill>
-        <a:effectLst/>
-      </p:bgPr>
-    </p:bg>
     <p:spTree>
       <p:nvGrpSpPr>
         <p:cNvPr id="1" name=""/>
@@ -5250,7 +5064,7 @@
           <p:cNvPr id="2" name="Title 1">
             <a:extLst>
               <a:ext uri="{FF2B5EF4-FFF2-40B4-BE49-F238E27FC236}">
-                <a16:creationId xmlns:a16="http://schemas.microsoft.com/office/drawing/2014/main" id="{D6A034D5-E952-294B-AC81-5584708DAFFB}"/>
+                <a16:creationId xmlns:a16="http://schemas.microsoft.com/office/drawing/2014/main" id="{E238217B-E04E-E5EE-ACB7-19C5A0E3622D}"/>
               </a:ext>
             </a:extLst>
           </p:cNvPr>
@@ -5259,213 +5073,135 @@
           </p:cNvSpPr>
           <p:nvPr>
             <p:ph type="title"/>
+          </p:nvPr>
+        </p:nvSpPr>
+        <p:spPr/>
+        <p:txBody>
+          <a:bodyPr/>
+          <a:lstStyle/>
+          <a:p>
+            <a:r>
+              <a:rPr lang="en-US" dirty="0"/>
+              <a:t>Build a Hypothesis</a:t>
+            </a:r>
+          </a:p>
+        </p:txBody>
+      </p:sp>
+      <p:sp>
+        <p:nvSpPr>
+          <p:cNvPr id="3" name="Content Placeholder 2">
+            <a:extLst>
+              <a:ext uri="{FF2B5EF4-FFF2-40B4-BE49-F238E27FC236}">
+                <a16:creationId xmlns:a16="http://schemas.microsoft.com/office/drawing/2014/main" id="{B7DD69C7-73D7-A47B-3140-75A889372834}"/>
+              </a:ext>
+            </a:extLst>
+          </p:cNvPr>
+          <p:cNvSpPr>
+            <a:spLocks noGrp="1"/>
+          </p:cNvSpPr>
+          <p:nvPr>
+            <p:ph idx="1"/>
           </p:nvPr>
         </p:nvSpPr>
         <p:spPr>
           <a:xfrm>
-            <a:off x="1451579" y="804519"/>
-            <a:ext cx="9603275" cy="1049235"/>
+            <a:off x="1451579" y="1853755"/>
+            <a:ext cx="9603275" cy="4199726"/>
           </a:xfrm>
         </p:spPr>
         <p:txBody>
           <a:bodyPr>
-            <a:normAutofit/>
+            <a:normAutofit lnSpcReduction="10000"/>
           </a:bodyPr>
           <a:lstStyle/>
           <a:p>
-            <a:r>
-              <a:rPr lang="en-US" dirty="0"/>
-              <a:t>Demise of Hypothesis Testing</a:t>
-            </a:r>
-          </a:p>
-        </p:txBody>
-      </p:sp>
-      <p:pic>
-        <p:nvPicPr>
-          <p:cNvPr id="8194" name="Picture 2" descr="Graphical user interface, text, application, email&#10;&#10;Description automatically generated">
-            <a:extLst>
-              <a:ext uri="{FF2B5EF4-FFF2-40B4-BE49-F238E27FC236}">
-                <a16:creationId xmlns:a16="http://schemas.microsoft.com/office/drawing/2014/main" id="{843CC31A-A8D8-D94B-BE98-048586839791}"/>
-              </a:ext>
-            </a:extLst>
-          </p:cNvPr>
-          <p:cNvPicPr>
-            <a:picLocks noChangeAspect="1" noChangeArrowheads="1"/>
-          </p:cNvPicPr>
-          <p:nvPr/>
-        </p:nvPicPr>
-        <p:blipFill>
-          <a:blip r:embed="rId2">
-            <a:extLst>
-              <a:ext uri="{28A0092B-C50C-407E-A947-70E740481C1C}">
-                <a14:useLocalDpi xmlns:a14="http://schemas.microsoft.com/office/drawing/2010/main" val="0"/>
-              </a:ext>
-            </a:extLst>
-          </a:blip>
-          <a:stretch>
-            <a:fillRect/>
-          </a:stretch>
-        </p:blipFill>
-        <p:spPr bwMode="auto">
-          <a:xfrm>
-            <a:off x="191739" y="2111065"/>
-            <a:ext cx="6038708" cy="2979095"/>
-          </a:xfrm>
-          <a:prstGeom prst="rect">
-            <a:avLst/>
-          </a:prstGeom>
-          <a:noFill/>
-          <a:extLst>
-            <a:ext uri="{909E8E84-426E-40DD-AFC4-6F175D3DCCD1}">
-              <a14:hiddenFill xmlns:a14="http://schemas.microsoft.com/office/drawing/2010/main">
-                <a:solidFill>
-                  <a:srgbClr val="FFFFFF"/>
-                </a:solidFill>
-              </a14:hiddenFill>
-            </a:ext>
-          </a:extLst>
-        </p:spPr>
-      </p:pic>
-      <p:sp>
-        <p:nvSpPr>
-          <p:cNvPr id="3" name="Content Placeholder 2">
-            <a:extLst>
-              <a:ext uri="{FF2B5EF4-FFF2-40B4-BE49-F238E27FC236}">
-                <a16:creationId xmlns:a16="http://schemas.microsoft.com/office/drawing/2014/main" id="{F7E53707-A64A-6E40-9F66-E23093385A9E}"/>
-              </a:ext>
-            </a:extLst>
-          </p:cNvPr>
-          <p:cNvSpPr>
-            <a:spLocks noGrp="1"/>
-          </p:cNvSpPr>
-          <p:nvPr>
-            <p:ph idx="1"/>
-          </p:nvPr>
-        </p:nvSpPr>
-        <p:spPr>
-          <a:xfrm>
-            <a:off x="6370321" y="2015733"/>
-            <a:ext cx="5212080" cy="4037747"/>
-          </a:xfrm>
-        </p:spPr>
-        <p:txBody>
-          <a:bodyPr>
-            <a:normAutofit/>
-          </a:bodyPr>
-          <a:lstStyle/>
-          <a:p>
-            <a:pPr>
-              <a:lnSpc>
-                <a:spcPct val="110000"/>
-              </a:lnSpc>
+            <a:pPr marL="457200" indent="-457200">
+              <a:buFont typeface="+mj-lt"/>
+              <a:buAutoNum type="arabicPeriod"/>
             </a:pPr>
             <a:r>
-              <a:rPr lang="en-US" sz="1500" dirty="0"/>
-              <a:t>P-values are (somewhat) on their way out. </a:t>
-            </a:r>
-          </a:p>
-          <a:p>
-            <a:pPr lvl="1">
-              <a:lnSpc>
-                <a:spcPct val="110000"/>
-              </a:lnSpc>
+              <a:rPr lang="en-US" dirty="0"/>
+              <a:t>Select a test statistic – the thing calculated. </a:t>
+            </a:r>
+          </a:p>
+          <a:p>
+            <a:pPr marL="914400" lvl="1" indent="-457200">
+              <a:buFont typeface="+mj-lt"/>
+              <a:buAutoNum type="arabicPeriod"/>
             </a:pPr>
             <a:r>
-              <a:rPr lang="en-US" sz="1500" dirty="0"/>
-              <a:t>Banned from some medical journals as too easy to pass. </a:t>
-            </a:r>
-          </a:p>
-          <a:p>
-            <a:pPr lvl="1">
-              <a:lnSpc>
-                <a:spcPct val="110000"/>
-              </a:lnSpc>
+              <a:rPr lang="en-US" dirty="0"/>
+              <a:t>For the life expectancy this would be mean life expectancy of the samples. </a:t>
+            </a:r>
+          </a:p>
+          <a:p>
+            <a:pPr marL="457200" indent="-457200">
+              <a:buFont typeface="+mj-lt"/>
+              <a:buAutoNum type="arabicPeriod"/>
             </a:pPr>
             <a:r>
-              <a:rPr lang="en-US" sz="1500" dirty="0"/>
-              <a:t>NHST = null </a:t>
-            </a:r>
-            <a:r>
-              <a:rPr lang="en-US" sz="1500" dirty="0" err="1"/>
-              <a:t>hyp</a:t>
-            </a:r>
-            <a:r>
-              <a:rPr lang="en-US" sz="1500" dirty="0"/>
-              <a:t>. significance testing. </a:t>
-            </a:r>
-          </a:p>
-          <a:p>
-            <a:pPr>
-              <a:lnSpc>
-                <a:spcPct val="110000"/>
-              </a:lnSpc>
+              <a:rPr lang="en-US" dirty="0"/>
+              <a:t>Define null hypothesis – assertion that this thing is not true. </a:t>
+            </a:r>
+          </a:p>
+          <a:p>
+            <a:pPr marL="914400" lvl="1" indent="-457200">
+              <a:buFont typeface="+mj-lt"/>
+              <a:buAutoNum type="arabicPeriod"/>
             </a:pPr>
             <a:r>
-              <a:rPr lang="en-US" sz="1500" dirty="0"/>
-              <a:t>Unfortunately, and surprisingly, there’s no perfect alternative. </a:t>
-            </a:r>
-          </a:p>
-          <a:p>
-            <a:pPr>
-              <a:lnSpc>
-                <a:spcPct val="110000"/>
-              </a:lnSpc>
+              <a:rPr lang="en-US" dirty="0"/>
+              <a:t>There is no difference between the population means of treatment and control. </a:t>
+            </a:r>
+          </a:p>
+          <a:p>
+            <a:pPr marL="457200" indent="-457200">
+              <a:buFont typeface="+mj-lt"/>
+              <a:buAutoNum type="arabicPeriod"/>
             </a:pPr>
             <a:r>
-              <a:rPr lang="en-US" sz="1500" dirty="0"/>
-              <a:t>What do we do???</a:t>
-            </a:r>
-          </a:p>
-          <a:p>
-            <a:pPr lvl="1">
-              <a:lnSpc>
-                <a:spcPct val="110000"/>
-              </a:lnSpc>
+              <a:rPr lang="en-US" dirty="0"/>
+              <a:t>Calculate the p-value – the likelihood the null hypothesis is true. </a:t>
+            </a:r>
+          </a:p>
+          <a:p>
+            <a:pPr marL="914400" lvl="1" indent="-457200">
+              <a:buFont typeface="+mj-lt"/>
+              <a:buAutoNum type="arabicPeriod"/>
             </a:pPr>
             <a:r>
-              <a:rPr lang="en-US" sz="1500" dirty="0"/>
-              <a:t>Effect size. </a:t>
-            </a:r>
-          </a:p>
-          <a:p>
-            <a:pPr lvl="1">
-              <a:lnSpc>
-                <a:spcPct val="110000"/>
-              </a:lnSpc>
+              <a:rPr lang="en-US" dirty="0"/>
+              <a:t>Probability treatment and control populations are the same and effect is random variation.</a:t>
+            </a:r>
+          </a:p>
+          <a:p>
+            <a:pPr marL="914400" lvl="1" indent="-457200">
+              <a:buFont typeface="+mj-lt"/>
+              <a:buAutoNum type="arabicPeriod"/>
             </a:pPr>
             <a:r>
-              <a:rPr lang="en-US" sz="1500" dirty="0"/>
-              <a:t>Estimate mean with standard error and confidence intervals. </a:t>
-            </a:r>
-          </a:p>
-          <a:p>
-            <a:pPr lvl="1">
-              <a:lnSpc>
-                <a:spcPct val="110000"/>
-              </a:lnSpc>
+              <a:rPr lang="en-US" dirty="0"/>
+              <a:t>We can do simulating here, but we need to build the right model to generate tests. </a:t>
+            </a:r>
+          </a:p>
+          <a:p>
+            <a:pPr marL="457200" indent="-457200">
+              <a:buFont typeface="+mj-lt"/>
+              <a:buAutoNum type="arabicPeriod"/>
             </a:pPr>
             <a:r>
-              <a:rPr lang="en-US" sz="1500" dirty="0"/>
-              <a:t>Bayesian estimation (we </a:t>
-            </a:r>
-            <a:r>
-              <a:rPr lang="en-US" sz="1500" i="1" dirty="0"/>
-              <a:t>might</a:t>
-            </a:r>
-            <a:r>
-              <a:rPr lang="en-US" sz="1500" dirty="0"/>
-              <a:t> touch on this later)</a:t>
-            </a:r>
-          </a:p>
-          <a:p>
-            <a:pPr>
-              <a:lnSpc>
-                <a:spcPct val="110000"/>
-              </a:lnSpc>
+              <a:rPr lang="en-US" dirty="0"/>
+              <a:t>Interpret the result – is the likelihood of it being random low enough? </a:t>
+            </a:r>
+          </a:p>
+          <a:p>
+            <a:pPr marL="914400" lvl="1" indent="-457200">
+              <a:buFont typeface="+mj-lt"/>
+              <a:buAutoNum type="arabicPeriod"/>
             </a:pPr>
             <a:r>
-              <a:rPr lang="en-US" sz="1700" dirty="0"/>
-              <a:t>Real statisticians are actively debating this – we don’t have a firm answer. </a:t>
+              <a:rPr lang="en-US" dirty="0"/>
+              <a:t>If the probability of the treatment and control populations being the same is very low, we can conclude the drug actually made the two populations differ. </a:t>
             </a:r>
           </a:p>
         </p:txBody>
@@ -5473,7 +5209,7 @@
     </p:spTree>
     <p:extLst>
       <p:ext uri="{BB962C8B-B14F-4D97-AF65-F5344CB8AC3E}">
-        <p14:creationId xmlns:p14="http://schemas.microsoft.com/office/powerpoint/2010/main" val="2551124561"/>
+        <p14:creationId xmlns:p14="http://schemas.microsoft.com/office/powerpoint/2010/main" val="353130190"/>
       </p:ext>
     </p:extLst>
   </p:cSld>
@@ -5486,30 +5222,6 @@
 <file path=ppt/slides/slide16.xml><?xml version="1.0" encoding="utf-8"?>
 <p:sld xmlns:a="http://schemas.openxmlformats.org/drawingml/2006/main" xmlns:r="http://schemas.openxmlformats.org/officeDocument/2006/relationships" xmlns:p="http://schemas.openxmlformats.org/presentationml/2006/main">
   <p:cSld>
-    <p:bg>
-      <p:bgPr>
-        <a:gradFill rotWithShape="1">
-          <a:gsLst>
-            <a:gs pos="0">
-              <a:schemeClr val="bg2">
-                <a:tint val="94000"/>
-                <a:satMod val="80000"/>
-                <a:lumMod val="106000"/>
-              </a:schemeClr>
-            </a:gs>
-            <a:gs pos="100000">
-              <a:schemeClr val="bg2">
-                <a:shade val="80000"/>
-              </a:schemeClr>
-            </a:gs>
-          </a:gsLst>
-          <a:path path="circle">
-            <a:fillToRect l="43000" r="43000" b="100000"/>
-          </a:path>
-        </a:gradFill>
-        <a:effectLst/>
-      </p:bgPr>
-    </p:bg>
     <p:spTree>
       <p:nvGrpSpPr>
         <p:cNvPr id="1" name=""/>
@@ -5529,7 +5241,7 @@
           <p:cNvPr id="2" name="Title 1">
             <a:extLst>
               <a:ext uri="{FF2B5EF4-FFF2-40B4-BE49-F238E27FC236}">
-                <a16:creationId xmlns:a16="http://schemas.microsoft.com/office/drawing/2014/main" id="{AA861DA4-0DF2-D249-9DDF-0D62D36A5841}"/>
+                <a16:creationId xmlns:a16="http://schemas.microsoft.com/office/drawing/2014/main" id="{CA6CB23A-5CF3-B067-AA4C-9714A220A757}"/>
               </a:ext>
             </a:extLst>
           </p:cNvPr>
@@ -5538,156 +5250,110 @@
           </p:cNvSpPr>
           <p:nvPr>
             <p:ph type="title"/>
+          </p:nvPr>
+        </p:nvSpPr>
+        <p:spPr/>
+        <p:txBody>
+          <a:bodyPr/>
+          <a:lstStyle/>
+          <a:p>
+            <a:r>
+              <a:rPr lang="en-US" dirty="0"/>
+              <a:t>Ok, so… Do it!</a:t>
+            </a:r>
+          </a:p>
+        </p:txBody>
+      </p:sp>
+      <p:sp>
+        <p:nvSpPr>
+          <p:cNvPr id="3" name="Content Placeholder 2">
+            <a:extLst>
+              <a:ext uri="{FF2B5EF4-FFF2-40B4-BE49-F238E27FC236}">
+                <a16:creationId xmlns:a16="http://schemas.microsoft.com/office/drawing/2014/main" id="{D669C50B-D96E-F8FE-9E8B-AAED4A2FB926}"/>
+              </a:ext>
+            </a:extLst>
+          </p:cNvPr>
+          <p:cNvSpPr>
+            <a:spLocks noGrp="1"/>
+          </p:cNvSpPr>
+          <p:nvPr>
+            <p:ph idx="1"/>
           </p:nvPr>
         </p:nvSpPr>
         <p:spPr>
           <a:xfrm>
-            <a:off x="1451579" y="804519"/>
-            <a:ext cx="9603275" cy="1049235"/>
+            <a:off x="1451579" y="2015732"/>
+            <a:ext cx="9603275" cy="4037749"/>
           </a:xfrm>
         </p:spPr>
         <p:txBody>
-          <a:bodyPr>
-            <a:normAutofit/>
-          </a:bodyPr>
-          <a:lstStyle/>
-          <a:p>
-            <a:r>
-              <a:rPr lang="en-US" dirty="0"/>
-              <a:t>P Hacking</a:t>
-            </a:r>
-          </a:p>
-        </p:txBody>
-      </p:sp>
-      <p:sp>
-        <p:nvSpPr>
-          <p:cNvPr id="3" name="Content Placeholder 2">
-            <a:extLst>
-              <a:ext uri="{FF2B5EF4-FFF2-40B4-BE49-F238E27FC236}">
-                <a16:creationId xmlns:a16="http://schemas.microsoft.com/office/drawing/2014/main" id="{05C14BC6-77F4-534E-A32E-70385FECA69B}"/>
-              </a:ext>
-            </a:extLst>
-          </p:cNvPr>
-          <p:cNvSpPr>
-            <a:spLocks noGrp="1"/>
-          </p:cNvSpPr>
-          <p:nvPr>
-            <p:ph idx="1"/>
-          </p:nvPr>
-        </p:nvSpPr>
-        <p:spPr>
-          <a:xfrm>
-            <a:off x="1451579" y="2015734"/>
-            <a:ext cx="5622284" cy="3450613"/>
-          </a:xfrm>
-        </p:spPr>
-        <p:txBody>
-          <a:bodyPr>
-            <a:normAutofit/>
-          </a:bodyPr>
-          <a:lstStyle/>
-          <a:p>
-            <a:endParaRPr lang="en-US"/>
-          </a:p>
-        </p:txBody>
-      </p:sp>
-      <p:pic>
-        <p:nvPicPr>
-          <p:cNvPr id="2050" name="Picture 2" descr="A Useful Urinal Etiquette Guide For All Men, Everywhere - Mandatory">
-            <a:extLst>
-              <a:ext uri="{FF2B5EF4-FFF2-40B4-BE49-F238E27FC236}">
-                <a16:creationId xmlns:a16="http://schemas.microsoft.com/office/drawing/2014/main" id="{28D2CAA2-1578-214A-8E05-B00489994910}"/>
-              </a:ext>
-            </a:extLst>
-          </p:cNvPr>
-          <p:cNvPicPr>
-            <a:picLocks noChangeAspect="1" noChangeArrowheads="1"/>
-          </p:cNvPicPr>
-          <p:nvPr/>
-        </p:nvPicPr>
-        <p:blipFill>
-          <a:blip r:embed="rId2">
-            <a:extLst>
-              <a:ext uri="{28A0092B-C50C-407E-A947-70E740481C1C}">
-                <a14:useLocalDpi xmlns:a14="http://schemas.microsoft.com/office/drawing/2010/main" val="0"/>
-              </a:ext>
-            </a:extLst>
-          </a:blip>
-          <a:stretch>
-            <a:fillRect/>
-          </a:stretch>
-        </p:blipFill>
-        <p:spPr bwMode="auto">
-          <a:xfrm>
-            <a:off x="160637" y="2015734"/>
-            <a:ext cx="6422388" cy="3612593"/>
-          </a:xfrm>
-          <a:prstGeom prst="rect">
-            <a:avLst/>
-          </a:prstGeom>
-          <a:noFill/>
-          <a:extLst>
-            <a:ext uri="{909E8E84-426E-40DD-AFC4-6F175D3DCCD1}">
-              <a14:hiddenFill xmlns:a14="http://schemas.microsoft.com/office/drawing/2010/main">
-                <a:solidFill>
-                  <a:srgbClr val="FFFFFF"/>
-                </a:solidFill>
-              </a14:hiddenFill>
-            </a:ext>
-          </a:extLst>
-        </p:spPr>
-      </p:pic>
-      <p:pic>
-        <p:nvPicPr>
-          <p:cNvPr id="2052" name="Picture 4" descr="A Look into Computer Hacking - WORT 89.9 FM">
-            <a:extLst>
-              <a:ext uri="{FF2B5EF4-FFF2-40B4-BE49-F238E27FC236}">
-                <a16:creationId xmlns:a16="http://schemas.microsoft.com/office/drawing/2014/main" id="{15F358B1-FC4A-244D-AA90-5BBAAA1F7F68}"/>
-              </a:ext>
-            </a:extLst>
-          </p:cNvPr>
-          <p:cNvPicPr>
-            <a:picLocks noChangeAspect="1" noChangeArrowheads="1"/>
-          </p:cNvPicPr>
-          <p:nvPr/>
-        </p:nvPicPr>
-        <p:blipFill>
-          <a:blip r:embed="rId3">
-            <a:extLst>
-              <a:ext uri="{28A0092B-C50C-407E-A947-70E740481C1C}">
-                <a14:useLocalDpi xmlns:a14="http://schemas.microsoft.com/office/drawing/2010/main" val="0"/>
-              </a:ext>
-            </a:extLst>
-          </a:blip>
-          <a:srcRect/>
-          <a:stretch>
-            <a:fillRect/>
-          </a:stretch>
-        </p:blipFill>
-        <p:spPr bwMode="auto">
-          <a:xfrm>
-            <a:off x="6789656" y="2107248"/>
-            <a:ext cx="5241707" cy="4577757"/>
-          </a:xfrm>
-          <a:prstGeom prst="rect">
-            <a:avLst/>
-          </a:prstGeom>
-          <a:noFill/>
-          <a:extLst>
-            <a:ext uri="{909E8E84-426E-40DD-AFC4-6F175D3DCCD1}">
-              <a14:hiddenFill xmlns:a14="http://schemas.microsoft.com/office/drawing/2010/main">
-                <a:solidFill>
-                  <a:srgbClr val="FFFFFF"/>
-                </a:solidFill>
-              </a14:hiddenFill>
-            </a:ext>
-          </a:extLst>
-        </p:spPr>
-      </p:pic>
+          <a:bodyPr/>
+          <a:lstStyle/>
+          <a:p>
+            <a:r>
+              <a:rPr lang="en-US" dirty="0"/>
+              <a:t>This process is something that can extend on our simulations. </a:t>
+            </a:r>
+          </a:p>
+          <a:p>
+            <a:pPr lvl="1"/>
+            <a:r>
+              <a:rPr lang="en-US" dirty="0"/>
+              <a:t>The test statistics are defined by some model, usually a normal distribution. </a:t>
+            </a:r>
+          </a:p>
+          <a:p>
+            <a:pPr lvl="1"/>
+            <a:r>
+              <a:rPr lang="en-US" dirty="0"/>
+              <a:t>We can generate multiple samples can tabulate where they lie. </a:t>
+            </a:r>
+          </a:p>
+          <a:p>
+            <a:r>
+              <a:rPr lang="en-US" dirty="0"/>
+              <a:t>If the p-value is the probability of the effect being random, we can count that. </a:t>
+            </a:r>
+          </a:p>
+          <a:p>
+            <a:pPr lvl="1"/>
+            <a:r>
+              <a:rPr lang="en-US" dirty="0"/>
+              <a:t>Generate many trials and count the number of times that randomness yielded a result. </a:t>
+            </a:r>
+          </a:p>
+          <a:p>
+            <a:r>
+              <a:rPr lang="en-US" dirty="0"/>
+              <a:t>This process is mostly generic – the process is the same, the details vary. </a:t>
+            </a:r>
+          </a:p>
+          <a:p>
+            <a:pPr lvl="1"/>
+            <a:r>
+              <a:rPr lang="en-US" dirty="0"/>
+              <a:t>The textbook has an example of inheritance and classes that we can hopefully use. </a:t>
+            </a:r>
+          </a:p>
+          <a:p>
+            <a:pPr lvl="1"/>
+            <a:r>
+              <a:rPr lang="en-US" dirty="0"/>
+              <a:t>We can rotate test statistics and models to test almost anything!</a:t>
+            </a:r>
+          </a:p>
+          <a:p>
+            <a:r>
+              <a:rPr lang="en-US" dirty="0"/>
+              <a:t>The important part is framing the problem correctly. </a:t>
+            </a:r>
+          </a:p>
+        </p:txBody>
+      </p:sp>
     </p:spTree>
     <p:extLst>
       <p:ext uri="{BB962C8B-B14F-4D97-AF65-F5344CB8AC3E}">
-        <p14:creationId xmlns:p14="http://schemas.microsoft.com/office/powerpoint/2010/main" val="3269594207"/>
+        <p14:creationId xmlns:p14="http://schemas.microsoft.com/office/powerpoint/2010/main" val="4262855181"/>
       </p:ext>
     </p:extLst>
   </p:cSld>
@@ -5719,7 +5385,7 @@
           <p:cNvPr id="2" name="Title 1">
             <a:extLst>
               <a:ext uri="{FF2B5EF4-FFF2-40B4-BE49-F238E27FC236}">
-                <a16:creationId xmlns:a16="http://schemas.microsoft.com/office/drawing/2014/main" id="{8D48E8B3-406C-794A-B1EF-BCB803974BCE}"/>
+                <a16:creationId xmlns:a16="http://schemas.microsoft.com/office/drawing/2014/main" id="{5024A5B8-7CFF-BB67-7707-243CC55E79FC}"/>
               </a:ext>
             </a:extLst>
           </p:cNvPr>
@@ -5737,7 +5403,7 @@
           <a:p>
             <a:r>
               <a:rPr lang="en-US" dirty="0"/>
-              <a:t>What is P-Hacking?</a:t>
+              <a:t>Specific Implementations</a:t>
             </a:r>
           </a:p>
         </p:txBody>
@@ -5747,7 +5413,7 @@
           <p:cNvPr id="3" name="Content Placeholder 2">
             <a:extLst>
               <a:ext uri="{FF2B5EF4-FFF2-40B4-BE49-F238E27FC236}">
-                <a16:creationId xmlns:a16="http://schemas.microsoft.com/office/drawing/2014/main" id="{F9B6F98D-1784-EC4E-A263-DBC24CE4E93A}"/>
+                <a16:creationId xmlns:a16="http://schemas.microsoft.com/office/drawing/2014/main" id="{80EE99A2-3424-F371-D82A-D5709FF413A4}"/>
               </a:ext>
             </a:extLst>
           </p:cNvPr>
@@ -5761,79 +5427,101 @@
         <p:spPr>
           <a:xfrm>
             <a:off x="1451579" y="1853754"/>
-            <a:ext cx="9603275" cy="4287273"/>
+            <a:ext cx="9603275" cy="4199727"/>
           </a:xfrm>
         </p:spPr>
         <p:txBody>
-          <a:bodyPr>
-            <a:normAutofit/>
-          </a:bodyPr>
-          <a:lstStyle/>
-          <a:p>
-            <a:r>
-              <a:rPr lang="en-US" dirty="0"/>
-              <a:t>Generally, we (the royal one) are looking to demonstrate significance:</a:t>
-            </a:r>
-          </a:p>
-          <a:p>
-            <a:pPr lvl="1"/>
-            <a:r>
-              <a:rPr lang="en-US" dirty="0"/>
-              <a:t>This drug works – the people who took it live longer.</a:t>
-            </a:r>
-          </a:p>
-          <a:p>
-            <a:pPr lvl="1"/>
-            <a:r>
-              <a:rPr lang="en-US" dirty="0"/>
-              <a:t>This thing I noticed in my thesis is real – some effect is due to a real thing, not randomness.</a:t>
-            </a:r>
-          </a:p>
-          <a:p>
-            <a:pPr lvl="1"/>
-            <a:r>
-              <a:rPr lang="en-US" dirty="0"/>
-              <a:t>This difference matters – group A really is different from group B. </a:t>
-            </a:r>
-          </a:p>
-          <a:p>
-            <a:r>
-              <a:rPr lang="en-US" dirty="0"/>
-              <a:t>95% confidence is only 19 times out of 20. </a:t>
-            </a:r>
-          </a:p>
-          <a:p>
-            <a:r>
-              <a:rPr lang="en-US" dirty="0"/>
-              <a:t>If we just want to show something is significant:</a:t>
-            </a:r>
-          </a:p>
-          <a:p>
-            <a:pPr lvl="1"/>
-            <a:r>
-              <a:rPr lang="en-US" dirty="0"/>
-              <a:t>Manipulate variables</a:t>
-            </a:r>
-          </a:p>
-          <a:p>
-            <a:pPr lvl="1"/>
-            <a:r>
-              <a:rPr lang="en-US" dirty="0"/>
-              <a:t>Repeat testing with different details</a:t>
-            </a:r>
-          </a:p>
-          <a:p>
-            <a:pPr lvl="1"/>
-            <a:r>
-              <a:rPr lang="en-US" dirty="0"/>
-              <a:t>Find a small p</a:t>
-            </a:r>
-          </a:p>
-          <a:p>
-            <a:pPr lvl="1"/>
-            <a:r>
-              <a:rPr lang="en-US" dirty="0"/>
-              <a:t>Publish!!!!!!!</a:t>
+          <a:bodyPr/>
+          <a:lstStyle/>
+          <a:p>
+            <a:r>
+              <a:rPr lang="en-US" dirty="0"/>
+              <a:t>There are several common-</a:t>
+            </a:r>
+            <a:r>
+              <a:rPr lang="en-US" dirty="0" err="1"/>
+              <a:t>ish</a:t>
+            </a:r>
+            <a:r>
+              <a:rPr lang="en-US" dirty="0"/>
+              <a:t> setups that we can test:</a:t>
+            </a:r>
+          </a:p>
+          <a:p>
+            <a:pPr lvl="1"/>
+            <a:r>
+              <a:rPr lang="en-US" dirty="0"/>
+              <a:t>Things are different – permutation (in book</a:t>
+            </a:r>
+            <a:r>
+              <a:rPr lang="en-US"/>
+              <a:t>), shuffle randomly </a:t>
+            </a:r>
+            <a:r>
+              <a:rPr lang="en-US" dirty="0"/>
+              <a:t>data and </a:t>
+            </a:r>
+            <a:r>
+              <a:rPr lang="en-US"/>
+              <a:t>observe results. </a:t>
+            </a:r>
+            <a:endParaRPr lang="en-US" dirty="0"/>
+          </a:p>
+          <a:p>
+            <a:pPr lvl="1"/>
+            <a:r>
+              <a:rPr lang="en-US" dirty="0"/>
+              <a:t>Greater/less - permutation + greater/less than. </a:t>
+            </a:r>
+          </a:p>
+          <a:p>
+            <a:r>
+              <a:rPr lang="en-US" dirty="0"/>
+              <a:t>In general:</a:t>
+            </a:r>
+          </a:p>
+          <a:p>
+            <a:pPr lvl="1"/>
+            <a:r>
+              <a:rPr lang="en-US" dirty="0"/>
+              <a:t>What is the opposite of the null hypothesis. (e.g. Means are equal). </a:t>
+            </a:r>
+          </a:p>
+          <a:p>
+            <a:pPr lvl="2"/>
+            <a:r>
+              <a:rPr lang="en-US" dirty="0"/>
+              <a:t>This is the NH – mean1=mean2, mean1 &gt; mean2, std1 = std2, </a:t>
+            </a:r>
+            <a:r>
+              <a:rPr lang="en-US" dirty="0" err="1"/>
+              <a:t>etc</a:t>
+            </a:r>
+            <a:r>
+              <a:rPr lang="en-US" dirty="0"/>
+              <a:t>…</a:t>
+            </a:r>
+          </a:p>
+          <a:p>
+            <a:pPr lvl="1"/>
+            <a:r>
+              <a:rPr lang="en-US" dirty="0"/>
+              <a:t>Create test that can try this – permutation, generate samples, </a:t>
+            </a:r>
+            <a:r>
+              <a:rPr lang="en-US" dirty="0" err="1"/>
+              <a:t>etc</a:t>
+            </a:r>
+            <a:r>
+              <a:rPr lang="en-US" dirty="0"/>
+              <a:t>….</a:t>
+            </a:r>
+          </a:p>
+          <a:p>
+            <a:pPr lvl="1"/>
+            <a:r>
+              <a:rPr lang="en-US" dirty="0"/>
+              <a:t>Count how many times ‘it’ happens. </a:t>
             </a:r>
           </a:p>
         </p:txBody>
@@ -5841,7 +5529,7 @@
     </p:spTree>
     <p:extLst>
       <p:ext uri="{BB962C8B-B14F-4D97-AF65-F5344CB8AC3E}">
-        <p14:creationId xmlns:p14="http://schemas.microsoft.com/office/powerpoint/2010/main" val="2930291580"/>
+        <p14:creationId xmlns:p14="http://schemas.microsoft.com/office/powerpoint/2010/main" val="208701022"/>
       </p:ext>
     </p:extLst>
   </p:cSld>
@@ -5897,7 +5585,7 @@
           <p:cNvPr id="2" name="Title 1">
             <a:extLst>
               <a:ext uri="{FF2B5EF4-FFF2-40B4-BE49-F238E27FC236}">
-                <a16:creationId xmlns:a16="http://schemas.microsoft.com/office/drawing/2014/main" id="{722F0982-DE8D-644B-8D71-399253321296}"/>
+                <a16:creationId xmlns:a16="http://schemas.microsoft.com/office/drawing/2014/main" id="{E9FB4EAE-8C60-0F48-8E09-4DBF9EFA1A74}"/>
               </a:ext>
             </a:extLst>
           </p:cNvPr>
@@ -5922,7 +5610,7 @@
           <a:p>
             <a:r>
               <a:rPr lang="en-US" dirty="0"/>
-              <a:t>Data Dredging</a:t>
+              <a:t>It’s Science!!</a:t>
             </a:r>
           </a:p>
         </p:txBody>
@@ -5932,7 +5620,7 @@
           <p:cNvPr id="3" name="Content Placeholder 2">
             <a:extLst>
               <a:ext uri="{FF2B5EF4-FFF2-40B4-BE49-F238E27FC236}">
-                <a16:creationId xmlns:a16="http://schemas.microsoft.com/office/drawing/2014/main" id="{81BAD69F-CDE9-8746-8218-37FB9AD709BD}"/>
+                <a16:creationId xmlns:a16="http://schemas.microsoft.com/office/drawing/2014/main" id="{D95C479D-1CC5-7947-B7C5-85D2EE5E1C65}"/>
               </a:ext>
             </a:extLst>
           </p:cNvPr>
@@ -5945,8 +5633,8 @@
         </p:nvSpPr>
         <p:spPr>
           <a:xfrm>
-            <a:off x="1049482" y="2015734"/>
-            <a:ext cx="6024381" cy="4037747"/>
+            <a:off x="94593" y="1887421"/>
+            <a:ext cx="6936827" cy="4086659"/>
           </a:xfrm>
         </p:spPr>
         <p:txBody>
@@ -5957,51 +5645,70 @@
           <a:p>
             <a:r>
               <a:rPr lang="en-US" dirty="0"/>
-              <a:t>P Hacking is one example of Data Dredging:</a:t>
-            </a:r>
-          </a:p>
-          <a:p>
-            <a:pPr lvl="1"/>
-            <a:r>
-              <a:rPr lang="en-US" dirty="0"/>
-              <a:t>Manipulating analysis to find justification for a predetermined result. </a:t>
-            </a:r>
-          </a:p>
-          <a:p>
-            <a:r>
-              <a:rPr lang="en-US" dirty="0"/>
-              <a:t>E.g. if I want to show correlation, predictive value, or similar for an example, I can:</a:t>
-            </a:r>
-          </a:p>
-          <a:p>
-            <a:pPr lvl="1"/>
-            <a:r>
-              <a:rPr lang="en-US" dirty="0"/>
-              <a:t>Remove (or add) data arbitrarily to change results. </a:t>
-            </a:r>
-          </a:p>
-          <a:p>
-            <a:pPr lvl="1"/>
-            <a:r>
-              <a:rPr lang="en-US" dirty="0"/>
-              <a:t>Transform data in some way.</a:t>
-            </a:r>
-          </a:p>
-          <a:p>
-            <a:pPr lvl="1"/>
-            <a:r>
-              <a:rPr lang="en-US" dirty="0"/>
-              <a:t>Run a test, then change things to get what I want. </a:t>
+              <a:t>Hypothesis testing uses samples to infer about populations. </a:t>
+            </a:r>
+          </a:p>
+          <a:p>
+            <a:r>
+              <a:rPr lang="en-US" dirty="0"/>
+              <a:t>What is the probability this effect is due to random variation?</a:t>
+            </a:r>
+          </a:p>
+          <a:p>
+            <a:pPr lvl="1"/>
+            <a:r>
+              <a:rPr lang="en-US" dirty="0"/>
+              <a:t>We see some difference, the effect. </a:t>
+            </a:r>
+          </a:p>
+          <a:p>
+            <a:pPr lvl="1"/>
+            <a:r>
+              <a:rPr lang="en-US" dirty="0"/>
+              <a:t>Is that difference ‘real’, or not just due to randomness?</a:t>
+            </a:r>
+          </a:p>
+          <a:p>
+            <a:pPr lvl="1"/>
+            <a:r>
+              <a:rPr lang="en-US" dirty="0"/>
+              <a:t>Or can we expect this difference to be seen in the population? </a:t>
+            </a:r>
+          </a:p>
+          <a:p>
+            <a:r>
+              <a:rPr lang="en-US" dirty="0"/>
+              <a:t>For example, a new drug treatment and life expectancy. </a:t>
+            </a:r>
+          </a:p>
+          <a:p>
+            <a:pPr lvl="1"/>
+            <a:r>
+              <a:rPr lang="en-US" dirty="0"/>
+              <a:t>The sample of drugged people live longer. </a:t>
+            </a:r>
+          </a:p>
+          <a:p>
+            <a:pPr lvl="1"/>
+            <a:r>
+              <a:rPr lang="en-US" dirty="0"/>
+              <a:t>Is that difference likely real – big enough to mean the drug did it?</a:t>
+            </a:r>
+          </a:p>
+          <a:p>
+            <a:r>
+              <a:rPr lang="en-US" dirty="0"/>
+              <a:t>This is used all over in science and research. </a:t>
             </a:r>
           </a:p>
         </p:txBody>
       </p:sp>
       <p:pic>
         <p:nvPicPr>
-          <p:cNvPr id="3074" name="Picture 2" descr="Lies, Damn Lies, and Statistics: How the COVID-19 Crisis Highlights Our  Misuse of Data | Foley Hoag LLP - Environmental Law - JDSupra">
+          <p:cNvPr id="1026" name="Picture 2" descr="Hypothesis vs. Theory: The Difference Explained | Merriam-Webster">
             <a:extLst>
               <a:ext uri="{FF2B5EF4-FFF2-40B4-BE49-F238E27FC236}">
-                <a16:creationId xmlns:a16="http://schemas.microsoft.com/office/drawing/2014/main" id="{22FBCF00-8A1B-034C-BF4C-A4471315BE83}"/>
+                <a16:creationId xmlns:a16="http://schemas.microsoft.com/office/drawing/2014/main" id="{CD8C1DE2-BD67-164B-B905-9C98DA89A777}"/>
               </a:ext>
             </a:extLst>
           </p:cNvPr>
@@ -6024,8 +5731,8 @@
         </p:blipFill>
         <p:spPr bwMode="auto">
           <a:xfrm>
-            <a:off x="7430572" y="2015735"/>
-            <a:ext cx="4600816" cy="3450612"/>
+            <a:off x="7031420" y="1887421"/>
+            <a:ext cx="5160579" cy="3870433"/>
           </a:xfrm>
           <a:prstGeom prst="rect">
             <a:avLst/>
@@ -6045,7 +5752,7 @@
     </p:spTree>
     <p:extLst>
       <p:ext uri="{BB962C8B-B14F-4D97-AF65-F5344CB8AC3E}">
-        <p14:creationId xmlns:p14="http://schemas.microsoft.com/office/powerpoint/2010/main" val="2893789664"/>
+        <p14:creationId xmlns:p14="http://schemas.microsoft.com/office/powerpoint/2010/main" val="3552808515"/>
       </p:ext>
     </p:extLst>
   </p:cSld>
@@ -6077,7 +5784,7 @@
           <p:cNvPr id="2" name="Title 1">
             <a:extLst>
               <a:ext uri="{FF2B5EF4-FFF2-40B4-BE49-F238E27FC236}">
-                <a16:creationId xmlns:a16="http://schemas.microsoft.com/office/drawing/2014/main" id="{BE41156D-A56A-0842-B741-09E6D744E59F}"/>
+                <a16:creationId xmlns:a16="http://schemas.microsoft.com/office/drawing/2014/main" id="{07E36D4B-F13F-C35A-5657-1C98F74F4CEE}"/>
               </a:ext>
             </a:extLst>
           </p:cNvPr>
@@ -6095,7 +5802,7 @@
           <a:p>
             <a:r>
               <a:rPr lang="en-US" dirty="0"/>
-              <a:t>Don’t be a P Hacker (Unless Maybe if grant Funding Depends on it)</a:t>
+              <a:t>The Results - Significance</a:t>
             </a:r>
           </a:p>
         </p:txBody>
@@ -6105,7 +5812,7 @@
           <p:cNvPr id="3" name="Content Placeholder 2">
             <a:extLst>
               <a:ext uri="{FF2B5EF4-FFF2-40B4-BE49-F238E27FC236}">
-                <a16:creationId xmlns:a16="http://schemas.microsoft.com/office/drawing/2014/main" id="{09C2E57C-E69A-784E-B887-A6B8D10B924B}"/>
+                <a16:creationId xmlns:a16="http://schemas.microsoft.com/office/drawing/2014/main" id="{B0E24597-E550-101E-E565-B0456F471800}"/>
               </a:ext>
             </a:extLst>
           </p:cNvPr>
@@ -6128,19 +5835,47 @@
           <a:p>
             <a:r>
               <a:rPr lang="en-US" dirty="0"/>
-              <a:t>Share process, not just results. </a:t>
-            </a:r>
-          </a:p>
-          <a:p>
-            <a:r>
-              <a:rPr lang="en-US" dirty="0"/>
-              <a:t>Look for multiple metrics of significance that agree with each other. </a:t>
-            </a:r>
-          </a:p>
-          <a:p>
-            <a:r>
-              <a:rPr lang="en-US" dirty="0"/>
-              <a:t>Just “don’t” – avoid searching for ways to force data to show what you want. </a:t>
+              <a:t>Hypothesis tests yield an estimate of some effect occurring by chance. </a:t>
+            </a:r>
+          </a:p>
+          <a:p>
+            <a:pPr lvl="1"/>
+            <a:r>
+              <a:rPr lang="en-US" dirty="0"/>
+              <a:t>P value is the probability of this thing happening randomly. </a:t>
+            </a:r>
+          </a:p>
+          <a:p>
+            <a:r>
+              <a:rPr lang="en-US" dirty="0"/>
+              <a:t>The cutoff we set for “good enough” can vary depending on scenario. </a:t>
+            </a:r>
+          </a:p>
+          <a:p>
+            <a:pPr lvl="1"/>
+            <a:r>
+              <a:rPr lang="en-US" dirty="0"/>
+              <a:t>.05, or 5% is a common cutoff. (This isn’t that unlikely…)</a:t>
+            </a:r>
+          </a:p>
+          <a:p>
+            <a:r>
+              <a:rPr lang="en-US" dirty="0"/>
+              <a:t>If the likelihood of randomness &lt; cutoff, the result is “statistically significant”. </a:t>
+            </a:r>
+          </a:p>
+          <a:p>
+            <a:pPr lvl="1"/>
+            <a:r>
+              <a:rPr lang="en-US" dirty="0"/>
+              <a:t>This is irrespective of the size of the effect, it could be small but significant. </a:t>
+            </a:r>
+          </a:p>
+          <a:p>
+            <a:pPr lvl="1"/>
+            <a:r>
+              <a:rPr lang="en-US" dirty="0"/>
+              <a:t>This doesn’t mean it is true, this is just one piece of evidence. </a:t>
             </a:r>
           </a:p>
         </p:txBody>
@@ -6148,7 +5883,7 @@
     </p:spTree>
     <p:extLst>
       <p:ext uri="{BB962C8B-B14F-4D97-AF65-F5344CB8AC3E}">
-        <p14:creationId xmlns:p14="http://schemas.microsoft.com/office/powerpoint/2010/main" val="1179250358"/>
+        <p14:creationId xmlns:p14="http://schemas.microsoft.com/office/powerpoint/2010/main" val="2787222080"/>
       </p:ext>
     </p:extLst>
   </p:cSld>
@@ -6180,6 +5915,1766 @@
           <p:cNvPr id="2" name="Title 1">
             <a:extLst>
               <a:ext uri="{FF2B5EF4-FFF2-40B4-BE49-F238E27FC236}">
+                <a16:creationId xmlns:a16="http://schemas.microsoft.com/office/drawing/2014/main" id="{7115F306-249F-4561-521B-14C45383C528}"/>
+              </a:ext>
+            </a:extLst>
+          </p:cNvPr>
+          <p:cNvSpPr>
+            <a:spLocks noGrp="1"/>
+          </p:cNvSpPr>
+          <p:nvPr>
+            <p:ph type="title"/>
+          </p:nvPr>
+        </p:nvSpPr>
+        <p:spPr/>
+        <p:txBody>
+          <a:bodyPr/>
+          <a:lstStyle/>
+          <a:p>
+            <a:r>
+              <a:rPr lang="en-US" dirty="0"/>
+              <a:t>Some Stuff</a:t>
+            </a:r>
+          </a:p>
+        </p:txBody>
+      </p:sp>
+      <p:sp>
+        <p:nvSpPr>
+          <p:cNvPr id="3" name="Content Placeholder 2">
+            <a:extLst>
+              <a:ext uri="{FF2B5EF4-FFF2-40B4-BE49-F238E27FC236}">
+                <a16:creationId xmlns:a16="http://schemas.microsoft.com/office/drawing/2014/main" id="{6D36FC52-8F69-94EE-32EB-161E1AB831C5}"/>
+              </a:ext>
+            </a:extLst>
+          </p:cNvPr>
+          <p:cNvSpPr>
+            <a:spLocks noGrp="1"/>
+          </p:cNvSpPr>
+          <p:nvPr>
+            <p:ph idx="1"/>
+          </p:nvPr>
+        </p:nvSpPr>
+        <p:spPr>
+          <a:xfrm>
+            <a:off x="1451579" y="1853755"/>
+            <a:ext cx="9603275" cy="4199726"/>
+          </a:xfrm>
+        </p:spPr>
+        <p:txBody>
+          <a:bodyPr>
+            <a:normAutofit lnSpcReduction="10000"/>
+          </a:bodyPr>
+          <a:lstStyle/>
+          <a:p>
+            <a:r>
+              <a:rPr lang="en-US" dirty="0"/>
+              <a:t>Question – in chapter 9 (e.g. 9.2) do the “class…” code parts make sense or no?</a:t>
+            </a:r>
+          </a:p>
+          <a:p>
+            <a:r>
+              <a:rPr lang="en-US" dirty="0"/>
+              <a:t>Today – recap simulation and (maybe) first part of hypothesis testing (&lt;=9.5). </a:t>
+            </a:r>
+          </a:p>
+          <a:p>
+            <a:pPr lvl="1"/>
+            <a:r>
+              <a:rPr lang="en-US" dirty="0"/>
+              <a:t>Game 7. </a:t>
+            </a:r>
+          </a:p>
+          <a:p>
+            <a:pPr lvl="1"/>
+            <a:r>
+              <a:rPr lang="en-US" dirty="0"/>
+              <a:t>More generalization, confidence, and election simulation. </a:t>
+            </a:r>
+          </a:p>
+          <a:p>
+            <a:pPr lvl="1"/>
+            <a:r>
+              <a:rPr lang="en-US" dirty="0"/>
+              <a:t>Hypothesis testing from scratch. </a:t>
+            </a:r>
+          </a:p>
+          <a:p>
+            <a:pPr lvl="1"/>
+            <a:r>
+              <a:rPr lang="en-US" dirty="0"/>
+              <a:t>Depending on what you all know, a bit about classes to make sense of book. </a:t>
+            </a:r>
+          </a:p>
+          <a:p>
+            <a:r>
+              <a:rPr lang="en-US" dirty="0"/>
+              <a:t>Note: we’ll look at the ‘from scratch’ stuff now and worry about t/z/p tests next time. </a:t>
+            </a:r>
+          </a:p>
+          <a:p>
+            <a:r>
+              <a:rPr lang="en-US" dirty="0"/>
+              <a:t>Exam, in a couple of weeks (31):</a:t>
+            </a:r>
+          </a:p>
+          <a:p>
+            <a:pPr lvl="1"/>
+            <a:r>
+              <a:rPr lang="en-US" dirty="0"/>
+              <a:t>Set a cutoff on hypothesis testing (ch9 - we’ll be more specific at the end of the week). </a:t>
+            </a:r>
+          </a:p>
+          <a:p>
+            <a:pPr lvl="1"/>
+            <a:r>
+              <a:rPr lang="en-US" dirty="0"/>
+              <a:t>It’ll involve answering some questions, and submitting some code bits. </a:t>
+            </a:r>
+          </a:p>
+        </p:txBody>
+      </p:sp>
+      <p:pic>
+        <p:nvPicPr>
+          <p:cNvPr id="2050" name="Picture 2" descr="Toronto Blue Jays - Wikipedia">
+            <a:extLst>
+              <a:ext uri="{FF2B5EF4-FFF2-40B4-BE49-F238E27FC236}">
+                <a16:creationId xmlns:a16="http://schemas.microsoft.com/office/drawing/2014/main" id="{906B6302-6014-1A0A-B459-FC61F9795AB8}"/>
+              </a:ext>
+            </a:extLst>
+          </p:cNvPr>
+          <p:cNvPicPr>
+            <a:picLocks noChangeAspect="1" noChangeArrowheads="1"/>
+          </p:cNvPicPr>
+          <p:nvPr/>
+        </p:nvPicPr>
+        <p:blipFill>
+          <a:blip r:embed="rId2">
+            <a:extLst>
+              <a:ext uri="{28A0092B-C50C-407E-A947-70E740481C1C}">
+                <a14:useLocalDpi xmlns:a14="http://schemas.microsoft.com/office/drawing/2010/main" val="0"/>
+              </a:ext>
+            </a:extLst>
+          </a:blip>
+          <a:srcRect/>
+          <a:stretch>
+            <a:fillRect/>
+          </a:stretch>
+        </p:blipFill>
+        <p:spPr bwMode="auto">
+          <a:xfrm>
+            <a:off x="9970474" y="0"/>
+            <a:ext cx="2168759" cy="1870441"/>
+          </a:xfrm>
+          <a:prstGeom prst="rect">
+            <a:avLst/>
+          </a:prstGeom>
+          <a:noFill/>
+          <a:extLst>
+            <a:ext uri="{909E8E84-426E-40DD-AFC4-6F175D3DCCD1}">
+              <a14:hiddenFill xmlns:a14="http://schemas.microsoft.com/office/drawing/2010/main">
+                <a:solidFill>
+                  <a:srgbClr val="FFFFFF"/>
+                </a:solidFill>
+              </a14:hiddenFill>
+            </a:ext>
+          </a:extLst>
+        </p:spPr>
+      </p:pic>
+    </p:spTree>
+    <p:extLst>
+      <p:ext uri="{BB962C8B-B14F-4D97-AF65-F5344CB8AC3E}">
+        <p14:creationId xmlns:p14="http://schemas.microsoft.com/office/powerpoint/2010/main" val="3163518021"/>
+      </p:ext>
+    </p:extLst>
+  </p:cSld>
+  <p:clrMapOvr>
+    <a:masterClrMapping/>
+  </p:clrMapOvr>
+</p:sld>
+</file>
+
+<file path=ppt/slides/slide20.xml><?xml version="1.0" encoding="utf-8"?>
+<p:sld xmlns:a="http://schemas.openxmlformats.org/drawingml/2006/main" xmlns:r="http://schemas.openxmlformats.org/officeDocument/2006/relationships" xmlns:p="http://schemas.openxmlformats.org/presentationml/2006/main">
+  <p:cSld>
+    <p:spTree>
+      <p:nvGrpSpPr>
+        <p:cNvPr id="1" name=""/>
+        <p:cNvGrpSpPr/>
+        <p:nvPr/>
+      </p:nvGrpSpPr>
+      <p:grpSpPr>
+        <a:xfrm>
+          <a:off x="0" y="0"/>
+          <a:ext cx="0" cy="0"/>
+          <a:chOff x="0" y="0"/>
+          <a:chExt cx="0" cy="0"/>
+        </a:xfrm>
+      </p:grpSpPr>
+      <p:sp>
+        <p:nvSpPr>
+          <p:cNvPr id="2" name="Title 1">
+            <a:extLst>
+              <a:ext uri="{FF2B5EF4-FFF2-40B4-BE49-F238E27FC236}">
+                <a16:creationId xmlns:a16="http://schemas.microsoft.com/office/drawing/2014/main" id="{69A39623-527F-9870-5419-C8924A9434CA}"/>
+              </a:ext>
+            </a:extLst>
+          </p:cNvPr>
+          <p:cNvSpPr>
+            <a:spLocks noGrp="1"/>
+          </p:cNvSpPr>
+          <p:nvPr>
+            <p:ph type="title"/>
+          </p:nvPr>
+        </p:nvSpPr>
+        <p:spPr/>
+        <p:txBody>
+          <a:bodyPr/>
+          <a:lstStyle/>
+          <a:p>
+            <a:r>
+              <a:rPr lang="en-US" dirty="0"/>
+              <a:t>Classes and Objects</a:t>
+            </a:r>
+          </a:p>
+        </p:txBody>
+      </p:sp>
+      <p:sp>
+        <p:nvSpPr>
+          <p:cNvPr id="3" name="Content Placeholder 2">
+            <a:extLst>
+              <a:ext uri="{FF2B5EF4-FFF2-40B4-BE49-F238E27FC236}">
+                <a16:creationId xmlns:a16="http://schemas.microsoft.com/office/drawing/2014/main" id="{D58B4E2A-B221-940D-A63F-C080495BCF3C}"/>
+              </a:ext>
+            </a:extLst>
+          </p:cNvPr>
+          <p:cNvSpPr>
+            <a:spLocks noGrp="1"/>
+          </p:cNvSpPr>
+          <p:nvPr>
+            <p:ph idx="1"/>
+          </p:nvPr>
+        </p:nvSpPr>
+        <p:spPr>
+          <a:xfrm>
+            <a:off x="1451579" y="1921566"/>
+            <a:ext cx="9603275" cy="4131916"/>
+          </a:xfrm>
+        </p:spPr>
+        <p:txBody>
+          <a:bodyPr/>
+          <a:lstStyle/>
+          <a:p>
+            <a:r>
+              <a:rPr lang="en-US" dirty="0"/>
+              <a:t>Pretty much everything you use in Python is an object. </a:t>
+            </a:r>
+          </a:p>
+          <a:p>
+            <a:pPr lvl="1"/>
+            <a:r>
+              <a:rPr lang="en-US" dirty="0"/>
+              <a:t>Strings, </a:t>
+            </a:r>
+            <a:r>
+              <a:rPr lang="en-US" dirty="0" err="1"/>
+              <a:t>dataframes</a:t>
+            </a:r>
+            <a:r>
+              <a:rPr lang="en-US" dirty="0"/>
+              <a:t>, integers, </a:t>
+            </a:r>
+            <a:r>
+              <a:rPr lang="en-US" dirty="0" err="1"/>
+              <a:t>etc</a:t>
+            </a:r>
+            <a:r>
+              <a:rPr lang="en-US" dirty="0"/>
+              <a:t>…</a:t>
+            </a:r>
+          </a:p>
+          <a:p>
+            <a:pPr lvl="1"/>
+            <a:r>
+              <a:rPr lang="en-US" dirty="0"/>
+              <a:t>Each variable declaration is (usually) a creation of an object. </a:t>
+            </a:r>
+          </a:p>
+          <a:p>
+            <a:r>
+              <a:rPr lang="en-US" dirty="0"/>
+              <a:t>Objects can be made to do whatever we need, each object has:</a:t>
+            </a:r>
+          </a:p>
+          <a:p>
+            <a:pPr lvl="1"/>
+            <a:r>
+              <a:rPr lang="en-US" dirty="0"/>
+              <a:t>Some things it knows – the data stored in the object. </a:t>
+            </a:r>
+          </a:p>
+          <a:p>
+            <a:pPr lvl="1"/>
+            <a:r>
+              <a:rPr lang="en-US" dirty="0"/>
+              <a:t>Some things it can do – the methods (functions) that can take action. </a:t>
+            </a:r>
+          </a:p>
+          <a:p>
+            <a:r>
+              <a:rPr lang="en-US" dirty="0"/>
+              <a:t>Examples:</a:t>
+            </a:r>
+          </a:p>
+          <a:p>
+            <a:pPr lvl="1"/>
+            <a:r>
+              <a:rPr lang="en-US" dirty="0" err="1"/>
+              <a:t>Dataframe</a:t>
+            </a:r>
+            <a:r>
+              <a:rPr lang="en-US" dirty="0"/>
+              <a:t>: ”things known” – data, “things done” – describe(), info(), </a:t>
+            </a:r>
+            <a:r>
+              <a:rPr lang="en-US" dirty="0" err="1"/>
+              <a:t>etc</a:t>
+            </a:r>
+            <a:r>
+              <a:rPr lang="en-US" dirty="0"/>
+              <a:t>…</a:t>
+            </a:r>
+          </a:p>
+          <a:p>
+            <a:pPr lvl="1"/>
+            <a:r>
+              <a:rPr lang="en-US" dirty="0"/>
+              <a:t>Integer: “Thing known” – data, “things done” – all the operators, </a:t>
+            </a:r>
+            <a:r>
+              <a:rPr lang="en-US" dirty="0" err="1"/>
+              <a:t>etc</a:t>
+            </a:r>
+            <a:r>
+              <a:rPr lang="en-US" dirty="0"/>
+              <a:t>…</a:t>
+            </a:r>
+          </a:p>
+        </p:txBody>
+      </p:sp>
+    </p:spTree>
+    <p:extLst>
+      <p:ext uri="{BB962C8B-B14F-4D97-AF65-F5344CB8AC3E}">
+        <p14:creationId xmlns:p14="http://schemas.microsoft.com/office/powerpoint/2010/main" val="2727267912"/>
+      </p:ext>
+    </p:extLst>
+  </p:cSld>
+  <p:clrMapOvr>
+    <a:masterClrMapping/>
+  </p:clrMapOvr>
+</p:sld>
+</file>
+
+<file path=ppt/slides/slide21.xml><?xml version="1.0" encoding="utf-8"?>
+<p:sld xmlns:a="http://schemas.openxmlformats.org/drawingml/2006/main" xmlns:r="http://schemas.openxmlformats.org/officeDocument/2006/relationships" xmlns:p="http://schemas.openxmlformats.org/presentationml/2006/main">
+  <p:cSld>
+    <p:spTree>
+      <p:nvGrpSpPr>
+        <p:cNvPr id="1" name=""/>
+        <p:cNvGrpSpPr/>
+        <p:nvPr/>
+      </p:nvGrpSpPr>
+      <p:grpSpPr>
+        <a:xfrm>
+          <a:off x="0" y="0"/>
+          <a:ext cx="0" cy="0"/>
+          <a:chOff x="0" y="0"/>
+          <a:chExt cx="0" cy="0"/>
+        </a:xfrm>
+      </p:grpSpPr>
+      <p:sp>
+        <p:nvSpPr>
+          <p:cNvPr id="2" name="Title 1">
+            <a:extLst>
+              <a:ext uri="{FF2B5EF4-FFF2-40B4-BE49-F238E27FC236}">
+                <a16:creationId xmlns:a16="http://schemas.microsoft.com/office/drawing/2014/main" id="{D21D85F9-7601-B74E-3FE9-8D41DF070F3C}"/>
+              </a:ext>
+            </a:extLst>
+          </p:cNvPr>
+          <p:cNvSpPr>
+            <a:spLocks noGrp="1"/>
+          </p:cNvSpPr>
+          <p:nvPr>
+            <p:ph type="title"/>
+          </p:nvPr>
+        </p:nvSpPr>
+        <p:spPr/>
+        <p:txBody>
+          <a:bodyPr/>
+          <a:lstStyle/>
+          <a:p>
+            <a:r>
+              <a:rPr lang="en-US" dirty="0"/>
+              <a:t>Custom Objects (classes)</a:t>
+            </a:r>
+          </a:p>
+        </p:txBody>
+      </p:sp>
+      <p:sp>
+        <p:nvSpPr>
+          <p:cNvPr id="3" name="Content Placeholder 2">
+            <a:extLst>
+              <a:ext uri="{FF2B5EF4-FFF2-40B4-BE49-F238E27FC236}">
+                <a16:creationId xmlns:a16="http://schemas.microsoft.com/office/drawing/2014/main" id="{CCA1E9FE-7152-7C39-1B42-BF4A052B50E1}"/>
+              </a:ext>
+            </a:extLst>
+          </p:cNvPr>
+          <p:cNvSpPr>
+            <a:spLocks noGrp="1"/>
+          </p:cNvSpPr>
+          <p:nvPr>
+            <p:ph idx="1"/>
+          </p:nvPr>
+        </p:nvSpPr>
+        <p:spPr>
+          <a:xfrm>
+            <a:off x="1451579" y="1956097"/>
+            <a:ext cx="9603275" cy="3987503"/>
+          </a:xfrm>
+        </p:spPr>
+        <p:txBody>
+          <a:bodyPr/>
+          <a:lstStyle/>
+          <a:p>
+            <a:r>
+              <a:rPr lang="en-US" dirty="0"/>
+              <a:t>We can create classes that let us use custom objects. </a:t>
+            </a:r>
+          </a:p>
+          <a:p>
+            <a:pPr lvl="1"/>
+            <a:r>
+              <a:rPr lang="en-US" dirty="0"/>
+              <a:t>We can add any other objects to it to store data inside. </a:t>
+            </a:r>
+          </a:p>
+          <a:p>
+            <a:pPr lvl="1"/>
+            <a:r>
+              <a:rPr lang="en-US" dirty="0"/>
+              <a:t>We can create methods (functions) to add functionality. </a:t>
+            </a:r>
+          </a:p>
+          <a:p>
+            <a:r>
+              <a:rPr lang="en-US" dirty="0"/>
+              <a:t>For example – a college registration record. </a:t>
+            </a:r>
+          </a:p>
+          <a:p>
+            <a:pPr lvl="1"/>
+            <a:r>
+              <a:rPr lang="en-US" dirty="0"/>
+              <a:t>Data – student, class, date, grade, status, </a:t>
+            </a:r>
+            <a:r>
+              <a:rPr lang="en-US" dirty="0" err="1"/>
+              <a:t>etc</a:t>
+            </a:r>
+            <a:r>
+              <a:rPr lang="en-US" dirty="0"/>
+              <a:t>…</a:t>
+            </a:r>
+          </a:p>
+          <a:p>
+            <a:pPr lvl="1"/>
+            <a:r>
+              <a:rPr lang="en-US" dirty="0"/>
+              <a:t>Methods – </a:t>
+            </a:r>
+            <a:r>
+              <a:rPr lang="en-US" dirty="0" err="1"/>
+              <a:t>cancelRegistration</a:t>
+            </a:r>
+            <a:r>
+              <a:rPr lang="en-US" dirty="0"/>
+              <a:t>(), print(), </a:t>
+            </a:r>
+            <a:r>
+              <a:rPr lang="en-US" dirty="0" err="1"/>
+              <a:t>changeGrade</a:t>
+            </a:r>
+            <a:r>
+              <a:rPr lang="en-US" dirty="0"/>
+              <a:t>(), </a:t>
+            </a:r>
+            <a:r>
+              <a:rPr lang="en-US" dirty="0" err="1"/>
+              <a:t>changeStatus</a:t>
+            </a:r>
+            <a:r>
+              <a:rPr lang="en-US" dirty="0"/>
+              <a:t>()…</a:t>
+            </a:r>
+          </a:p>
+          <a:p>
+            <a:r>
+              <a:rPr lang="en-US" dirty="0"/>
+              <a:t>Once created we can use them just like anything else. </a:t>
+            </a:r>
+          </a:p>
+          <a:p>
+            <a:pPr lvl="1"/>
+            <a:r>
+              <a:rPr lang="en-US" dirty="0"/>
+              <a:t>Create by calling the constructor, usually in a variable declaration. </a:t>
+            </a:r>
+          </a:p>
+          <a:p>
+            <a:pPr lvl="1"/>
+            <a:r>
+              <a:rPr lang="en-US" dirty="0"/>
+              <a:t>Interact by using functions on those objects – </a:t>
+            </a:r>
+            <a:r>
+              <a:rPr lang="en-US" dirty="0" err="1"/>
+              <a:t>newObject.theNewFunction</a:t>
+            </a:r>
+            <a:r>
+              <a:rPr lang="en-US" dirty="0"/>
+              <a:t>(parameter_1).</a:t>
+            </a:r>
+          </a:p>
+          <a:p>
+            <a:pPr lvl="1"/>
+            <a:endParaRPr lang="en-US" dirty="0"/>
+          </a:p>
+        </p:txBody>
+      </p:sp>
+    </p:spTree>
+    <p:extLst>
+      <p:ext uri="{BB962C8B-B14F-4D97-AF65-F5344CB8AC3E}">
+        <p14:creationId xmlns:p14="http://schemas.microsoft.com/office/powerpoint/2010/main" val="2619415263"/>
+      </p:ext>
+    </p:extLst>
+  </p:cSld>
+  <p:clrMapOvr>
+    <a:masterClrMapping/>
+  </p:clrMapOvr>
+</p:sld>
+</file>
+
+<file path=ppt/slides/slide22.xml><?xml version="1.0" encoding="utf-8"?>
+<p:sld xmlns:a="http://schemas.openxmlformats.org/drawingml/2006/main" xmlns:r="http://schemas.openxmlformats.org/officeDocument/2006/relationships" xmlns:p="http://schemas.openxmlformats.org/presentationml/2006/main">
+  <p:cSld>
+    <p:spTree>
+      <p:nvGrpSpPr>
+        <p:cNvPr id="1" name=""/>
+        <p:cNvGrpSpPr/>
+        <p:nvPr/>
+      </p:nvGrpSpPr>
+      <p:grpSpPr>
+        <a:xfrm>
+          <a:off x="0" y="0"/>
+          <a:ext cx="0" cy="0"/>
+          <a:chOff x="0" y="0"/>
+          <a:chExt cx="0" cy="0"/>
+        </a:xfrm>
+      </p:grpSpPr>
+      <p:sp>
+        <p:nvSpPr>
+          <p:cNvPr id="2" name="Title 1">
+            <a:extLst>
+              <a:ext uri="{FF2B5EF4-FFF2-40B4-BE49-F238E27FC236}">
+                <a16:creationId xmlns:a16="http://schemas.microsoft.com/office/drawing/2014/main" id="{10FA6B79-300D-ABDE-AAC4-F2C91BEE3E7E}"/>
+              </a:ext>
+            </a:extLst>
+          </p:cNvPr>
+          <p:cNvSpPr>
+            <a:spLocks noGrp="1"/>
+          </p:cNvSpPr>
+          <p:nvPr>
+            <p:ph type="title"/>
+          </p:nvPr>
+        </p:nvSpPr>
+        <p:spPr/>
+        <p:txBody>
+          <a:bodyPr/>
+          <a:lstStyle/>
+          <a:p>
+            <a:r>
+              <a:rPr lang="en-US" dirty="0"/>
+              <a:t>Inheritance</a:t>
+            </a:r>
+          </a:p>
+        </p:txBody>
+      </p:sp>
+      <p:sp>
+        <p:nvSpPr>
+          <p:cNvPr id="3" name="Content Placeholder 2">
+            <a:extLst>
+              <a:ext uri="{FF2B5EF4-FFF2-40B4-BE49-F238E27FC236}">
+                <a16:creationId xmlns:a16="http://schemas.microsoft.com/office/drawing/2014/main" id="{E62B541F-B8F9-15D8-BE84-2FB50BA9FE98}"/>
+              </a:ext>
+            </a:extLst>
+          </p:cNvPr>
+          <p:cNvSpPr>
+            <a:spLocks noGrp="1"/>
+          </p:cNvSpPr>
+          <p:nvPr>
+            <p:ph idx="1"/>
+          </p:nvPr>
+        </p:nvSpPr>
+        <p:spPr>
+          <a:xfrm>
+            <a:off x="1451579" y="1934817"/>
+            <a:ext cx="9603275" cy="4118663"/>
+          </a:xfrm>
+        </p:spPr>
+        <p:txBody>
+          <a:bodyPr/>
+          <a:lstStyle/>
+          <a:p>
+            <a:r>
+              <a:rPr lang="en-US" dirty="0"/>
+              <a:t>We have another feature, the one thing that matters in the modern economy, inheritance. </a:t>
+            </a:r>
+          </a:p>
+          <a:p>
+            <a:r>
+              <a:rPr lang="en-US" dirty="0"/>
+              <a:t>Inheritance is a hierarchy with an “is-a” relationship. </a:t>
+            </a:r>
+          </a:p>
+          <a:p>
+            <a:pPr lvl="1"/>
+            <a:r>
+              <a:rPr lang="en-US" dirty="0"/>
+              <a:t>We can define types that share data/methods. </a:t>
+            </a:r>
+          </a:p>
+          <a:p>
+            <a:pPr lvl="1"/>
+            <a:r>
+              <a:rPr lang="en-US" dirty="0"/>
+              <a:t>We can change the different parts as needed. </a:t>
+            </a:r>
+          </a:p>
+          <a:p>
+            <a:pPr lvl="1"/>
+            <a:r>
+              <a:rPr lang="en-US" dirty="0"/>
+              <a:t>We can still access the common stuff directly. </a:t>
+            </a:r>
+          </a:p>
+          <a:p>
+            <a:r>
+              <a:rPr lang="en-US" dirty="0"/>
+              <a:t>Example – a large company with employees.</a:t>
+            </a:r>
+          </a:p>
+          <a:p>
+            <a:pPr lvl="1"/>
+            <a:r>
+              <a:rPr lang="en-US" dirty="0"/>
+              <a:t>Parent class – “Worker”. Common stuff - wage, address, </a:t>
+            </a:r>
+            <a:r>
+              <a:rPr lang="en-US" dirty="0" err="1"/>
+              <a:t>changePay</a:t>
+            </a:r>
+            <a:r>
+              <a:rPr lang="en-US" dirty="0"/>
+              <a:t>, </a:t>
+            </a:r>
+            <a:r>
+              <a:rPr lang="en-US" dirty="0" err="1"/>
+              <a:t>etc</a:t>
+            </a:r>
+            <a:r>
+              <a:rPr lang="en-US" dirty="0"/>
+              <a:t>…</a:t>
+            </a:r>
+          </a:p>
+          <a:p>
+            <a:pPr lvl="1"/>
+            <a:r>
+              <a:rPr lang="en-US" dirty="0"/>
+              <a:t>Children – Full time employee, part time, contractor, temporary. Pay/benefit things change. </a:t>
+            </a:r>
+          </a:p>
+          <a:p>
+            <a:pPr lvl="1"/>
+            <a:r>
+              <a:rPr lang="en-US" dirty="0"/>
+              <a:t>We can leave common stuff in Worker and make specific versions for children. </a:t>
+            </a:r>
+          </a:p>
+        </p:txBody>
+      </p:sp>
+    </p:spTree>
+    <p:extLst>
+      <p:ext uri="{BB962C8B-B14F-4D97-AF65-F5344CB8AC3E}">
+        <p14:creationId xmlns:p14="http://schemas.microsoft.com/office/powerpoint/2010/main" val="2366003626"/>
+      </p:ext>
+    </p:extLst>
+  </p:cSld>
+  <p:clrMapOvr>
+    <a:masterClrMapping/>
+  </p:clrMapOvr>
+</p:sld>
+</file>
+
+<file path=ppt/slides/slide23.xml><?xml version="1.0" encoding="utf-8"?>
+<p:sld xmlns:a="http://schemas.openxmlformats.org/drawingml/2006/main" xmlns:r="http://schemas.openxmlformats.org/officeDocument/2006/relationships" xmlns:p="http://schemas.openxmlformats.org/presentationml/2006/main">
+  <p:cSld>
+    <p:spTree>
+      <p:nvGrpSpPr>
+        <p:cNvPr id="1" name=""/>
+        <p:cNvGrpSpPr/>
+        <p:nvPr/>
+      </p:nvGrpSpPr>
+      <p:grpSpPr>
+        <a:xfrm>
+          <a:off x="0" y="0"/>
+          <a:ext cx="0" cy="0"/>
+          <a:chOff x="0" y="0"/>
+          <a:chExt cx="0" cy="0"/>
+        </a:xfrm>
+      </p:grpSpPr>
+      <p:sp>
+        <p:nvSpPr>
+          <p:cNvPr id="2" name="Title 1">
+            <a:extLst>
+              <a:ext uri="{FF2B5EF4-FFF2-40B4-BE49-F238E27FC236}">
+                <a16:creationId xmlns:a16="http://schemas.microsoft.com/office/drawing/2014/main" id="{E7E59093-B8A2-939C-22E7-540BB26E387E}"/>
+              </a:ext>
+            </a:extLst>
+          </p:cNvPr>
+          <p:cNvSpPr>
+            <a:spLocks noGrp="1"/>
+          </p:cNvSpPr>
+          <p:nvPr>
+            <p:ph type="title"/>
+          </p:nvPr>
+        </p:nvSpPr>
+        <p:spPr>
+          <a:xfrm>
+            <a:off x="7356969" y="804519"/>
+            <a:ext cx="3697885" cy="1049235"/>
+          </a:xfrm>
+        </p:spPr>
+        <p:txBody>
+          <a:bodyPr/>
+          <a:lstStyle/>
+          <a:p>
+            <a:r>
+              <a:rPr lang="en-US" dirty="0"/>
+              <a:t>Simple example</a:t>
+            </a:r>
+          </a:p>
+        </p:txBody>
+      </p:sp>
+      <p:sp>
+        <p:nvSpPr>
+          <p:cNvPr id="3" name="Content Placeholder 2">
+            <a:extLst>
+              <a:ext uri="{FF2B5EF4-FFF2-40B4-BE49-F238E27FC236}">
+                <a16:creationId xmlns:a16="http://schemas.microsoft.com/office/drawing/2014/main" id="{14CD2078-7D52-E760-F8BA-FE9515667799}"/>
+              </a:ext>
+            </a:extLst>
+          </p:cNvPr>
+          <p:cNvSpPr>
+            <a:spLocks noGrp="1"/>
+          </p:cNvSpPr>
+          <p:nvPr>
+            <p:ph idx="1"/>
+          </p:nvPr>
+        </p:nvSpPr>
+        <p:spPr>
+          <a:xfrm>
+            <a:off x="7356969" y="1914940"/>
+            <a:ext cx="4662753" cy="4138542"/>
+          </a:xfrm>
+        </p:spPr>
+        <p:txBody>
+          <a:bodyPr/>
+          <a:lstStyle/>
+          <a:p>
+            <a:r>
+              <a:rPr lang="en-US" dirty="0"/>
+              <a:t>This is s simple example. </a:t>
+            </a:r>
+          </a:p>
+          <a:p>
+            <a:pPr lvl="1"/>
+            <a:r>
+              <a:rPr lang="en-US" dirty="0"/>
+              <a:t>Ignore the green part. </a:t>
+            </a:r>
+          </a:p>
+          <a:p>
+            <a:r>
+              <a:rPr lang="en-US" dirty="0"/>
+              <a:t>An employee is the parent. </a:t>
+            </a:r>
+          </a:p>
+          <a:p>
+            <a:pPr lvl="1"/>
+            <a:r>
+              <a:rPr lang="en-US" dirty="0"/>
+              <a:t>Employees all have names and ID. </a:t>
+            </a:r>
+          </a:p>
+          <a:p>
+            <a:r>
+              <a:rPr lang="en-US" dirty="0"/>
+              <a:t>All employees need pay calculated. </a:t>
+            </a:r>
+          </a:p>
+          <a:p>
+            <a:pPr lvl="1"/>
+            <a:r>
+              <a:rPr lang="en-US" dirty="0"/>
+              <a:t>Each child has a separate method. </a:t>
+            </a:r>
+          </a:p>
+          <a:p>
+            <a:pPr lvl="1"/>
+            <a:r>
+              <a:rPr lang="en-US" dirty="0"/>
+              <a:t>When told to “calc pay” each does it. </a:t>
+            </a:r>
+          </a:p>
+          <a:p>
+            <a:pPr lvl="1"/>
+            <a:r>
+              <a:rPr lang="en-US" dirty="0"/>
+              <a:t>A loop could “calc pay” for all employees, each ’knows’ how to do it.</a:t>
+            </a:r>
+          </a:p>
+        </p:txBody>
+      </p:sp>
+      <p:pic>
+        <p:nvPicPr>
+          <p:cNvPr id="1026" name="Picture 2" descr="Inheritance and Composition: A Python OOP Guide – Real Python">
+            <a:extLst>
+              <a:ext uri="{FF2B5EF4-FFF2-40B4-BE49-F238E27FC236}">
+                <a16:creationId xmlns:a16="http://schemas.microsoft.com/office/drawing/2014/main" id="{9804C9A4-330C-0C23-C912-27DAE6B005FF}"/>
+              </a:ext>
+            </a:extLst>
+          </p:cNvPr>
+          <p:cNvPicPr>
+            <a:picLocks noChangeAspect="1" noChangeArrowheads="1"/>
+          </p:cNvPicPr>
+          <p:nvPr/>
+        </p:nvPicPr>
+        <p:blipFill>
+          <a:blip r:embed="rId2">
+            <a:extLst>
+              <a:ext uri="{28A0092B-C50C-407E-A947-70E740481C1C}">
+                <a14:useLocalDpi xmlns:a14="http://schemas.microsoft.com/office/drawing/2010/main" val="0"/>
+              </a:ext>
+            </a:extLst>
+          </a:blip>
+          <a:srcRect/>
+          <a:stretch>
+            <a:fillRect/>
+          </a:stretch>
+        </p:blipFill>
+        <p:spPr bwMode="auto">
+          <a:xfrm>
+            <a:off x="121144" y="0"/>
+            <a:ext cx="7235825" cy="6858000"/>
+          </a:xfrm>
+          <a:prstGeom prst="rect">
+            <a:avLst/>
+          </a:prstGeom>
+          <a:noFill/>
+          <a:extLst>
+            <a:ext uri="{909E8E84-426E-40DD-AFC4-6F175D3DCCD1}">
+              <a14:hiddenFill xmlns:a14="http://schemas.microsoft.com/office/drawing/2010/main">
+                <a:solidFill>
+                  <a:srgbClr val="FFFFFF"/>
+                </a:solidFill>
+              </a14:hiddenFill>
+            </a:ext>
+          </a:extLst>
+        </p:spPr>
+      </p:pic>
+    </p:spTree>
+    <p:extLst>
+      <p:ext uri="{BB962C8B-B14F-4D97-AF65-F5344CB8AC3E}">
+        <p14:creationId xmlns:p14="http://schemas.microsoft.com/office/powerpoint/2010/main" val="1476462590"/>
+      </p:ext>
+    </p:extLst>
+  </p:cSld>
+  <p:clrMapOvr>
+    <a:masterClrMapping/>
+  </p:clrMapOvr>
+</p:sld>
+</file>
+
+<file path=ppt/slides/slide24.xml><?xml version="1.0" encoding="utf-8"?>
+<p:sld xmlns:a="http://schemas.openxmlformats.org/drawingml/2006/main" xmlns:r="http://schemas.openxmlformats.org/officeDocument/2006/relationships" xmlns:p="http://schemas.openxmlformats.org/presentationml/2006/main">
+  <p:cSld>
+    <p:spTree>
+      <p:nvGrpSpPr>
+        <p:cNvPr id="1" name=""/>
+        <p:cNvGrpSpPr/>
+        <p:nvPr/>
+      </p:nvGrpSpPr>
+      <p:grpSpPr>
+        <a:xfrm>
+          <a:off x="0" y="0"/>
+          <a:ext cx="0" cy="0"/>
+          <a:chOff x="0" y="0"/>
+          <a:chExt cx="0" cy="0"/>
+        </a:xfrm>
+      </p:grpSpPr>
+      <p:sp>
+        <p:nvSpPr>
+          <p:cNvPr id="2" name="Title 1">
+            <a:extLst>
+              <a:ext uri="{FF2B5EF4-FFF2-40B4-BE49-F238E27FC236}">
+                <a16:creationId xmlns:a16="http://schemas.microsoft.com/office/drawing/2014/main" id="{966F776B-DB5A-D724-6587-80DDED57ACFE}"/>
+              </a:ext>
+            </a:extLst>
+          </p:cNvPr>
+          <p:cNvSpPr>
+            <a:spLocks noGrp="1"/>
+          </p:cNvSpPr>
+          <p:nvPr>
+            <p:ph type="title"/>
+          </p:nvPr>
+        </p:nvSpPr>
+        <p:spPr/>
+        <p:txBody>
+          <a:bodyPr/>
+          <a:lstStyle/>
+          <a:p>
+            <a:r>
+              <a:rPr lang="en-US" dirty="0"/>
+              <a:t>In the Book</a:t>
+            </a:r>
+          </a:p>
+        </p:txBody>
+      </p:sp>
+      <p:sp>
+        <p:nvSpPr>
+          <p:cNvPr id="3" name="Content Placeholder 2">
+            <a:extLst>
+              <a:ext uri="{FF2B5EF4-FFF2-40B4-BE49-F238E27FC236}">
+                <a16:creationId xmlns:a16="http://schemas.microsoft.com/office/drawing/2014/main" id="{89B4D29D-B4C1-349F-E12B-5FFF24C75AAE}"/>
+              </a:ext>
+            </a:extLst>
+          </p:cNvPr>
+          <p:cNvSpPr>
+            <a:spLocks noGrp="1"/>
+          </p:cNvSpPr>
+          <p:nvPr>
+            <p:ph idx="1"/>
+          </p:nvPr>
+        </p:nvSpPr>
+        <p:spPr>
+          <a:xfrm>
+            <a:off x="1451579" y="1853754"/>
+            <a:ext cx="9603275" cy="4199727"/>
+          </a:xfrm>
+        </p:spPr>
+        <p:txBody>
+          <a:bodyPr/>
+          <a:lstStyle/>
+          <a:p>
+            <a:r>
+              <a:rPr lang="en-US" dirty="0"/>
+              <a:t>The simulation mechanics are mostly identical. </a:t>
+            </a:r>
+          </a:p>
+          <a:p>
+            <a:r>
+              <a:rPr lang="en-US" dirty="0"/>
+              <a:t>The details of the probability of each round change. </a:t>
+            </a:r>
+          </a:p>
+          <a:p>
+            <a:r>
+              <a:rPr lang="en-US" dirty="0"/>
+              <a:t>The book example shows a simulation inheritance setup:</a:t>
+            </a:r>
+          </a:p>
+          <a:p>
+            <a:pPr lvl="1"/>
+            <a:r>
+              <a:rPr lang="en-US" dirty="0"/>
+              <a:t>We need to redo the testing and tabulating each time. </a:t>
+            </a:r>
+          </a:p>
+          <a:p>
+            <a:pPr lvl="1"/>
+            <a:r>
+              <a:rPr lang="en-US" dirty="0"/>
+              <a:t>The way ‘events’ (the values) are generated changes (different models). </a:t>
+            </a:r>
+          </a:p>
+          <a:p>
+            <a:pPr lvl="1"/>
+            <a:r>
+              <a:rPr lang="en-US" dirty="0"/>
+              <a:t>As long as we can provide the probability part, the rest can happen without change. </a:t>
+            </a:r>
+          </a:p>
+          <a:p>
+            <a:r>
+              <a:rPr lang="en-US" dirty="0"/>
+              <a:t>The parent is a generic simulator harness. </a:t>
+            </a:r>
+          </a:p>
+          <a:p>
+            <a:r>
+              <a:rPr lang="en-US" dirty="0"/>
+              <a:t>The children change the specifics for that scenario. </a:t>
+            </a:r>
+          </a:p>
+          <a:p>
+            <a:r>
+              <a:rPr lang="en-US" dirty="0"/>
+              <a:t>This can be repurposed to almost any application. </a:t>
+            </a:r>
+          </a:p>
+        </p:txBody>
+      </p:sp>
+    </p:spTree>
+    <p:extLst>
+      <p:ext uri="{BB962C8B-B14F-4D97-AF65-F5344CB8AC3E}">
+        <p14:creationId xmlns:p14="http://schemas.microsoft.com/office/powerpoint/2010/main" val="1349325770"/>
+      </p:ext>
+    </p:extLst>
+  </p:cSld>
+  <p:clrMapOvr>
+    <a:masterClrMapping/>
+  </p:clrMapOvr>
+</p:sld>
+</file>
+
+<file path=ppt/slides/slide25.xml><?xml version="1.0" encoding="utf-8"?>
+<p:sld xmlns:a="http://schemas.openxmlformats.org/drawingml/2006/main" xmlns:r="http://schemas.openxmlformats.org/officeDocument/2006/relationships" xmlns:p="http://schemas.openxmlformats.org/presentationml/2006/main">
+  <p:cSld>
+    <p:spTree>
+      <p:nvGrpSpPr>
+        <p:cNvPr id="1" name=""/>
+        <p:cNvGrpSpPr/>
+        <p:nvPr/>
+      </p:nvGrpSpPr>
+      <p:grpSpPr>
+        <a:xfrm>
+          <a:off x="0" y="0"/>
+          <a:ext cx="0" cy="0"/>
+          <a:chOff x="0" y="0"/>
+          <a:chExt cx="0" cy="0"/>
+        </a:xfrm>
+      </p:grpSpPr>
+      <p:sp>
+        <p:nvSpPr>
+          <p:cNvPr id="2" name="Title 1">
+            <a:extLst>
+              <a:ext uri="{FF2B5EF4-FFF2-40B4-BE49-F238E27FC236}">
+                <a16:creationId xmlns:a16="http://schemas.microsoft.com/office/drawing/2014/main" id="{83A886D7-A2E6-F241-1E5D-C97F6B6CA403}"/>
+              </a:ext>
+            </a:extLst>
+          </p:cNvPr>
+          <p:cNvSpPr>
+            <a:spLocks noGrp="1"/>
+          </p:cNvSpPr>
+          <p:nvPr>
+            <p:ph type="title"/>
+          </p:nvPr>
+        </p:nvSpPr>
+        <p:spPr/>
+        <p:txBody>
+          <a:bodyPr/>
+          <a:lstStyle/>
+          <a:p>
+            <a:r>
+              <a:rPr lang="en-US" dirty="0"/>
+              <a:t>Using the Classes</a:t>
+            </a:r>
+          </a:p>
+        </p:txBody>
+      </p:sp>
+      <p:sp>
+        <p:nvSpPr>
+          <p:cNvPr id="3" name="Content Placeholder 2">
+            <a:extLst>
+              <a:ext uri="{FF2B5EF4-FFF2-40B4-BE49-F238E27FC236}">
+                <a16:creationId xmlns:a16="http://schemas.microsoft.com/office/drawing/2014/main" id="{CB5ABC3B-DC40-A260-8E81-147B3D0A70FB}"/>
+              </a:ext>
+            </a:extLst>
+          </p:cNvPr>
+          <p:cNvSpPr>
+            <a:spLocks noGrp="1"/>
+          </p:cNvSpPr>
+          <p:nvPr>
+            <p:ph idx="1"/>
+          </p:nvPr>
+        </p:nvSpPr>
+        <p:spPr>
+          <a:xfrm>
+            <a:off x="1451579" y="1853754"/>
+            <a:ext cx="9603275" cy="4199727"/>
+          </a:xfrm>
+        </p:spPr>
+        <p:txBody>
+          <a:bodyPr/>
+          <a:lstStyle/>
+          <a:p>
+            <a:r>
+              <a:rPr lang="en-US" dirty="0"/>
+              <a:t>We use and take advantage of this all the time. </a:t>
+            </a:r>
+          </a:p>
+          <a:p>
+            <a:pPr lvl="1"/>
+            <a:r>
+              <a:rPr lang="en-US" dirty="0"/>
+              <a:t>Shared functionality – the parent can provide data/functions that are shared. </a:t>
+            </a:r>
+          </a:p>
+          <a:p>
+            <a:pPr lvl="1"/>
+            <a:r>
+              <a:rPr lang="en-US" dirty="0"/>
+              <a:t>Different implementations – each child can implement the same functionality differently. </a:t>
+            </a:r>
+          </a:p>
+          <a:p>
+            <a:r>
+              <a:rPr lang="en-US" dirty="0"/>
+              <a:t>Interchangeability:</a:t>
+            </a:r>
+          </a:p>
+          <a:p>
+            <a:pPr lvl="1"/>
+            <a:r>
+              <a:rPr lang="en-US" dirty="0"/>
+              <a:t>As long as one object can do what is asked of it, it works. </a:t>
+            </a:r>
+          </a:p>
+          <a:p>
+            <a:pPr lvl="1"/>
+            <a:r>
+              <a:rPr lang="en-US" dirty="0"/>
+              <a:t>We can create new objects that work differently, as long as we don’t break other stuff.</a:t>
+            </a:r>
+          </a:p>
+          <a:p>
+            <a:r>
+              <a:rPr lang="en-US" dirty="0"/>
+              <a:t>When we do basic data processing, we can feed most functions data as:</a:t>
+            </a:r>
+          </a:p>
+          <a:p>
+            <a:pPr lvl="1"/>
+            <a:r>
+              <a:rPr lang="en-US" dirty="0" err="1"/>
+              <a:t>Dataframe</a:t>
+            </a:r>
+            <a:r>
+              <a:rPr lang="en-US" dirty="0"/>
+              <a:t>, list, array, series, </a:t>
+            </a:r>
+            <a:r>
+              <a:rPr lang="en-US" dirty="0" err="1"/>
+              <a:t>etc</a:t>
+            </a:r>
+            <a:r>
+              <a:rPr lang="en-US" dirty="0"/>
+              <a:t>…</a:t>
+            </a:r>
+          </a:p>
+          <a:p>
+            <a:pPr lvl="1"/>
+            <a:r>
+              <a:rPr lang="en-US" dirty="0"/>
+              <a:t>All of these can do “storage container” stuff, so we can usually swap them out for each other. </a:t>
+            </a:r>
+          </a:p>
+        </p:txBody>
+      </p:sp>
+    </p:spTree>
+    <p:extLst>
+      <p:ext uri="{BB962C8B-B14F-4D97-AF65-F5344CB8AC3E}">
+        <p14:creationId xmlns:p14="http://schemas.microsoft.com/office/powerpoint/2010/main" val="1354568557"/>
+      </p:ext>
+    </p:extLst>
+  </p:cSld>
+  <p:clrMapOvr>
+    <a:masterClrMapping/>
+  </p:clrMapOvr>
+</p:sld>
+</file>
+
+<file path=ppt/slides/slide26.xml><?xml version="1.0" encoding="utf-8"?>
+<p:sld xmlns:a="http://schemas.openxmlformats.org/drawingml/2006/main" xmlns:r="http://schemas.openxmlformats.org/officeDocument/2006/relationships" xmlns:p="http://schemas.openxmlformats.org/presentationml/2006/main">
+  <p:cSld>
+    <p:spTree>
+      <p:nvGrpSpPr>
+        <p:cNvPr id="1" name=""/>
+        <p:cNvGrpSpPr/>
+        <p:nvPr/>
+      </p:nvGrpSpPr>
+      <p:grpSpPr>
+        <a:xfrm>
+          <a:off x="0" y="0"/>
+          <a:ext cx="0" cy="0"/>
+          <a:chOff x="0" y="0"/>
+          <a:chExt cx="0" cy="0"/>
+        </a:xfrm>
+      </p:grpSpPr>
+      <p:sp>
+        <p:nvSpPr>
+          <p:cNvPr id="2" name="Title 1">
+            <a:extLst>
+              <a:ext uri="{FF2B5EF4-FFF2-40B4-BE49-F238E27FC236}">
+                <a16:creationId xmlns:a16="http://schemas.microsoft.com/office/drawing/2014/main" id="{A1E5E592-9385-36D1-F5FE-48A55C04A36E}"/>
+              </a:ext>
+            </a:extLst>
+          </p:cNvPr>
+          <p:cNvSpPr>
+            <a:spLocks noGrp="1"/>
+          </p:cNvSpPr>
+          <p:nvPr>
+            <p:ph type="title"/>
+          </p:nvPr>
+        </p:nvSpPr>
+        <p:spPr/>
+        <p:txBody>
+          <a:bodyPr/>
+          <a:lstStyle/>
+          <a:p>
+            <a:r>
+              <a:rPr lang="en-US" dirty="0"/>
+              <a:t>Hypothesis Testing throwback</a:t>
+            </a:r>
+          </a:p>
+        </p:txBody>
+      </p:sp>
+      <p:sp>
+        <p:nvSpPr>
+          <p:cNvPr id="3" name="Content Placeholder 2">
+            <a:extLst>
+              <a:ext uri="{FF2B5EF4-FFF2-40B4-BE49-F238E27FC236}">
+                <a16:creationId xmlns:a16="http://schemas.microsoft.com/office/drawing/2014/main" id="{79F7E6CF-375C-F1A6-A28E-3B33B4F16390}"/>
+              </a:ext>
+            </a:extLst>
+          </p:cNvPr>
+          <p:cNvSpPr>
+            <a:spLocks noGrp="1"/>
+          </p:cNvSpPr>
+          <p:nvPr>
+            <p:ph idx="1"/>
+          </p:nvPr>
+        </p:nvSpPr>
+        <p:spPr/>
+        <p:txBody>
+          <a:bodyPr/>
+          <a:lstStyle/>
+          <a:p>
+            <a:r>
+              <a:rPr lang="en-US" dirty="0"/>
+              <a:t>Our simulation based hypothesis testing is very flexible but requires a computer. </a:t>
+            </a:r>
+          </a:p>
+          <a:p>
+            <a:r>
+              <a:rPr lang="en-US" dirty="0"/>
+              <a:t>Hypothesis tests are older and can work computer free. </a:t>
+            </a:r>
+          </a:p>
+          <a:p>
+            <a:pPr lvl="1"/>
+            <a:r>
+              <a:rPr lang="en-US" dirty="0"/>
+              <a:t>There isn’t the generic framework that the simulation offers, only specific tests. </a:t>
+            </a:r>
+          </a:p>
+          <a:p>
+            <a:pPr lvl="1"/>
+            <a:r>
+              <a:rPr lang="en-US" dirty="0"/>
+              <a:t>Tests combine parametric assumptions with data to allow calculations. </a:t>
+            </a:r>
+          </a:p>
+          <a:p>
+            <a:pPr lvl="1"/>
+            <a:r>
+              <a:rPr lang="en-US" dirty="0"/>
+              <a:t>In classical stats, you’d do this since you can’t simulate. </a:t>
+            </a:r>
+          </a:p>
+          <a:p>
+            <a:pPr lvl="1"/>
+            <a:r>
+              <a:rPr lang="en-US" dirty="0"/>
+              <a:t>We’ll look at next time. </a:t>
+            </a:r>
+          </a:p>
+        </p:txBody>
+      </p:sp>
+    </p:spTree>
+    <p:extLst>
+      <p:ext uri="{BB962C8B-B14F-4D97-AF65-F5344CB8AC3E}">
+        <p14:creationId xmlns:p14="http://schemas.microsoft.com/office/powerpoint/2010/main" val="2886691532"/>
+      </p:ext>
+    </p:extLst>
+  </p:cSld>
+  <p:clrMapOvr>
+    <a:masterClrMapping/>
+  </p:clrMapOvr>
+</p:sld>
+</file>
+
+<file path=ppt/slides/slide27.xml><?xml version="1.0" encoding="utf-8"?>
+<p:sld xmlns:a="http://schemas.openxmlformats.org/drawingml/2006/main" xmlns:r="http://schemas.openxmlformats.org/officeDocument/2006/relationships" xmlns:p="http://schemas.openxmlformats.org/presentationml/2006/main" show="0">
+  <p:cSld>
+    <p:spTree>
+      <p:nvGrpSpPr>
+        <p:cNvPr id="1" name=""/>
+        <p:cNvGrpSpPr/>
+        <p:nvPr/>
+      </p:nvGrpSpPr>
+      <p:grpSpPr>
+        <a:xfrm>
+          <a:off x="0" y="0"/>
+          <a:ext cx="0" cy="0"/>
+          <a:chOff x="0" y="0"/>
+          <a:chExt cx="0" cy="0"/>
+        </a:xfrm>
+      </p:grpSpPr>
+      <p:sp>
+        <p:nvSpPr>
+          <p:cNvPr id="2" name="Title 1">
+            <a:extLst>
+              <a:ext uri="{FF2B5EF4-FFF2-40B4-BE49-F238E27FC236}">
+                <a16:creationId xmlns:a16="http://schemas.microsoft.com/office/drawing/2014/main" id="{0A8CA671-6D08-E2F0-B208-9F70708BCE28}"/>
+              </a:ext>
+            </a:extLst>
+          </p:cNvPr>
+          <p:cNvSpPr>
+            <a:spLocks noGrp="1"/>
+          </p:cNvSpPr>
+          <p:nvPr>
+            <p:ph type="title"/>
+          </p:nvPr>
+        </p:nvSpPr>
+        <p:spPr/>
+        <p:txBody>
+          <a:bodyPr/>
+          <a:lstStyle/>
+          <a:p>
+            <a:r>
+              <a:rPr lang="en-US" dirty="0" err="1"/>
+              <a:t>Workin</a:t>
+            </a:r>
+            <a:r>
+              <a:rPr lang="en-US" dirty="0"/>
+              <a:t>’ on the ‘P’</a:t>
+            </a:r>
+          </a:p>
+        </p:txBody>
+      </p:sp>
+      <p:sp>
+        <p:nvSpPr>
+          <p:cNvPr id="3" name="Content Placeholder 2">
+            <a:extLst>
+              <a:ext uri="{FF2B5EF4-FFF2-40B4-BE49-F238E27FC236}">
+                <a16:creationId xmlns:a16="http://schemas.microsoft.com/office/drawing/2014/main" id="{E84FA36B-2D34-B394-C504-E6FC012C111A}"/>
+              </a:ext>
+            </a:extLst>
+          </p:cNvPr>
+          <p:cNvSpPr>
+            <a:spLocks noGrp="1"/>
+          </p:cNvSpPr>
+          <p:nvPr>
+            <p:ph idx="1"/>
+          </p:nvPr>
+        </p:nvSpPr>
+        <p:spPr>
+          <a:xfrm>
+            <a:off x="1451579" y="2015732"/>
+            <a:ext cx="9603275" cy="4037749"/>
+          </a:xfrm>
+        </p:spPr>
+        <p:txBody>
+          <a:bodyPr/>
+          <a:lstStyle/>
+          <a:p>
+            <a:r>
+              <a:rPr lang="en-US" dirty="0"/>
+              <a:t>If you’ve ever seen/interacted with some sort of clinical trial you’ve seen this. </a:t>
+            </a:r>
+          </a:p>
+          <a:p>
+            <a:pPr lvl="1"/>
+            <a:r>
+              <a:rPr lang="en-US" dirty="0"/>
+              <a:t>We have one group that got a medical treatment. </a:t>
+            </a:r>
+          </a:p>
+          <a:p>
+            <a:pPr lvl="1"/>
+            <a:r>
+              <a:rPr lang="en-US" dirty="0"/>
+              <a:t>We have one group that got a placebo. </a:t>
+            </a:r>
+          </a:p>
+          <a:p>
+            <a:pPr lvl="1"/>
+            <a:r>
+              <a:rPr lang="en-US" dirty="0"/>
+              <a:t>Is the improvement in life expectancy/quality/symptoms real?</a:t>
+            </a:r>
+          </a:p>
+          <a:p>
+            <a:r>
+              <a:rPr lang="en-US" dirty="0"/>
+              <a:t>Observing differences with samples (many values) isn’t straightforward. </a:t>
+            </a:r>
+          </a:p>
+          <a:p>
+            <a:pPr lvl="1"/>
+            <a:r>
+              <a:rPr lang="en-US" dirty="0"/>
+              <a:t>We always have some variation in values, even between ‘equal’ groups. </a:t>
+            </a:r>
+          </a:p>
+          <a:p>
+            <a:r>
+              <a:rPr lang="en-US" dirty="0"/>
+              <a:t>This is why grad school students need stats. </a:t>
+            </a:r>
+          </a:p>
+        </p:txBody>
+      </p:sp>
+    </p:spTree>
+    <p:extLst>
+      <p:ext uri="{BB962C8B-B14F-4D97-AF65-F5344CB8AC3E}">
+        <p14:creationId xmlns:p14="http://schemas.microsoft.com/office/powerpoint/2010/main" val="2089667408"/>
+      </p:ext>
+    </p:extLst>
+  </p:cSld>
+  <p:clrMapOvr>
+    <a:masterClrMapping/>
+  </p:clrMapOvr>
+</p:sld>
+</file>
+
+<file path=ppt/slides/slide28.xml><?xml version="1.0" encoding="utf-8"?>
+<p:sld xmlns:a="http://schemas.openxmlformats.org/drawingml/2006/main" xmlns:r="http://schemas.openxmlformats.org/officeDocument/2006/relationships" xmlns:p="http://schemas.openxmlformats.org/presentationml/2006/main">
+  <p:cSld>
+    <p:spTree>
+      <p:nvGrpSpPr>
+        <p:cNvPr id="1" name=""/>
+        <p:cNvGrpSpPr/>
+        <p:nvPr/>
+      </p:nvGrpSpPr>
+      <p:grpSpPr>
+        <a:xfrm>
+          <a:off x="0" y="0"/>
+          <a:ext cx="0" cy="0"/>
+          <a:chOff x="0" y="0"/>
+          <a:chExt cx="0" cy="0"/>
+        </a:xfrm>
+      </p:grpSpPr>
+      <p:sp>
+        <p:nvSpPr>
+          <p:cNvPr id="2" name="Title 1">
+            <a:extLst>
+              <a:ext uri="{FF2B5EF4-FFF2-40B4-BE49-F238E27FC236}">
+                <a16:creationId xmlns:a16="http://schemas.microsoft.com/office/drawing/2014/main" id="{C50F3542-1AAB-334C-906A-F8224315790B}"/>
+              </a:ext>
+            </a:extLst>
+          </p:cNvPr>
+          <p:cNvSpPr>
+            <a:spLocks noGrp="1"/>
+          </p:cNvSpPr>
+          <p:nvPr>
+            <p:ph type="title"/>
+          </p:nvPr>
+        </p:nvSpPr>
+        <p:spPr/>
+        <p:txBody>
+          <a:bodyPr/>
+          <a:lstStyle/>
+          <a:p>
+            <a:r>
+              <a:rPr lang="en-US" dirty="0"/>
+              <a:t>Hypothesis Tests </a:t>
+            </a:r>
+          </a:p>
+        </p:txBody>
+      </p:sp>
+      <p:sp>
+        <p:nvSpPr>
+          <p:cNvPr id="3" name="Content Placeholder 2">
+            <a:extLst>
+              <a:ext uri="{FF2B5EF4-FFF2-40B4-BE49-F238E27FC236}">
+                <a16:creationId xmlns:a16="http://schemas.microsoft.com/office/drawing/2014/main" id="{A73972D4-87BF-8740-8AD4-96E77B0CD030}"/>
+              </a:ext>
+            </a:extLst>
+          </p:cNvPr>
+          <p:cNvSpPr>
+            <a:spLocks noGrp="1"/>
+          </p:cNvSpPr>
+          <p:nvPr>
+            <p:ph idx="1"/>
+          </p:nvPr>
+        </p:nvSpPr>
+        <p:spPr>
+          <a:xfrm>
+            <a:off x="1137146" y="1853754"/>
+            <a:ext cx="10455413" cy="4303206"/>
+          </a:xfrm>
+        </p:spPr>
+        <p:txBody>
+          <a:bodyPr>
+            <a:normAutofit/>
+          </a:bodyPr>
+          <a:lstStyle/>
+          <a:p>
+            <a:r>
+              <a:rPr lang="en-US" dirty="0"/>
+              <a:t>Notice a difference (effect) in data, test to see if is “real”, or due to variation. </a:t>
+            </a:r>
+          </a:p>
+          <a:p>
+            <a:pPr lvl="1"/>
+            <a:r>
+              <a:rPr lang="en-US" dirty="0"/>
+              <a:t>E.g. these people live longer. </a:t>
+            </a:r>
+          </a:p>
+          <a:p>
+            <a:r>
+              <a:rPr lang="en-US" dirty="0"/>
+              <a:t>Real can be highly situation dependent:</a:t>
+            </a:r>
+          </a:p>
+          <a:p>
+            <a:pPr lvl="1"/>
+            <a:r>
+              <a:rPr lang="en-US" dirty="0"/>
+              <a:t>Different situations yield different criteria. </a:t>
+            </a:r>
+          </a:p>
+          <a:p>
+            <a:r>
+              <a:rPr lang="en-US" dirty="0"/>
+              <a:t>Problem – there’s no definitive way to go from probabilities and results of samples to definitive declarations for an entire population. We are always making an inference, not showing a law. </a:t>
+            </a:r>
+          </a:p>
+          <a:p>
+            <a:r>
+              <a:rPr lang="en-US" dirty="0"/>
+              <a:t>Reliable conclusions will require domain knowledge, and likely more than one calc. </a:t>
+            </a:r>
+          </a:p>
+          <a:p>
+            <a:r>
+              <a:rPr lang="en-US" dirty="0"/>
+              <a:t>All of these things are “ways to demonstrate a difference”, not absolute rules. </a:t>
+            </a:r>
+          </a:p>
+          <a:p>
+            <a:r>
+              <a:rPr lang="en-US" dirty="0"/>
+              <a:t>Similar to predictions later – we are stating a conclusion, and offering evidence of its truth. </a:t>
+            </a:r>
+          </a:p>
+        </p:txBody>
+      </p:sp>
+    </p:spTree>
+    <p:extLst>
+      <p:ext uri="{BB962C8B-B14F-4D97-AF65-F5344CB8AC3E}">
+        <p14:creationId xmlns:p14="http://schemas.microsoft.com/office/powerpoint/2010/main" val="2641840238"/>
+      </p:ext>
+    </p:extLst>
+  </p:cSld>
+  <p:clrMapOvr>
+    <a:masterClrMapping/>
+  </p:clrMapOvr>
+</p:sld>
+</file>
+
+<file path=ppt/slides/slide29.xml><?xml version="1.0" encoding="utf-8"?>
+<p:sld xmlns:a="http://schemas.openxmlformats.org/drawingml/2006/main" xmlns:r="http://schemas.openxmlformats.org/officeDocument/2006/relationships" xmlns:p="http://schemas.openxmlformats.org/presentationml/2006/main">
+  <p:cSld>
+    <p:spTree>
+      <p:nvGrpSpPr>
+        <p:cNvPr id="1" name="">
+          <a:extLst>
+            <a:ext uri="{FF2B5EF4-FFF2-40B4-BE49-F238E27FC236}">
+              <a16:creationId xmlns:a16="http://schemas.microsoft.com/office/drawing/2014/main" id="{6EDE149D-D981-92AD-7C3A-6F44034098BB}"/>
+            </a:ext>
+          </a:extLst>
+        </p:cNvPr>
+        <p:cNvGrpSpPr/>
+        <p:nvPr/>
+      </p:nvGrpSpPr>
+      <p:grpSpPr>
+        <a:xfrm>
+          <a:off x="0" y="0"/>
+          <a:ext cx="0" cy="0"/>
+          <a:chOff x="0" y="0"/>
+          <a:chExt cx="0" cy="0"/>
+        </a:xfrm>
+      </p:grpSpPr>
+      <p:sp>
+        <p:nvSpPr>
+          <p:cNvPr id="2" name="Title 1">
+            <a:extLst>
+              <a:ext uri="{FF2B5EF4-FFF2-40B4-BE49-F238E27FC236}">
+                <a16:creationId xmlns:a16="http://schemas.microsoft.com/office/drawing/2014/main" id="{32AD2A40-A3C3-0DFE-168C-9972DD184519}"/>
+              </a:ext>
+            </a:extLst>
+          </p:cNvPr>
+          <p:cNvSpPr>
+            <a:spLocks noGrp="1"/>
+          </p:cNvSpPr>
+          <p:nvPr>
+            <p:ph type="title"/>
+          </p:nvPr>
+        </p:nvSpPr>
+        <p:spPr/>
+        <p:txBody>
+          <a:bodyPr/>
+          <a:lstStyle/>
+          <a:p>
+            <a:r>
+              <a:rPr lang="en-US" dirty="0"/>
+              <a:t>What’s a Hypothesis Test?</a:t>
+            </a:r>
+          </a:p>
+        </p:txBody>
+      </p:sp>
+      <p:sp>
+        <p:nvSpPr>
+          <p:cNvPr id="3" name="Content Placeholder 2">
+            <a:extLst>
+              <a:ext uri="{FF2B5EF4-FFF2-40B4-BE49-F238E27FC236}">
+                <a16:creationId xmlns:a16="http://schemas.microsoft.com/office/drawing/2014/main" id="{34E62C23-0E14-5B47-D12E-DD63D929CF9F}"/>
+              </a:ext>
+            </a:extLst>
+          </p:cNvPr>
+          <p:cNvSpPr>
+            <a:spLocks noGrp="1"/>
+          </p:cNvSpPr>
+          <p:nvPr>
+            <p:ph idx="1"/>
+          </p:nvPr>
+        </p:nvSpPr>
+        <p:spPr>
+          <a:xfrm>
+            <a:off x="1451579" y="1933904"/>
+            <a:ext cx="9603275" cy="4119578"/>
+          </a:xfrm>
+        </p:spPr>
+        <p:txBody>
+          <a:bodyPr/>
+          <a:lstStyle/>
+          <a:p>
+            <a:r>
+              <a:rPr lang="en-US" dirty="0"/>
+              <a:t>A hypothesis test evaluates two mutually exclusive statements about a population to determine which statement the sample data best supports. </a:t>
+            </a:r>
+          </a:p>
+          <a:p>
+            <a:pPr lvl="1"/>
+            <a:r>
+              <a:rPr lang="en-US" dirty="0"/>
+              <a:t>Null Hypothesis: The effect does not exist in the population.</a:t>
+            </a:r>
+          </a:p>
+          <a:p>
+            <a:pPr lvl="1"/>
+            <a:r>
+              <a:rPr lang="en-US" dirty="0"/>
+              <a:t>Alternative Hypothesis: The effect does exist in the population.</a:t>
+            </a:r>
+          </a:p>
+          <a:p>
+            <a:pPr lvl="1"/>
+            <a:r>
+              <a:rPr lang="en-US" dirty="0"/>
+              <a:t>Effect = difference. Specifically, here it is the difference we see between the samples. </a:t>
+            </a:r>
+          </a:p>
+          <a:p>
+            <a:r>
+              <a:rPr lang="en-US" dirty="0"/>
+              <a:t>Hypothesis testing lets us say that effects have statistical significance, indicating that an effect in sample data also likely exists in the population after accounting for:</a:t>
+            </a:r>
+          </a:p>
+          <a:p>
+            <a:pPr lvl="1"/>
+            <a:r>
+              <a:rPr lang="en-US" dirty="0"/>
+              <a:t>Random sampling error.</a:t>
+            </a:r>
+          </a:p>
+          <a:p>
+            <a:pPr lvl="1"/>
+            <a:r>
+              <a:rPr lang="en-US" dirty="0"/>
+              <a:t>Variability in the data. </a:t>
+            </a:r>
+          </a:p>
+          <a:p>
+            <a:pPr lvl="1"/>
+            <a:r>
+              <a:rPr lang="en-US" dirty="0"/>
+              <a:t>Sample size. </a:t>
+            </a:r>
+          </a:p>
+          <a:p>
+            <a:endParaRPr lang="en-US" dirty="0"/>
+          </a:p>
+        </p:txBody>
+      </p:sp>
+    </p:spTree>
+    <p:extLst>
+      <p:ext uri="{BB962C8B-B14F-4D97-AF65-F5344CB8AC3E}">
+        <p14:creationId xmlns:p14="http://schemas.microsoft.com/office/powerpoint/2010/main" val="2517431365"/>
+      </p:ext>
+    </p:extLst>
+  </p:cSld>
+  <p:clrMapOvr>
+    <a:masterClrMapping/>
+  </p:clrMapOvr>
+</p:sld>
+</file>
+
+<file path=ppt/slides/slide3.xml><?xml version="1.0" encoding="utf-8"?>
+<p:sld xmlns:a="http://schemas.openxmlformats.org/drawingml/2006/main" xmlns:r="http://schemas.openxmlformats.org/officeDocument/2006/relationships" xmlns:p="http://schemas.openxmlformats.org/presentationml/2006/main">
+  <p:cSld>
+    <p:spTree>
+      <p:nvGrpSpPr>
+        <p:cNvPr id="1" name=""/>
+        <p:cNvGrpSpPr/>
+        <p:nvPr/>
+      </p:nvGrpSpPr>
+      <p:grpSpPr>
+        <a:xfrm>
+          <a:off x="0" y="0"/>
+          <a:ext cx="0" cy="0"/>
+          <a:chOff x="0" y="0"/>
+          <a:chExt cx="0" cy="0"/>
+        </a:xfrm>
+      </p:grpSpPr>
+      <p:sp>
+        <p:nvSpPr>
+          <p:cNvPr id="2" name="Title 1">
+            <a:extLst>
+              <a:ext uri="{FF2B5EF4-FFF2-40B4-BE49-F238E27FC236}">
                 <a16:creationId xmlns:a16="http://schemas.microsoft.com/office/drawing/2014/main" id="{3FFFB92D-D5B7-5C46-859A-480D5C8782A5}"/>
               </a:ext>
             </a:extLst>
@@ -6244,7 +7739,1031 @@
 </p:sld>
 </file>
 
-<file path=ppt/slides/slide3.xml><?xml version="1.0" encoding="utf-8"?>
+<file path=ppt/slides/slide30.xml><?xml version="1.0" encoding="utf-8"?>
+<p:sld xmlns:a="http://schemas.openxmlformats.org/drawingml/2006/main" xmlns:r="http://schemas.openxmlformats.org/officeDocument/2006/relationships" xmlns:p="http://schemas.openxmlformats.org/presentationml/2006/main" show="0">
+  <p:cSld>
+    <p:bg>
+      <p:bgPr>
+        <a:gradFill rotWithShape="1">
+          <a:gsLst>
+            <a:gs pos="0">
+              <a:schemeClr val="bg2">
+                <a:tint val="94000"/>
+                <a:satMod val="80000"/>
+                <a:lumMod val="106000"/>
+              </a:schemeClr>
+            </a:gs>
+            <a:gs pos="100000">
+              <a:schemeClr val="bg2">
+                <a:shade val="80000"/>
+              </a:schemeClr>
+            </a:gs>
+          </a:gsLst>
+          <a:path path="circle">
+            <a:fillToRect l="43000" r="43000" b="100000"/>
+          </a:path>
+        </a:gradFill>
+        <a:effectLst/>
+      </p:bgPr>
+    </p:bg>
+    <p:spTree>
+      <p:nvGrpSpPr>
+        <p:cNvPr id="1" name=""/>
+        <p:cNvGrpSpPr/>
+        <p:nvPr/>
+      </p:nvGrpSpPr>
+      <p:grpSpPr>
+        <a:xfrm>
+          <a:off x="0" y="0"/>
+          <a:ext cx="0" cy="0"/>
+          <a:chOff x="0" y="0"/>
+          <a:chExt cx="0" cy="0"/>
+        </a:xfrm>
+      </p:grpSpPr>
+      <p:sp>
+        <p:nvSpPr>
+          <p:cNvPr id="2" name="Title 1">
+            <a:extLst>
+              <a:ext uri="{FF2B5EF4-FFF2-40B4-BE49-F238E27FC236}">
+                <a16:creationId xmlns:a16="http://schemas.microsoft.com/office/drawing/2014/main" id="{1043841F-69FE-3249-BD4A-C67CCDF98C90}"/>
+              </a:ext>
+            </a:extLst>
+          </p:cNvPr>
+          <p:cNvSpPr>
+            <a:spLocks noGrp="1"/>
+          </p:cNvSpPr>
+          <p:nvPr>
+            <p:ph type="title"/>
+          </p:nvPr>
+        </p:nvSpPr>
+        <p:spPr>
+          <a:xfrm>
+            <a:off x="1451579" y="804519"/>
+            <a:ext cx="9603275" cy="1049235"/>
+          </a:xfrm>
+        </p:spPr>
+        <p:txBody>
+          <a:bodyPr>
+            <a:normAutofit/>
+          </a:bodyPr>
+          <a:lstStyle/>
+          <a:p>
+            <a:r>
+              <a:rPr lang="en-US" dirty="0"/>
+              <a:t>Flashback – Cohen’s Effect Size</a:t>
+            </a:r>
+          </a:p>
+        </p:txBody>
+      </p:sp>
+      <p:sp>
+        <p:nvSpPr>
+          <p:cNvPr id="3" name="Content Placeholder 2">
+            <a:extLst>
+              <a:ext uri="{FF2B5EF4-FFF2-40B4-BE49-F238E27FC236}">
+                <a16:creationId xmlns:a16="http://schemas.microsoft.com/office/drawing/2014/main" id="{8B9A6E8C-6885-E34E-9D72-60BD727D40C5}"/>
+              </a:ext>
+            </a:extLst>
+          </p:cNvPr>
+          <p:cNvSpPr>
+            <a:spLocks noGrp="1"/>
+          </p:cNvSpPr>
+          <p:nvPr>
+            <p:ph idx="1"/>
+          </p:nvPr>
+        </p:nvSpPr>
+        <p:spPr>
+          <a:xfrm>
+            <a:off x="1451579" y="2015734"/>
+            <a:ext cx="7089668" cy="4037747"/>
+          </a:xfrm>
+        </p:spPr>
+        <p:txBody>
+          <a:bodyPr>
+            <a:normAutofit/>
+          </a:bodyPr>
+          <a:lstStyle/>
+          <a:p>
+            <a:r>
+              <a:rPr lang="en-US" dirty="0"/>
+              <a:t>Effect size is very good for showing how big of a difference there is between groups.</a:t>
+            </a:r>
+          </a:p>
+          <a:p>
+            <a:pPr lvl="1"/>
+            <a:r>
+              <a:rPr lang="en-US" dirty="0"/>
+              <a:t>How ”big” is the difference between A and B</a:t>
+            </a:r>
+          </a:p>
+          <a:p>
+            <a:r>
+              <a:rPr lang="en-US" dirty="0"/>
+              <a:t>Easy to calculate, symmetrical, comparable across studies. </a:t>
+            </a:r>
+          </a:p>
+          <a:p>
+            <a:r>
+              <a:rPr lang="en-US" dirty="0"/>
+              <a:t>Downside – the value doesn’t have obvious meaning. </a:t>
+            </a:r>
+          </a:p>
+          <a:p>
+            <a:r>
+              <a:rPr lang="en-US" dirty="0"/>
+              <a:t>Table is a list of approximate significance, by Cohen himself. </a:t>
+            </a:r>
+          </a:p>
+          <a:p>
+            <a:r>
+              <a:rPr lang="en-US" dirty="0"/>
+              <a:t>Book’s author a huge proponent of effect size!</a:t>
+            </a:r>
+          </a:p>
+        </p:txBody>
+      </p:sp>
+      <p:pic>
+        <p:nvPicPr>
+          <p:cNvPr id="4" name="Picture 3">
+            <a:extLst>
+              <a:ext uri="{FF2B5EF4-FFF2-40B4-BE49-F238E27FC236}">
+                <a16:creationId xmlns:a16="http://schemas.microsoft.com/office/drawing/2014/main" id="{B77DD00A-365A-7D43-BA89-E174F497726F}"/>
+              </a:ext>
+            </a:extLst>
+          </p:cNvPr>
+          <p:cNvPicPr>
+            <a:picLocks noChangeAspect="1"/>
+          </p:cNvPicPr>
+          <p:nvPr/>
+        </p:nvPicPr>
+        <p:blipFill>
+          <a:blip r:embed="rId2"/>
+          <a:stretch>
+            <a:fillRect/>
+          </a:stretch>
+        </p:blipFill>
+        <p:spPr>
+          <a:xfrm>
+            <a:off x="8541247" y="2015734"/>
+            <a:ext cx="2727388" cy="4479127"/>
+          </a:xfrm>
+          <a:prstGeom prst="rect">
+            <a:avLst/>
+          </a:prstGeom>
+        </p:spPr>
+      </p:pic>
+    </p:spTree>
+    <p:extLst>
+      <p:ext uri="{BB962C8B-B14F-4D97-AF65-F5344CB8AC3E}">
+        <p14:creationId xmlns:p14="http://schemas.microsoft.com/office/powerpoint/2010/main" val="1678335132"/>
+      </p:ext>
+    </p:extLst>
+  </p:cSld>
+  <p:clrMapOvr>
+    <a:masterClrMapping/>
+  </p:clrMapOvr>
+</p:sld>
+</file>
+
+<file path=ppt/slides/slide31.xml><?xml version="1.0" encoding="utf-8"?>
+<p:sld xmlns:a="http://schemas.openxmlformats.org/drawingml/2006/main" xmlns:r="http://schemas.openxmlformats.org/officeDocument/2006/relationships" xmlns:p="http://schemas.openxmlformats.org/presentationml/2006/main">
+  <p:cSld>
+    <p:spTree>
+      <p:nvGrpSpPr>
+        <p:cNvPr id="1" name=""/>
+        <p:cNvGrpSpPr/>
+        <p:nvPr/>
+      </p:nvGrpSpPr>
+      <p:grpSpPr>
+        <a:xfrm>
+          <a:off x="0" y="0"/>
+          <a:ext cx="0" cy="0"/>
+          <a:chOff x="0" y="0"/>
+          <a:chExt cx="0" cy="0"/>
+        </a:xfrm>
+      </p:grpSpPr>
+      <p:sp>
+        <p:nvSpPr>
+          <p:cNvPr id="2" name="Title 1">
+            <a:extLst>
+              <a:ext uri="{FF2B5EF4-FFF2-40B4-BE49-F238E27FC236}">
+                <a16:creationId xmlns:a16="http://schemas.microsoft.com/office/drawing/2014/main" id="{C34EA8A0-5341-A341-9EA8-5EB58536E0D9}"/>
+              </a:ext>
+            </a:extLst>
+          </p:cNvPr>
+          <p:cNvSpPr>
+            <a:spLocks noGrp="1"/>
+          </p:cNvSpPr>
+          <p:nvPr>
+            <p:ph type="title"/>
+          </p:nvPr>
+        </p:nvSpPr>
+        <p:spPr/>
+        <p:txBody>
+          <a:bodyPr/>
+          <a:lstStyle/>
+          <a:p>
+            <a:r>
+              <a:rPr lang="en-US" dirty="0"/>
+              <a:t>Hypothesis Test process</a:t>
+            </a:r>
+          </a:p>
+        </p:txBody>
+      </p:sp>
+      <p:sp>
+        <p:nvSpPr>
+          <p:cNvPr id="3" name="Content Placeholder 2">
+            <a:extLst>
+              <a:ext uri="{FF2B5EF4-FFF2-40B4-BE49-F238E27FC236}">
+                <a16:creationId xmlns:a16="http://schemas.microsoft.com/office/drawing/2014/main" id="{0D496893-51F3-9D49-90F1-1D589AECE24D}"/>
+              </a:ext>
+            </a:extLst>
+          </p:cNvPr>
+          <p:cNvSpPr>
+            <a:spLocks noGrp="1"/>
+          </p:cNvSpPr>
+          <p:nvPr>
+            <p:ph idx="1"/>
+          </p:nvPr>
+        </p:nvSpPr>
+        <p:spPr>
+          <a:xfrm>
+            <a:off x="1250577" y="1853754"/>
+            <a:ext cx="10058400" cy="4336839"/>
+          </a:xfrm>
+        </p:spPr>
+        <p:txBody>
+          <a:bodyPr>
+            <a:normAutofit/>
+          </a:bodyPr>
+          <a:lstStyle/>
+          <a:p>
+            <a:r>
+              <a:rPr lang="en-US" dirty="0"/>
+              <a:t>A hypothesis test will seek to answer if two samples that show a difference have that difference due to real effects, or random variation. </a:t>
+            </a:r>
+          </a:p>
+          <a:p>
+            <a:pPr lvl="1"/>
+            <a:r>
+              <a:rPr lang="en-US" dirty="0"/>
+              <a:t>A.K.A. did these two samples come from the same population. </a:t>
+            </a:r>
+          </a:p>
+          <a:p>
+            <a:r>
+              <a:rPr lang="en-US" dirty="0"/>
+              <a:t>Define the test statistic – normally the mean.</a:t>
+            </a:r>
+          </a:p>
+          <a:p>
+            <a:r>
+              <a:rPr lang="en-US" dirty="0"/>
+              <a:t>Define a null hypothesis – “there is actually no difference in the means of the two groups.”</a:t>
+            </a:r>
+          </a:p>
+          <a:p>
+            <a:r>
+              <a:rPr lang="en-US" dirty="0"/>
+              <a:t>Compute the p-value – this is what the test does. The probability the NH is true.</a:t>
+            </a:r>
+          </a:p>
+          <a:p>
+            <a:r>
+              <a:rPr lang="en-US" dirty="0"/>
+              <a:t>Compare to the cutoff (alpha) – if the p-value is smaller, we can reject the NH, therefore the difference is statistically significant. </a:t>
+            </a:r>
+          </a:p>
+          <a:p>
+            <a:pPr lvl="1"/>
+            <a:r>
+              <a:rPr lang="en-US" dirty="0"/>
+              <a:t>A.K.A. how likely is that that the two samples are from the same pop, and the difference in their means is just random variation. </a:t>
+            </a:r>
+          </a:p>
+          <a:p>
+            <a:endParaRPr lang="en-US" dirty="0"/>
+          </a:p>
+        </p:txBody>
+      </p:sp>
+    </p:spTree>
+    <p:extLst>
+      <p:ext uri="{BB962C8B-B14F-4D97-AF65-F5344CB8AC3E}">
+        <p14:creationId xmlns:p14="http://schemas.microsoft.com/office/powerpoint/2010/main" val="996436132"/>
+      </p:ext>
+    </p:extLst>
+  </p:cSld>
+  <p:clrMapOvr>
+    <a:masterClrMapping/>
+  </p:clrMapOvr>
+</p:sld>
+</file>
+
+<file path=ppt/slides/slide32.xml><?xml version="1.0" encoding="utf-8"?>
+<p:sld xmlns:a="http://schemas.openxmlformats.org/drawingml/2006/main" xmlns:r="http://schemas.openxmlformats.org/officeDocument/2006/relationships" xmlns:p="http://schemas.openxmlformats.org/presentationml/2006/main">
+  <p:cSld>
+    <p:spTree>
+      <p:nvGrpSpPr>
+        <p:cNvPr id="1" name=""/>
+        <p:cNvGrpSpPr/>
+        <p:nvPr/>
+      </p:nvGrpSpPr>
+      <p:grpSpPr>
+        <a:xfrm>
+          <a:off x="0" y="0"/>
+          <a:ext cx="0" cy="0"/>
+          <a:chOff x="0" y="0"/>
+          <a:chExt cx="0" cy="0"/>
+        </a:xfrm>
+      </p:grpSpPr>
+      <p:sp>
+        <p:nvSpPr>
+          <p:cNvPr id="2" name="Title 1">
+            <a:extLst>
+              <a:ext uri="{FF2B5EF4-FFF2-40B4-BE49-F238E27FC236}">
+                <a16:creationId xmlns:a16="http://schemas.microsoft.com/office/drawing/2014/main" id="{D777C4F1-B4FA-D249-95A6-C649BBD426DF}"/>
+              </a:ext>
+            </a:extLst>
+          </p:cNvPr>
+          <p:cNvSpPr>
+            <a:spLocks noGrp="1"/>
+          </p:cNvSpPr>
+          <p:nvPr>
+            <p:ph type="title"/>
+          </p:nvPr>
+        </p:nvSpPr>
+        <p:spPr/>
+        <p:txBody>
+          <a:bodyPr/>
+          <a:lstStyle/>
+          <a:p>
+            <a:endParaRPr lang="en-US"/>
+          </a:p>
+        </p:txBody>
+      </p:sp>
+      <p:sp>
+        <p:nvSpPr>
+          <p:cNvPr id="3" name="Content Placeholder 2">
+            <a:extLst>
+              <a:ext uri="{FF2B5EF4-FFF2-40B4-BE49-F238E27FC236}">
+                <a16:creationId xmlns:a16="http://schemas.microsoft.com/office/drawing/2014/main" id="{D7BFCAE8-3D2D-2244-81A3-B63518158FAB}"/>
+              </a:ext>
+            </a:extLst>
+          </p:cNvPr>
+          <p:cNvSpPr>
+            <a:spLocks noGrp="1"/>
+          </p:cNvSpPr>
+          <p:nvPr>
+            <p:ph idx="1"/>
+          </p:nvPr>
+        </p:nvSpPr>
+        <p:spPr/>
+        <p:txBody>
+          <a:bodyPr/>
+          <a:lstStyle/>
+          <a:p>
+            <a:endParaRPr lang="en-US"/>
+          </a:p>
+        </p:txBody>
+      </p:sp>
+      <p:pic>
+        <p:nvPicPr>
+          <p:cNvPr id="7170" name="Picture 2">
+            <a:extLst>
+              <a:ext uri="{FF2B5EF4-FFF2-40B4-BE49-F238E27FC236}">
+                <a16:creationId xmlns:a16="http://schemas.microsoft.com/office/drawing/2014/main" id="{05A565D6-6651-0444-BB8A-EA1D38731B7C}"/>
+              </a:ext>
+            </a:extLst>
+          </p:cNvPr>
+          <p:cNvPicPr>
+            <a:picLocks noChangeAspect="1" noChangeArrowheads="1"/>
+          </p:cNvPicPr>
+          <p:nvPr/>
+        </p:nvPicPr>
+        <p:blipFill>
+          <a:blip r:embed="rId2">
+            <a:extLst>
+              <a:ext uri="{28A0092B-C50C-407E-A947-70E740481C1C}">
+                <a14:useLocalDpi xmlns:a14="http://schemas.microsoft.com/office/drawing/2010/main" val="0"/>
+              </a:ext>
+            </a:extLst>
+          </a:blip>
+          <a:srcRect/>
+          <a:stretch>
+            <a:fillRect/>
+          </a:stretch>
+        </p:blipFill>
+        <p:spPr bwMode="auto">
+          <a:xfrm>
+            <a:off x="1219200" y="177800"/>
+            <a:ext cx="9753600" cy="6502400"/>
+          </a:xfrm>
+          <a:prstGeom prst="rect">
+            <a:avLst/>
+          </a:prstGeom>
+          <a:noFill/>
+          <a:extLst>
+            <a:ext uri="{909E8E84-426E-40DD-AFC4-6F175D3DCCD1}">
+              <a14:hiddenFill xmlns:a14="http://schemas.microsoft.com/office/drawing/2010/main">
+                <a:solidFill>
+                  <a:srgbClr val="FFFFFF"/>
+                </a:solidFill>
+              </a14:hiddenFill>
+            </a:ext>
+          </a:extLst>
+        </p:spPr>
+      </p:pic>
+    </p:spTree>
+    <p:extLst>
+      <p:ext uri="{BB962C8B-B14F-4D97-AF65-F5344CB8AC3E}">
+        <p14:creationId xmlns:p14="http://schemas.microsoft.com/office/powerpoint/2010/main" val="238663840"/>
+      </p:ext>
+    </p:extLst>
+  </p:cSld>
+  <p:clrMapOvr>
+    <a:masterClrMapping/>
+  </p:clrMapOvr>
+</p:sld>
+</file>
+
+<file path=ppt/slides/slide33.xml><?xml version="1.0" encoding="utf-8"?>
+<p:sld xmlns:a="http://schemas.openxmlformats.org/drawingml/2006/main" xmlns:r="http://schemas.openxmlformats.org/officeDocument/2006/relationships" xmlns:p="http://schemas.openxmlformats.org/presentationml/2006/main" show="0">
+  <p:cSld>
+    <p:spTree>
+      <p:nvGrpSpPr>
+        <p:cNvPr id="1" name=""/>
+        <p:cNvGrpSpPr/>
+        <p:nvPr/>
+      </p:nvGrpSpPr>
+      <p:grpSpPr>
+        <a:xfrm>
+          <a:off x="0" y="0"/>
+          <a:ext cx="0" cy="0"/>
+          <a:chOff x="0" y="0"/>
+          <a:chExt cx="0" cy="0"/>
+        </a:xfrm>
+      </p:grpSpPr>
+      <p:sp>
+        <p:nvSpPr>
+          <p:cNvPr id="2" name="Title 1">
+            <a:extLst>
+              <a:ext uri="{FF2B5EF4-FFF2-40B4-BE49-F238E27FC236}">
+                <a16:creationId xmlns:a16="http://schemas.microsoft.com/office/drawing/2014/main" id="{454D611A-CF86-8746-97A4-33E74E2BFF77}"/>
+              </a:ext>
+            </a:extLst>
+          </p:cNvPr>
+          <p:cNvSpPr>
+            <a:spLocks noGrp="1"/>
+          </p:cNvSpPr>
+          <p:nvPr>
+            <p:ph type="title"/>
+          </p:nvPr>
+        </p:nvSpPr>
+        <p:spPr/>
+        <p:txBody>
+          <a:bodyPr/>
+          <a:lstStyle/>
+          <a:p>
+            <a:endParaRPr lang="en-US"/>
+          </a:p>
+        </p:txBody>
+      </p:sp>
+      <p:sp>
+        <p:nvSpPr>
+          <p:cNvPr id="3" name="Content Placeholder 2">
+            <a:extLst>
+              <a:ext uri="{FF2B5EF4-FFF2-40B4-BE49-F238E27FC236}">
+                <a16:creationId xmlns:a16="http://schemas.microsoft.com/office/drawing/2014/main" id="{D4977805-BE5D-D14C-BD46-5F20F369C2D2}"/>
+              </a:ext>
+            </a:extLst>
+          </p:cNvPr>
+          <p:cNvSpPr>
+            <a:spLocks noGrp="1"/>
+          </p:cNvSpPr>
+          <p:nvPr>
+            <p:ph idx="1"/>
+          </p:nvPr>
+        </p:nvSpPr>
+        <p:spPr/>
+        <p:txBody>
+          <a:bodyPr/>
+          <a:lstStyle/>
+          <a:p>
+            <a:endParaRPr lang="en-US"/>
+          </a:p>
+        </p:txBody>
+      </p:sp>
+      <p:pic>
+        <p:nvPicPr>
+          <p:cNvPr id="4098" name="Picture 2">
+            <a:extLst>
+              <a:ext uri="{FF2B5EF4-FFF2-40B4-BE49-F238E27FC236}">
+                <a16:creationId xmlns:a16="http://schemas.microsoft.com/office/drawing/2014/main" id="{0A6DAAD8-638A-8643-B668-3E40462E19C4}"/>
+              </a:ext>
+            </a:extLst>
+          </p:cNvPr>
+          <p:cNvPicPr>
+            <a:picLocks noChangeAspect="1" noChangeArrowheads="1"/>
+          </p:cNvPicPr>
+          <p:nvPr/>
+        </p:nvPicPr>
+        <p:blipFill>
+          <a:blip r:embed="rId2">
+            <a:extLst>
+              <a:ext uri="{28A0092B-C50C-407E-A947-70E740481C1C}">
+                <a14:useLocalDpi xmlns:a14="http://schemas.microsoft.com/office/drawing/2010/main" val="0"/>
+              </a:ext>
+            </a:extLst>
+          </a:blip>
+          <a:srcRect/>
+          <a:stretch>
+            <a:fillRect/>
+          </a:stretch>
+        </p:blipFill>
+        <p:spPr bwMode="auto">
+          <a:xfrm>
+            <a:off x="-4863" y="389965"/>
+            <a:ext cx="12201726" cy="6078070"/>
+          </a:xfrm>
+          <a:prstGeom prst="rect">
+            <a:avLst/>
+          </a:prstGeom>
+          <a:noFill/>
+          <a:extLst>
+            <a:ext uri="{909E8E84-426E-40DD-AFC4-6F175D3DCCD1}">
+              <a14:hiddenFill xmlns:a14="http://schemas.microsoft.com/office/drawing/2010/main">
+                <a:solidFill>
+                  <a:srgbClr val="FFFFFF"/>
+                </a:solidFill>
+              </a14:hiddenFill>
+            </a:ext>
+          </a:extLst>
+        </p:spPr>
+      </p:pic>
+    </p:spTree>
+    <p:extLst>
+      <p:ext uri="{BB962C8B-B14F-4D97-AF65-F5344CB8AC3E}">
+        <p14:creationId xmlns:p14="http://schemas.microsoft.com/office/powerpoint/2010/main" val="278982855"/>
+      </p:ext>
+    </p:extLst>
+  </p:cSld>
+  <p:clrMapOvr>
+    <a:masterClrMapping/>
+  </p:clrMapOvr>
+</p:sld>
+</file>
+
+<file path=ppt/slides/slide34.xml><?xml version="1.0" encoding="utf-8"?>
+<p:sld xmlns:a="http://schemas.openxmlformats.org/drawingml/2006/main" xmlns:r="http://schemas.openxmlformats.org/officeDocument/2006/relationships" xmlns:p="http://schemas.openxmlformats.org/presentationml/2006/main">
+  <p:cSld>
+    <p:spTree>
+      <p:nvGrpSpPr>
+        <p:cNvPr id="1" name=""/>
+        <p:cNvGrpSpPr/>
+        <p:nvPr/>
+      </p:nvGrpSpPr>
+      <p:grpSpPr>
+        <a:xfrm>
+          <a:off x="0" y="0"/>
+          <a:ext cx="0" cy="0"/>
+          <a:chOff x="0" y="0"/>
+          <a:chExt cx="0" cy="0"/>
+        </a:xfrm>
+      </p:grpSpPr>
+      <p:sp>
+        <p:nvSpPr>
+          <p:cNvPr id="2" name="Title 1">
+            <a:extLst>
+              <a:ext uri="{FF2B5EF4-FFF2-40B4-BE49-F238E27FC236}">
+                <a16:creationId xmlns:a16="http://schemas.microsoft.com/office/drawing/2014/main" id="{A80E8ED4-C6ED-754F-9599-EBCA2583D433}"/>
+              </a:ext>
+            </a:extLst>
+          </p:cNvPr>
+          <p:cNvSpPr>
+            <a:spLocks noGrp="1"/>
+          </p:cNvSpPr>
+          <p:nvPr>
+            <p:ph type="title"/>
+          </p:nvPr>
+        </p:nvSpPr>
+        <p:spPr/>
+        <p:txBody>
+          <a:bodyPr/>
+          <a:lstStyle/>
+          <a:p>
+            <a:r>
+              <a:rPr lang="en-US" dirty="0"/>
+              <a:t>T-Tests</a:t>
+            </a:r>
+          </a:p>
+        </p:txBody>
+      </p:sp>
+      <p:sp>
+        <p:nvSpPr>
+          <p:cNvPr id="3" name="Content Placeholder 2">
+            <a:extLst>
+              <a:ext uri="{FF2B5EF4-FFF2-40B4-BE49-F238E27FC236}">
+                <a16:creationId xmlns:a16="http://schemas.microsoft.com/office/drawing/2014/main" id="{2C609283-AF97-CC4E-8FA2-931D43BA5317}"/>
+              </a:ext>
+            </a:extLst>
+          </p:cNvPr>
+          <p:cNvSpPr>
+            <a:spLocks noGrp="1"/>
+          </p:cNvSpPr>
+          <p:nvPr>
+            <p:ph idx="1"/>
+          </p:nvPr>
+        </p:nvSpPr>
+        <p:spPr>
+          <a:xfrm>
+            <a:off x="746235" y="1853754"/>
+            <a:ext cx="10699532" cy="4199727"/>
+          </a:xfrm>
+        </p:spPr>
+        <p:txBody>
+          <a:bodyPr>
+            <a:normAutofit/>
+          </a:bodyPr>
+          <a:lstStyle/>
+          <a:p>
+            <a:r>
+              <a:rPr lang="en-US" dirty="0"/>
+              <a:t>T-tests allow us to make an estimate of, “is this difference likely real, or could it be due to chance?”</a:t>
+            </a:r>
+          </a:p>
+          <a:p>
+            <a:r>
+              <a:rPr lang="en-US" dirty="0"/>
+              <a:t>Extremely common in basic stats and scientific papers/reports. </a:t>
+            </a:r>
+          </a:p>
+          <a:p>
+            <a:r>
+              <a:rPr lang="en-US" dirty="0"/>
+              <a:t>Weakness – subject to manipulation, becoming less relied on over time. </a:t>
+            </a:r>
+          </a:p>
+          <a:p>
+            <a:r>
+              <a:rPr lang="en-US" dirty="0"/>
+              <a:t>One sample – tests mean against some value.</a:t>
+            </a:r>
+          </a:p>
+          <a:p>
+            <a:r>
+              <a:rPr lang="en-US" dirty="0"/>
+              <a:t>Two sample – tests two means against each other. </a:t>
+            </a:r>
+          </a:p>
+          <a:p>
+            <a:r>
+              <a:rPr lang="en-US" dirty="0"/>
+              <a:t>Sidedness:</a:t>
+            </a:r>
+          </a:p>
+          <a:p>
+            <a:pPr lvl="1"/>
+            <a:r>
+              <a:rPr lang="en-US" dirty="0"/>
+              <a:t>One side tests if lesser/greater.</a:t>
+            </a:r>
+          </a:p>
+          <a:p>
+            <a:pPr lvl="1"/>
+            <a:r>
+              <a:rPr lang="en-US" dirty="0"/>
+              <a:t>Two-sided tests if different at all. </a:t>
+            </a:r>
+          </a:p>
+        </p:txBody>
+      </p:sp>
+    </p:spTree>
+    <p:extLst>
+      <p:ext uri="{BB962C8B-B14F-4D97-AF65-F5344CB8AC3E}">
+        <p14:creationId xmlns:p14="http://schemas.microsoft.com/office/powerpoint/2010/main" val="201004784"/>
+      </p:ext>
+    </p:extLst>
+  </p:cSld>
+  <p:clrMapOvr>
+    <a:masterClrMapping/>
+  </p:clrMapOvr>
+</p:sld>
+</file>
+
+<file path=ppt/slides/slide35.xml><?xml version="1.0" encoding="utf-8"?>
+<p:sld xmlns:a="http://schemas.openxmlformats.org/drawingml/2006/main" xmlns:r="http://schemas.openxmlformats.org/officeDocument/2006/relationships" xmlns:p="http://schemas.openxmlformats.org/presentationml/2006/main">
+  <p:cSld>
+    <p:spTree>
+      <p:nvGrpSpPr>
+        <p:cNvPr id="1" name=""/>
+        <p:cNvGrpSpPr/>
+        <p:nvPr/>
+      </p:nvGrpSpPr>
+      <p:grpSpPr>
+        <a:xfrm>
+          <a:off x="0" y="0"/>
+          <a:ext cx="0" cy="0"/>
+          <a:chOff x="0" y="0"/>
+          <a:chExt cx="0" cy="0"/>
+        </a:xfrm>
+      </p:grpSpPr>
+      <p:sp>
+        <p:nvSpPr>
+          <p:cNvPr id="4" name="Title 3">
+            <a:extLst>
+              <a:ext uri="{FF2B5EF4-FFF2-40B4-BE49-F238E27FC236}">
+                <a16:creationId xmlns:a16="http://schemas.microsoft.com/office/drawing/2014/main" id="{93D8206E-559D-CE45-85C5-85695AB37A13}"/>
+              </a:ext>
+            </a:extLst>
+          </p:cNvPr>
+          <p:cNvSpPr>
+            <a:spLocks noGrp="1"/>
+          </p:cNvSpPr>
+          <p:nvPr>
+            <p:ph type="title"/>
+          </p:nvPr>
+        </p:nvSpPr>
+        <p:spPr/>
+        <p:txBody>
+          <a:bodyPr/>
+          <a:lstStyle/>
+          <a:p>
+            <a:endParaRPr lang="en-US"/>
+          </a:p>
+        </p:txBody>
+      </p:sp>
+      <p:sp>
+        <p:nvSpPr>
+          <p:cNvPr id="5" name="Content Placeholder 4">
+            <a:extLst>
+              <a:ext uri="{FF2B5EF4-FFF2-40B4-BE49-F238E27FC236}">
+                <a16:creationId xmlns:a16="http://schemas.microsoft.com/office/drawing/2014/main" id="{40E82067-9C80-8E4E-ABC3-85AB34A50B0A}"/>
+              </a:ext>
+            </a:extLst>
+          </p:cNvPr>
+          <p:cNvSpPr>
+            <a:spLocks noGrp="1"/>
+          </p:cNvSpPr>
+          <p:nvPr>
+            <p:ph sz="half" idx="1"/>
+          </p:nvPr>
+        </p:nvSpPr>
+        <p:spPr/>
+        <p:txBody>
+          <a:bodyPr/>
+          <a:lstStyle/>
+          <a:p>
+            <a:endParaRPr lang="en-US"/>
+          </a:p>
+        </p:txBody>
+      </p:sp>
+      <p:sp>
+        <p:nvSpPr>
+          <p:cNvPr id="6" name="Content Placeholder 5">
+            <a:extLst>
+              <a:ext uri="{FF2B5EF4-FFF2-40B4-BE49-F238E27FC236}">
+                <a16:creationId xmlns:a16="http://schemas.microsoft.com/office/drawing/2014/main" id="{9DFA7AFC-CBC7-3E4A-B817-222F190353DB}"/>
+              </a:ext>
+            </a:extLst>
+          </p:cNvPr>
+          <p:cNvSpPr>
+            <a:spLocks noGrp="1"/>
+          </p:cNvSpPr>
+          <p:nvPr>
+            <p:ph sz="half" idx="2"/>
+          </p:nvPr>
+        </p:nvSpPr>
+        <p:spPr/>
+        <p:txBody>
+          <a:bodyPr/>
+          <a:lstStyle/>
+          <a:p>
+            <a:endParaRPr lang="en-US"/>
+          </a:p>
+        </p:txBody>
+      </p:sp>
+      <p:pic>
+        <p:nvPicPr>
+          <p:cNvPr id="5122" name="Picture 2">
+            <a:extLst>
+              <a:ext uri="{FF2B5EF4-FFF2-40B4-BE49-F238E27FC236}">
+                <a16:creationId xmlns:a16="http://schemas.microsoft.com/office/drawing/2014/main" id="{C87F644B-A903-D247-8667-BB7C3B8C95CA}"/>
+              </a:ext>
+            </a:extLst>
+          </p:cNvPr>
+          <p:cNvPicPr>
+            <a:picLocks noChangeAspect="1" noChangeArrowheads="1"/>
+          </p:cNvPicPr>
+          <p:nvPr/>
+        </p:nvPicPr>
+        <p:blipFill>
+          <a:blip r:embed="rId2">
+            <a:extLst>
+              <a:ext uri="{28A0092B-C50C-407E-A947-70E740481C1C}">
+                <a14:useLocalDpi xmlns:a14="http://schemas.microsoft.com/office/drawing/2010/main" val="0"/>
+              </a:ext>
+            </a:extLst>
+          </a:blip>
+          <a:srcRect/>
+          <a:stretch>
+            <a:fillRect/>
+          </a:stretch>
+        </p:blipFill>
+        <p:spPr bwMode="auto">
+          <a:xfrm>
+            <a:off x="0" y="-241300"/>
+            <a:ext cx="7416800" cy="3670300"/>
+          </a:xfrm>
+          <a:prstGeom prst="rect">
+            <a:avLst/>
+          </a:prstGeom>
+          <a:noFill/>
+          <a:extLst>
+            <a:ext uri="{909E8E84-426E-40DD-AFC4-6F175D3DCCD1}">
+              <a14:hiddenFill xmlns:a14="http://schemas.microsoft.com/office/drawing/2010/main">
+                <a:solidFill>
+                  <a:srgbClr val="FFFFFF"/>
+                </a:solidFill>
+              </a14:hiddenFill>
+            </a:ext>
+          </a:extLst>
+        </p:spPr>
+      </p:pic>
+      <p:pic>
+        <p:nvPicPr>
+          <p:cNvPr id="5124" name="Picture 4">
+            <a:extLst>
+              <a:ext uri="{FF2B5EF4-FFF2-40B4-BE49-F238E27FC236}">
+                <a16:creationId xmlns:a16="http://schemas.microsoft.com/office/drawing/2014/main" id="{97187806-CB83-874B-8736-4A0895D65308}"/>
+              </a:ext>
+            </a:extLst>
+          </p:cNvPr>
+          <p:cNvPicPr>
+            <a:picLocks noChangeAspect="1" noChangeArrowheads="1"/>
+          </p:cNvPicPr>
+          <p:nvPr/>
+        </p:nvPicPr>
+        <p:blipFill>
+          <a:blip r:embed="rId3">
+            <a:extLst>
+              <a:ext uri="{28A0092B-C50C-407E-A947-70E740481C1C}">
+                <a14:useLocalDpi xmlns:a14="http://schemas.microsoft.com/office/drawing/2010/main" val="0"/>
+              </a:ext>
+            </a:extLst>
+          </a:blip>
+          <a:srcRect/>
+          <a:stretch>
+            <a:fillRect/>
+          </a:stretch>
+        </p:blipFill>
+        <p:spPr bwMode="auto">
+          <a:xfrm>
+            <a:off x="4675740" y="3165007"/>
+            <a:ext cx="7569200" cy="3657600"/>
+          </a:xfrm>
+          <a:prstGeom prst="rect">
+            <a:avLst/>
+          </a:prstGeom>
+          <a:noFill/>
+          <a:extLst>
+            <a:ext uri="{909E8E84-426E-40DD-AFC4-6F175D3DCCD1}">
+              <a14:hiddenFill xmlns:a14="http://schemas.microsoft.com/office/drawing/2010/main">
+                <a:solidFill>
+                  <a:srgbClr val="FFFFFF"/>
+                </a:solidFill>
+              </a14:hiddenFill>
+            </a:ext>
+          </a:extLst>
+        </p:spPr>
+      </p:pic>
+    </p:spTree>
+    <p:extLst>
+      <p:ext uri="{BB962C8B-B14F-4D97-AF65-F5344CB8AC3E}">
+        <p14:creationId xmlns:p14="http://schemas.microsoft.com/office/powerpoint/2010/main" val="3073410795"/>
+      </p:ext>
+    </p:extLst>
+  </p:cSld>
+  <p:clrMapOvr>
+    <a:masterClrMapping/>
+  </p:clrMapOvr>
+</p:sld>
+</file>
+
+<file path=ppt/slides/slide36.xml><?xml version="1.0" encoding="utf-8"?>
+<p:sld xmlns:a="http://schemas.openxmlformats.org/drawingml/2006/main" xmlns:r="http://schemas.openxmlformats.org/officeDocument/2006/relationships" xmlns:p="http://schemas.openxmlformats.org/presentationml/2006/main">
+  <p:cSld>
+    <p:spTree>
+      <p:nvGrpSpPr>
+        <p:cNvPr id="1" name=""/>
+        <p:cNvGrpSpPr/>
+        <p:nvPr/>
+      </p:nvGrpSpPr>
+      <p:grpSpPr>
+        <a:xfrm>
+          <a:off x="0" y="0"/>
+          <a:ext cx="0" cy="0"/>
+          <a:chOff x="0" y="0"/>
+          <a:chExt cx="0" cy="0"/>
+        </a:xfrm>
+      </p:grpSpPr>
+      <p:sp>
+        <p:nvSpPr>
+          <p:cNvPr id="2" name="Title 1">
+            <a:extLst>
+              <a:ext uri="{FF2B5EF4-FFF2-40B4-BE49-F238E27FC236}">
+                <a16:creationId xmlns:a16="http://schemas.microsoft.com/office/drawing/2014/main" id="{ED7B2C08-E1A8-C144-8E09-2D73345AD7C2}"/>
+              </a:ext>
+            </a:extLst>
+          </p:cNvPr>
+          <p:cNvSpPr>
+            <a:spLocks noGrp="1"/>
+          </p:cNvSpPr>
+          <p:nvPr>
+            <p:ph type="title"/>
+          </p:nvPr>
+        </p:nvSpPr>
+        <p:spPr/>
+        <p:txBody>
+          <a:bodyPr/>
+          <a:lstStyle/>
+          <a:p>
+            <a:r>
+              <a:rPr lang="en-US" dirty="0"/>
+              <a:t>Z-tests</a:t>
+            </a:r>
+          </a:p>
+        </p:txBody>
+      </p:sp>
+      <p:sp>
+        <p:nvSpPr>
+          <p:cNvPr id="3" name="Content Placeholder 2">
+            <a:extLst>
+              <a:ext uri="{FF2B5EF4-FFF2-40B4-BE49-F238E27FC236}">
+                <a16:creationId xmlns:a16="http://schemas.microsoft.com/office/drawing/2014/main" id="{DDD1D357-DDDA-BE40-A4A5-256F756EE88E}"/>
+              </a:ext>
+            </a:extLst>
+          </p:cNvPr>
+          <p:cNvSpPr>
+            <a:spLocks noGrp="1"/>
+          </p:cNvSpPr>
+          <p:nvPr>
+            <p:ph idx="1"/>
+          </p:nvPr>
+        </p:nvSpPr>
+        <p:spPr/>
+        <p:txBody>
+          <a:bodyPr/>
+          <a:lstStyle/>
+          <a:p>
+            <a:r>
+              <a:rPr lang="en-US" dirty="0"/>
+              <a:t>Z-tests do the same basic thing as t-tests, they can be used when:</a:t>
+            </a:r>
+          </a:p>
+          <a:p>
+            <a:pPr lvl="1"/>
+            <a:r>
+              <a:rPr lang="en-US" dirty="0"/>
+              <a:t>Sample size is large. (50ish is a rule of thumb), or…</a:t>
+            </a:r>
+          </a:p>
+          <a:p>
+            <a:pPr lvl="1"/>
+            <a:r>
+              <a:rPr lang="en-US" dirty="0"/>
+              <a:t>Population variance is known.</a:t>
+            </a:r>
+          </a:p>
+          <a:p>
+            <a:r>
+              <a:rPr lang="en-US" dirty="0"/>
+              <a:t>If that’s not true, use a t-test. (Results will converge with larger samples)</a:t>
+            </a:r>
+          </a:p>
+          <a:p>
+            <a:endParaRPr lang="en-US" dirty="0"/>
+          </a:p>
+          <a:p>
+            <a:r>
+              <a:rPr lang="en-US" dirty="0"/>
+              <a:t>More simple if calculating by hand, we kind of don’t really need to care about it…</a:t>
+            </a:r>
+          </a:p>
+        </p:txBody>
+      </p:sp>
+    </p:spTree>
+    <p:extLst>
+      <p:ext uri="{BB962C8B-B14F-4D97-AF65-F5344CB8AC3E}">
+        <p14:creationId xmlns:p14="http://schemas.microsoft.com/office/powerpoint/2010/main" val="2318308049"/>
+      </p:ext>
+    </p:extLst>
+  </p:cSld>
+  <p:clrMapOvr>
+    <a:masterClrMapping/>
+  </p:clrMapOvr>
+</p:sld>
+</file>
+
+<file path=ppt/slides/slide37.xml><?xml version="1.0" encoding="utf-8"?>
 <p:sld xmlns:a="http://schemas.openxmlformats.org/drawingml/2006/main" xmlns:r="http://schemas.openxmlformats.org/officeDocument/2006/relationships" xmlns:p="http://schemas.openxmlformats.org/presentationml/2006/main">
   <p:cSld>
     <p:bg>
@@ -6287,123 +8806,321 @@
       </p:grpSpPr>
       <p:sp>
         <p:nvSpPr>
-          <p:cNvPr id="2" name="Title 1">
+          <p:cNvPr id="71" name="Rectangle 70">
             <a:extLst>
               <a:ext uri="{FF2B5EF4-FFF2-40B4-BE49-F238E27FC236}">
-                <a16:creationId xmlns:a16="http://schemas.microsoft.com/office/drawing/2014/main" id="{E9FB4EAE-8C60-0F48-8E09-4DBF9EFA1A74}"/>
+                <a16:creationId xmlns:a16="http://schemas.microsoft.com/office/drawing/2014/main" id="{CDDE5CDF-1512-4CDA-B956-23D223F8DE44}"/>
+              </a:ext>
+              <a:ext uri="{C183D7F6-B498-43B3-948B-1728B52AA6E4}">
+                <adec:decorative xmlns:adec="http://schemas.microsoft.com/office/drawing/2017/decorative" val="1"/>
               </a:ext>
             </a:extLst>
           </p:cNvPr>
           <p:cNvSpPr>
-            <a:spLocks noGrp="1"/>
-          </p:cNvSpPr>
-          <p:nvPr>
-            <p:ph type="title"/>
+            <a:spLocks noGrp="1" noRot="1" noChangeAspect="1" noMove="1" noResize="1" noEditPoints="1" noAdjustHandles="1" noChangeArrowheads="1" noChangeShapeType="1" noTextEdit="1"/>
+          </p:cNvSpPr>
+          <p:nvPr>
+            <p:extLst>
+              <p:ext uri="{386F3935-93C4-4BCD-93E2-E3B085C9AB24}">
+                <p16:designElem xmlns:p16="http://schemas.microsoft.com/office/powerpoint/2015/main" val="1"/>
+              </p:ext>
+            </p:extLst>
           </p:nvPr>
         </p:nvSpPr>
         <p:spPr>
           <a:xfrm>
-            <a:off x="1451579" y="804519"/>
-            <a:ext cx="9603275" cy="1049235"/>
+            <a:off x="0" y="2019476"/>
+            <a:ext cx="12192000" cy="4105941"/>
           </a:xfrm>
+          <a:prstGeom prst="rect">
+            <a:avLst/>
+          </a:prstGeom>
+          <a:gradFill flip="none" rotWithShape="1">
+            <a:gsLst>
+              <a:gs pos="0">
+                <a:schemeClr val="bg2">
+                  <a:alpha val="0"/>
+                </a:schemeClr>
+              </a:gs>
+              <a:gs pos="100000">
+                <a:schemeClr val="bg2"/>
+              </a:gs>
+            </a:gsLst>
+            <a:lin ang="5400000" scaled="0"/>
+            <a:tileRect/>
+          </a:gradFill>
+          <a:ln>
+            <a:noFill/>
+          </a:ln>
         </p:spPr>
-        <p:txBody>
-          <a:bodyPr>
-            <a:normAutofit/>
-          </a:bodyPr>
-          <a:lstStyle/>
-          <a:p>
-            <a:r>
-              <a:rPr lang="en-US" dirty="0"/>
-              <a:t>It’s Science!!</a:t>
-            </a:r>
-          </a:p>
-        </p:txBody>
-      </p:sp>
-      <p:sp>
-        <p:nvSpPr>
-          <p:cNvPr id="3" name="Content Placeholder 2">
+        <p:style>
+          <a:lnRef idx="2">
+            <a:schemeClr val="accent1">
+              <a:shade val="50000"/>
+            </a:schemeClr>
+          </a:lnRef>
+          <a:fillRef idx="1">
+            <a:schemeClr val="accent1"/>
+          </a:fillRef>
+          <a:effectRef idx="0">
+            <a:schemeClr val="accent1"/>
+          </a:effectRef>
+          <a:fontRef idx="minor">
+            <a:schemeClr val="lt1"/>
+          </a:fontRef>
+        </p:style>
+        <p:txBody>
+          <a:bodyPr/>
+          <a:lstStyle/>
+          <a:p>
+            <a:endParaRPr lang="en-US"/>
+          </a:p>
+        </p:txBody>
+      </p:sp>
+      <p:pic>
+        <p:nvPicPr>
+          <p:cNvPr id="73" name="Picture 72">
             <a:extLst>
               <a:ext uri="{FF2B5EF4-FFF2-40B4-BE49-F238E27FC236}">
-                <a16:creationId xmlns:a16="http://schemas.microsoft.com/office/drawing/2014/main" id="{D95C479D-1CC5-7947-B7C5-85D2EE5E1C65}"/>
+                <a16:creationId xmlns:a16="http://schemas.microsoft.com/office/drawing/2014/main" id="{B029D7D8-5A6B-4C76-94C8-15798C6C5ADB}"/>
+              </a:ext>
+              <a:ext uri="{C183D7F6-B498-43B3-948B-1728B52AA6E4}">
+                <adec:decorative xmlns:adec="http://schemas.microsoft.com/office/drawing/2017/decorative" val="1"/>
               </a:ext>
             </a:extLst>
           </p:cNvPr>
-          <p:cNvSpPr>
-            <a:spLocks noGrp="1"/>
-          </p:cNvSpPr>
-          <p:nvPr>
-            <p:ph idx="1"/>
-          </p:nvPr>
-        </p:nvSpPr>
+          <p:cNvPicPr>
+            <a:picLocks noGrp="1" noRot="1" noChangeAspect="1" noMove="1" noResize="1" noEditPoints="1" noAdjustHandles="1" noChangeArrowheads="1" noChangeShapeType="1" noCrop="1"/>
+          </p:cNvPicPr>
+          <p:nvPr>
+            <p:extLst>
+              <p:ext uri="{386F3935-93C4-4BCD-93E2-E3B085C9AB24}">
+                <p16:designElem xmlns:p16="http://schemas.microsoft.com/office/powerpoint/2015/main" val="1"/>
+              </p:ext>
+            </p:extLst>
+          </p:nvPr>
+        </p:nvPicPr>
+        <p:blipFill rotWithShape="1">
+          <a:blip r:embed="rId2">
+            <a:extLst>
+              <a:ext uri="{28A0092B-C50C-407E-A947-70E740481C1C}">
+                <a14:useLocalDpi xmlns:a14="http://schemas.microsoft.com/office/drawing/2010/main" val="0"/>
+              </a:ext>
+            </a:extLst>
+          </a:blip>
+          <a:srcRect t="1538" b="-1538"/>
+          <a:stretch/>
+        </p:blipFill>
+        <p:spPr bwMode="black">
+          <a:xfrm>
+            <a:off x="0" y="6126480"/>
+            <a:ext cx="12192000" cy="742950"/>
+          </a:xfrm>
+          <a:prstGeom prst="rect">
+            <a:avLst/>
+          </a:prstGeom>
+        </p:spPr>
+      </p:pic>
+      <p:cxnSp>
+        <p:nvCxnSpPr>
+          <p:cNvPr id="75" name="Straight Connector 74">
+            <a:extLst>
+              <a:ext uri="{FF2B5EF4-FFF2-40B4-BE49-F238E27FC236}">
+                <a16:creationId xmlns:a16="http://schemas.microsoft.com/office/drawing/2014/main" id="{A5C9319C-E20D-4884-952F-60B6A58C3E34}"/>
+              </a:ext>
+              <a:ext uri="{C183D7F6-B498-43B3-948B-1728B52AA6E4}">
+                <adec:decorative xmlns:adec="http://schemas.microsoft.com/office/drawing/2017/decorative" val="1"/>
+              </a:ext>
+            </a:extLst>
+          </p:cNvPr>
+          <p:cNvCxnSpPr>
+            <a:cxnSpLocks noGrp="1" noRot="1" noChangeAspect="1" noMove="1" noResize="1" noEditPoints="1" noAdjustHandles="1" noChangeArrowheads="1" noChangeShapeType="1"/>
+          </p:cNvCxnSpPr>
+          <p:nvPr>
+            <p:extLst>
+              <p:ext uri="{386F3935-93C4-4BCD-93E2-E3B085C9AB24}">
+                <p16:designElem xmlns:p16="http://schemas.microsoft.com/office/powerpoint/2015/main" val="1"/>
+              </p:ext>
+            </p:extLst>
+          </p:nvPr>
+        </p:nvCxnSpPr>
         <p:spPr>
           <a:xfrm>
-            <a:off x="630195" y="2015734"/>
-            <a:ext cx="4934365" cy="3958346"/>
+            <a:off x="0" y="6128413"/>
+            <a:ext cx="12192000" cy="0"/>
           </a:xfrm>
+          <a:prstGeom prst="line">
+            <a:avLst/>
+          </a:prstGeom>
+          <a:ln w="12700">
+            <a:solidFill>
+              <a:srgbClr val="000001">
+                <a:alpha val="20000"/>
+              </a:srgbClr>
+            </a:solidFill>
+          </a:ln>
         </p:spPr>
-        <p:txBody>
-          <a:bodyPr>
-            <a:normAutofit/>
-          </a:bodyPr>
-          <a:lstStyle/>
-          <a:p>
-            <a:r>
-              <a:rPr lang="en-US" dirty="0"/>
-              <a:t>At least it is commonly used in science.</a:t>
-            </a:r>
-          </a:p>
-          <a:p>
-            <a:r>
-              <a:rPr lang="en-US" dirty="0"/>
-              <a:t>E.g. Give some people a vaccine</a:t>
-            </a:r>
-          </a:p>
-          <a:p>
-            <a:pPr lvl="1"/>
-            <a:r>
-              <a:rPr lang="en-US" dirty="0"/>
-              <a:t>How many got sick?</a:t>
-            </a:r>
-          </a:p>
-          <a:p>
-            <a:pPr lvl="1"/>
-            <a:r>
-              <a:rPr lang="en-US" dirty="0"/>
-              <a:t>How many didn’t?</a:t>
-            </a:r>
-          </a:p>
-          <a:p>
-            <a:pPr lvl="1"/>
-            <a:r>
-              <a:rPr lang="en-US" dirty="0"/>
-              <a:t>Is the difference significant?</a:t>
-            </a:r>
-          </a:p>
-          <a:p>
-            <a:r>
-              <a:rPr lang="en-US" dirty="0"/>
-              <a:t>Can we state that there’s a difference between two groups? And that difference is due to something real, not chance?</a:t>
-            </a:r>
+        <p:style>
+          <a:lnRef idx="1">
+            <a:schemeClr val="accent1"/>
+          </a:lnRef>
+          <a:fillRef idx="0">
+            <a:schemeClr val="accent1"/>
+          </a:fillRef>
+          <a:effectRef idx="0">
+            <a:schemeClr val="accent1"/>
+          </a:effectRef>
+          <a:fontRef idx="minor">
+            <a:schemeClr val="tx1"/>
+          </a:fontRef>
+        </p:style>
+      </p:cxnSp>
+      <p:sp useBgFill="1">
+        <p:nvSpPr>
+          <p:cNvPr id="77" name="Rectangle 76">
+            <a:extLst>
+              <a:ext uri="{FF2B5EF4-FFF2-40B4-BE49-F238E27FC236}">
+                <a16:creationId xmlns:a16="http://schemas.microsoft.com/office/drawing/2014/main" id="{F1176DA6-4BBF-42A4-9C94-E6613CCD6B37}"/>
+              </a:ext>
+              <a:ext uri="{C183D7F6-B498-43B3-948B-1728B52AA6E4}">
+                <adec:decorative xmlns:adec="http://schemas.microsoft.com/office/drawing/2017/decorative" val="1"/>
+              </a:ext>
+            </a:extLst>
+          </p:cNvPr>
+          <p:cNvSpPr>
+            <a:spLocks noGrp="1" noRot="1" noChangeAspect="1" noMove="1" noResize="1" noEditPoints="1" noAdjustHandles="1" noChangeArrowheads="1" noChangeShapeType="1" noTextEdit="1"/>
+          </p:cNvSpPr>
+          <p:nvPr>
+            <p:extLst>
+              <p:ext uri="{386F3935-93C4-4BCD-93E2-E3B085C9AB24}">
+                <p16:designElem xmlns:p16="http://schemas.microsoft.com/office/powerpoint/2015/main" val="1"/>
+              </p:ext>
+            </p:extLst>
+          </p:nvPr>
+        </p:nvSpPr>
+        <p:spPr>
+          <a:xfrm>
+            <a:off x="0" y="0"/>
+            <a:ext cx="12192000" cy="6858000"/>
+          </a:xfrm>
+          <a:prstGeom prst="rect">
+            <a:avLst/>
+          </a:prstGeom>
+          <a:ln>
+            <a:noFill/>
+          </a:ln>
+        </p:spPr>
+        <p:style>
+          <a:lnRef idx="2">
+            <a:schemeClr val="accent1">
+              <a:shade val="50000"/>
+            </a:schemeClr>
+          </a:lnRef>
+          <a:fillRef idx="1">
+            <a:schemeClr val="accent1"/>
+          </a:fillRef>
+          <a:effectRef idx="0">
+            <a:schemeClr val="accent1"/>
+          </a:effectRef>
+          <a:fontRef idx="minor">
+            <a:schemeClr val="lt1"/>
+          </a:fontRef>
+        </p:style>
+        <p:txBody>
+          <a:bodyPr rtlCol="0" anchor="ctr"/>
+          <a:lstStyle/>
+          <a:p>
+            <a:pPr algn="ctr"/>
+            <a:endParaRPr lang="en-US"/>
+          </a:p>
+        </p:txBody>
+      </p:sp>
+      <p:sp>
+        <p:nvSpPr>
+          <p:cNvPr id="79" name="Rectangle 78">
+            <a:extLst>
+              <a:ext uri="{FF2B5EF4-FFF2-40B4-BE49-F238E27FC236}">
+                <a16:creationId xmlns:a16="http://schemas.microsoft.com/office/drawing/2014/main" id="{99AAB0AE-172B-4FB4-80C2-86CD6B824220}"/>
+              </a:ext>
+              <a:ext uri="{C183D7F6-B498-43B3-948B-1728B52AA6E4}">
+                <adec:decorative xmlns:adec="http://schemas.microsoft.com/office/drawing/2017/decorative" val="1"/>
+              </a:ext>
+            </a:extLst>
+          </p:cNvPr>
+          <p:cNvSpPr>
+            <a:spLocks noGrp="1" noRot="1" noChangeAspect="1" noMove="1" noResize="1" noEditPoints="1" noAdjustHandles="1" noChangeArrowheads="1" noChangeShapeType="1" noTextEdit="1"/>
+          </p:cNvSpPr>
+          <p:nvPr>
+            <p:extLst>
+              <p:ext uri="{386F3935-93C4-4BCD-93E2-E3B085C9AB24}">
+                <p16:designElem xmlns:p16="http://schemas.microsoft.com/office/powerpoint/2015/main" val="1"/>
+              </p:ext>
+            </p:extLst>
+          </p:nvPr>
+        </p:nvSpPr>
+        <p:spPr>
+          <a:xfrm>
+            <a:off x="477012" y="480060"/>
+            <a:ext cx="11237976" cy="5897880"/>
+          </a:xfrm>
+          <a:prstGeom prst="rect">
+            <a:avLst/>
+          </a:prstGeom>
+          <a:solidFill>
+            <a:schemeClr val="bg1"/>
+          </a:solidFill>
+          <a:ln w="22225">
+            <a:solidFill>
+              <a:schemeClr val="tx1">
+                <a:lumMod val="50000"/>
+                <a:lumOff val="50000"/>
+              </a:schemeClr>
+            </a:solidFill>
+          </a:ln>
+        </p:spPr>
+        <p:style>
+          <a:lnRef idx="2">
+            <a:schemeClr val="accent1">
+              <a:shade val="50000"/>
+            </a:schemeClr>
+          </a:lnRef>
+          <a:fillRef idx="1">
+            <a:schemeClr val="accent1"/>
+          </a:fillRef>
+          <a:effectRef idx="0">
+            <a:schemeClr val="accent1"/>
+          </a:effectRef>
+          <a:fontRef idx="minor">
+            <a:schemeClr val="lt1"/>
+          </a:fontRef>
+        </p:style>
+        <p:txBody>
+          <a:bodyPr rtlCol="0" anchor="ctr"/>
+          <a:lstStyle/>
+          <a:p>
+            <a:pPr algn="ctr"/>
+            <a:endParaRPr lang="en-US"/>
           </a:p>
         </p:txBody>
       </p:sp>
       <p:pic>
         <p:nvPicPr>
-          <p:cNvPr id="1026" name="Picture 2" descr="Hypothesis vs. Theory: The Difference Explained | Merriam-Webster">
+          <p:cNvPr id="6146" name="Picture 2">
             <a:extLst>
               <a:ext uri="{FF2B5EF4-FFF2-40B4-BE49-F238E27FC236}">
-                <a16:creationId xmlns:a16="http://schemas.microsoft.com/office/drawing/2014/main" id="{CD8C1DE2-BD67-164B-B905-9C98DA89A777}"/>
+                <a16:creationId xmlns:a16="http://schemas.microsoft.com/office/drawing/2014/main" id="{8D98FC15-87F0-4843-B3F3-DD1B04498763}"/>
               </a:ext>
             </a:extLst>
           </p:cNvPr>
           <p:cNvPicPr>
-            <a:picLocks noChangeAspect="1" noChangeArrowheads="1"/>
+            <a:picLocks noGrp="1" noChangeAspect="1" noChangeArrowheads="1"/>
           </p:cNvPicPr>
-          <p:nvPr/>
+          <p:nvPr>
+            <p:ph idx="1"/>
+          </p:nvPr>
         </p:nvPicPr>
         <p:blipFill>
-          <a:blip r:embed="rId2">
+          <a:blip r:embed="rId3">
             <a:extLst>
               <a:ext uri="{28A0092B-C50C-407E-A947-70E740481C1C}">
                 <a14:useLocalDpi xmlns:a14="http://schemas.microsoft.com/office/drawing/2010/main" val="0"/>
@@ -6416,8 +9133,8 @@
         </p:blipFill>
         <p:spPr bwMode="auto">
           <a:xfrm>
-            <a:off x="5564560" y="1887421"/>
-            <a:ext cx="6627440" cy="4970579"/>
+            <a:off x="643467" y="975360"/>
+            <a:ext cx="10905066" cy="4907279"/>
           </a:xfrm>
           <a:prstGeom prst="rect">
             <a:avLst/>
@@ -6437,7 +9154,7 @@
     </p:spTree>
     <p:extLst>
       <p:ext uri="{BB962C8B-B14F-4D97-AF65-F5344CB8AC3E}">
-        <p14:creationId xmlns:p14="http://schemas.microsoft.com/office/powerpoint/2010/main" val="3552808515"/>
+        <p14:creationId xmlns:p14="http://schemas.microsoft.com/office/powerpoint/2010/main" val="2654219470"/>
       </p:ext>
     </p:extLst>
   </p:cSld>
@@ -6447,7 +9164,7 @@
 </p:sld>
 </file>
 
-<file path=ppt/slides/slide4.xml><?xml version="1.0" encoding="utf-8"?>
+<file path=ppt/slides/slide38.xml><?xml version="1.0" encoding="utf-8"?>
 <p:sld xmlns:a="http://schemas.openxmlformats.org/drawingml/2006/main" xmlns:r="http://schemas.openxmlformats.org/officeDocument/2006/relationships" xmlns:p="http://schemas.openxmlformats.org/presentationml/2006/main">
   <p:cSld>
     <p:spTree>
@@ -6469,7 +9186,7 @@
           <p:cNvPr id="2" name="Title 1">
             <a:extLst>
               <a:ext uri="{FF2B5EF4-FFF2-40B4-BE49-F238E27FC236}">
-                <a16:creationId xmlns:a16="http://schemas.microsoft.com/office/drawing/2014/main" id="{C50F3542-1AAB-334C-906A-F8224315790B}"/>
+                <a16:creationId xmlns:a16="http://schemas.microsoft.com/office/drawing/2014/main" id="{811F65A3-A0AA-C8BA-F107-02720C4387EC}"/>
               </a:ext>
             </a:extLst>
           </p:cNvPr>
@@ -6485,10 +9202,7 @@
           <a:bodyPr/>
           <a:lstStyle/>
           <a:p>
-            <a:r>
-              <a:rPr lang="en-US" dirty="0"/>
-              <a:t>Hypothesis Tests </a:t>
-            </a:r>
+            <a:endParaRPr lang="en-US"/>
           </a:p>
         </p:txBody>
       </p:sp>
@@ -6497,7 +9211,7 @@
           <p:cNvPr id="3" name="Content Placeholder 2">
             <a:extLst>
               <a:ext uri="{FF2B5EF4-FFF2-40B4-BE49-F238E27FC236}">
-                <a16:creationId xmlns:a16="http://schemas.microsoft.com/office/drawing/2014/main" id="{A73972D4-87BF-8740-8AD4-96E77B0CD030}"/>
+                <a16:creationId xmlns:a16="http://schemas.microsoft.com/office/drawing/2014/main" id="{738BF645-09AC-09C0-E33F-B83072CCE9B3}"/>
               </a:ext>
             </a:extLst>
           </p:cNvPr>
@@ -6508,69 +9222,66 @@
             <p:ph idx="1"/>
           </p:nvPr>
         </p:nvSpPr>
-        <p:spPr>
+        <p:spPr/>
+        <p:txBody>
+          <a:bodyPr/>
+          <a:lstStyle/>
+          <a:p>
+            <a:endParaRPr lang="en-US"/>
+          </a:p>
+        </p:txBody>
+      </p:sp>
+      <p:pic>
+        <p:nvPicPr>
+          <p:cNvPr id="2050" name="Picture 2" descr="Difference between Z-Test and T-Test - GeeksforGeeks">
+            <a:extLst>
+              <a:ext uri="{FF2B5EF4-FFF2-40B4-BE49-F238E27FC236}">
+                <a16:creationId xmlns:a16="http://schemas.microsoft.com/office/drawing/2014/main" id="{9C9F8A59-48EA-7FC7-1944-08D77554B627}"/>
+              </a:ext>
+            </a:extLst>
+          </p:cNvPr>
+          <p:cNvPicPr>
+            <a:picLocks noChangeAspect="1" noChangeArrowheads="1"/>
+          </p:cNvPicPr>
+          <p:nvPr/>
+        </p:nvPicPr>
+        <p:blipFill>
+          <a:blip r:embed="rId2">
+            <a:extLst>
+              <a:ext uri="{28A0092B-C50C-407E-A947-70E740481C1C}">
+                <a14:useLocalDpi xmlns:a14="http://schemas.microsoft.com/office/drawing/2010/main" val="0"/>
+              </a:ext>
+            </a:extLst>
+          </a:blip>
+          <a:srcRect/>
+          <a:stretch>
+            <a:fillRect/>
+          </a:stretch>
+        </p:blipFill>
+        <p:spPr bwMode="auto">
           <a:xfrm>
-            <a:off x="1137146" y="1853754"/>
-            <a:ext cx="10455413" cy="4303206"/>
+            <a:off x="0" y="563563"/>
+            <a:ext cx="12192000" cy="5730875"/>
           </a:xfrm>
+          <a:prstGeom prst="rect">
+            <a:avLst/>
+          </a:prstGeom>
+          <a:noFill/>
+          <a:extLst>
+            <a:ext uri="{909E8E84-426E-40DD-AFC4-6F175D3DCCD1}">
+              <a14:hiddenFill xmlns:a14="http://schemas.microsoft.com/office/drawing/2010/main">
+                <a:solidFill>
+                  <a:srgbClr val="FFFFFF"/>
+                </a:solidFill>
+              </a14:hiddenFill>
+            </a:ext>
+          </a:extLst>
         </p:spPr>
-        <p:txBody>
-          <a:bodyPr>
-            <a:normAutofit/>
-          </a:bodyPr>
-          <a:lstStyle/>
-          <a:p>
-            <a:r>
-              <a:rPr lang="en-US" dirty="0"/>
-              <a:t>Notice a difference (effect) in data, test to see if is “real”, or due to variation. </a:t>
-            </a:r>
-          </a:p>
-          <a:p>
-            <a:r>
-              <a:rPr lang="en-US" dirty="0"/>
-              <a:t>Real can be highly situation dependent:</a:t>
-            </a:r>
-          </a:p>
-          <a:p>
-            <a:pPr lvl="1"/>
-            <a:r>
-              <a:rPr lang="en-US" dirty="0"/>
-              <a:t>Different situations yield different criteria. </a:t>
-            </a:r>
-          </a:p>
-          <a:p>
-            <a:endParaRPr lang="en-US" dirty="0"/>
-          </a:p>
-          <a:p>
-            <a:r>
-              <a:rPr lang="en-US" dirty="0"/>
-              <a:t>Problem – there’s no definitive way to go from probabilities and results of samples to definitive declarations for an entire population. We are always making an inference, not showing a law. </a:t>
-            </a:r>
-          </a:p>
-          <a:p>
-            <a:r>
-              <a:rPr lang="en-US" dirty="0"/>
-              <a:t>Reliable conclusions will require domain knowledge, and likely more than one calc. </a:t>
-            </a:r>
-          </a:p>
-          <a:p>
-            <a:r>
-              <a:rPr lang="en-US" dirty="0"/>
-              <a:t>All of these things are “ways to demonstrate a difference”, not absolute rules. </a:t>
-            </a:r>
-          </a:p>
-          <a:p>
-            <a:r>
-              <a:rPr lang="en-US" dirty="0"/>
-              <a:t>Similar to predictions later – we are stating a conclusion, and offering evidence of its truth. </a:t>
-            </a:r>
-          </a:p>
-        </p:txBody>
-      </p:sp>
+      </p:pic>
     </p:spTree>
     <p:extLst>
       <p:ext uri="{BB962C8B-B14F-4D97-AF65-F5344CB8AC3E}">
-        <p14:creationId xmlns:p14="http://schemas.microsoft.com/office/powerpoint/2010/main" val="2641840238"/>
+        <p14:creationId xmlns:p14="http://schemas.microsoft.com/office/powerpoint/2010/main" val="1227351256"/>
       </p:ext>
     </p:extLst>
   </p:cSld>
@@ -6580,7 +9291,543 @@
 </p:sld>
 </file>
 
-<file path=ppt/slides/slide5.xml><?xml version="1.0" encoding="utf-8"?>
+<file path=ppt/slides/slide39.xml><?xml version="1.0" encoding="utf-8"?>
+<p:sld xmlns:a="http://schemas.openxmlformats.org/drawingml/2006/main" xmlns:r="http://schemas.openxmlformats.org/officeDocument/2006/relationships" xmlns:p="http://schemas.openxmlformats.org/presentationml/2006/main" show="0">
+  <p:cSld>
+    <p:spTree>
+      <p:nvGrpSpPr>
+        <p:cNvPr id="1" name=""/>
+        <p:cNvGrpSpPr/>
+        <p:nvPr/>
+      </p:nvGrpSpPr>
+      <p:grpSpPr>
+        <a:xfrm>
+          <a:off x="0" y="0"/>
+          <a:ext cx="0" cy="0"/>
+          <a:chOff x="0" y="0"/>
+          <a:chExt cx="0" cy="0"/>
+        </a:xfrm>
+      </p:grpSpPr>
+      <p:sp>
+        <p:nvSpPr>
+          <p:cNvPr id="2" name="Title 1">
+            <a:extLst>
+              <a:ext uri="{FF2B5EF4-FFF2-40B4-BE49-F238E27FC236}">
+                <a16:creationId xmlns:a16="http://schemas.microsoft.com/office/drawing/2014/main" id="{5F22F6A2-1A31-8B79-3CFC-B3423C81D552}"/>
+              </a:ext>
+            </a:extLst>
+          </p:cNvPr>
+          <p:cNvSpPr>
+            <a:spLocks noGrp="1"/>
+          </p:cNvSpPr>
+          <p:nvPr>
+            <p:ph type="title"/>
+          </p:nvPr>
+        </p:nvSpPr>
+        <p:spPr/>
+        <p:txBody>
+          <a:bodyPr/>
+          <a:lstStyle/>
+          <a:p>
+            <a:r>
+              <a:rPr lang="en-US" dirty="0"/>
+              <a:t>Calculating the tests</a:t>
+            </a:r>
+          </a:p>
+        </p:txBody>
+      </p:sp>
+      <p:sp>
+        <p:nvSpPr>
+          <p:cNvPr id="3" name="Content Placeholder 2">
+            <a:extLst>
+              <a:ext uri="{FF2B5EF4-FFF2-40B4-BE49-F238E27FC236}">
+                <a16:creationId xmlns:a16="http://schemas.microsoft.com/office/drawing/2014/main" id="{AC643535-FDC0-4308-035D-72BE61B95AE1}"/>
+              </a:ext>
+            </a:extLst>
+          </p:cNvPr>
+          <p:cNvSpPr>
+            <a:spLocks noGrp="1"/>
+          </p:cNvSpPr>
+          <p:nvPr>
+            <p:ph idx="1"/>
+          </p:nvPr>
+        </p:nvSpPr>
+        <p:spPr/>
+        <p:txBody>
+          <a:bodyPr/>
+          <a:lstStyle/>
+          <a:p>
+            <a:endParaRPr lang="en-US"/>
+          </a:p>
+        </p:txBody>
+      </p:sp>
+      <p:pic>
+        <p:nvPicPr>
+          <p:cNvPr id="1026" name="Picture 2" descr="Calculate t-value">
+            <a:extLst>
+              <a:ext uri="{FF2B5EF4-FFF2-40B4-BE49-F238E27FC236}">
+                <a16:creationId xmlns:a16="http://schemas.microsoft.com/office/drawing/2014/main" id="{C6994AD9-7FFF-C14D-0713-EA35750445C5}"/>
+              </a:ext>
+            </a:extLst>
+          </p:cNvPr>
+          <p:cNvPicPr>
+            <a:picLocks noChangeAspect="1" noChangeArrowheads="1"/>
+          </p:cNvPicPr>
+          <p:nvPr/>
+        </p:nvPicPr>
+        <p:blipFill>
+          <a:blip r:embed="rId2">
+            <a:extLst>
+              <a:ext uri="{28A0092B-C50C-407E-A947-70E740481C1C}">
+                <a14:useLocalDpi xmlns:a14="http://schemas.microsoft.com/office/drawing/2010/main" val="0"/>
+              </a:ext>
+            </a:extLst>
+          </a:blip>
+          <a:srcRect/>
+          <a:stretch>
+            <a:fillRect/>
+          </a:stretch>
+        </p:blipFill>
+        <p:spPr bwMode="auto">
+          <a:xfrm>
+            <a:off x="5469781" y="747293"/>
+            <a:ext cx="6451600" cy="2374900"/>
+          </a:xfrm>
+          <a:prstGeom prst="rect">
+            <a:avLst/>
+          </a:prstGeom>
+          <a:noFill/>
+          <a:extLst>
+            <a:ext uri="{909E8E84-426E-40DD-AFC4-6F175D3DCCD1}">
+              <a14:hiddenFill xmlns:a14="http://schemas.microsoft.com/office/drawing/2010/main">
+                <a:solidFill>
+                  <a:srgbClr val="FFFFFF"/>
+                </a:solidFill>
+              </a14:hiddenFill>
+            </a:ext>
+          </a:extLst>
+        </p:spPr>
+      </p:pic>
+      <p:pic>
+        <p:nvPicPr>
+          <p:cNvPr id="1028" name="Picture 4" descr="t-value in t-test independent samples">
+            <a:extLst>
+              <a:ext uri="{FF2B5EF4-FFF2-40B4-BE49-F238E27FC236}">
+                <a16:creationId xmlns:a16="http://schemas.microsoft.com/office/drawing/2014/main" id="{5E70AE33-CBEB-4E17-FF8D-554B1F332B12}"/>
+              </a:ext>
+            </a:extLst>
+          </p:cNvPr>
+          <p:cNvPicPr>
+            <a:picLocks noChangeAspect="1" noChangeArrowheads="1"/>
+          </p:cNvPicPr>
+          <p:nvPr/>
+        </p:nvPicPr>
+        <p:blipFill>
+          <a:blip r:embed="rId3">
+            <a:extLst>
+              <a:ext uri="{28A0092B-C50C-407E-A947-70E740481C1C}">
+                <a14:useLocalDpi xmlns:a14="http://schemas.microsoft.com/office/drawing/2010/main" val="0"/>
+              </a:ext>
+            </a:extLst>
+          </a:blip>
+          <a:srcRect/>
+          <a:stretch>
+            <a:fillRect/>
+          </a:stretch>
+        </p:blipFill>
+        <p:spPr bwMode="auto">
+          <a:xfrm>
+            <a:off x="6854081" y="2899168"/>
+            <a:ext cx="5067300" cy="3886200"/>
+          </a:xfrm>
+          <a:prstGeom prst="rect">
+            <a:avLst/>
+          </a:prstGeom>
+          <a:noFill/>
+          <a:extLst>
+            <a:ext uri="{909E8E84-426E-40DD-AFC4-6F175D3DCCD1}">
+              <a14:hiddenFill xmlns:a14="http://schemas.microsoft.com/office/drawing/2010/main">
+                <a:solidFill>
+                  <a:srgbClr val="FFFFFF"/>
+                </a:solidFill>
+              </a14:hiddenFill>
+            </a:ext>
+          </a:extLst>
+        </p:spPr>
+      </p:pic>
+    </p:spTree>
+    <p:extLst>
+      <p:ext uri="{BB962C8B-B14F-4D97-AF65-F5344CB8AC3E}">
+        <p14:creationId xmlns:p14="http://schemas.microsoft.com/office/powerpoint/2010/main" val="2070858688"/>
+      </p:ext>
+    </p:extLst>
+  </p:cSld>
+  <p:clrMapOvr>
+    <a:masterClrMapping/>
+  </p:clrMapOvr>
+</p:sld>
+</file>
+
+<file path=ppt/slides/slide4.xml><?xml version="1.0" encoding="utf-8"?>
+<p:sld xmlns:a="http://schemas.openxmlformats.org/drawingml/2006/main" xmlns:r="http://schemas.openxmlformats.org/officeDocument/2006/relationships" xmlns:p="http://schemas.openxmlformats.org/presentationml/2006/main" show="0">
+  <p:cSld>
+    <p:spTree>
+      <p:nvGrpSpPr>
+        <p:cNvPr id="1" name=""/>
+        <p:cNvGrpSpPr/>
+        <p:nvPr/>
+      </p:nvGrpSpPr>
+      <p:grpSpPr>
+        <a:xfrm>
+          <a:off x="0" y="0"/>
+          <a:ext cx="0" cy="0"/>
+          <a:chOff x="0" y="0"/>
+          <a:chExt cx="0" cy="0"/>
+        </a:xfrm>
+      </p:grpSpPr>
+      <p:sp>
+        <p:nvSpPr>
+          <p:cNvPr id="2" name="Title 1">
+            <a:extLst>
+              <a:ext uri="{FF2B5EF4-FFF2-40B4-BE49-F238E27FC236}">
+                <a16:creationId xmlns:a16="http://schemas.microsoft.com/office/drawing/2014/main" id="{3D63269E-AAC3-61F0-A2DB-867CAE780FF4}"/>
+              </a:ext>
+            </a:extLst>
+          </p:cNvPr>
+          <p:cNvSpPr>
+            <a:spLocks noGrp="1"/>
+          </p:cNvSpPr>
+          <p:nvPr>
+            <p:ph type="title"/>
+          </p:nvPr>
+        </p:nvSpPr>
+        <p:spPr/>
+        <p:txBody>
+          <a:bodyPr/>
+          <a:lstStyle/>
+          <a:p>
+            <a:r>
+              <a:rPr lang="en-US" dirty="0"/>
+              <a:t>Hypothesis Test</a:t>
+            </a:r>
+          </a:p>
+        </p:txBody>
+      </p:sp>
+      <p:sp>
+        <p:nvSpPr>
+          <p:cNvPr id="3" name="Content Placeholder 2">
+            <a:extLst>
+              <a:ext uri="{FF2B5EF4-FFF2-40B4-BE49-F238E27FC236}">
+                <a16:creationId xmlns:a16="http://schemas.microsoft.com/office/drawing/2014/main" id="{A78F8A65-87BC-7150-5EF4-ED6622A95FE8}"/>
+              </a:ext>
+            </a:extLst>
+          </p:cNvPr>
+          <p:cNvSpPr>
+            <a:spLocks noGrp="1"/>
+          </p:cNvSpPr>
+          <p:nvPr>
+            <p:ph idx="1"/>
+          </p:nvPr>
+        </p:nvSpPr>
+        <p:spPr/>
+        <p:txBody>
+          <a:bodyPr/>
+          <a:lstStyle/>
+          <a:p>
+            <a:r>
+              <a:rPr lang="en-US" dirty="0"/>
+              <a:t>Hypothesis testing is a reasonably large topic. </a:t>
+            </a:r>
+          </a:p>
+        </p:txBody>
+      </p:sp>
+    </p:spTree>
+    <p:extLst>
+      <p:ext uri="{BB962C8B-B14F-4D97-AF65-F5344CB8AC3E}">
+        <p14:creationId xmlns:p14="http://schemas.microsoft.com/office/powerpoint/2010/main" val="2539723738"/>
+      </p:ext>
+    </p:extLst>
+  </p:cSld>
+  <p:clrMapOvr>
+    <a:masterClrMapping/>
+  </p:clrMapOvr>
+</p:sld>
+</file>
+
+<file path=ppt/slides/slide40.xml><?xml version="1.0" encoding="utf-8"?>
+<p:sld xmlns:a="http://schemas.openxmlformats.org/drawingml/2006/main" xmlns:r="http://schemas.openxmlformats.org/officeDocument/2006/relationships" xmlns:p="http://schemas.openxmlformats.org/presentationml/2006/main">
+  <p:cSld>
+    <p:spTree>
+      <p:nvGrpSpPr>
+        <p:cNvPr id="1" name=""/>
+        <p:cNvGrpSpPr/>
+        <p:nvPr/>
+      </p:nvGrpSpPr>
+      <p:grpSpPr>
+        <a:xfrm>
+          <a:off x="0" y="0"/>
+          <a:ext cx="0" cy="0"/>
+          <a:chOff x="0" y="0"/>
+          <a:chExt cx="0" cy="0"/>
+        </a:xfrm>
+      </p:grpSpPr>
+      <p:sp>
+        <p:nvSpPr>
+          <p:cNvPr id="2" name="Title 1">
+            <a:extLst>
+              <a:ext uri="{FF2B5EF4-FFF2-40B4-BE49-F238E27FC236}">
+                <a16:creationId xmlns:a16="http://schemas.microsoft.com/office/drawing/2014/main" id="{5F240032-86EE-D042-A41F-F73A666B9CB7}"/>
+              </a:ext>
+            </a:extLst>
+          </p:cNvPr>
+          <p:cNvSpPr>
+            <a:spLocks noGrp="1"/>
+          </p:cNvSpPr>
+          <p:nvPr>
+            <p:ph type="title"/>
+          </p:nvPr>
+        </p:nvSpPr>
+        <p:spPr/>
+        <p:txBody>
+          <a:bodyPr/>
+          <a:lstStyle/>
+          <a:p>
+            <a:r>
+              <a:rPr lang="en-US" dirty="0"/>
+              <a:t>Test Assumptions – Parametric </a:t>
+            </a:r>
+            <a:r>
+              <a:rPr lang="en-US" dirty="0" err="1"/>
+              <a:t>TEst</a:t>
+            </a:r>
+            <a:endParaRPr lang="en-US" dirty="0"/>
+          </a:p>
+        </p:txBody>
+      </p:sp>
+      <p:sp>
+        <p:nvSpPr>
+          <p:cNvPr id="3" name="Content Placeholder 2">
+            <a:extLst>
+              <a:ext uri="{FF2B5EF4-FFF2-40B4-BE49-F238E27FC236}">
+                <a16:creationId xmlns:a16="http://schemas.microsoft.com/office/drawing/2014/main" id="{38AA6E6A-2A74-D642-A764-13B0702EDB9D}"/>
+              </a:ext>
+            </a:extLst>
+          </p:cNvPr>
+          <p:cNvSpPr>
+            <a:spLocks noGrp="1"/>
+          </p:cNvSpPr>
+          <p:nvPr>
+            <p:ph idx="1"/>
+          </p:nvPr>
+        </p:nvSpPr>
+        <p:spPr>
+          <a:xfrm>
+            <a:off x="1451579" y="2015732"/>
+            <a:ext cx="9603275" cy="4171708"/>
+          </a:xfrm>
+        </p:spPr>
+        <p:txBody>
+          <a:bodyPr>
+            <a:normAutofit lnSpcReduction="10000"/>
+          </a:bodyPr>
+          <a:lstStyle/>
+          <a:p>
+            <a:r>
+              <a:rPr lang="en-US" dirty="0"/>
+              <a:t>Data is normally distributed. </a:t>
+            </a:r>
+          </a:p>
+          <a:p>
+            <a:pPr lvl="1"/>
+            <a:r>
+              <a:rPr lang="en-US" dirty="0"/>
+              <a:t>Central limit theorem (more on this later) – as you get more data, samples of many things become more normal. </a:t>
+            </a:r>
+          </a:p>
+          <a:p>
+            <a:pPr lvl="1"/>
+            <a:r>
+              <a:rPr lang="en-US" dirty="0"/>
+              <a:t>Non-normal data can sometimes be transformed (e.g. log income from last week)</a:t>
+            </a:r>
+          </a:p>
+          <a:p>
+            <a:r>
+              <a:rPr lang="en-US" dirty="0"/>
+              <a:t>Equal variance:</a:t>
+            </a:r>
+          </a:p>
+          <a:p>
+            <a:pPr lvl="1"/>
+            <a:r>
+              <a:rPr lang="en-US" dirty="0"/>
+              <a:t>Argument in </a:t>
+            </a:r>
+            <a:r>
+              <a:rPr lang="en-US" dirty="0" err="1"/>
+              <a:t>scipy</a:t>
+            </a:r>
+            <a:r>
+              <a:rPr lang="en-US" dirty="0"/>
+              <a:t> t-test. </a:t>
+            </a:r>
+          </a:p>
+          <a:p>
+            <a:pPr lvl="1"/>
+            <a:r>
+              <a:rPr lang="en-US" dirty="0"/>
+              <a:t>Normal t-test assumes true, Welch’s does not. </a:t>
+            </a:r>
+          </a:p>
+          <a:p>
+            <a:r>
+              <a:rPr lang="en-US" dirty="0"/>
+              <a:t>Observations are independent. </a:t>
+            </a:r>
+          </a:p>
+          <a:p>
+            <a:r>
+              <a:rPr lang="en-US" dirty="0"/>
+              <a:t>No/minimal outliers. </a:t>
+            </a:r>
+          </a:p>
+          <a:p>
+            <a:pPr lvl="1"/>
+            <a:r>
+              <a:rPr lang="en-US" dirty="0"/>
+              <a:t>There’s a “trim” option to take out outliers in the </a:t>
+            </a:r>
+            <a:r>
+              <a:rPr lang="en-US" dirty="0" err="1"/>
+              <a:t>scipy</a:t>
+            </a:r>
+            <a:r>
+              <a:rPr lang="en-US" dirty="0"/>
+              <a:t> stuff. </a:t>
+            </a:r>
+          </a:p>
+        </p:txBody>
+      </p:sp>
+    </p:spTree>
+    <p:extLst>
+      <p:ext uri="{BB962C8B-B14F-4D97-AF65-F5344CB8AC3E}">
+        <p14:creationId xmlns:p14="http://schemas.microsoft.com/office/powerpoint/2010/main" val="3336447634"/>
+      </p:ext>
+    </p:extLst>
+  </p:cSld>
+  <p:clrMapOvr>
+    <a:masterClrMapping/>
+  </p:clrMapOvr>
+</p:sld>
+</file>
+
+<file path=ppt/slides/slide41.xml><?xml version="1.0" encoding="utf-8"?>
+<p:sld xmlns:a="http://schemas.openxmlformats.org/drawingml/2006/main" xmlns:r="http://schemas.openxmlformats.org/officeDocument/2006/relationships" xmlns:p="http://schemas.openxmlformats.org/presentationml/2006/main">
+  <p:cSld>
+    <p:spTree>
+      <p:nvGrpSpPr>
+        <p:cNvPr id="1" name=""/>
+        <p:cNvGrpSpPr/>
+        <p:nvPr/>
+      </p:nvGrpSpPr>
+      <p:grpSpPr>
+        <a:xfrm>
+          <a:off x="0" y="0"/>
+          <a:ext cx="0" cy="0"/>
+          <a:chOff x="0" y="0"/>
+          <a:chExt cx="0" cy="0"/>
+        </a:xfrm>
+      </p:grpSpPr>
+      <p:sp>
+        <p:nvSpPr>
+          <p:cNvPr id="2" name="Title 1">
+            <a:extLst>
+              <a:ext uri="{FF2B5EF4-FFF2-40B4-BE49-F238E27FC236}">
+                <a16:creationId xmlns:a16="http://schemas.microsoft.com/office/drawing/2014/main" id="{C16DE78B-CAB7-B840-A8D2-2FF5E9523193}"/>
+              </a:ext>
+            </a:extLst>
+          </p:cNvPr>
+          <p:cNvSpPr>
+            <a:spLocks noGrp="1"/>
+          </p:cNvSpPr>
+          <p:nvPr>
+            <p:ph type="title"/>
+          </p:nvPr>
+        </p:nvSpPr>
+        <p:spPr/>
+        <p:txBody>
+          <a:bodyPr/>
+          <a:lstStyle/>
+          <a:p>
+            <a:r>
+              <a:rPr lang="en-US" dirty="0"/>
+              <a:t>Other Tests</a:t>
+            </a:r>
+          </a:p>
+        </p:txBody>
+      </p:sp>
+      <p:sp>
+        <p:nvSpPr>
+          <p:cNvPr id="3" name="Content Placeholder 2">
+            <a:extLst>
+              <a:ext uri="{FF2B5EF4-FFF2-40B4-BE49-F238E27FC236}">
+                <a16:creationId xmlns:a16="http://schemas.microsoft.com/office/drawing/2014/main" id="{7F83A866-680A-0A46-BAC5-898B2DB87A2D}"/>
+              </a:ext>
+            </a:extLst>
+          </p:cNvPr>
+          <p:cNvSpPr>
+            <a:spLocks noGrp="1"/>
+          </p:cNvSpPr>
+          <p:nvPr>
+            <p:ph idx="1"/>
+          </p:nvPr>
+        </p:nvSpPr>
+        <p:spPr/>
+        <p:txBody>
+          <a:bodyPr/>
+          <a:lstStyle/>
+          <a:p>
+            <a:r>
+              <a:rPr lang="en-US" dirty="0"/>
+              <a:t>There are many other statistical tests that can be useful in other scenarios. </a:t>
+            </a:r>
+          </a:p>
+          <a:p>
+            <a:r>
+              <a:rPr lang="en-US" dirty="0"/>
+              <a:t>We can look one up based on our scenario, if needed. Some common ones:</a:t>
+            </a:r>
+          </a:p>
+          <a:p>
+            <a:pPr lvl="1"/>
+            <a:r>
+              <a:rPr lang="en-US" dirty="0"/>
+              <a:t>ANOVA (analysis of variance) – Test means of 3+ groups. </a:t>
+            </a:r>
+          </a:p>
+          <a:p>
+            <a:pPr lvl="1"/>
+            <a:r>
+              <a:rPr lang="en-US" dirty="0"/>
+              <a:t>Mann-Whitney – T-test equivalent with no assumption of distributions. </a:t>
+            </a:r>
+          </a:p>
+        </p:txBody>
+      </p:sp>
+    </p:spTree>
+    <p:extLst>
+      <p:ext uri="{BB962C8B-B14F-4D97-AF65-F5344CB8AC3E}">
+        <p14:creationId xmlns:p14="http://schemas.microsoft.com/office/powerpoint/2010/main" val="1530674256"/>
+      </p:ext>
+    </p:extLst>
+  </p:cSld>
+  <p:clrMapOvr>
+    <a:masterClrMapping/>
+  </p:clrMapOvr>
+</p:sld>
+</file>
+
+<file path=ppt/slides/slide42.xml><?xml version="1.0" encoding="utf-8"?>
 <p:sld xmlns:a="http://schemas.openxmlformats.org/drawingml/2006/main" xmlns:r="http://schemas.openxmlformats.org/officeDocument/2006/relationships" xmlns:p="http://schemas.openxmlformats.org/presentationml/2006/main">
   <p:cSld>
     <p:bg>
@@ -6626,7 +9873,7 @@
           <p:cNvPr id="2" name="Title 1">
             <a:extLst>
               <a:ext uri="{FF2B5EF4-FFF2-40B4-BE49-F238E27FC236}">
-                <a16:creationId xmlns:a16="http://schemas.microsoft.com/office/drawing/2014/main" id="{1043841F-69FE-3249-BD4A-C67CCDF98C90}"/>
+                <a16:creationId xmlns:a16="http://schemas.microsoft.com/office/drawing/2014/main" id="{D6A034D5-E952-294B-AC81-5584708DAFFB}"/>
               </a:ext>
             </a:extLst>
           </p:cNvPr>
@@ -6651,111 +9898,1165 @@
           <a:p>
             <a:r>
               <a:rPr lang="en-US" dirty="0"/>
-              <a:t>Flashback – Cohen’s Effect Size</a:t>
-            </a:r>
-          </a:p>
-        </p:txBody>
-      </p:sp>
-      <p:sp>
-        <p:nvSpPr>
-          <p:cNvPr id="3" name="Content Placeholder 2">
-            <a:extLst>
-              <a:ext uri="{FF2B5EF4-FFF2-40B4-BE49-F238E27FC236}">
-                <a16:creationId xmlns:a16="http://schemas.microsoft.com/office/drawing/2014/main" id="{8B9A6E8C-6885-E34E-9D72-60BD727D40C5}"/>
-              </a:ext>
-            </a:extLst>
-          </p:cNvPr>
-          <p:cNvSpPr>
-            <a:spLocks noGrp="1"/>
-          </p:cNvSpPr>
-          <p:nvPr>
-            <p:ph idx="1"/>
-          </p:nvPr>
-        </p:nvSpPr>
-        <p:spPr>
-          <a:xfrm>
-            <a:off x="1451579" y="2015734"/>
-            <a:ext cx="6195784" cy="4037747"/>
-          </a:xfrm>
-        </p:spPr>
-        <p:txBody>
-          <a:bodyPr>
-            <a:normAutofit/>
-          </a:bodyPr>
-          <a:lstStyle/>
-          <a:p>
-            <a:r>
-              <a:rPr lang="en-US" dirty="0"/>
-              <a:t>Effect size is very good for showing how big of a difference there is between groups.</a:t>
-            </a:r>
-          </a:p>
-          <a:p>
-            <a:pPr lvl="1"/>
-            <a:r>
-              <a:rPr lang="en-US" dirty="0"/>
-              <a:t>How ”big” is the difference between A and B</a:t>
-            </a:r>
-          </a:p>
-          <a:p>
-            <a:r>
-              <a:rPr lang="en-US" dirty="0"/>
-              <a:t>Easy to calculate, symmetrical, comparable across studies. </a:t>
-            </a:r>
-          </a:p>
-          <a:p>
-            <a:r>
-              <a:rPr lang="en-US" dirty="0"/>
-              <a:t>Downside – the value doesn’t have obvious meaning. </a:t>
-            </a:r>
-          </a:p>
-          <a:p>
-            <a:r>
-              <a:rPr lang="en-US" dirty="0"/>
-              <a:t>Table is a list of approximate significance, by Cohen himself. </a:t>
-            </a:r>
-          </a:p>
-          <a:p>
-            <a:r>
-              <a:rPr lang="en-US" dirty="0"/>
-              <a:t>Book’s author a huge proponent of effect size!</a:t>
+              <a:t>Demise of Hypothesis Testing</a:t>
             </a:r>
           </a:p>
         </p:txBody>
       </p:sp>
       <p:pic>
         <p:nvPicPr>
-          <p:cNvPr id="4" name="Picture 3">
+          <p:cNvPr id="8194" name="Picture 2" descr="Graphical user interface, text, application, email&#10;&#10;Description automatically generated">
             <a:extLst>
               <a:ext uri="{FF2B5EF4-FFF2-40B4-BE49-F238E27FC236}">
-                <a16:creationId xmlns:a16="http://schemas.microsoft.com/office/drawing/2014/main" id="{B77DD00A-365A-7D43-BA89-E174F497726F}"/>
+                <a16:creationId xmlns:a16="http://schemas.microsoft.com/office/drawing/2014/main" id="{843CC31A-A8D8-D94B-BE98-048586839791}"/>
               </a:ext>
             </a:extLst>
           </p:cNvPr>
           <p:cNvPicPr>
-            <a:picLocks noChangeAspect="1"/>
+            <a:picLocks noChangeAspect="1" noChangeArrowheads="1"/>
           </p:cNvPicPr>
           <p:nvPr/>
         </p:nvPicPr>
         <p:blipFill>
-          <a:blip r:embed="rId2"/>
+          <a:blip r:embed="rId2">
+            <a:extLst>
+              <a:ext uri="{28A0092B-C50C-407E-A947-70E740481C1C}">
+                <a14:useLocalDpi xmlns:a14="http://schemas.microsoft.com/office/drawing/2010/main" val="0"/>
+              </a:ext>
+            </a:extLst>
+          </a:blip>
           <a:stretch>
             <a:fillRect/>
           </a:stretch>
         </p:blipFill>
-        <p:spPr>
+        <p:spPr bwMode="auto">
           <a:xfrm>
-            <a:off x="8541247" y="2015734"/>
-            <a:ext cx="2727388" cy="4479127"/>
+            <a:off x="191739" y="2111065"/>
+            <a:ext cx="6038708" cy="2979095"/>
           </a:xfrm>
           <a:prstGeom prst="rect">
             <a:avLst/>
           </a:prstGeom>
+          <a:noFill/>
+          <a:extLst>
+            <a:ext uri="{909E8E84-426E-40DD-AFC4-6F175D3DCCD1}">
+              <a14:hiddenFill xmlns:a14="http://schemas.microsoft.com/office/drawing/2010/main">
+                <a:solidFill>
+                  <a:srgbClr val="FFFFFF"/>
+                </a:solidFill>
+              </a14:hiddenFill>
+            </a:ext>
+          </a:extLst>
+        </p:spPr>
+      </p:pic>
+      <p:sp>
+        <p:nvSpPr>
+          <p:cNvPr id="3" name="Content Placeholder 2">
+            <a:extLst>
+              <a:ext uri="{FF2B5EF4-FFF2-40B4-BE49-F238E27FC236}">
+                <a16:creationId xmlns:a16="http://schemas.microsoft.com/office/drawing/2014/main" id="{F7E53707-A64A-6E40-9F66-E23093385A9E}"/>
+              </a:ext>
+            </a:extLst>
+          </p:cNvPr>
+          <p:cNvSpPr>
+            <a:spLocks noGrp="1"/>
+          </p:cNvSpPr>
+          <p:nvPr>
+            <p:ph idx="1"/>
+          </p:nvPr>
+        </p:nvSpPr>
+        <p:spPr>
+          <a:xfrm>
+            <a:off x="6230447" y="1853755"/>
+            <a:ext cx="5769814" cy="4199726"/>
+          </a:xfrm>
+        </p:spPr>
+        <p:txBody>
+          <a:bodyPr>
+            <a:normAutofit fontScale="92500"/>
+          </a:bodyPr>
+          <a:lstStyle/>
+          <a:p>
+            <a:pPr>
+              <a:lnSpc>
+                <a:spcPct val="110000"/>
+              </a:lnSpc>
+            </a:pPr>
+            <a:r>
+              <a:rPr lang="en-US" sz="1800" dirty="0"/>
+              <a:t>P-values are (somewhat) on their way out. </a:t>
+            </a:r>
+          </a:p>
+          <a:p>
+            <a:pPr lvl="1">
+              <a:lnSpc>
+                <a:spcPct val="110000"/>
+              </a:lnSpc>
+            </a:pPr>
+            <a:r>
+              <a:rPr lang="en-US" dirty="0"/>
+              <a:t>Banned from some medical journals as too easy to pass. </a:t>
+            </a:r>
+          </a:p>
+          <a:p>
+            <a:pPr lvl="1">
+              <a:lnSpc>
+                <a:spcPct val="110000"/>
+              </a:lnSpc>
+            </a:pPr>
+            <a:r>
+              <a:rPr lang="en-US" dirty="0"/>
+              <a:t>NHST = null </a:t>
+            </a:r>
+            <a:r>
+              <a:rPr lang="en-US" dirty="0" err="1"/>
+              <a:t>hyp</a:t>
+            </a:r>
+            <a:r>
+              <a:rPr lang="en-US" dirty="0"/>
+              <a:t>. significance testing. </a:t>
+            </a:r>
+          </a:p>
+          <a:p>
+            <a:pPr>
+              <a:lnSpc>
+                <a:spcPct val="110000"/>
+              </a:lnSpc>
+            </a:pPr>
+            <a:r>
+              <a:rPr lang="en-US" sz="1800" dirty="0"/>
+              <a:t>Unfortunately, and surprisingly, there’s no perfect alternative. </a:t>
+            </a:r>
+          </a:p>
+          <a:p>
+            <a:pPr>
+              <a:lnSpc>
+                <a:spcPct val="110000"/>
+              </a:lnSpc>
+            </a:pPr>
+            <a:r>
+              <a:rPr lang="en-US" sz="1800" dirty="0"/>
+              <a:t>What do we do???</a:t>
+            </a:r>
+          </a:p>
+          <a:p>
+            <a:pPr lvl="1">
+              <a:lnSpc>
+                <a:spcPct val="110000"/>
+              </a:lnSpc>
+            </a:pPr>
+            <a:r>
+              <a:rPr lang="en-US" dirty="0"/>
+              <a:t>Effect size. </a:t>
+            </a:r>
+          </a:p>
+          <a:p>
+            <a:pPr lvl="1">
+              <a:lnSpc>
+                <a:spcPct val="110000"/>
+              </a:lnSpc>
+            </a:pPr>
+            <a:r>
+              <a:rPr lang="en-US" dirty="0"/>
+              <a:t>Estimate mean with standard error and confidence intervals. </a:t>
+            </a:r>
+          </a:p>
+          <a:p>
+            <a:pPr lvl="1">
+              <a:lnSpc>
+                <a:spcPct val="110000"/>
+              </a:lnSpc>
+            </a:pPr>
+            <a:r>
+              <a:rPr lang="en-US" dirty="0"/>
+              <a:t>Bayesian estimation (we </a:t>
+            </a:r>
+            <a:r>
+              <a:rPr lang="en-US" i="1" dirty="0"/>
+              <a:t>might</a:t>
+            </a:r>
+            <a:r>
+              <a:rPr lang="en-US" dirty="0"/>
+              <a:t> touch on this later)</a:t>
+            </a:r>
+          </a:p>
+          <a:p>
+            <a:pPr>
+              <a:lnSpc>
+                <a:spcPct val="110000"/>
+              </a:lnSpc>
+            </a:pPr>
+            <a:r>
+              <a:rPr lang="en-US" dirty="0"/>
+              <a:t>Real statisticians are actively debating this – we don’t have a firm answer. </a:t>
+            </a:r>
+          </a:p>
+        </p:txBody>
+      </p:sp>
+    </p:spTree>
+    <p:extLst>
+      <p:ext uri="{BB962C8B-B14F-4D97-AF65-F5344CB8AC3E}">
+        <p14:creationId xmlns:p14="http://schemas.microsoft.com/office/powerpoint/2010/main" val="2551124561"/>
+      </p:ext>
+    </p:extLst>
+  </p:cSld>
+  <p:clrMapOvr>
+    <a:masterClrMapping/>
+  </p:clrMapOvr>
+</p:sld>
+</file>
+
+<file path=ppt/slides/slide43.xml><?xml version="1.0" encoding="utf-8"?>
+<p:sld xmlns:a="http://schemas.openxmlformats.org/drawingml/2006/main" xmlns:r="http://schemas.openxmlformats.org/officeDocument/2006/relationships" xmlns:p="http://schemas.openxmlformats.org/presentationml/2006/main">
+  <p:cSld>
+    <p:bg>
+      <p:bgPr>
+        <a:gradFill rotWithShape="1">
+          <a:gsLst>
+            <a:gs pos="0">
+              <a:schemeClr val="bg2">
+                <a:tint val="94000"/>
+                <a:satMod val="80000"/>
+                <a:lumMod val="106000"/>
+              </a:schemeClr>
+            </a:gs>
+            <a:gs pos="100000">
+              <a:schemeClr val="bg2">
+                <a:shade val="80000"/>
+              </a:schemeClr>
+            </a:gs>
+          </a:gsLst>
+          <a:path path="circle">
+            <a:fillToRect l="43000" r="43000" b="100000"/>
+          </a:path>
+        </a:gradFill>
+        <a:effectLst/>
+      </p:bgPr>
+    </p:bg>
+    <p:spTree>
+      <p:nvGrpSpPr>
+        <p:cNvPr id="1" name=""/>
+        <p:cNvGrpSpPr/>
+        <p:nvPr/>
+      </p:nvGrpSpPr>
+      <p:grpSpPr>
+        <a:xfrm>
+          <a:off x="0" y="0"/>
+          <a:ext cx="0" cy="0"/>
+          <a:chOff x="0" y="0"/>
+          <a:chExt cx="0" cy="0"/>
+        </a:xfrm>
+      </p:grpSpPr>
+      <p:sp>
+        <p:nvSpPr>
+          <p:cNvPr id="2" name="Title 1">
+            <a:extLst>
+              <a:ext uri="{FF2B5EF4-FFF2-40B4-BE49-F238E27FC236}">
+                <a16:creationId xmlns:a16="http://schemas.microsoft.com/office/drawing/2014/main" id="{AA861DA4-0DF2-D249-9DDF-0D62D36A5841}"/>
+              </a:ext>
+            </a:extLst>
+          </p:cNvPr>
+          <p:cNvSpPr>
+            <a:spLocks noGrp="1"/>
+          </p:cNvSpPr>
+          <p:nvPr>
+            <p:ph type="title"/>
+          </p:nvPr>
+        </p:nvSpPr>
+        <p:spPr>
+          <a:xfrm>
+            <a:off x="1451579" y="804519"/>
+            <a:ext cx="9603275" cy="1049235"/>
+          </a:xfrm>
+        </p:spPr>
+        <p:txBody>
+          <a:bodyPr>
+            <a:normAutofit/>
+          </a:bodyPr>
+          <a:lstStyle/>
+          <a:p>
+            <a:r>
+              <a:rPr lang="en-US" dirty="0"/>
+              <a:t>P Hacking</a:t>
+            </a:r>
+          </a:p>
+        </p:txBody>
+      </p:sp>
+      <p:sp>
+        <p:nvSpPr>
+          <p:cNvPr id="3" name="Content Placeholder 2">
+            <a:extLst>
+              <a:ext uri="{FF2B5EF4-FFF2-40B4-BE49-F238E27FC236}">
+                <a16:creationId xmlns:a16="http://schemas.microsoft.com/office/drawing/2014/main" id="{05C14BC6-77F4-534E-A32E-70385FECA69B}"/>
+              </a:ext>
+            </a:extLst>
+          </p:cNvPr>
+          <p:cNvSpPr>
+            <a:spLocks noGrp="1"/>
+          </p:cNvSpPr>
+          <p:nvPr>
+            <p:ph idx="1"/>
+          </p:nvPr>
+        </p:nvSpPr>
+        <p:spPr>
+          <a:xfrm>
+            <a:off x="1451579" y="2015734"/>
+            <a:ext cx="5622284" cy="3450613"/>
+          </a:xfrm>
+        </p:spPr>
+        <p:txBody>
+          <a:bodyPr>
+            <a:normAutofit/>
+          </a:bodyPr>
+          <a:lstStyle/>
+          <a:p>
+            <a:endParaRPr lang="en-US"/>
+          </a:p>
+        </p:txBody>
+      </p:sp>
+      <p:pic>
+        <p:nvPicPr>
+          <p:cNvPr id="2050" name="Picture 2" descr="A Useful Urinal Etiquette Guide For All Men, Everywhere - Mandatory">
+            <a:extLst>
+              <a:ext uri="{FF2B5EF4-FFF2-40B4-BE49-F238E27FC236}">
+                <a16:creationId xmlns:a16="http://schemas.microsoft.com/office/drawing/2014/main" id="{28D2CAA2-1578-214A-8E05-B00489994910}"/>
+              </a:ext>
+            </a:extLst>
+          </p:cNvPr>
+          <p:cNvPicPr>
+            <a:picLocks noChangeAspect="1" noChangeArrowheads="1"/>
+          </p:cNvPicPr>
+          <p:nvPr/>
+        </p:nvPicPr>
+        <p:blipFill>
+          <a:blip r:embed="rId2">
+            <a:extLst>
+              <a:ext uri="{28A0092B-C50C-407E-A947-70E740481C1C}">
+                <a14:useLocalDpi xmlns:a14="http://schemas.microsoft.com/office/drawing/2010/main" val="0"/>
+              </a:ext>
+            </a:extLst>
+          </a:blip>
+          <a:stretch>
+            <a:fillRect/>
+          </a:stretch>
+        </p:blipFill>
+        <p:spPr bwMode="auto">
+          <a:xfrm>
+            <a:off x="160637" y="2015734"/>
+            <a:ext cx="6422388" cy="3612593"/>
+          </a:xfrm>
+          <a:prstGeom prst="rect">
+            <a:avLst/>
+          </a:prstGeom>
+          <a:noFill/>
+          <a:extLst>
+            <a:ext uri="{909E8E84-426E-40DD-AFC4-6F175D3DCCD1}">
+              <a14:hiddenFill xmlns:a14="http://schemas.microsoft.com/office/drawing/2010/main">
+                <a:solidFill>
+                  <a:srgbClr val="FFFFFF"/>
+                </a:solidFill>
+              </a14:hiddenFill>
+            </a:ext>
+          </a:extLst>
+        </p:spPr>
+      </p:pic>
+      <p:pic>
+        <p:nvPicPr>
+          <p:cNvPr id="2052" name="Picture 4" descr="A Look into Computer Hacking - WORT 89.9 FM">
+            <a:extLst>
+              <a:ext uri="{FF2B5EF4-FFF2-40B4-BE49-F238E27FC236}">
+                <a16:creationId xmlns:a16="http://schemas.microsoft.com/office/drawing/2014/main" id="{15F358B1-FC4A-244D-AA90-5BBAAA1F7F68}"/>
+              </a:ext>
+            </a:extLst>
+          </p:cNvPr>
+          <p:cNvPicPr>
+            <a:picLocks noChangeAspect="1" noChangeArrowheads="1"/>
+          </p:cNvPicPr>
+          <p:nvPr/>
+        </p:nvPicPr>
+        <p:blipFill>
+          <a:blip r:embed="rId3">
+            <a:extLst>
+              <a:ext uri="{28A0092B-C50C-407E-A947-70E740481C1C}">
+                <a14:useLocalDpi xmlns:a14="http://schemas.microsoft.com/office/drawing/2010/main" val="0"/>
+              </a:ext>
+            </a:extLst>
+          </a:blip>
+          <a:srcRect/>
+          <a:stretch>
+            <a:fillRect/>
+          </a:stretch>
+        </p:blipFill>
+        <p:spPr bwMode="auto">
+          <a:xfrm>
+            <a:off x="6789656" y="2107248"/>
+            <a:ext cx="5241707" cy="4577757"/>
+          </a:xfrm>
+          <a:prstGeom prst="rect">
+            <a:avLst/>
+          </a:prstGeom>
+          <a:noFill/>
+          <a:extLst>
+            <a:ext uri="{909E8E84-426E-40DD-AFC4-6F175D3DCCD1}">
+              <a14:hiddenFill xmlns:a14="http://schemas.microsoft.com/office/drawing/2010/main">
+                <a:solidFill>
+                  <a:srgbClr val="FFFFFF"/>
+                </a:solidFill>
+              </a14:hiddenFill>
+            </a:ext>
+          </a:extLst>
         </p:spPr>
       </p:pic>
     </p:spTree>
     <p:extLst>
       <p:ext uri="{BB962C8B-B14F-4D97-AF65-F5344CB8AC3E}">
-        <p14:creationId xmlns:p14="http://schemas.microsoft.com/office/powerpoint/2010/main" val="1678335132"/>
+        <p14:creationId xmlns:p14="http://schemas.microsoft.com/office/powerpoint/2010/main" val="3269594207"/>
+      </p:ext>
+    </p:extLst>
+  </p:cSld>
+  <p:clrMapOvr>
+    <a:masterClrMapping/>
+  </p:clrMapOvr>
+</p:sld>
+</file>
+
+<file path=ppt/slides/slide44.xml><?xml version="1.0" encoding="utf-8"?>
+<p:sld xmlns:a="http://schemas.openxmlformats.org/drawingml/2006/main" xmlns:r="http://schemas.openxmlformats.org/officeDocument/2006/relationships" xmlns:p="http://schemas.openxmlformats.org/presentationml/2006/main">
+  <p:cSld>
+    <p:spTree>
+      <p:nvGrpSpPr>
+        <p:cNvPr id="1" name=""/>
+        <p:cNvGrpSpPr/>
+        <p:nvPr/>
+      </p:nvGrpSpPr>
+      <p:grpSpPr>
+        <a:xfrm>
+          <a:off x="0" y="0"/>
+          <a:ext cx="0" cy="0"/>
+          <a:chOff x="0" y="0"/>
+          <a:chExt cx="0" cy="0"/>
+        </a:xfrm>
+      </p:grpSpPr>
+      <p:sp>
+        <p:nvSpPr>
+          <p:cNvPr id="2" name="Title 1">
+            <a:extLst>
+              <a:ext uri="{FF2B5EF4-FFF2-40B4-BE49-F238E27FC236}">
+                <a16:creationId xmlns:a16="http://schemas.microsoft.com/office/drawing/2014/main" id="{8D48E8B3-406C-794A-B1EF-BCB803974BCE}"/>
+              </a:ext>
+            </a:extLst>
+          </p:cNvPr>
+          <p:cNvSpPr>
+            <a:spLocks noGrp="1"/>
+          </p:cNvSpPr>
+          <p:nvPr>
+            <p:ph type="title"/>
+          </p:nvPr>
+        </p:nvSpPr>
+        <p:spPr/>
+        <p:txBody>
+          <a:bodyPr/>
+          <a:lstStyle/>
+          <a:p>
+            <a:r>
+              <a:rPr lang="en-US" dirty="0"/>
+              <a:t>What is P-Hacking?</a:t>
+            </a:r>
+          </a:p>
+        </p:txBody>
+      </p:sp>
+      <p:sp>
+        <p:nvSpPr>
+          <p:cNvPr id="3" name="Content Placeholder 2">
+            <a:extLst>
+              <a:ext uri="{FF2B5EF4-FFF2-40B4-BE49-F238E27FC236}">
+                <a16:creationId xmlns:a16="http://schemas.microsoft.com/office/drawing/2014/main" id="{F9B6F98D-1784-EC4E-A263-DBC24CE4E93A}"/>
+              </a:ext>
+            </a:extLst>
+          </p:cNvPr>
+          <p:cNvSpPr>
+            <a:spLocks noGrp="1"/>
+          </p:cNvSpPr>
+          <p:nvPr>
+            <p:ph idx="1"/>
+          </p:nvPr>
+        </p:nvSpPr>
+        <p:spPr>
+          <a:xfrm>
+            <a:off x="1451579" y="1853754"/>
+            <a:ext cx="9603275" cy="4287273"/>
+          </a:xfrm>
+        </p:spPr>
+        <p:txBody>
+          <a:bodyPr>
+            <a:normAutofit/>
+          </a:bodyPr>
+          <a:lstStyle/>
+          <a:p>
+            <a:r>
+              <a:rPr lang="en-US" dirty="0"/>
+              <a:t>Generally, we (the royal one) are looking to demonstrate significance:</a:t>
+            </a:r>
+          </a:p>
+          <a:p>
+            <a:pPr lvl="1"/>
+            <a:r>
+              <a:rPr lang="en-US" dirty="0"/>
+              <a:t>This drug works – the people who took it live longer.</a:t>
+            </a:r>
+          </a:p>
+          <a:p>
+            <a:pPr lvl="1"/>
+            <a:r>
+              <a:rPr lang="en-US" dirty="0"/>
+              <a:t>This thing I noticed in my thesis is real – some effect is due to a real thing, not randomness.</a:t>
+            </a:r>
+          </a:p>
+          <a:p>
+            <a:pPr lvl="1"/>
+            <a:r>
+              <a:rPr lang="en-US" dirty="0"/>
+              <a:t>This difference matters – group A really is different from group B. </a:t>
+            </a:r>
+          </a:p>
+          <a:p>
+            <a:r>
+              <a:rPr lang="en-US" dirty="0"/>
+              <a:t>95% confidence is only 19 times out of 20. </a:t>
+            </a:r>
+          </a:p>
+          <a:p>
+            <a:r>
+              <a:rPr lang="en-US" dirty="0"/>
+              <a:t>If we just want to show something is significant:</a:t>
+            </a:r>
+          </a:p>
+          <a:p>
+            <a:pPr lvl="1"/>
+            <a:r>
+              <a:rPr lang="en-US" dirty="0"/>
+              <a:t>Manipulate variables</a:t>
+            </a:r>
+          </a:p>
+          <a:p>
+            <a:pPr lvl="1"/>
+            <a:r>
+              <a:rPr lang="en-US" dirty="0"/>
+              <a:t>Repeat testing with different details</a:t>
+            </a:r>
+          </a:p>
+          <a:p>
+            <a:pPr lvl="1"/>
+            <a:r>
+              <a:rPr lang="en-US" dirty="0"/>
+              <a:t>Find a small p</a:t>
+            </a:r>
+          </a:p>
+          <a:p>
+            <a:pPr lvl="1"/>
+            <a:r>
+              <a:rPr lang="en-US" dirty="0"/>
+              <a:t>Publish!!!!!!!</a:t>
+            </a:r>
+          </a:p>
+        </p:txBody>
+      </p:sp>
+    </p:spTree>
+    <p:extLst>
+      <p:ext uri="{BB962C8B-B14F-4D97-AF65-F5344CB8AC3E}">
+        <p14:creationId xmlns:p14="http://schemas.microsoft.com/office/powerpoint/2010/main" val="2930291580"/>
+      </p:ext>
+    </p:extLst>
+  </p:cSld>
+  <p:clrMapOvr>
+    <a:masterClrMapping/>
+  </p:clrMapOvr>
+</p:sld>
+</file>
+
+<file path=ppt/slides/slide45.xml><?xml version="1.0" encoding="utf-8"?>
+<p:sld xmlns:a="http://schemas.openxmlformats.org/drawingml/2006/main" xmlns:r="http://schemas.openxmlformats.org/officeDocument/2006/relationships" xmlns:p="http://schemas.openxmlformats.org/presentationml/2006/main">
+  <p:cSld>
+    <p:bg>
+      <p:bgPr>
+        <a:gradFill rotWithShape="1">
+          <a:gsLst>
+            <a:gs pos="0">
+              <a:schemeClr val="bg2">
+                <a:tint val="94000"/>
+                <a:satMod val="80000"/>
+                <a:lumMod val="106000"/>
+              </a:schemeClr>
+            </a:gs>
+            <a:gs pos="100000">
+              <a:schemeClr val="bg2">
+                <a:shade val="80000"/>
+              </a:schemeClr>
+            </a:gs>
+          </a:gsLst>
+          <a:path path="circle">
+            <a:fillToRect l="43000" r="43000" b="100000"/>
+          </a:path>
+        </a:gradFill>
+        <a:effectLst/>
+      </p:bgPr>
+    </p:bg>
+    <p:spTree>
+      <p:nvGrpSpPr>
+        <p:cNvPr id="1" name=""/>
+        <p:cNvGrpSpPr/>
+        <p:nvPr/>
+      </p:nvGrpSpPr>
+      <p:grpSpPr>
+        <a:xfrm>
+          <a:off x="0" y="0"/>
+          <a:ext cx="0" cy="0"/>
+          <a:chOff x="0" y="0"/>
+          <a:chExt cx="0" cy="0"/>
+        </a:xfrm>
+      </p:grpSpPr>
+      <p:sp>
+        <p:nvSpPr>
+          <p:cNvPr id="2" name="Title 1">
+            <a:extLst>
+              <a:ext uri="{FF2B5EF4-FFF2-40B4-BE49-F238E27FC236}">
+                <a16:creationId xmlns:a16="http://schemas.microsoft.com/office/drawing/2014/main" id="{722F0982-DE8D-644B-8D71-399253321296}"/>
+              </a:ext>
+            </a:extLst>
+          </p:cNvPr>
+          <p:cNvSpPr>
+            <a:spLocks noGrp="1"/>
+          </p:cNvSpPr>
+          <p:nvPr>
+            <p:ph type="title"/>
+          </p:nvPr>
+        </p:nvSpPr>
+        <p:spPr>
+          <a:xfrm>
+            <a:off x="1451579" y="804519"/>
+            <a:ext cx="9603275" cy="1049235"/>
+          </a:xfrm>
+        </p:spPr>
+        <p:txBody>
+          <a:bodyPr>
+            <a:normAutofit/>
+          </a:bodyPr>
+          <a:lstStyle/>
+          <a:p>
+            <a:r>
+              <a:rPr lang="en-US" dirty="0"/>
+              <a:t>Data Dredging</a:t>
+            </a:r>
+          </a:p>
+        </p:txBody>
+      </p:sp>
+      <p:sp>
+        <p:nvSpPr>
+          <p:cNvPr id="3" name="Content Placeholder 2">
+            <a:extLst>
+              <a:ext uri="{FF2B5EF4-FFF2-40B4-BE49-F238E27FC236}">
+                <a16:creationId xmlns:a16="http://schemas.microsoft.com/office/drawing/2014/main" id="{81BAD69F-CDE9-8746-8218-37FB9AD709BD}"/>
+              </a:ext>
+            </a:extLst>
+          </p:cNvPr>
+          <p:cNvSpPr>
+            <a:spLocks noGrp="1"/>
+          </p:cNvSpPr>
+          <p:nvPr>
+            <p:ph idx="1"/>
+          </p:nvPr>
+        </p:nvSpPr>
+        <p:spPr>
+          <a:xfrm>
+            <a:off x="723662" y="1931651"/>
+            <a:ext cx="6024381" cy="4037747"/>
+          </a:xfrm>
+        </p:spPr>
+        <p:txBody>
+          <a:bodyPr>
+            <a:normAutofit/>
+          </a:bodyPr>
+          <a:lstStyle/>
+          <a:p>
+            <a:r>
+              <a:rPr lang="en-US" sz="2400" dirty="0"/>
+              <a:t>P Hacking is one example of Data Dredging:</a:t>
+            </a:r>
+          </a:p>
+          <a:p>
+            <a:pPr lvl="1"/>
+            <a:r>
+              <a:rPr lang="en-US" sz="2000" dirty="0"/>
+              <a:t>Manipulating analysis to find justification for a predetermined result. </a:t>
+            </a:r>
+          </a:p>
+          <a:p>
+            <a:r>
+              <a:rPr lang="en-US" sz="2400" dirty="0"/>
+              <a:t>E.g. if I want to show correlation, predictive value, or similar for an example, I can:</a:t>
+            </a:r>
+          </a:p>
+          <a:p>
+            <a:pPr lvl="1"/>
+            <a:r>
+              <a:rPr lang="en-US" sz="2000" dirty="0"/>
+              <a:t>Remove (or add) data arbitrarily to change results. </a:t>
+            </a:r>
+          </a:p>
+          <a:p>
+            <a:pPr lvl="1"/>
+            <a:r>
+              <a:rPr lang="en-US" sz="2000" dirty="0"/>
+              <a:t>Transform data in some way.</a:t>
+            </a:r>
+          </a:p>
+          <a:p>
+            <a:pPr lvl="1"/>
+            <a:r>
+              <a:rPr lang="en-US" sz="2000" dirty="0"/>
+              <a:t>Run a test, then change things to get what I want. </a:t>
+            </a:r>
+          </a:p>
+        </p:txBody>
+      </p:sp>
+      <p:pic>
+        <p:nvPicPr>
+          <p:cNvPr id="3074" name="Picture 2" descr="Lies, Damn Lies, and Statistics: How the COVID-19 Crisis Highlights Our  Misuse of Data | Foley Hoag LLP - Environmental Law - JDSupra">
+            <a:extLst>
+              <a:ext uri="{FF2B5EF4-FFF2-40B4-BE49-F238E27FC236}">
+                <a16:creationId xmlns:a16="http://schemas.microsoft.com/office/drawing/2014/main" id="{22FBCF00-8A1B-034C-BF4C-A4471315BE83}"/>
+              </a:ext>
+            </a:extLst>
+          </p:cNvPr>
+          <p:cNvPicPr>
+            <a:picLocks noChangeAspect="1" noChangeArrowheads="1"/>
+          </p:cNvPicPr>
+          <p:nvPr/>
+        </p:nvPicPr>
+        <p:blipFill>
+          <a:blip r:embed="rId2">
+            <a:extLst>
+              <a:ext uri="{28A0092B-C50C-407E-A947-70E740481C1C}">
+                <a14:useLocalDpi xmlns:a14="http://schemas.microsoft.com/office/drawing/2010/main" val="0"/>
+              </a:ext>
+            </a:extLst>
+          </a:blip>
+          <a:stretch>
+            <a:fillRect/>
+          </a:stretch>
+        </p:blipFill>
+        <p:spPr bwMode="auto">
+          <a:xfrm>
+            <a:off x="6696227" y="1931651"/>
+            <a:ext cx="5495774" cy="4121830"/>
+          </a:xfrm>
+          <a:prstGeom prst="rect">
+            <a:avLst/>
+          </a:prstGeom>
+          <a:noFill/>
+          <a:extLst>
+            <a:ext uri="{909E8E84-426E-40DD-AFC4-6F175D3DCCD1}">
+              <a14:hiddenFill xmlns:a14="http://schemas.microsoft.com/office/drawing/2010/main">
+                <a:solidFill>
+                  <a:srgbClr val="FFFFFF"/>
+                </a:solidFill>
+              </a14:hiddenFill>
+            </a:ext>
+          </a:extLst>
+        </p:spPr>
+      </p:pic>
+    </p:spTree>
+    <p:extLst>
+      <p:ext uri="{BB962C8B-B14F-4D97-AF65-F5344CB8AC3E}">
+        <p14:creationId xmlns:p14="http://schemas.microsoft.com/office/powerpoint/2010/main" val="2893789664"/>
+      </p:ext>
+    </p:extLst>
+  </p:cSld>
+  <p:clrMapOvr>
+    <a:masterClrMapping/>
+  </p:clrMapOvr>
+</p:sld>
+</file>
+
+<file path=ppt/slides/slide46.xml><?xml version="1.0" encoding="utf-8"?>
+<p:sld xmlns:a="http://schemas.openxmlformats.org/drawingml/2006/main" xmlns:r="http://schemas.openxmlformats.org/officeDocument/2006/relationships" xmlns:p="http://schemas.openxmlformats.org/presentationml/2006/main">
+  <p:cSld>
+    <p:spTree>
+      <p:nvGrpSpPr>
+        <p:cNvPr id="1" name=""/>
+        <p:cNvGrpSpPr/>
+        <p:nvPr/>
+      </p:nvGrpSpPr>
+      <p:grpSpPr>
+        <a:xfrm>
+          <a:off x="0" y="0"/>
+          <a:ext cx="0" cy="0"/>
+          <a:chOff x="0" y="0"/>
+          <a:chExt cx="0" cy="0"/>
+        </a:xfrm>
+      </p:grpSpPr>
+      <p:sp>
+        <p:nvSpPr>
+          <p:cNvPr id="2" name="Title 1">
+            <a:extLst>
+              <a:ext uri="{FF2B5EF4-FFF2-40B4-BE49-F238E27FC236}">
+                <a16:creationId xmlns:a16="http://schemas.microsoft.com/office/drawing/2014/main" id="{BE41156D-A56A-0842-B741-09E6D744E59F}"/>
+              </a:ext>
+            </a:extLst>
+          </p:cNvPr>
+          <p:cNvSpPr>
+            <a:spLocks noGrp="1"/>
+          </p:cNvSpPr>
+          <p:nvPr>
+            <p:ph type="title"/>
+          </p:nvPr>
+        </p:nvSpPr>
+        <p:spPr/>
+        <p:txBody>
+          <a:bodyPr/>
+          <a:lstStyle/>
+          <a:p>
+            <a:r>
+              <a:rPr lang="en-US" dirty="0"/>
+              <a:t>Don’t be a P Hacker (Unless Maybe if grant Funding Depends on it)</a:t>
+            </a:r>
+          </a:p>
+        </p:txBody>
+      </p:sp>
+      <p:sp>
+        <p:nvSpPr>
+          <p:cNvPr id="3" name="Content Placeholder 2">
+            <a:extLst>
+              <a:ext uri="{FF2B5EF4-FFF2-40B4-BE49-F238E27FC236}">
+                <a16:creationId xmlns:a16="http://schemas.microsoft.com/office/drawing/2014/main" id="{09C2E57C-E69A-784E-B887-A6B8D10B924B}"/>
+              </a:ext>
+            </a:extLst>
+          </p:cNvPr>
+          <p:cNvSpPr>
+            <a:spLocks noGrp="1"/>
+          </p:cNvSpPr>
+          <p:nvPr>
+            <p:ph idx="1"/>
+          </p:nvPr>
+        </p:nvSpPr>
+        <p:spPr>
+          <a:xfrm>
+            <a:off x="1451579" y="2015732"/>
+            <a:ext cx="9603275" cy="4037749"/>
+          </a:xfrm>
+        </p:spPr>
+        <p:txBody>
+          <a:bodyPr/>
+          <a:lstStyle/>
+          <a:p>
+            <a:r>
+              <a:rPr lang="en-US" dirty="0"/>
+              <a:t>Share process, not just results. </a:t>
+            </a:r>
+          </a:p>
+          <a:p>
+            <a:r>
+              <a:rPr lang="en-US" dirty="0"/>
+              <a:t>Look for multiple metrics of significance that agree with each other. </a:t>
+            </a:r>
+          </a:p>
+          <a:p>
+            <a:r>
+              <a:rPr lang="en-US" dirty="0"/>
+              <a:t>Just “don’t” – avoid searching for ways to force data to show what you want. </a:t>
+            </a:r>
+          </a:p>
+          <a:p>
+            <a:pPr lvl="1"/>
+            <a:r>
+              <a:rPr lang="en-US" dirty="0"/>
+              <a:t>P hacking usually involves extra work – changing test statistics, filtering data, </a:t>
+            </a:r>
+            <a:r>
+              <a:rPr lang="en-US" dirty="0" err="1"/>
+              <a:t>etc</a:t>
+            </a:r>
+            <a:r>
+              <a:rPr lang="en-US" dirty="0"/>
+              <a:t>…</a:t>
+            </a:r>
+          </a:p>
+          <a:p>
+            <a:pPr lvl="1"/>
+            <a:r>
+              <a:rPr lang="en-US" dirty="0"/>
+              <a:t>If an experiment is well designed, we live with the results. </a:t>
+            </a:r>
+          </a:p>
+          <a:p>
+            <a:r>
+              <a:rPr lang="en-US" dirty="0"/>
+              <a:t>This is a malicious application of stats – we should be offended!!!!!</a:t>
+            </a:r>
+          </a:p>
+          <a:p>
+            <a:pPr lvl="1"/>
+            <a:r>
+              <a:rPr lang="en-US" dirty="0"/>
+              <a:t>Biologists, doctors, </a:t>
+            </a:r>
+            <a:r>
+              <a:rPr lang="en-US" dirty="0" err="1"/>
+              <a:t>etc</a:t>
+            </a:r>
+            <a:r>
+              <a:rPr lang="en-US" dirty="0"/>
+              <a:t>… misuse our precious math to make their crap sciences look legit. </a:t>
+            </a:r>
+          </a:p>
+          <a:p>
+            <a:r>
+              <a:rPr lang="en-US" dirty="0"/>
+              <a:t>If you need to show your research shows significance, then hack away at your p. </a:t>
+            </a:r>
+          </a:p>
+        </p:txBody>
+      </p:sp>
+    </p:spTree>
+    <p:extLst>
+      <p:ext uri="{BB962C8B-B14F-4D97-AF65-F5344CB8AC3E}">
+        <p14:creationId xmlns:p14="http://schemas.microsoft.com/office/powerpoint/2010/main" val="1179250358"/>
+      </p:ext>
+    </p:extLst>
+  </p:cSld>
+  <p:clrMapOvr>
+    <a:masterClrMapping/>
+  </p:clrMapOvr>
+</p:sld>
+</file>
+
+<file path=ppt/slides/slide47.xml><?xml version="1.0" encoding="utf-8"?>
+<p:sld xmlns:a="http://schemas.openxmlformats.org/drawingml/2006/main" xmlns:r="http://schemas.openxmlformats.org/officeDocument/2006/relationships" xmlns:p="http://schemas.openxmlformats.org/presentationml/2006/main">
+  <p:cSld>
+    <p:spTree>
+      <p:nvGrpSpPr>
+        <p:cNvPr id="1" name=""/>
+        <p:cNvGrpSpPr/>
+        <p:nvPr/>
+      </p:nvGrpSpPr>
+      <p:grpSpPr>
+        <a:xfrm>
+          <a:off x="0" y="0"/>
+          <a:ext cx="0" cy="0"/>
+          <a:chOff x="0" y="0"/>
+          <a:chExt cx="0" cy="0"/>
+        </a:xfrm>
+      </p:grpSpPr>
+      <p:sp>
+        <p:nvSpPr>
+          <p:cNvPr id="2" name="Title 1">
+            <a:extLst>
+              <a:ext uri="{FF2B5EF4-FFF2-40B4-BE49-F238E27FC236}">
+                <a16:creationId xmlns:a16="http://schemas.microsoft.com/office/drawing/2014/main" id="{0335BE2D-F548-0127-319A-2B53F05C6ED9}"/>
+              </a:ext>
+            </a:extLst>
+          </p:cNvPr>
+          <p:cNvSpPr>
+            <a:spLocks noGrp="1"/>
+          </p:cNvSpPr>
+          <p:nvPr>
+            <p:ph type="title"/>
+          </p:nvPr>
+        </p:nvSpPr>
+        <p:spPr/>
+        <p:txBody>
+          <a:bodyPr/>
+          <a:lstStyle/>
+          <a:p>
+            <a:r>
+              <a:rPr lang="en-US" dirty="0"/>
+              <a:t>Hypothesis tests and you!</a:t>
+            </a:r>
+          </a:p>
+        </p:txBody>
+      </p:sp>
+      <p:sp>
+        <p:nvSpPr>
+          <p:cNvPr id="3" name="Content Placeholder 2">
+            <a:extLst>
+              <a:ext uri="{FF2B5EF4-FFF2-40B4-BE49-F238E27FC236}">
+                <a16:creationId xmlns:a16="http://schemas.microsoft.com/office/drawing/2014/main" id="{36EABB56-8944-BD49-D204-10BA7A987AED}"/>
+              </a:ext>
+            </a:extLst>
+          </p:cNvPr>
+          <p:cNvSpPr>
+            <a:spLocks noGrp="1"/>
+          </p:cNvSpPr>
+          <p:nvPr>
+            <p:ph idx="1"/>
+          </p:nvPr>
+        </p:nvSpPr>
+        <p:spPr>
+          <a:xfrm>
+            <a:off x="1451579" y="1853755"/>
+            <a:ext cx="9603275" cy="4199726"/>
+          </a:xfrm>
+        </p:spPr>
+        <p:txBody>
+          <a:bodyPr/>
+          <a:lstStyle/>
+          <a:p>
+            <a:r>
+              <a:rPr lang="en-US" dirty="0"/>
+              <a:t>These hypothesis tests are specific parametric applications of our simulation loops. </a:t>
+            </a:r>
+          </a:p>
+          <a:p>
+            <a:pPr lvl="1"/>
+            <a:r>
+              <a:rPr lang="en-US" dirty="0"/>
+              <a:t>Each hypothesis tests says, “out of N trials how many…”</a:t>
+            </a:r>
+          </a:p>
+          <a:p>
+            <a:pPr lvl="1"/>
+            <a:r>
+              <a:rPr lang="en-US" dirty="0"/>
+              <a:t>E.g. out of 100 times, how many will randomly show a difference in life exp. </a:t>
+            </a:r>
+          </a:p>
+          <a:p>
+            <a:pPr lvl="1"/>
+            <a:r>
+              <a:rPr lang="en-US" dirty="0"/>
+              <a:t>Or, what is the probability of this difference being due to random selection. </a:t>
+            </a:r>
+          </a:p>
+          <a:p>
+            <a:r>
+              <a:rPr lang="en-US" dirty="0"/>
+              <a:t>If we can create some function for one trial/round we can run this directly.  </a:t>
+            </a:r>
+          </a:p>
+          <a:p>
+            <a:pPr lvl="1"/>
+            <a:r>
+              <a:rPr lang="en-US" dirty="0"/>
+              <a:t>Analytical distribution, probability function, </a:t>
+            </a:r>
+            <a:r>
+              <a:rPr lang="en-US" dirty="0" err="1"/>
+              <a:t>etc</a:t>
+            </a:r>
+            <a:r>
+              <a:rPr lang="en-US" dirty="0"/>
+              <a:t>…</a:t>
+            </a:r>
+          </a:p>
+          <a:p>
+            <a:pPr lvl="1"/>
+            <a:r>
+              <a:rPr lang="en-US" dirty="0"/>
+              <a:t>Hypothesis tests rely on assumptions since they didn’t have computers. </a:t>
+            </a:r>
+          </a:p>
+          <a:p>
+            <a:r>
+              <a:rPr lang="en-US" dirty="0"/>
+              <a:t>Our loops are flexible, we can do hypothesis tests and more. </a:t>
+            </a:r>
+          </a:p>
+          <a:p>
+            <a:pPr lvl="1"/>
+            <a:r>
+              <a:rPr lang="en-US" dirty="0"/>
+              <a:t>This is actually very cool and big, we can do much of inferential stats with these two things. </a:t>
+            </a:r>
+          </a:p>
+        </p:txBody>
+      </p:sp>
+    </p:spTree>
+    <p:extLst>
+      <p:ext uri="{BB962C8B-B14F-4D97-AF65-F5344CB8AC3E}">
+        <p14:creationId xmlns:p14="http://schemas.microsoft.com/office/powerpoint/2010/main" val="3089929506"/>
+      </p:ext>
+    </p:extLst>
+  </p:cSld>
+  <p:clrMapOvr>
+    <a:masterClrMapping/>
+  </p:clrMapOvr>
+</p:sld>
+</file>
+
+<file path=ppt/slides/slide5.xml><?xml version="1.0" encoding="utf-8"?>
+<p:sld xmlns:a="http://schemas.openxmlformats.org/drawingml/2006/main" xmlns:r="http://schemas.openxmlformats.org/officeDocument/2006/relationships" xmlns:p="http://schemas.openxmlformats.org/presentationml/2006/main">
+  <p:cSld>
+    <p:spTree>
+      <p:nvGrpSpPr>
+        <p:cNvPr id="1" name=""/>
+        <p:cNvGrpSpPr/>
+        <p:nvPr/>
+      </p:nvGrpSpPr>
+      <p:grpSpPr>
+        <a:xfrm>
+          <a:off x="0" y="0"/>
+          <a:ext cx="0" cy="0"/>
+          <a:chOff x="0" y="0"/>
+          <a:chExt cx="0" cy="0"/>
+        </a:xfrm>
+      </p:grpSpPr>
+      <p:sp>
+        <p:nvSpPr>
+          <p:cNvPr id="2" name="Title 1">
+            <a:extLst>
+              <a:ext uri="{FF2B5EF4-FFF2-40B4-BE49-F238E27FC236}">
+                <a16:creationId xmlns:a16="http://schemas.microsoft.com/office/drawing/2014/main" id="{F722AA3E-BBBE-94A6-DAF1-85773DBEE918}"/>
+              </a:ext>
+            </a:extLst>
+          </p:cNvPr>
+          <p:cNvSpPr>
+            <a:spLocks noGrp="1"/>
+          </p:cNvSpPr>
+          <p:nvPr>
+            <p:ph type="title"/>
+          </p:nvPr>
+        </p:nvSpPr>
+        <p:spPr/>
+        <p:txBody>
+          <a:bodyPr/>
+          <a:lstStyle/>
+          <a:p>
+            <a:r>
+              <a:rPr lang="en-US" dirty="0"/>
+              <a:t>Recall - Estimation</a:t>
+            </a:r>
+          </a:p>
+        </p:txBody>
+      </p:sp>
+      <p:sp>
+        <p:nvSpPr>
+          <p:cNvPr id="3" name="Content Placeholder 2">
+            <a:extLst>
+              <a:ext uri="{FF2B5EF4-FFF2-40B4-BE49-F238E27FC236}">
+                <a16:creationId xmlns:a16="http://schemas.microsoft.com/office/drawing/2014/main" id="{080A01FD-7DDA-A8D2-8DC7-479583D5F684}"/>
+              </a:ext>
+            </a:extLst>
+          </p:cNvPr>
+          <p:cNvSpPr>
+            <a:spLocks noGrp="1"/>
+          </p:cNvSpPr>
+          <p:nvPr>
+            <p:ph idx="1"/>
+          </p:nvPr>
+        </p:nvSpPr>
+        <p:spPr/>
+        <p:txBody>
+          <a:bodyPr/>
+          <a:lstStyle/>
+          <a:p>
+            <a:endParaRPr lang="en-US"/>
+          </a:p>
+        </p:txBody>
+      </p:sp>
+    </p:spTree>
+    <p:extLst>
+      <p:ext uri="{BB962C8B-B14F-4D97-AF65-F5344CB8AC3E}">
+        <p14:creationId xmlns:p14="http://schemas.microsoft.com/office/powerpoint/2010/main" val="1056623766"/>
       </p:ext>
     </p:extLst>
   </p:cSld>
@@ -6787,7 +11088,7 @@
           <p:cNvPr id="2" name="Title 1">
             <a:extLst>
               <a:ext uri="{FF2B5EF4-FFF2-40B4-BE49-F238E27FC236}">
-                <a16:creationId xmlns:a16="http://schemas.microsoft.com/office/drawing/2014/main" id="{C34EA8A0-5341-A341-9EA8-5EB58536E0D9}"/>
+                <a16:creationId xmlns:a16="http://schemas.microsoft.com/office/drawing/2014/main" id="{53C9C203-8EA9-7410-B8BA-9D9CB018ECB0}"/>
               </a:ext>
             </a:extLst>
           </p:cNvPr>
@@ -6796,100 +11097,153 @@
           </p:cNvSpPr>
           <p:nvPr>
             <p:ph type="title"/>
-          </p:nvPr>
-        </p:nvSpPr>
-        <p:spPr/>
-        <p:txBody>
-          <a:bodyPr/>
-          <a:lstStyle/>
-          <a:p>
-            <a:r>
-              <a:rPr lang="en-US" dirty="0"/>
-              <a:t>Hypothesis Test process</a:t>
-            </a:r>
-          </a:p>
-        </p:txBody>
-      </p:sp>
-      <p:sp>
-        <p:nvSpPr>
-          <p:cNvPr id="3" name="Content Placeholder 2">
-            <a:extLst>
-              <a:ext uri="{FF2B5EF4-FFF2-40B4-BE49-F238E27FC236}">
-                <a16:creationId xmlns:a16="http://schemas.microsoft.com/office/drawing/2014/main" id="{0D496893-51F3-9D49-90F1-1D589AECE24D}"/>
-              </a:ext>
-            </a:extLst>
-          </p:cNvPr>
-          <p:cNvSpPr>
-            <a:spLocks noGrp="1"/>
-          </p:cNvSpPr>
-          <p:nvPr>
-            <p:ph idx="1"/>
           </p:nvPr>
         </p:nvSpPr>
         <p:spPr>
           <a:xfrm>
-            <a:off x="1250577" y="1853754"/>
-            <a:ext cx="10058400" cy="4336839"/>
+            <a:off x="1" y="804519"/>
+            <a:ext cx="3549650" cy="1049235"/>
           </a:xfrm>
         </p:spPr>
         <p:txBody>
-          <a:bodyPr>
-            <a:normAutofit/>
-          </a:bodyPr>
-          <a:lstStyle/>
-          <a:p>
-            <a:r>
-              <a:rPr lang="en-US" dirty="0"/>
-              <a:t>A hypothesis test will seek to answer if two samples that show a difference have that difference due to real effects, or random variation. </a:t>
-            </a:r>
-          </a:p>
-          <a:p>
-            <a:pPr lvl="1"/>
-            <a:r>
-              <a:rPr lang="en-US" dirty="0"/>
-              <a:t>A.K.A. did these two samples come from the same population. </a:t>
-            </a:r>
-          </a:p>
-          <a:p>
-            <a:r>
-              <a:rPr lang="en-US" dirty="0"/>
-              <a:t>Define the test statistic – normally the mean.</a:t>
-            </a:r>
-          </a:p>
-          <a:p>
-            <a:r>
-              <a:rPr lang="en-US" dirty="0"/>
-              <a:t>Define a null hypothesis – “there is actually no difference in the means of the two groups.”</a:t>
-            </a:r>
-          </a:p>
-          <a:p>
-            <a:r>
-              <a:rPr lang="en-US" dirty="0"/>
-              <a:t>Compute the p-value – this is what the test does. The probability the NH is true.</a:t>
-            </a:r>
-          </a:p>
-          <a:p>
-            <a:r>
-              <a:rPr lang="en-US" dirty="0"/>
-              <a:t>Compare to the cutoff (alpha) – if the p-value is smaller, we can reject the NH, therefore the difference is statistically significant. </a:t>
-            </a:r>
-          </a:p>
-          <a:p>
-            <a:pPr lvl="1"/>
-            <a:r>
-              <a:rPr lang="en-US" dirty="0"/>
-              <a:t>A.K.A. how likely is that that the two samples are from the same pop, and the difference in their means is just random variation. </a:t>
-            </a:r>
-          </a:p>
-          <a:p>
+          <a:bodyPr/>
+          <a:lstStyle/>
+          <a:p>
+            <a:r>
+              <a:rPr lang="en-US" dirty="0"/>
+              <a:t>Recall - Estimation</a:t>
+            </a:r>
+          </a:p>
+        </p:txBody>
+      </p:sp>
+      <p:sp>
+        <p:nvSpPr>
+          <p:cNvPr id="3" name="Content Placeholder 2">
+            <a:extLst>
+              <a:ext uri="{FF2B5EF4-FFF2-40B4-BE49-F238E27FC236}">
+                <a16:creationId xmlns:a16="http://schemas.microsoft.com/office/drawing/2014/main" id="{7684DE7B-31AB-063F-8BC5-23E4889972D6}"/>
+              </a:ext>
+            </a:extLst>
+          </p:cNvPr>
+          <p:cNvSpPr>
+            <a:spLocks noGrp="1"/>
+          </p:cNvSpPr>
+          <p:nvPr>
+            <p:ph idx="1"/>
+          </p:nvPr>
+        </p:nvSpPr>
+        <p:spPr>
+          <a:xfrm>
+            <a:off x="0" y="2015732"/>
+            <a:ext cx="3549651" cy="4037749"/>
+          </a:xfrm>
+        </p:spPr>
+        <p:txBody>
+          <a:bodyPr/>
+          <a:lstStyle/>
+          <a:p>
+            <a:r>
+              <a:rPr lang="en-US" dirty="0"/>
+              <a:t>We looked at estimating for a population from a sample. </a:t>
+            </a:r>
+          </a:p>
+          <a:p>
+            <a:pPr lvl="1"/>
+            <a:r>
+              <a:rPr lang="en-US" dirty="0"/>
+              <a:t>Take sample, calculate stats.</a:t>
+            </a:r>
+          </a:p>
+          <a:p>
+            <a:pPr lvl="1"/>
+            <a:r>
+              <a:rPr lang="en-US" dirty="0"/>
+              <a:t>Make model, run trials.</a:t>
+            </a:r>
+          </a:p>
+          <a:p>
+            <a:r>
+              <a:rPr lang="en-US" dirty="0"/>
+              <a:t>Conclusions are probabilistic. </a:t>
+            </a:r>
+          </a:p>
+          <a:p>
+            <a:pPr lvl="1"/>
+            <a:r>
+              <a:rPr lang="en-US" dirty="0"/>
+              <a:t>We have uncertainty. </a:t>
+            </a:r>
+          </a:p>
+          <a:p>
+            <a:r>
+              <a:rPr lang="en-US" dirty="0"/>
+              <a:t>Conclusions have confidence intervals. </a:t>
+            </a:r>
+          </a:p>
+          <a:p>
+            <a:pPr lvl="1"/>
+            <a:r>
+              <a:rPr lang="en-US" dirty="0"/>
+              <a:t>Indication of prediction acc.</a:t>
+            </a:r>
+          </a:p>
+          <a:p>
+            <a:pPr lvl="1"/>
             <a:endParaRPr lang="en-US" dirty="0"/>
           </a:p>
         </p:txBody>
       </p:sp>
+      <p:pic>
+        <p:nvPicPr>
+          <p:cNvPr id="3076" name="Picture 4" descr="Can't find the CLT? Fundamental Statistics for Machine Learning: Part 1 |  by Abhishek Divekar | Medium">
+            <a:extLst>
+              <a:ext uri="{FF2B5EF4-FFF2-40B4-BE49-F238E27FC236}">
+                <a16:creationId xmlns:a16="http://schemas.microsoft.com/office/drawing/2014/main" id="{B0F902A8-0C2E-0F8C-1A06-AA40FDFF5048}"/>
+              </a:ext>
+            </a:extLst>
+          </p:cNvPr>
+          <p:cNvPicPr>
+            <a:picLocks noChangeAspect="1" noChangeArrowheads="1"/>
+          </p:cNvPicPr>
+          <p:nvPr/>
+        </p:nvPicPr>
+        <p:blipFill>
+          <a:blip r:embed="rId2">
+            <a:extLst>
+              <a:ext uri="{28A0092B-C50C-407E-A947-70E740481C1C}">
+                <a14:useLocalDpi xmlns:a14="http://schemas.microsoft.com/office/drawing/2010/main" val="0"/>
+              </a:ext>
+            </a:extLst>
+          </a:blip>
+          <a:srcRect/>
+          <a:stretch>
+            <a:fillRect/>
+          </a:stretch>
+        </p:blipFill>
+        <p:spPr bwMode="auto">
+          <a:xfrm>
+            <a:off x="3549650" y="0"/>
+            <a:ext cx="8642350" cy="6858000"/>
+          </a:xfrm>
+          <a:prstGeom prst="rect">
+            <a:avLst/>
+          </a:prstGeom>
+          <a:noFill/>
+          <a:extLst>
+            <a:ext uri="{909E8E84-426E-40DD-AFC4-6F175D3DCCD1}">
+              <a14:hiddenFill xmlns:a14="http://schemas.microsoft.com/office/drawing/2010/main">
+                <a:solidFill>
+                  <a:srgbClr val="FFFFFF"/>
+                </a:solidFill>
+              </a14:hiddenFill>
+            </a:ext>
+          </a:extLst>
+        </p:spPr>
+      </p:pic>
     </p:spTree>
     <p:extLst>
       <p:ext uri="{BB962C8B-B14F-4D97-AF65-F5344CB8AC3E}">
-        <p14:creationId xmlns:p14="http://schemas.microsoft.com/office/powerpoint/2010/main" val="996436132"/>
+        <p14:creationId xmlns:p14="http://schemas.microsoft.com/office/powerpoint/2010/main" val="3637465867"/>
       </p:ext>
     </p:extLst>
   </p:cSld>
@@ -6921,7 +11275,7 @@
           <p:cNvPr id="2" name="Title 1">
             <a:extLst>
               <a:ext uri="{FF2B5EF4-FFF2-40B4-BE49-F238E27FC236}">
-                <a16:creationId xmlns:a16="http://schemas.microsoft.com/office/drawing/2014/main" id="{D777C4F1-B4FA-D249-95A6-C649BBD426DF}"/>
+                <a16:creationId xmlns:a16="http://schemas.microsoft.com/office/drawing/2014/main" id="{8EB41484-7549-9AD6-8858-9D7B52369AE9}"/>
               </a:ext>
             </a:extLst>
           </p:cNvPr>
@@ -6937,7 +11291,10 @@
           <a:bodyPr/>
           <a:lstStyle/>
           <a:p>
-            <a:endParaRPr lang="en-US"/>
+            <a:r>
+              <a:rPr lang="en-US" dirty="0"/>
+              <a:t>Making Predictions</a:t>
+            </a:r>
           </a:p>
         </p:txBody>
       </p:sp>
@@ -6946,7 +11303,7 @@
           <p:cNvPr id="3" name="Content Placeholder 2">
             <a:extLst>
               <a:ext uri="{FF2B5EF4-FFF2-40B4-BE49-F238E27FC236}">
-                <a16:creationId xmlns:a16="http://schemas.microsoft.com/office/drawing/2014/main" id="{D7BFCAE8-3D2D-2244-81A3-B63518158FAB}"/>
+                <a16:creationId xmlns:a16="http://schemas.microsoft.com/office/drawing/2014/main" id="{CF20F2D4-8597-0E59-306A-60B9146921D6}"/>
               </a:ext>
             </a:extLst>
           </p:cNvPr>
@@ -6957,21 +11314,62 @@
             <p:ph idx="1"/>
           </p:nvPr>
         </p:nvSpPr>
-        <p:spPr/>
+        <p:spPr>
+          <a:xfrm>
+            <a:off x="7714650" y="2015732"/>
+            <a:ext cx="4066672" cy="4037749"/>
+          </a:xfrm>
+        </p:spPr>
         <p:txBody>
           <a:bodyPr/>
           <a:lstStyle/>
           <a:p>
-            <a:endParaRPr lang="en-US"/>
+            <a:r>
+              <a:rPr lang="en-US" dirty="0"/>
+              <a:t>When generalizing, we have a range and a likelihood. </a:t>
+            </a:r>
+          </a:p>
+          <a:p>
+            <a:r>
+              <a:rPr lang="en-US" dirty="0"/>
+              <a:t>Errors stem from:</a:t>
+            </a:r>
+          </a:p>
+          <a:p>
+            <a:pPr lvl="1"/>
+            <a:r>
+              <a:rPr lang="en-US" dirty="0"/>
+              <a:t>Sampling. </a:t>
+            </a:r>
+          </a:p>
+          <a:p>
+            <a:pPr lvl="1"/>
+            <a:r>
+              <a:rPr lang="en-US" dirty="0"/>
+              <a:t>Sampling bias. </a:t>
+            </a:r>
+          </a:p>
+          <a:p>
+            <a:pPr lvl="1"/>
+            <a:r>
+              <a:rPr lang="en-US" dirty="0"/>
+              <a:t>Measurement error. </a:t>
+            </a:r>
+          </a:p>
+          <a:p>
+            <a:r>
+              <a:rPr lang="en-US" dirty="0"/>
+              <a:t>Some errors are beyond us. </a:t>
+            </a:r>
           </a:p>
         </p:txBody>
       </p:sp>
       <p:pic>
         <p:nvPicPr>
-          <p:cNvPr id="7170" name="Picture 2">
+          <p:cNvPr id="4" name="Picture 2" descr="Chapter 10 Confidence Intervals | Introduction to Statistics and Data  Science">
             <a:extLst>
               <a:ext uri="{FF2B5EF4-FFF2-40B4-BE49-F238E27FC236}">
-                <a16:creationId xmlns:a16="http://schemas.microsoft.com/office/drawing/2014/main" id="{05A565D6-6651-0444-BB8A-EA1D38731B7C}"/>
+                <a16:creationId xmlns:a16="http://schemas.microsoft.com/office/drawing/2014/main" id="{3FB6E4FC-E947-EA3D-3069-097DD3CC5739}"/>
               </a:ext>
             </a:extLst>
           </p:cNvPr>
@@ -6995,8 +11393,8 @@
         </p:blipFill>
         <p:spPr bwMode="auto">
           <a:xfrm>
-            <a:off x="1219200" y="177800"/>
-            <a:ext cx="9753600" cy="6502400"/>
+            <a:off x="0" y="1853754"/>
+            <a:ext cx="7714650" cy="4408371"/>
           </a:xfrm>
           <a:prstGeom prst="rect">
             <a:avLst/>
@@ -7016,7 +11414,7 @@
     </p:spTree>
     <p:extLst>
       <p:ext uri="{BB962C8B-B14F-4D97-AF65-F5344CB8AC3E}">
-        <p14:creationId xmlns:p14="http://schemas.microsoft.com/office/powerpoint/2010/main" val="238663840"/>
+        <p14:creationId xmlns:p14="http://schemas.microsoft.com/office/powerpoint/2010/main" val="3203570768"/>
       </p:ext>
     </p:extLst>
   </p:cSld>
@@ -7027,133 +11425,6 @@
 </file>
 
 <file path=ppt/slides/slide8.xml><?xml version="1.0" encoding="utf-8"?>
-<p:sld xmlns:a="http://schemas.openxmlformats.org/drawingml/2006/main" xmlns:r="http://schemas.openxmlformats.org/officeDocument/2006/relationships" xmlns:p="http://schemas.openxmlformats.org/presentationml/2006/main" show="0">
-  <p:cSld>
-    <p:spTree>
-      <p:nvGrpSpPr>
-        <p:cNvPr id="1" name=""/>
-        <p:cNvGrpSpPr/>
-        <p:nvPr/>
-      </p:nvGrpSpPr>
-      <p:grpSpPr>
-        <a:xfrm>
-          <a:off x="0" y="0"/>
-          <a:ext cx="0" cy="0"/>
-          <a:chOff x="0" y="0"/>
-          <a:chExt cx="0" cy="0"/>
-        </a:xfrm>
-      </p:grpSpPr>
-      <p:sp>
-        <p:nvSpPr>
-          <p:cNvPr id="2" name="Title 1">
-            <a:extLst>
-              <a:ext uri="{FF2B5EF4-FFF2-40B4-BE49-F238E27FC236}">
-                <a16:creationId xmlns:a16="http://schemas.microsoft.com/office/drawing/2014/main" id="{454D611A-CF86-8746-97A4-33E74E2BFF77}"/>
-              </a:ext>
-            </a:extLst>
-          </p:cNvPr>
-          <p:cNvSpPr>
-            <a:spLocks noGrp="1"/>
-          </p:cNvSpPr>
-          <p:nvPr>
-            <p:ph type="title"/>
-          </p:nvPr>
-        </p:nvSpPr>
-        <p:spPr/>
-        <p:txBody>
-          <a:bodyPr/>
-          <a:lstStyle/>
-          <a:p>
-            <a:endParaRPr lang="en-US"/>
-          </a:p>
-        </p:txBody>
-      </p:sp>
-      <p:sp>
-        <p:nvSpPr>
-          <p:cNvPr id="3" name="Content Placeholder 2">
-            <a:extLst>
-              <a:ext uri="{FF2B5EF4-FFF2-40B4-BE49-F238E27FC236}">
-                <a16:creationId xmlns:a16="http://schemas.microsoft.com/office/drawing/2014/main" id="{D4977805-BE5D-D14C-BD46-5F20F369C2D2}"/>
-              </a:ext>
-            </a:extLst>
-          </p:cNvPr>
-          <p:cNvSpPr>
-            <a:spLocks noGrp="1"/>
-          </p:cNvSpPr>
-          <p:nvPr>
-            <p:ph idx="1"/>
-          </p:nvPr>
-        </p:nvSpPr>
-        <p:spPr/>
-        <p:txBody>
-          <a:bodyPr/>
-          <a:lstStyle/>
-          <a:p>
-            <a:endParaRPr lang="en-US"/>
-          </a:p>
-        </p:txBody>
-      </p:sp>
-      <p:pic>
-        <p:nvPicPr>
-          <p:cNvPr id="4098" name="Picture 2">
-            <a:extLst>
-              <a:ext uri="{FF2B5EF4-FFF2-40B4-BE49-F238E27FC236}">
-                <a16:creationId xmlns:a16="http://schemas.microsoft.com/office/drawing/2014/main" id="{0A6DAAD8-638A-8643-B668-3E40462E19C4}"/>
-              </a:ext>
-            </a:extLst>
-          </p:cNvPr>
-          <p:cNvPicPr>
-            <a:picLocks noChangeAspect="1" noChangeArrowheads="1"/>
-          </p:cNvPicPr>
-          <p:nvPr/>
-        </p:nvPicPr>
-        <p:blipFill>
-          <a:blip r:embed="rId2">
-            <a:extLst>
-              <a:ext uri="{28A0092B-C50C-407E-A947-70E740481C1C}">
-                <a14:useLocalDpi xmlns:a14="http://schemas.microsoft.com/office/drawing/2010/main" val="0"/>
-              </a:ext>
-            </a:extLst>
-          </a:blip>
-          <a:srcRect/>
-          <a:stretch>
-            <a:fillRect/>
-          </a:stretch>
-        </p:blipFill>
-        <p:spPr bwMode="auto">
-          <a:xfrm>
-            <a:off x="-4863" y="389965"/>
-            <a:ext cx="12201726" cy="6078070"/>
-          </a:xfrm>
-          <a:prstGeom prst="rect">
-            <a:avLst/>
-          </a:prstGeom>
-          <a:noFill/>
-          <a:extLst>
-            <a:ext uri="{909E8E84-426E-40DD-AFC4-6F175D3DCCD1}">
-              <a14:hiddenFill xmlns:a14="http://schemas.microsoft.com/office/drawing/2010/main">
-                <a:solidFill>
-                  <a:srgbClr val="FFFFFF"/>
-                </a:solidFill>
-              </a14:hiddenFill>
-            </a:ext>
-          </a:extLst>
-        </p:spPr>
-      </p:pic>
-    </p:spTree>
-    <p:extLst>
-      <p:ext uri="{BB962C8B-B14F-4D97-AF65-F5344CB8AC3E}">
-        <p14:creationId xmlns:p14="http://schemas.microsoft.com/office/powerpoint/2010/main" val="278982855"/>
-      </p:ext>
-    </p:extLst>
-  </p:cSld>
-  <p:clrMapOvr>
-    <a:masterClrMapping/>
-  </p:clrMapOvr>
-</p:sld>
-</file>
-
-<file path=ppt/slides/slide9.xml><?xml version="1.0" encoding="utf-8"?>
 <p:sld xmlns:a="http://schemas.openxmlformats.org/drawingml/2006/main" xmlns:r="http://schemas.openxmlformats.org/officeDocument/2006/relationships" xmlns:p="http://schemas.openxmlformats.org/presentationml/2006/main">
   <p:cSld>
     <p:spTree>
@@ -7175,7 +11446,7 @@
           <p:cNvPr id="2" name="Title 1">
             <a:extLst>
               <a:ext uri="{FF2B5EF4-FFF2-40B4-BE49-F238E27FC236}">
-                <a16:creationId xmlns:a16="http://schemas.microsoft.com/office/drawing/2014/main" id="{A80E8ED4-C6ED-754F-9599-EBCA2583D433}"/>
+                <a16:creationId xmlns:a16="http://schemas.microsoft.com/office/drawing/2014/main" id="{A9BE8D9D-350C-FFC8-8E60-05F536113D49}"/>
               </a:ext>
             </a:extLst>
           </p:cNvPr>
@@ -7193,7 +11464,7 @@
           <a:p>
             <a:r>
               <a:rPr lang="en-US" dirty="0"/>
-              <a:t>T-Tests</a:t>
+              <a:t>Using Simulations</a:t>
             </a:r>
           </a:p>
         </p:txBody>
@@ -7203,7 +11474,7 @@
           <p:cNvPr id="3" name="Content Placeholder 2">
             <a:extLst>
               <a:ext uri="{FF2B5EF4-FFF2-40B4-BE49-F238E27FC236}">
-                <a16:creationId xmlns:a16="http://schemas.microsoft.com/office/drawing/2014/main" id="{2C609283-AF97-CC4E-8FA2-931D43BA5317}"/>
+                <a16:creationId xmlns:a16="http://schemas.microsoft.com/office/drawing/2014/main" id="{6F01357A-84A4-884F-00D0-13CDFD37E2A6}"/>
               </a:ext>
             </a:extLst>
           </p:cNvPr>
@@ -7216,8 +11487,124 @@
         </p:nvSpPr>
         <p:spPr>
           <a:xfrm>
-            <a:off x="1451579" y="1853754"/>
-            <a:ext cx="9603275" cy="4199727"/>
+            <a:off x="1451579" y="2015732"/>
+            <a:ext cx="9603275" cy="3932681"/>
+          </a:xfrm>
+        </p:spPr>
+        <p:txBody>
+          <a:bodyPr/>
+          <a:lstStyle/>
+          <a:p>
+            <a:r>
+              <a:rPr lang="en-US" dirty="0"/>
+              <a:t>We can do this with our simulation loops. </a:t>
+            </a:r>
+          </a:p>
+          <a:p>
+            <a:pPr lvl="1"/>
+            <a:r>
+              <a:rPr lang="en-US" dirty="0"/>
+              <a:t>We have a model for data expectations (analytical distribution) made from sample. </a:t>
+            </a:r>
+          </a:p>
+          <a:p>
+            <a:pPr lvl="1"/>
+            <a:r>
+              <a:rPr lang="en-US" dirty="0"/>
+              <a:t>We can generate many new samples from that distribution. </a:t>
+            </a:r>
+          </a:p>
+          <a:p>
+            <a:pPr lvl="1"/>
+            <a:r>
+              <a:rPr lang="en-US" dirty="0"/>
+              <a:t>We can count where the results of those samples fall. </a:t>
+            </a:r>
+          </a:p>
+          <a:p>
+            <a:r>
+              <a:rPr lang="en-US" dirty="0"/>
+              <a:t>These counts are an estimate of what we can expect going forward. </a:t>
+            </a:r>
+          </a:p>
+          <a:p>
+            <a:pPr lvl="1"/>
+            <a:r>
+              <a:rPr lang="en-US" dirty="0"/>
+              <a:t>The more clustered they are, the more confident we are in predictions. </a:t>
+            </a:r>
+          </a:p>
+          <a:p>
+            <a:pPr lvl="1"/>
+            <a:r>
+              <a:rPr lang="en-US" dirty="0"/>
+              <a:t>The range that 90/95/99% fall into is our confidence interval. </a:t>
+            </a:r>
+          </a:p>
+          <a:p>
+            <a:r>
+              <a:rPr lang="en-US" dirty="0"/>
+              <a:t>As long as we have some model of the distribution, we can do the same thing. </a:t>
+            </a:r>
+          </a:p>
+        </p:txBody>
+      </p:sp>
+    </p:spTree>
+    <p:extLst>
+      <p:ext uri="{BB962C8B-B14F-4D97-AF65-F5344CB8AC3E}">
+        <p14:creationId xmlns:p14="http://schemas.microsoft.com/office/powerpoint/2010/main" val="3630232877"/>
+      </p:ext>
+    </p:extLst>
+  </p:cSld>
+  <p:clrMapOvr>
+    <a:masterClrMapping/>
+  </p:clrMapOvr>
+</p:sld>
+</file>
+
+<file path=ppt/slides/slide9.xml><?xml version="1.0" encoding="utf-8"?>
+<p:sld xmlns:a="http://schemas.openxmlformats.org/drawingml/2006/main" xmlns:r="http://schemas.openxmlformats.org/officeDocument/2006/relationships" xmlns:p="http://schemas.openxmlformats.org/presentationml/2006/main">
+  <p:cSld>
+    <p:spTree>
+      <p:nvGrpSpPr>
+        <p:cNvPr id="1" name="">
+          <a:extLst>
+            <a:ext uri="{FF2B5EF4-FFF2-40B4-BE49-F238E27FC236}">
+              <a16:creationId xmlns:a16="http://schemas.microsoft.com/office/drawing/2014/main" id="{1C237FF7-4E14-DB4F-0428-DA9C7B428F28}"/>
+            </a:ext>
+          </a:extLst>
+        </p:cNvPr>
+        <p:cNvGrpSpPr/>
+        <p:nvPr/>
+      </p:nvGrpSpPr>
+      <p:grpSpPr>
+        <a:xfrm>
+          <a:off x="0" y="0"/>
+          <a:ext cx="0" cy="0"/>
+          <a:chOff x="0" y="0"/>
+          <a:chExt cx="0" cy="0"/>
+        </a:xfrm>
+      </p:grpSpPr>
+      <p:sp>
+        <p:nvSpPr>
+          <p:cNvPr id="2" name="Title 1">
+            <a:extLst>
+              <a:ext uri="{FF2B5EF4-FFF2-40B4-BE49-F238E27FC236}">
+                <a16:creationId xmlns:a16="http://schemas.microsoft.com/office/drawing/2014/main" id="{A4D52962-0069-5970-7E60-5D3767C89133}"/>
+              </a:ext>
+            </a:extLst>
+          </p:cNvPr>
+          <p:cNvSpPr>
+            <a:spLocks noGrp="1"/>
+          </p:cNvSpPr>
+          <p:nvPr>
+            <p:ph type="title"/>
+          </p:nvPr>
+        </p:nvSpPr>
+        <p:spPr>
+          <a:xfrm>
+            <a:off x="1451579" y="804519"/>
+            <a:ext cx="9603275" cy="1049235"/>
           </a:xfrm>
         </p:spPr>
         <p:txBody>
@@ -7228,59 +11615,117 @@
           <a:p>
             <a:r>
               <a:rPr lang="en-US" dirty="0"/>
-              <a:t>T-tests allow us to make an estimate of, “is this difference likely real, or could it be due to chance?”</a:t>
-            </a:r>
-          </a:p>
-          <a:p>
-            <a:r>
-              <a:rPr lang="en-US" dirty="0"/>
-              <a:t>Extremely common in basic stats and scientific papers/reports. </a:t>
-            </a:r>
-          </a:p>
-          <a:p>
-            <a:r>
-              <a:rPr lang="en-US" dirty="0"/>
-              <a:t>Weakness – subject to manipulation, becoming less relied on over time. </a:t>
-            </a:r>
-          </a:p>
-          <a:p>
-            <a:r>
-              <a:rPr lang="en-US" dirty="0"/>
-              <a:t>One sample – tests mean against some value.</a:t>
-            </a:r>
-          </a:p>
-          <a:p>
-            <a:r>
-              <a:rPr lang="en-US" dirty="0"/>
-              <a:t>Two sample – tests two means against each other. </a:t>
-            </a:r>
-          </a:p>
-          <a:p>
-            <a:r>
-              <a:rPr lang="en-US" dirty="0"/>
-              <a:t>Sidedness:</a:t>
-            </a:r>
-          </a:p>
-          <a:p>
-            <a:pPr lvl="1"/>
-            <a:r>
-              <a:rPr lang="en-US" dirty="0"/>
-              <a:t>One side tests if lesser/greater.</a:t>
-            </a:r>
-          </a:p>
-          <a:p>
-            <a:pPr lvl="1"/>
-            <a:r>
-              <a:rPr lang="en-US" dirty="0"/>
-              <a:t>Two-sided tests if different at all. </a:t>
-            </a:r>
-          </a:p>
-        </p:txBody>
-      </p:sp>
+              <a:t>Effects Flashback – Cohen’s Effect Size</a:t>
+            </a:r>
+          </a:p>
+        </p:txBody>
+      </p:sp>
+      <p:sp>
+        <p:nvSpPr>
+          <p:cNvPr id="3" name="Content Placeholder 2">
+            <a:extLst>
+              <a:ext uri="{FF2B5EF4-FFF2-40B4-BE49-F238E27FC236}">
+                <a16:creationId xmlns:a16="http://schemas.microsoft.com/office/drawing/2014/main" id="{1F71D939-A10B-21DB-D934-F4F7A82E8C42}"/>
+              </a:ext>
+            </a:extLst>
+          </p:cNvPr>
+          <p:cNvSpPr>
+            <a:spLocks noGrp="1"/>
+          </p:cNvSpPr>
+          <p:nvPr>
+            <p:ph idx="1"/>
+          </p:nvPr>
+        </p:nvSpPr>
+        <p:spPr>
+          <a:xfrm>
+            <a:off x="1451579" y="2015734"/>
+            <a:ext cx="7089668" cy="4037747"/>
+          </a:xfrm>
+        </p:spPr>
+        <p:txBody>
+          <a:bodyPr>
+            <a:normAutofit/>
+          </a:bodyPr>
+          <a:lstStyle/>
+          <a:p>
+            <a:r>
+              <a:rPr lang="en-US" dirty="0"/>
+              <a:t>Effects are just differences between samples. </a:t>
+            </a:r>
+          </a:p>
+          <a:p>
+            <a:r>
+              <a:rPr lang="en-US" dirty="0"/>
+              <a:t>Effect size is very good for showing how big of a difference there is between groups.</a:t>
+            </a:r>
+          </a:p>
+          <a:p>
+            <a:pPr lvl="1"/>
+            <a:r>
+              <a:rPr lang="en-US" dirty="0"/>
+              <a:t>How ”big” is the difference between A and B</a:t>
+            </a:r>
+          </a:p>
+          <a:p>
+            <a:r>
+              <a:rPr lang="en-US" dirty="0"/>
+              <a:t>Easy to calculate, symmetrical, comparable across studies. </a:t>
+            </a:r>
+          </a:p>
+          <a:p>
+            <a:r>
+              <a:rPr lang="en-US" dirty="0"/>
+              <a:t>Downside – the value doesn’t have obvious meaning. </a:t>
+            </a:r>
+          </a:p>
+          <a:p>
+            <a:r>
+              <a:rPr lang="en-US" dirty="0"/>
+              <a:t>Table is a list of approximate significance, by Cohen himself. </a:t>
+            </a:r>
+          </a:p>
+          <a:p>
+            <a:r>
+              <a:rPr lang="en-US" dirty="0"/>
+              <a:t>Book’s author a huge proponent of effect size!</a:t>
+            </a:r>
+          </a:p>
+        </p:txBody>
+      </p:sp>
+      <p:pic>
+        <p:nvPicPr>
+          <p:cNvPr id="4" name="Picture 3">
+            <a:extLst>
+              <a:ext uri="{FF2B5EF4-FFF2-40B4-BE49-F238E27FC236}">
+                <a16:creationId xmlns:a16="http://schemas.microsoft.com/office/drawing/2014/main" id="{EB62C5B9-5FA2-D563-844D-D905B8775149}"/>
+              </a:ext>
+            </a:extLst>
+          </p:cNvPr>
+          <p:cNvPicPr>
+            <a:picLocks noChangeAspect="1"/>
+          </p:cNvPicPr>
+          <p:nvPr/>
+        </p:nvPicPr>
+        <p:blipFill>
+          <a:blip r:embed="rId2"/>
+          <a:stretch>
+            <a:fillRect/>
+          </a:stretch>
+        </p:blipFill>
+        <p:spPr>
+          <a:xfrm>
+            <a:off x="8541247" y="2015734"/>
+            <a:ext cx="2727388" cy="4479127"/>
+          </a:xfrm>
+          <a:prstGeom prst="rect">
+            <a:avLst/>
+          </a:prstGeom>
+        </p:spPr>
+      </p:pic>
     </p:spTree>
     <p:extLst>
       <p:ext uri="{BB962C8B-B14F-4D97-AF65-F5344CB8AC3E}">
-        <p14:creationId xmlns:p14="http://schemas.microsoft.com/office/powerpoint/2010/main" val="201004784"/>
+        <p14:creationId xmlns:p14="http://schemas.microsoft.com/office/powerpoint/2010/main" val="2455635162"/>
       </p:ext>
     </p:extLst>
   </p:cSld>

--- a/reference_material/slides/018_Hypothesis_Test.pptx
+++ b/reference_material/slides/018_Hypothesis_Test.pptx
@@ -5,56 +5,60 @@
     <p:sldMasterId id="2147483660" r:id="rId1"/>
   </p:sldMasterIdLst>
   <p:notesMasterIdLst>
-    <p:notesMasterId r:id="rId49"/>
+    <p:notesMasterId r:id="rId53"/>
   </p:notesMasterIdLst>
   <p:sldIdLst>
-    <p:sldId id="274" r:id="rId2"/>
-    <p:sldId id="295" r:id="rId3"/>
-    <p:sldId id="256" r:id="rId4"/>
-    <p:sldId id="280" r:id="rId5"/>
-    <p:sldId id="298" r:id="rId6"/>
-    <p:sldId id="299" r:id="rId7"/>
-    <p:sldId id="300" r:id="rId8"/>
-    <p:sldId id="301" r:id="rId9"/>
-    <p:sldId id="286" r:id="rId10"/>
-    <p:sldId id="287" r:id="rId11"/>
-    <p:sldId id="297" r:id="rId12"/>
-    <p:sldId id="288" r:id="rId13"/>
-    <p:sldId id="281" r:id="rId14"/>
-    <p:sldId id="282" r:id="rId15"/>
-    <p:sldId id="283" r:id="rId16"/>
-    <p:sldId id="284" r:id="rId17"/>
-    <p:sldId id="302" r:id="rId18"/>
-    <p:sldId id="257" r:id="rId19"/>
-    <p:sldId id="296" r:id="rId20"/>
-    <p:sldId id="289" r:id="rId21"/>
-    <p:sldId id="290" r:id="rId22"/>
-    <p:sldId id="291" r:id="rId23"/>
-    <p:sldId id="293" r:id="rId24"/>
-    <p:sldId id="292" r:id="rId25"/>
-    <p:sldId id="294" r:id="rId26"/>
-    <p:sldId id="285" r:id="rId27"/>
-    <p:sldId id="275" r:id="rId28"/>
-    <p:sldId id="264" r:id="rId29"/>
-    <p:sldId id="279" r:id="rId30"/>
-    <p:sldId id="262" r:id="rId31"/>
-    <p:sldId id="270" r:id="rId32"/>
-    <p:sldId id="272" r:id="rId33"/>
-    <p:sldId id="268" r:id="rId34"/>
-    <p:sldId id="263" r:id="rId35"/>
-    <p:sldId id="269" r:id="rId36"/>
-    <p:sldId id="265" r:id="rId37"/>
-    <p:sldId id="271" r:id="rId38"/>
-    <p:sldId id="278" r:id="rId39"/>
-    <p:sldId id="277" r:id="rId40"/>
-    <p:sldId id="266" r:id="rId41"/>
-    <p:sldId id="267" r:id="rId42"/>
-    <p:sldId id="273" r:id="rId43"/>
-    <p:sldId id="258" r:id="rId44"/>
-    <p:sldId id="259" r:id="rId45"/>
-    <p:sldId id="260" r:id="rId46"/>
-    <p:sldId id="261" r:id="rId47"/>
-    <p:sldId id="276" r:id="rId48"/>
+    <p:sldId id="303" r:id="rId2"/>
+    <p:sldId id="305" r:id="rId3"/>
+    <p:sldId id="304" r:id="rId4"/>
+    <p:sldId id="306" r:id="rId5"/>
+    <p:sldId id="307" r:id="rId6"/>
+    <p:sldId id="308" r:id="rId7"/>
+    <p:sldId id="309" r:id="rId8"/>
+    <p:sldId id="274" r:id="rId9"/>
+    <p:sldId id="295" r:id="rId10"/>
+    <p:sldId id="256" r:id="rId11"/>
+    <p:sldId id="280" r:id="rId12"/>
+    <p:sldId id="298" r:id="rId13"/>
+    <p:sldId id="299" r:id="rId14"/>
+    <p:sldId id="300" r:id="rId15"/>
+    <p:sldId id="301" r:id="rId16"/>
+    <p:sldId id="286" r:id="rId17"/>
+    <p:sldId id="287" r:id="rId18"/>
+    <p:sldId id="297" r:id="rId19"/>
+    <p:sldId id="288" r:id="rId20"/>
+    <p:sldId id="281" r:id="rId21"/>
+    <p:sldId id="282" r:id="rId22"/>
+    <p:sldId id="283" r:id="rId23"/>
+    <p:sldId id="284" r:id="rId24"/>
+    <p:sldId id="302" r:id="rId25"/>
+    <p:sldId id="257" r:id="rId26"/>
+    <p:sldId id="296" r:id="rId27"/>
+    <p:sldId id="285" r:id="rId28"/>
+    <p:sldId id="275" r:id="rId29"/>
+    <p:sldId id="264" r:id="rId30"/>
+    <p:sldId id="279" r:id="rId31"/>
+    <p:sldId id="262" r:id="rId32"/>
+    <p:sldId id="270" r:id="rId33"/>
+    <p:sldId id="272" r:id="rId34"/>
+    <p:sldId id="268" r:id="rId35"/>
+    <p:sldId id="263" r:id="rId36"/>
+    <p:sldId id="269" r:id="rId37"/>
+    <p:sldId id="265" r:id="rId38"/>
+    <p:sldId id="271" r:id="rId39"/>
+    <p:sldId id="278" r:id="rId40"/>
+    <p:sldId id="277" r:id="rId41"/>
+    <p:sldId id="266" r:id="rId42"/>
+    <p:sldId id="267" r:id="rId43"/>
+    <p:sldId id="273" r:id="rId44"/>
+    <p:sldId id="258" r:id="rId45"/>
+    <p:sldId id="259" r:id="rId46"/>
+    <p:sldId id="260" r:id="rId47"/>
+    <p:sldId id="261" r:id="rId48"/>
+    <p:sldId id="312" r:id="rId49"/>
+    <p:sldId id="310" r:id="rId50"/>
+    <p:sldId id="276" r:id="rId51"/>
+    <p:sldId id="311" r:id="rId52"/>
   </p:sldIdLst>
   <p:sldSz cx="12192000" cy="6858000"/>
   <p:notesSz cx="6858000" cy="9144000"/>
@@ -158,6 +162,13 @@
       <p14:sectionLst xmlns:p14="http://schemas.microsoft.com/office/powerpoint/2010/main">
         <p14:section name="Default Section" id="{E563C269-5786-C244-B0B8-ECA227A0178C}">
           <p14:sldIdLst>
+            <p14:sldId id="303"/>
+            <p14:sldId id="305"/>
+            <p14:sldId id="304"/>
+            <p14:sldId id="306"/>
+            <p14:sldId id="307"/>
+            <p14:sldId id="308"/>
+            <p14:sldId id="309"/>
             <p14:sldId id="274"/>
             <p14:sldId id="295"/>
             <p14:sldId id="256"/>
@@ -192,14 +203,7 @@
           </p14:sldIdLst>
         </p14:section>
         <p14:section name="Classes" id="{141EB2E9-FC80-D441-9AE9-8E444C99A653}">
-          <p14:sldIdLst>
-            <p14:sldId id="289"/>
-            <p14:sldId id="290"/>
-            <p14:sldId id="291"/>
-            <p14:sldId id="293"/>
-            <p14:sldId id="292"/>
-            <p14:sldId id="294"/>
-          </p14:sldIdLst>
+          <p14:sldIdLst/>
         </p14:section>
         <p14:section name="Old hyp tests" id="{587513C8-59F6-DC46-BC83-B980CDCEFA5E}">
           <p14:sldIdLst>
@@ -232,11 +236,14 @@
             <p14:sldId id="259"/>
             <p14:sldId id="260"/>
             <p14:sldId id="261"/>
+            <p14:sldId id="312"/>
+            <p14:sldId id="310"/>
           </p14:sldIdLst>
         </p14:section>
         <p14:section name="Conclusion" id="{5A1FA9C0-297A-1B49-BCB2-0547A886D778}">
           <p14:sldIdLst>
             <p14:sldId id="276"/>
+            <p14:sldId id="311"/>
           </p14:sldIdLst>
         </p14:section>
       </p14:sectionLst>
@@ -689,7 +696,7 @@
           <a:p>
             <a:fld id="{E36F3295-E463-C64D-A388-E45D36324975}" type="slidenum">
               <a:rPr lang="en-US" smtClean="0"/>
-              <a:t>44</a:t>
+              <a:t>45</a:t>
             </a:fld>
             <a:endParaRPr lang="en-US"/>
           </a:p>
@@ -4233,7 +4240,7 @@
           <p:cNvPr id="2" name="Title 1">
             <a:extLst>
               <a:ext uri="{FF2B5EF4-FFF2-40B4-BE49-F238E27FC236}">
-                <a16:creationId xmlns:a16="http://schemas.microsoft.com/office/drawing/2014/main" id="{AC3B9CDF-EFA5-1EEC-025C-66087F9C02F8}"/>
+                <a16:creationId xmlns:a16="http://schemas.microsoft.com/office/drawing/2014/main" id="{68A5BE75-F97C-03CC-FFF5-2800CF7C92E0}"/>
               </a:ext>
             </a:extLst>
           </p:cNvPr>
@@ -4251,7 +4258,15 @@
           <a:p>
             <a:r>
               <a:rPr lang="en-US" dirty="0"/>
-              <a:t>Housekeeping:</a:t>
+              <a:t>Review – Get </a:t>
+            </a:r>
+            <a:r>
+              <a:rPr lang="en-US" dirty="0" err="1"/>
+              <a:t>Hyp’d</a:t>
+            </a:r>
+            <a:r>
+              <a:rPr lang="en-US" dirty="0"/>
+              <a:t>!</a:t>
             </a:r>
           </a:p>
         </p:txBody>
@@ -4261,7 +4276,7 @@
           <p:cNvPr id="3" name="Content Placeholder 2">
             <a:extLst>
               <a:ext uri="{FF2B5EF4-FFF2-40B4-BE49-F238E27FC236}">
-                <a16:creationId xmlns:a16="http://schemas.microsoft.com/office/drawing/2014/main" id="{D13F83CA-0EE3-BB5B-E653-DC3E53702C1A}"/>
+                <a16:creationId xmlns:a16="http://schemas.microsoft.com/office/drawing/2014/main" id="{6F149904-630A-6BA8-8924-D7B2408AB4ED}"/>
               </a:ext>
             </a:extLst>
           </p:cNvPr>
@@ -4272,57 +4287,90 @@
             <p:ph idx="1"/>
           </p:nvPr>
         </p:nvSpPr>
-        <p:spPr/>
-        <p:txBody>
-          <a:bodyPr/>
-          <a:lstStyle/>
-          <a:p>
-            <a:r>
-              <a:rPr lang="en-US" dirty="0"/>
-              <a:t>Assignment – date extended to Monday, noon. </a:t>
-            </a:r>
-          </a:p>
-          <a:p>
-            <a:r>
-              <a:rPr lang="en-US" dirty="0"/>
-              <a:t>Quiz – We can do it on the 11</a:t>
-            </a:r>
-            <a:r>
-              <a:rPr lang="en-US" baseline="30000" dirty="0"/>
-              <a:t>th</a:t>
-            </a:r>
-            <a:r>
-              <a:rPr lang="en-US" dirty="0"/>
-              <a:t> , let me know if that poses a problem. </a:t>
-            </a:r>
-          </a:p>
-          <a:p>
-            <a:pPr lvl="1"/>
-            <a:r>
-              <a:rPr lang="en-US" dirty="0"/>
-              <a:t>Estimating and testing. </a:t>
-            </a:r>
-          </a:p>
-          <a:p>
-            <a:r>
-              <a:rPr lang="en-US" dirty="0"/>
-              <a:t>Today:</a:t>
-            </a:r>
-          </a:p>
-          <a:p>
-            <a:pPr lvl="1"/>
-            <a:r>
-              <a:rPr lang="en-US"/>
-              <a:t>Hypothesis testing. </a:t>
-            </a:r>
-            <a:endParaRPr lang="en-US" dirty="0"/>
+        <p:spPr>
+          <a:xfrm>
+            <a:off x="1451579" y="1853754"/>
+            <a:ext cx="9603275" cy="4199727"/>
+          </a:xfrm>
+        </p:spPr>
+        <p:txBody>
+          <a:bodyPr>
+            <a:normAutofit/>
+          </a:bodyPr>
+          <a:lstStyle/>
+          <a:p>
+            <a:r>
+              <a:rPr lang="en-US" dirty="0"/>
+              <a:t>Last time we looked a bit at hypothesis tests. </a:t>
+            </a:r>
+          </a:p>
+          <a:p>
+            <a:pPr lvl="1"/>
+            <a:r>
+              <a:rPr lang="en-US" dirty="0"/>
+              <a:t>Tests if effects seen in samples are ‘real’ – due to actual differences in population values. </a:t>
+            </a:r>
+          </a:p>
+          <a:p>
+            <a:r>
+              <a:rPr lang="en-US" dirty="0"/>
+              <a:t>We can construct a hypothesis test with some code:</a:t>
+            </a:r>
+          </a:p>
+          <a:p>
+            <a:pPr lvl="1"/>
+            <a:r>
+              <a:rPr lang="en-US" dirty="0"/>
+              <a:t>Define test statistic – the effect we want to test. </a:t>
+            </a:r>
+          </a:p>
+          <a:p>
+            <a:pPr lvl="1"/>
+            <a:r>
+              <a:rPr lang="en-US" dirty="0"/>
+              <a:t>Create null hypothesis – assertion negating what we have seen (e.g. samples from same pop). </a:t>
+            </a:r>
+          </a:p>
+          <a:p>
+            <a:pPr lvl="1"/>
+            <a:r>
+              <a:rPr lang="en-US" dirty="0"/>
+              <a:t>Design a test – create a loop that runs a trial of the test stat ‘happening’. </a:t>
+            </a:r>
+          </a:p>
+          <a:p>
+            <a:pPr lvl="1"/>
+            <a:r>
+              <a:rPr lang="en-US" dirty="0"/>
+              <a:t>Interpret – the number of times ‘it’ happens randomly is probability. </a:t>
+            </a:r>
+          </a:p>
+          <a:p>
+            <a:r>
+              <a:rPr lang="en-US" dirty="0"/>
+              <a:t>This process is generic as long as we can define:</a:t>
+            </a:r>
+          </a:p>
+          <a:p>
+            <a:pPr lvl="1"/>
+            <a:r>
+              <a:rPr lang="en-US" dirty="0"/>
+              <a:t>Some test statistic that we are checking. </a:t>
+            </a:r>
+          </a:p>
+          <a:p>
+            <a:pPr lvl="1"/>
+            <a:r>
+              <a:rPr lang="en-US" dirty="0"/>
+              <a:t>Some test that simulates likelihood. </a:t>
+            </a:r>
           </a:p>
         </p:txBody>
       </p:sp>
     </p:spTree>
     <p:extLst>
       <p:ext uri="{BB962C8B-B14F-4D97-AF65-F5344CB8AC3E}">
-        <p14:creationId xmlns:p14="http://schemas.microsoft.com/office/powerpoint/2010/main" val="1578407356"/>
+        <p14:creationId xmlns:p14="http://schemas.microsoft.com/office/powerpoint/2010/main" val="2221503694"/>
       </p:ext>
     </p:extLst>
   </p:cSld>
@@ -4354,7 +4402,7 @@
           <p:cNvPr id="2" name="Title 1">
             <a:extLst>
               <a:ext uri="{FF2B5EF4-FFF2-40B4-BE49-F238E27FC236}">
-                <a16:creationId xmlns:a16="http://schemas.microsoft.com/office/drawing/2014/main" id="{22F8F6B6-A700-23AE-D6C2-580B93E058C9}"/>
+                <a16:creationId xmlns:a16="http://schemas.microsoft.com/office/drawing/2014/main" id="{3FFFB92D-D5B7-5C46-859A-480D5C8782A5}"/>
               </a:ext>
             </a:extLst>
           </p:cNvPr>
@@ -4362,7 +4410,7 @@
             <a:spLocks noGrp="1"/>
           </p:cNvSpPr>
           <p:nvPr>
-            <p:ph type="title"/>
+            <p:ph type="ctrTitle"/>
           </p:nvPr>
         </p:nvSpPr>
         <p:spPr/>
@@ -4372,17 +4420,17 @@
           <a:p>
             <a:r>
               <a:rPr lang="en-US" dirty="0"/>
-              <a:t>Inferencing Effects</a:t>
-            </a:r>
-          </a:p>
-        </p:txBody>
-      </p:sp>
-      <p:sp>
-        <p:nvSpPr>
-          <p:cNvPr id="3" name="Content Placeholder 2">
+              <a:t>Hypothesis Testing</a:t>
+            </a:r>
+          </a:p>
+        </p:txBody>
+      </p:sp>
+      <p:sp>
+        <p:nvSpPr>
+          <p:cNvPr id="3" name="Subtitle 2">
             <a:extLst>
               <a:ext uri="{FF2B5EF4-FFF2-40B4-BE49-F238E27FC236}">
-                <a16:creationId xmlns:a16="http://schemas.microsoft.com/office/drawing/2014/main" id="{BEE2A5EC-D8B7-F419-D2BC-B1C3F32F2DF3}"/>
+                <a16:creationId xmlns:a16="http://schemas.microsoft.com/office/drawing/2014/main" id="{584CDFCE-A045-3745-9428-AAC7367486DC}"/>
               </a:ext>
             </a:extLst>
           </p:cNvPr>
@@ -4390,85 +4438,17 @@
             <a:spLocks noGrp="1"/>
           </p:cNvSpPr>
           <p:nvPr>
-            <p:ph idx="1"/>
-          </p:nvPr>
-        </p:nvSpPr>
-        <p:spPr>
-          <a:xfrm>
-            <a:off x="1451579" y="1853754"/>
-            <a:ext cx="9603275" cy="4095101"/>
-          </a:xfrm>
-        </p:spPr>
-        <p:txBody>
-          <a:bodyPr>
-            <a:normAutofit lnSpcReduction="10000"/>
-          </a:bodyPr>
-          <a:lstStyle/>
-          <a:p>
-            <a:r>
-              <a:rPr lang="en-US" dirty="0"/>
-              <a:t>One big thing we want to do in stats is project these effects to a population. </a:t>
-            </a:r>
-          </a:p>
-          <a:p>
-            <a:pPr lvl="1"/>
-            <a:r>
-              <a:rPr lang="en-US" dirty="0"/>
-              <a:t>If people treated with drugs live longer than people in control group, is that difference real?</a:t>
-            </a:r>
-          </a:p>
-          <a:p>
-            <a:pPr lvl="1"/>
-            <a:r>
-              <a:rPr lang="en-US" dirty="0"/>
-              <a:t>If we tutor one group of students extra, is their grade change due to randomness or learning? </a:t>
-            </a:r>
-          </a:p>
-          <a:p>
-            <a:r>
-              <a:rPr lang="en-US" dirty="0"/>
-              <a:t>Like with generalizing, this isn’t direct, it is probabilistic. </a:t>
-            </a:r>
-          </a:p>
-          <a:p>
-            <a:pPr lvl="1"/>
-            <a:r>
-              <a:rPr lang="en-US" dirty="0"/>
-              <a:t>We have natural variance in data, and each sample may differ slightly normally. </a:t>
-            </a:r>
-          </a:p>
-          <a:p>
-            <a:pPr lvl="1"/>
-            <a:r>
-              <a:rPr lang="en-US" dirty="0"/>
-              <a:t>Depending on sample size, we might see swings in means that are random. </a:t>
-            </a:r>
-          </a:p>
-          <a:p>
-            <a:pPr lvl="1"/>
-            <a:r>
-              <a:rPr lang="en-US" dirty="0"/>
-              <a:t>Real life things are often limited in sample size, so variations can be big. </a:t>
-            </a:r>
-          </a:p>
-          <a:p>
-            <a:r>
-              <a:rPr lang="en-US" dirty="0"/>
-              <a:t>So… if we see some effect in our samples, can we trust that effect is in the population? </a:t>
-            </a:r>
-          </a:p>
-          <a:p>
-            <a:pPr lvl="1"/>
-            <a:r>
-              <a:rPr lang="en-US" dirty="0"/>
-              <a:t>Is what we see in our samples real? </a:t>
-            </a:r>
-          </a:p>
-          <a:p>
-            <a:pPr lvl="1"/>
-            <a:r>
-              <a:rPr lang="en-US" dirty="0"/>
-              <a:t>Our hypothesis test will give us a probability it was due to random variation. </a:t>
+            <p:ph type="subTitle" idx="1"/>
+          </p:nvPr>
+        </p:nvSpPr>
+        <p:spPr/>
+        <p:txBody>
+          <a:bodyPr/>
+          <a:lstStyle/>
+          <a:p>
+            <a:r>
+              <a:rPr lang="en-US" dirty="0"/>
+              <a:t>Does it Matter?</a:t>
             </a:r>
           </a:p>
         </p:txBody>
@@ -4476,7 +4456,7 @@
     </p:spTree>
     <p:extLst>
       <p:ext uri="{BB962C8B-B14F-4D97-AF65-F5344CB8AC3E}">
-        <p14:creationId xmlns:p14="http://schemas.microsoft.com/office/powerpoint/2010/main" val="2153975072"/>
+        <p14:creationId xmlns:p14="http://schemas.microsoft.com/office/powerpoint/2010/main" val="2997218721"/>
       </p:ext>
     </p:extLst>
   </p:cSld>
@@ -4487,17 +4467,11 @@
 </file>
 
 <file path=ppt/slides/slide11.xml><?xml version="1.0" encoding="utf-8"?>
-<p:sld xmlns:a="http://schemas.openxmlformats.org/drawingml/2006/main" xmlns:r="http://schemas.openxmlformats.org/officeDocument/2006/relationships" xmlns:p="http://schemas.openxmlformats.org/presentationml/2006/main">
+<p:sld xmlns:a="http://schemas.openxmlformats.org/drawingml/2006/main" xmlns:r="http://schemas.openxmlformats.org/officeDocument/2006/relationships" xmlns:p="http://schemas.openxmlformats.org/presentationml/2006/main" show="0">
   <p:cSld>
     <p:spTree>
       <p:nvGrpSpPr>
-        <p:cNvPr id="1" name="">
-          <a:extLst>
-            <a:ext uri="{FF2B5EF4-FFF2-40B4-BE49-F238E27FC236}">
-              <a16:creationId xmlns:a16="http://schemas.microsoft.com/office/drawing/2014/main" id="{F39E827A-F36A-E2CA-36D2-E27215414F24}"/>
-            </a:ext>
-          </a:extLst>
-        </p:cNvPr>
+        <p:cNvPr id="1" name=""/>
         <p:cNvGrpSpPr/>
         <p:nvPr/>
       </p:nvGrpSpPr>
@@ -4514,7 +4488,7 @@
           <p:cNvPr id="2" name="Title 1">
             <a:extLst>
               <a:ext uri="{FF2B5EF4-FFF2-40B4-BE49-F238E27FC236}">
-                <a16:creationId xmlns:a16="http://schemas.microsoft.com/office/drawing/2014/main" id="{40A6A509-3720-8CB2-D880-D93688039566}"/>
+                <a16:creationId xmlns:a16="http://schemas.microsoft.com/office/drawing/2014/main" id="{3D63269E-AAC3-61F0-A2DB-867CAE780FF4}"/>
               </a:ext>
             </a:extLst>
           </p:cNvPr>
@@ -4532,7 +4506,7 @@
           <a:p>
             <a:r>
               <a:rPr lang="en-US" dirty="0"/>
-              <a:t>What’s a Hypothesis Test?</a:t>
+              <a:t>Hypothesis Test</a:t>
             </a:r>
           </a:p>
         </p:txBody>
@@ -4542,7 +4516,7 @@
           <p:cNvPr id="3" name="Content Placeholder 2">
             <a:extLst>
               <a:ext uri="{FF2B5EF4-FFF2-40B4-BE49-F238E27FC236}">
-                <a16:creationId xmlns:a16="http://schemas.microsoft.com/office/drawing/2014/main" id="{7897E578-0879-9E1F-8B10-E0832E0C7299}"/>
+                <a16:creationId xmlns:a16="http://schemas.microsoft.com/office/drawing/2014/main" id="{A78F8A65-87BC-7150-5EF4-ED6622A95FE8}"/>
               </a:ext>
             </a:extLst>
           </p:cNvPr>
@@ -4553,78 +4527,22 @@
             <p:ph idx="1"/>
           </p:nvPr>
         </p:nvSpPr>
-        <p:spPr>
-          <a:xfrm>
-            <a:off x="1451579" y="1933904"/>
-            <a:ext cx="9603275" cy="4119578"/>
-          </a:xfrm>
-        </p:spPr>
+        <p:spPr/>
         <p:txBody>
           <a:bodyPr/>
           <a:lstStyle/>
           <a:p>
             <a:r>
               <a:rPr lang="en-US" dirty="0"/>
-              <a:t>A hypothesis test evaluates two mutually exclusive statements about a population to determine which statement the sample data best supports. </a:t>
-            </a:r>
-          </a:p>
-          <a:p>
-            <a:pPr lvl="1"/>
-            <a:r>
-              <a:rPr lang="en-US" dirty="0"/>
-              <a:t>Null Hypothesis: The effect does not exist in the population.</a:t>
-            </a:r>
-          </a:p>
-          <a:p>
-            <a:pPr lvl="1"/>
-            <a:r>
-              <a:rPr lang="en-US" dirty="0"/>
-              <a:t>Alternative Hypothesis: The effect does exist in the population.</a:t>
-            </a:r>
-          </a:p>
-          <a:p>
-            <a:pPr lvl="1"/>
-            <a:r>
-              <a:rPr lang="en-US" dirty="0"/>
-              <a:t>Effect = difference. Specifically, here it is the difference we see between the samples. </a:t>
-            </a:r>
-          </a:p>
-          <a:p>
-            <a:r>
-              <a:rPr lang="en-US" dirty="0"/>
-              <a:t>Hypothesis testing lets us say that effects have statistical significance, indicating that an effect in sample data also likely exists in the population after accounting for:</a:t>
-            </a:r>
-          </a:p>
-          <a:p>
-            <a:pPr lvl="1"/>
-            <a:r>
-              <a:rPr lang="en-US" dirty="0"/>
-              <a:t>Random sampling error.</a:t>
-            </a:r>
-          </a:p>
-          <a:p>
-            <a:pPr lvl="1"/>
-            <a:r>
-              <a:rPr lang="en-US" dirty="0"/>
-              <a:t>Variability in the data. </a:t>
-            </a:r>
-          </a:p>
-          <a:p>
-            <a:pPr lvl="1"/>
-            <a:r>
-              <a:rPr lang="en-US" dirty="0"/>
-              <a:t>Sample size. </a:t>
-            </a:r>
-          </a:p>
-          <a:p>
-            <a:endParaRPr lang="en-US" dirty="0"/>
+              <a:t>Hypothesis testing is a reasonably large topic. </a:t>
+            </a:r>
           </a:p>
         </p:txBody>
       </p:sp>
     </p:spTree>
     <p:extLst>
       <p:ext uri="{BB962C8B-B14F-4D97-AF65-F5344CB8AC3E}">
-        <p14:creationId xmlns:p14="http://schemas.microsoft.com/office/powerpoint/2010/main" val="93985515"/>
+        <p14:creationId xmlns:p14="http://schemas.microsoft.com/office/powerpoint/2010/main" val="2539723738"/>
       </p:ext>
     </p:extLst>
   </p:cSld>
@@ -4656,7 +4574,7 @@
           <p:cNvPr id="2" name="Title 1">
             <a:extLst>
               <a:ext uri="{FF2B5EF4-FFF2-40B4-BE49-F238E27FC236}">
-                <a16:creationId xmlns:a16="http://schemas.microsoft.com/office/drawing/2014/main" id="{FA40493A-F1BC-7E49-1897-3A5238079639}"/>
+                <a16:creationId xmlns:a16="http://schemas.microsoft.com/office/drawing/2014/main" id="{F722AA3E-BBBE-94A6-DAF1-85773DBEE918}"/>
               </a:ext>
             </a:extLst>
           </p:cNvPr>
@@ -4674,7 +4592,7 @@
           <a:p>
             <a:r>
               <a:rPr lang="en-US" dirty="0"/>
-              <a:t>Don’t Get too Confident</a:t>
+              <a:t>Recall - Estimation</a:t>
             </a:r>
           </a:p>
         </p:txBody>
@@ -4684,7 +4602,7 @@
           <p:cNvPr id="3" name="Content Placeholder 2">
             <a:extLst>
               <a:ext uri="{FF2B5EF4-FFF2-40B4-BE49-F238E27FC236}">
-                <a16:creationId xmlns:a16="http://schemas.microsoft.com/office/drawing/2014/main" id="{29AD3248-E13C-1595-6D51-ED37B4A2964C}"/>
+                <a16:creationId xmlns:a16="http://schemas.microsoft.com/office/drawing/2014/main" id="{080A01FD-7DDA-A8D2-8DC7-479583D5F684}"/>
               </a:ext>
             </a:extLst>
           </p:cNvPr>
@@ -4695,53 +4613,19 @@
             <p:ph idx="1"/>
           </p:nvPr>
         </p:nvSpPr>
-        <p:spPr>
-          <a:xfrm>
-            <a:off x="1451579" y="2015732"/>
-            <a:ext cx="9603275" cy="4037749"/>
-          </a:xfrm>
-        </p:spPr>
+        <p:spPr/>
         <p:txBody>
           <a:bodyPr/>
           <a:lstStyle/>
           <a:p>
-            <a:r>
-              <a:rPr lang="en-US" dirty="0"/>
-              <a:t>Like with generalizing to a population, this is probabilistic. </a:t>
-            </a:r>
-          </a:p>
-          <a:p>
-            <a:r>
-              <a:rPr lang="en-US" dirty="0"/>
-              <a:t>Our findings here are evidence, not assertions. </a:t>
-            </a:r>
-          </a:p>
-          <a:p>
-            <a:pPr lvl="1"/>
-            <a:r>
-              <a:rPr lang="en-US" dirty="0"/>
-              <a:t>E.g. if we do a hypothesis test that shows an effect is real, that’s only an indicator. </a:t>
-            </a:r>
-          </a:p>
-          <a:p>
-            <a:r>
-              <a:rPr lang="en-US" dirty="0"/>
-              <a:t>To make solid findings, we probably want several pieces of evidence. </a:t>
-            </a:r>
-          </a:p>
-          <a:p>
-            <a:pPr lvl="1"/>
-            <a:r>
-              <a:rPr lang="en-US" dirty="0"/>
-              <a:t>More is better, as we’ll see…</a:t>
-            </a:r>
+            <a:endParaRPr lang="en-US"/>
           </a:p>
         </p:txBody>
       </p:sp>
     </p:spTree>
     <p:extLst>
       <p:ext uri="{BB962C8B-B14F-4D97-AF65-F5344CB8AC3E}">
-        <p14:creationId xmlns:p14="http://schemas.microsoft.com/office/powerpoint/2010/main" val="1526678658"/>
+        <p14:creationId xmlns:p14="http://schemas.microsoft.com/office/powerpoint/2010/main" val="1056623766"/>
       </p:ext>
     </p:extLst>
   </p:cSld>
@@ -4773,7 +4657,7 @@
           <p:cNvPr id="2" name="Title 1">
             <a:extLst>
               <a:ext uri="{FF2B5EF4-FFF2-40B4-BE49-F238E27FC236}">
-                <a16:creationId xmlns:a16="http://schemas.microsoft.com/office/drawing/2014/main" id="{AE07D908-A850-3560-95FD-8C539921A59D}"/>
+                <a16:creationId xmlns:a16="http://schemas.microsoft.com/office/drawing/2014/main" id="{53C9C203-8EA9-7410-B8BA-9D9CB018ECB0}"/>
               </a:ext>
             </a:extLst>
           </p:cNvPr>
@@ -4782,113 +4666,153 @@
           </p:cNvSpPr>
           <p:nvPr>
             <p:ph type="title"/>
-          </p:nvPr>
-        </p:nvSpPr>
-        <p:spPr/>
-        <p:txBody>
-          <a:bodyPr/>
-          <a:lstStyle/>
-          <a:p>
-            <a:r>
-              <a:rPr lang="en-US" dirty="0"/>
-              <a:t>Hypothesis Testing From Scratch</a:t>
-            </a:r>
-          </a:p>
-        </p:txBody>
-      </p:sp>
-      <p:sp>
-        <p:nvSpPr>
-          <p:cNvPr id="3" name="Content Placeholder 2">
-            <a:extLst>
-              <a:ext uri="{FF2B5EF4-FFF2-40B4-BE49-F238E27FC236}">
-                <a16:creationId xmlns:a16="http://schemas.microsoft.com/office/drawing/2014/main" id="{D2544162-9761-6E7C-99FE-70C4B3473F0B}"/>
-              </a:ext>
-            </a:extLst>
-          </p:cNvPr>
-          <p:cNvSpPr>
-            <a:spLocks noGrp="1"/>
-          </p:cNvSpPr>
-          <p:nvPr>
-            <p:ph idx="1"/>
           </p:nvPr>
         </p:nvSpPr>
         <p:spPr>
           <a:xfrm>
-            <a:off x="1451579" y="1853754"/>
-            <a:ext cx="9603275" cy="4199727"/>
+            <a:off x="1" y="804519"/>
+            <a:ext cx="3549650" cy="1049235"/>
           </a:xfrm>
         </p:spPr>
         <p:txBody>
-          <a:bodyPr>
-            <a:normAutofit/>
-          </a:bodyPr>
-          <a:lstStyle/>
-          <a:p>
-            <a:r>
-              <a:rPr lang="en-US" dirty="0"/>
-              <a:t>We can use fast computers and coding </a:t>
-            </a:r>
-            <a:r>
-              <a:rPr lang="en-US" dirty="0" err="1"/>
-              <a:t>skillz</a:t>
-            </a:r>
-            <a:r>
-              <a:rPr lang="en-US" dirty="0"/>
-              <a:t> to do some hypothesis testing from scratch. </a:t>
-            </a:r>
-          </a:p>
-          <a:p>
-            <a:r>
-              <a:rPr lang="en-US" dirty="0"/>
-              <a:t>To start, we see some effect – such as a difference in our samples. </a:t>
-            </a:r>
-          </a:p>
-          <a:p>
-            <a:r>
-              <a:rPr lang="en-US" dirty="0"/>
-              <a:t>We can do a sort of two-part check:</a:t>
-            </a:r>
-          </a:p>
-          <a:p>
-            <a:pPr lvl="1"/>
-            <a:r>
-              <a:rPr lang="en-US" dirty="0"/>
-              <a:t>Comparison between two things (e.g. sample means). </a:t>
-            </a:r>
-          </a:p>
-          <a:p>
-            <a:pPr lvl="1"/>
-            <a:r>
-              <a:rPr lang="en-US" dirty="0"/>
-              <a:t>Generalization to the population. </a:t>
-            </a:r>
-          </a:p>
-          <a:p>
-            <a:r>
-              <a:rPr lang="en-US" dirty="0"/>
-              <a:t>Our hypothesis test answers the question, “Given this effect we see in our sample, what is the probability of the same effect existing in the population by chance (randomly)?”. </a:t>
-            </a:r>
-          </a:p>
-          <a:p>
-            <a:pPr lvl="1"/>
-            <a:r>
-              <a:rPr lang="en-US" dirty="0"/>
-              <a:t>We see X thing in the sample data (the effect). </a:t>
-            </a:r>
-          </a:p>
-          <a:p>
-            <a:pPr lvl="1"/>
-            <a:r>
-              <a:rPr lang="en-US" dirty="0"/>
-              <a:t>Is effect ‘real’ in the population or could it just be randomness due to sample and variance?</a:t>
-            </a:r>
-          </a:p>
-        </p:txBody>
-      </p:sp>
+          <a:bodyPr/>
+          <a:lstStyle/>
+          <a:p>
+            <a:r>
+              <a:rPr lang="en-US" dirty="0"/>
+              <a:t>Recall - Estimation</a:t>
+            </a:r>
+          </a:p>
+        </p:txBody>
+      </p:sp>
+      <p:sp>
+        <p:nvSpPr>
+          <p:cNvPr id="3" name="Content Placeholder 2">
+            <a:extLst>
+              <a:ext uri="{FF2B5EF4-FFF2-40B4-BE49-F238E27FC236}">
+                <a16:creationId xmlns:a16="http://schemas.microsoft.com/office/drawing/2014/main" id="{7684DE7B-31AB-063F-8BC5-23E4889972D6}"/>
+              </a:ext>
+            </a:extLst>
+          </p:cNvPr>
+          <p:cNvSpPr>
+            <a:spLocks noGrp="1"/>
+          </p:cNvSpPr>
+          <p:nvPr>
+            <p:ph idx="1"/>
+          </p:nvPr>
+        </p:nvSpPr>
+        <p:spPr>
+          <a:xfrm>
+            <a:off x="0" y="2015732"/>
+            <a:ext cx="3549651" cy="4037749"/>
+          </a:xfrm>
+        </p:spPr>
+        <p:txBody>
+          <a:bodyPr/>
+          <a:lstStyle/>
+          <a:p>
+            <a:r>
+              <a:rPr lang="en-US" dirty="0"/>
+              <a:t>We looked at estimating for a population from a sample. </a:t>
+            </a:r>
+          </a:p>
+          <a:p>
+            <a:pPr lvl="1"/>
+            <a:r>
+              <a:rPr lang="en-US" dirty="0"/>
+              <a:t>Take sample, calculate stats.</a:t>
+            </a:r>
+          </a:p>
+          <a:p>
+            <a:pPr lvl="1"/>
+            <a:r>
+              <a:rPr lang="en-US" dirty="0"/>
+              <a:t>Make model, run trials.</a:t>
+            </a:r>
+          </a:p>
+          <a:p>
+            <a:r>
+              <a:rPr lang="en-US" dirty="0"/>
+              <a:t>Conclusions are probabilistic. </a:t>
+            </a:r>
+          </a:p>
+          <a:p>
+            <a:pPr lvl="1"/>
+            <a:r>
+              <a:rPr lang="en-US" dirty="0"/>
+              <a:t>We have uncertainty. </a:t>
+            </a:r>
+          </a:p>
+          <a:p>
+            <a:r>
+              <a:rPr lang="en-US" dirty="0"/>
+              <a:t>Conclusions have confidence intervals. </a:t>
+            </a:r>
+          </a:p>
+          <a:p>
+            <a:pPr lvl="1"/>
+            <a:r>
+              <a:rPr lang="en-US" dirty="0"/>
+              <a:t>Indication of prediction acc.</a:t>
+            </a:r>
+          </a:p>
+          <a:p>
+            <a:pPr lvl="1"/>
+            <a:endParaRPr lang="en-US" dirty="0"/>
+          </a:p>
+        </p:txBody>
+      </p:sp>
+      <p:pic>
+        <p:nvPicPr>
+          <p:cNvPr id="3076" name="Picture 4" descr="Can't find the CLT? Fundamental Statistics for Machine Learning: Part 1 |  by Abhishek Divekar | Medium">
+            <a:extLst>
+              <a:ext uri="{FF2B5EF4-FFF2-40B4-BE49-F238E27FC236}">
+                <a16:creationId xmlns:a16="http://schemas.microsoft.com/office/drawing/2014/main" id="{B0F902A8-0C2E-0F8C-1A06-AA40FDFF5048}"/>
+              </a:ext>
+            </a:extLst>
+          </p:cNvPr>
+          <p:cNvPicPr>
+            <a:picLocks noChangeAspect="1" noChangeArrowheads="1"/>
+          </p:cNvPicPr>
+          <p:nvPr/>
+        </p:nvPicPr>
+        <p:blipFill>
+          <a:blip r:embed="rId2">
+            <a:extLst>
+              <a:ext uri="{28A0092B-C50C-407E-A947-70E740481C1C}">
+                <a14:useLocalDpi xmlns:a14="http://schemas.microsoft.com/office/drawing/2010/main" val="0"/>
+              </a:ext>
+            </a:extLst>
+          </a:blip>
+          <a:srcRect/>
+          <a:stretch>
+            <a:fillRect/>
+          </a:stretch>
+        </p:blipFill>
+        <p:spPr bwMode="auto">
+          <a:xfrm>
+            <a:off x="3549650" y="0"/>
+            <a:ext cx="8642350" cy="6858000"/>
+          </a:xfrm>
+          <a:prstGeom prst="rect">
+            <a:avLst/>
+          </a:prstGeom>
+          <a:noFill/>
+          <a:extLst>
+            <a:ext uri="{909E8E84-426E-40DD-AFC4-6F175D3DCCD1}">
+              <a14:hiddenFill xmlns:a14="http://schemas.microsoft.com/office/drawing/2010/main">
+                <a:solidFill>
+                  <a:srgbClr val="FFFFFF"/>
+                </a:solidFill>
+              </a14:hiddenFill>
+            </a:ext>
+          </a:extLst>
+        </p:spPr>
+      </p:pic>
     </p:spTree>
     <p:extLst>
       <p:ext uri="{BB962C8B-B14F-4D97-AF65-F5344CB8AC3E}">
-        <p14:creationId xmlns:p14="http://schemas.microsoft.com/office/powerpoint/2010/main" val="3725665083"/>
+        <p14:creationId xmlns:p14="http://schemas.microsoft.com/office/powerpoint/2010/main" val="3637465867"/>
       </p:ext>
     </p:extLst>
   </p:cSld>
@@ -4920,7 +4844,7 @@
           <p:cNvPr id="2" name="Title 1">
             <a:extLst>
               <a:ext uri="{FF2B5EF4-FFF2-40B4-BE49-F238E27FC236}">
-                <a16:creationId xmlns:a16="http://schemas.microsoft.com/office/drawing/2014/main" id="{42DBD3D8-17EC-4727-F753-F8A1F5E9A88E}"/>
+                <a16:creationId xmlns:a16="http://schemas.microsoft.com/office/drawing/2014/main" id="{8EB41484-7549-9AD6-8858-9D7B52369AE9}"/>
               </a:ext>
             </a:extLst>
           </p:cNvPr>
@@ -4938,7 +4862,7 @@
           <a:p>
             <a:r>
               <a:rPr lang="en-US" dirty="0"/>
-              <a:t>Realistic Example</a:t>
+              <a:t>Making Predictions</a:t>
             </a:r>
           </a:p>
         </p:txBody>
@@ -4948,7 +4872,7 @@
           <p:cNvPr id="3" name="Content Placeholder 2">
             <a:extLst>
               <a:ext uri="{FF2B5EF4-FFF2-40B4-BE49-F238E27FC236}">
-                <a16:creationId xmlns:a16="http://schemas.microsoft.com/office/drawing/2014/main" id="{65A4BDE6-2576-A2D0-0903-C569C03FF09B}"/>
+                <a16:creationId xmlns:a16="http://schemas.microsoft.com/office/drawing/2014/main" id="{CF20F2D4-8597-0E59-306A-60B9146921D6}"/>
               </a:ext>
             </a:extLst>
           </p:cNvPr>
@@ -4961,8 +4885,8 @@
         </p:nvSpPr>
         <p:spPr>
           <a:xfrm>
-            <a:off x="1451579" y="1933903"/>
-            <a:ext cx="9603275" cy="4119577"/>
+            <a:off x="7714650" y="2015732"/>
+            <a:ext cx="4066672" cy="4037749"/>
           </a:xfrm>
         </p:spPr>
         <p:txBody>
@@ -4971,68 +4895,95 @@
           <a:p>
             <a:r>
               <a:rPr lang="en-US" dirty="0"/>
-              <a:t>We are conducting a drug trial and have two separate samples:</a:t>
-            </a:r>
-          </a:p>
-          <a:p>
-            <a:pPr lvl="1"/>
-            <a:r>
-              <a:rPr lang="en-US" dirty="0"/>
-              <a:t>Treatment group – count 31, average life expectancy 12.5 years. </a:t>
-            </a:r>
-          </a:p>
-          <a:p>
-            <a:pPr lvl="1"/>
-            <a:r>
-              <a:rPr lang="en-US" dirty="0"/>
-              <a:t>Control group – count 39, average life expectancy 11.1 years. </a:t>
-            </a:r>
-          </a:p>
-          <a:p>
-            <a:r>
-              <a:rPr lang="en-US" dirty="0"/>
-              <a:t>The treated people live longer, but is that difference significant? </a:t>
-            </a:r>
-          </a:p>
-          <a:p>
-            <a:pPr lvl="1"/>
-            <a:r>
-              <a:rPr lang="en-US" dirty="0"/>
-              <a:t>Given the sample size and variance of data, could the observed sample effect be random? </a:t>
-            </a:r>
-          </a:p>
-          <a:p>
-            <a:r>
-              <a:rPr lang="en-US" dirty="0"/>
-              <a:t>This is a probabilistic decision. </a:t>
-            </a:r>
-          </a:p>
-          <a:p>
-            <a:pPr lvl="1"/>
-            <a:r>
-              <a:rPr lang="en-US" dirty="0"/>
-              <a:t>The effect we see in the sample could be real, or could be just random variation. </a:t>
-            </a:r>
-          </a:p>
-          <a:p>
-            <a:pPr lvl="1"/>
-            <a:r>
-              <a:rPr lang="en-US" dirty="0"/>
-              <a:t>The hypothesis test tests the likelihood it is random. </a:t>
-            </a:r>
-          </a:p>
-          <a:p>
-            <a:r>
-              <a:rPr lang="en-US" dirty="0"/>
-              <a:t>If the likelihood this effect is random is low enough, we judge it to be significant - real. </a:t>
-            </a:r>
-          </a:p>
-        </p:txBody>
-      </p:sp>
+              <a:t>When generalizing, we have a range and a likelihood. </a:t>
+            </a:r>
+          </a:p>
+          <a:p>
+            <a:r>
+              <a:rPr lang="en-US" dirty="0"/>
+              <a:t>Errors stem from:</a:t>
+            </a:r>
+          </a:p>
+          <a:p>
+            <a:pPr lvl="1"/>
+            <a:r>
+              <a:rPr lang="en-US" dirty="0"/>
+              <a:t>Sampling. </a:t>
+            </a:r>
+          </a:p>
+          <a:p>
+            <a:pPr lvl="1"/>
+            <a:r>
+              <a:rPr lang="en-US" dirty="0"/>
+              <a:t>Sampling bias. </a:t>
+            </a:r>
+          </a:p>
+          <a:p>
+            <a:pPr lvl="1"/>
+            <a:r>
+              <a:rPr lang="en-US" dirty="0"/>
+              <a:t>Measurement error. </a:t>
+            </a:r>
+          </a:p>
+          <a:p>
+            <a:r>
+              <a:rPr lang="en-US" dirty="0"/>
+              <a:t>Some errors are beyond us. </a:t>
+            </a:r>
+          </a:p>
+        </p:txBody>
+      </p:sp>
+      <p:pic>
+        <p:nvPicPr>
+          <p:cNvPr id="4" name="Picture 2" descr="Chapter 10 Confidence Intervals | Introduction to Statistics and Data  Science">
+            <a:extLst>
+              <a:ext uri="{FF2B5EF4-FFF2-40B4-BE49-F238E27FC236}">
+                <a16:creationId xmlns:a16="http://schemas.microsoft.com/office/drawing/2014/main" id="{3FB6E4FC-E947-EA3D-3069-097DD3CC5739}"/>
+              </a:ext>
+            </a:extLst>
+          </p:cNvPr>
+          <p:cNvPicPr>
+            <a:picLocks noChangeAspect="1" noChangeArrowheads="1"/>
+          </p:cNvPicPr>
+          <p:nvPr/>
+        </p:nvPicPr>
+        <p:blipFill>
+          <a:blip r:embed="rId2">
+            <a:extLst>
+              <a:ext uri="{28A0092B-C50C-407E-A947-70E740481C1C}">
+                <a14:useLocalDpi xmlns:a14="http://schemas.microsoft.com/office/drawing/2010/main" val="0"/>
+              </a:ext>
+            </a:extLst>
+          </a:blip>
+          <a:srcRect/>
+          <a:stretch>
+            <a:fillRect/>
+          </a:stretch>
+        </p:blipFill>
+        <p:spPr bwMode="auto">
+          <a:xfrm>
+            <a:off x="0" y="1853754"/>
+            <a:ext cx="7714650" cy="4408371"/>
+          </a:xfrm>
+          <a:prstGeom prst="rect">
+            <a:avLst/>
+          </a:prstGeom>
+          <a:noFill/>
+          <a:extLst>
+            <a:ext uri="{909E8E84-426E-40DD-AFC4-6F175D3DCCD1}">
+              <a14:hiddenFill xmlns:a14="http://schemas.microsoft.com/office/drawing/2010/main">
+                <a:solidFill>
+                  <a:srgbClr val="FFFFFF"/>
+                </a:solidFill>
+              </a14:hiddenFill>
+            </a:ext>
+          </a:extLst>
+        </p:spPr>
+      </p:pic>
     </p:spTree>
     <p:extLst>
       <p:ext uri="{BB962C8B-B14F-4D97-AF65-F5344CB8AC3E}">
-        <p14:creationId xmlns:p14="http://schemas.microsoft.com/office/powerpoint/2010/main" val="488682165"/>
+        <p14:creationId xmlns:p14="http://schemas.microsoft.com/office/powerpoint/2010/main" val="3203570768"/>
       </p:ext>
     </p:extLst>
   </p:cSld>
@@ -5064,7 +5015,7 @@
           <p:cNvPr id="2" name="Title 1">
             <a:extLst>
               <a:ext uri="{FF2B5EF4-FFF2-40B4-BE49-F238E27FC236}">
-                <a16:creationId xmlns:a16="http://schemas.microsoft.com/office/drawing/2014/main" id="{E238217B-E04E-E5EE-ACB7-19C5A0E3622D}"/>
+                <a16:creationId xmlns:a16="http://schemas.microsoft.com/office/drawing/2014/main" id="{A9BE8D9D-350C-FFC8-8E60-05F536113D49}"/>
               </a:ext>
             </a:extLst>
           </p:cNvPr>
@@ -5082,7 +5033,7 @@
           <a:p>
             <a:r>
               <a:rPr lang="en-US" dirty="0"/>
-              <a:t>Build a Hypothesis</a:t>
+              <a:t>Using Simulations</a:t>
             </a:r>
           </a:p>
         </p:txBody>
@@ -5092,7 +5043,7 @@
           <p:cNvPr id="3" name="Content Placeholder 2">
             <a:extLst>
               <a:ext uri="{FF2B5EF4-FFF2-40B4-BE49-F238E27FC236}">
-                <a16:creationId xmlns:a16="http://schemas.microsoft.com/office/drawing/2014/main" id="{B7DD69C7-73D7-A47B-3140-75A889372834}"/>
+                <a16:creationId xmlns:a16="http://schemas.microsoft.com/office/drawing/2014/main" id="{6F01357A-84A4-884F-00D0-13CDFD37E2A6}"/>
               </a:ext>
             </a:extLst>
           </p:cNvPr>
@@ -5105,103 +5056,64 @@
         </p:nvSpPr>
         <p:spPr>
           <a:xfrm>
-            <a:off x="1451579" y="1853755"/>
-            <a:ext cx="9603275" cy="4199726"/>
+            <a:off x="1451579" y="2015732"/>
+            <a:ext cx="9603275" cy="3932681"/>
           </a:xfrm>
         </p:spPr>
         <p:txBody>
-          <a:bodyPr>
-            <a:normAutofit lnSpcReduction="10000"/>
-          </a:bodyPr>
-          <a:lstStyle/>
-          <a:p>
-            <a:pPr marL="457200" indent="-457200">
-              <a:buFont typeface="+mj-lt"/>
-              <a:buAutoNum type="arabicPeriod"/>
-            </a:pPr>
-            <a:r>
-              <a:rPr lang="en-US" dirty="0"/>
-              <a:t>Select a test statistic – the thing calculated. </a:t>
-            </a:r>
-          </a:p>
-          <a:p>
-            <a:pPr marL="914400" lvl="1" indent="-457200">
-              <a:buFont typeface="+mj-lt"/>
-              <a:buAutoNum type="arabicPeriod"/>
-            </a:pPr>
-            <a:r>
-              <a:rPr lang="en-US" dirty="0"/>
-              <a:t>For the life expectancy this would be mean life expectancy of the samples. </a:t>
-            </a:r>
-          </a:p>
-          <a:p>
-            <a:pPr marL="457200" indent="-457200">
-              <a:buFont typeface="+mj-lt"/>
-              <a:buAutoNum type="arabicPeriod"/>
-            </a:pPr>
-            <a:r>
-              <a:rPr lang="en-US" dirty="0"/>
-              <a:t>Define null hypothesis – assertion that this thing is not true. </a:t>
-            </a:r>
-          </a:p>
-          <a:p>
-            <a:pPr marL="914400" lvl="1" indent="-457200">
-              <a:buFont typeface="+mj-lt"/>
-              <a:buAutoNum type="arabicPeriod"/>
-            </a:pPr>
-            <a:r>
-              <a:rPr lang="en-US" dirty="0"/>
-              <a:t>There is no difference between the population means of treatment and control. </a:t>
-            </a:r>
-          </a:p>
-          <a:p>
-            <a:pPr marL="457200" indent="-457200">
-              <a:buFont typeface="+mj-lt"/>
-              <a:buAutoNum type="arabicPeriod"/>
-            </a:pPr>
-            <a:r>
-              <a:rPr lang="en-US" dirty="0"/>
-              <a:t>Calculate the p-value – the likelihood the null hypothesis is true. </a:t>
-            </a:r>
-          </a:p>
-          <a:p>
-            <a:pPr marL="914400" lvl="1" indent="-457200">
-              <a:buFont typeface="+mj-lt"/>
-              <a:buAutoNum type="arabicPeriod"/>
-            </a:pPr>
-            <a:r>
-              <a:rPr lang="en-US" dirty="0"/>
-              <a:t>Probability treatment and control populations are the same and effect is random variation.</a:t>
-            </a:r>
-          </a:p>
-          <a:p>
-            <a:pPr marL="914400" lvl="1" indent="-457200">
-              <a:buFont typeface="+mj-lt"/>
-              <a:buAutoNum type="arabicPeriod"/>
-            </a:pPr>
-            <a:r>
-              <a:rPr lang="en-US" dirty="0"/>
-              <a:t>We can do simulating here, but we need to build the right model to generate tests. </a:t>
-            </a:r>
-          </a:p>
-          <a:p>
-            <a:pPr marL="457200" indent="-457200">
-              <a:buFont typeface="+mj-lt"/>
-              <a:buAutoNum type="arabicPeriod"/>
-            </a:pPr>
-            <a:r>
-              <a:rPr lang="en-US" dirty="0"/>
-              <a:t>Interpret the result – is the likelihood of it being random low enough? </a:t>
-            </a:r>
-          </a:p>
-          <a:p>
-            <a:pPr marL="914400" lvl="1" indent="-457200">
-              <a:buFont typeface="+mj-lt"/>
-              <a:buAutoNum type="arabicPeriod"/>
-            </a:pPr>
-            <a:r>
-              <a:rPr lang="en-US" dirty="0"/>
-              <a:t>If the probability of the treatment and control populations being the same is very low, we can conclude the drug actually made the two populations differ. </a:t>
+          <a:bodyPr/>
+          <a:lstStyle/>
+          <a:p>
+            <a:r>
+              <a:rPr lang="en-US" dirty="0"/>
+              <a:t>We can do this with our simulation loops. </a:t>
+            </a:r>
+          </a:p>
+          <a:p>
+            <a:pPr lvl="1"/>
+            <a:r>
+              <a:rPr lang="en-US" dirty="0"/>
+              <a:t>We have a model for data expectations (analytical distribution) made from sample. </a:t>
+            </a:r>
+          </a:p>
+          <a:p>
+            <a:pPr lvl="1"/>
+            <a:r>
+              <a:rPr lang="en-US" dirty="0"/>
+              <a:t>We can generate many new samples from that distribution. </a:t>
+            </a:r>
+          </a:p>
+          <a:p>
+            <a:pPr lvl="1"/>
+            <a:r>
+              <a:rPr lang="en-US" dirty="0"/>
+              <a:t>We can count where the results of those samples fall. </a:t>
+            </a:r>
+          </a:p>
+          <a:p>
+            <a:r>
+              <a:rPr lang="en-US" dirty="0"/>
+              <a:t>These counts are an estimate of what we can expect going forward. </a:t>
+            </a:r>
+          </a:p>
+          <a:p>
+            <a:pPr lvl="1"/>
+            <a:r>
+              <a:rPr lang="en-US" dirty="0"/>
+              <a:t>The more clustered they are, the more confident we are in predictions. </a:t>
+            </a:r>
+          </a:p>
+          <a:p>
+            <a:pPr lvl="1"/>
+            <a:r>
+              <a:rPr lang="en-US" dirty="0"/>
+              <a:t>The range that 90/95/99% fall into is our confidence interval. </a:t>
+            </a:r>
+          </a:p>
+          <a:p>
+            <a:r>
+              <a:rPr lang="en-US" dirty="0"/>
+              <a:t>As long as we have some model of the distribution, we can do the same thing. </a:t>
             </a:r>
           </a:p>
         </p:txBody>
@@ -5209,7 +5121,7 @@
     </p:spTree>
     <p:extLst>
       <p:ext uri="{BB962C8B-B14F-4D97-AF65-F5344CB8AC3E}">
-        <p14:creationId xmlns:p14="http://schemas.microsoft.com/office/powerpoint/2010/main" val="353130190"/>
+        <p14:creationId xmlns:p14="http://schemas.microsoft.com/office/powerpoint/2010/main" val="3630232877"/>
       </p:ext>
     </p:extLst>
   </p:cSld>
@@ -5224,7 +5136,13 @@
   <p:cSld>
     <p:spTree>
       <p:nvGrpSpPr>
-        <p:cNvPr id="1" name=""/>
+        <p:cNvPr id="1" name="">
+          <a:extLst>
+            <a:ext uri="{FF2B5EF4-FFF2-40B4-BE49-F238E27FC236}">
+              <a16:creationId xmlns:a16="http://schemas.microsoft.com/office/drawing/2014/main" id="{1C237FF7-4E14-DB4F-0428-DA9C7B428F28}"/>
+            </a:ext>
+          </a:extLst>
+        </p:cNvPr>
         <p:cNvGrpSpPr/>
         <p:nvPr/>
       </p:nvGrpSpPr>
@@ -5241,7 +5159,7 @@
           <p:cNvPr id="2" name="Title 1">
             <a:extLst>
               <a:ext uri="{FF2B5EF4-FFF2-40B4-BE49-F238E27FC236}">
-                <a16:creationId xmlns:a16="http://schemas.microsoft.com/office/drawing/2014/main" id="{CA6CB23A-5CF3-B067-AA4C-9714A220A757}"/>
+                <a16:creationId xmlns:a16="http://schemas.microsoft.com/office/drawing/2014/main" id="{A4D52962-0069-5970-7E60-5D3767C89133}"/>
               </a:ext>
             </a:extLst>
           </p:cNvPr>
@@ -5250,110 +5168,133 @@
           </p:cNvSpPr>
           <p:nvPr>
             <p:ph type="title"/>
-          </p:nvPr>
-        </p:nvSpPr>
-        <p:spPr/>
-        <p:txBody>
-          <a:bodyPr/>
-          <a:lstStyle/>
-          <a:p>
-            <a:r>
-              <a:rPr lang="en-US" dirty="0"/>
-              <a:t>Ok, so… Do it!</a:t>
-            </a:r>
-          </a:p>
-        </p:txBody>
-      </p:sp>
-      <p:sp>
-        <p:nvSpPr>
-          <p:cNvPr id="3" name="Content Placeholder 2">
-            <a:extLst>
-              <a:ext uri="{FF2B5EF4-FFF2-40B4-BE49-F238E27FC236}">
-                <a16:creationId xmlns:a16="http://schemas.microsoft.com/office/drawing/2014/main" id="{D669C50B-D96E-F8FE-9E8B-AAED4A2FB926}"/>
-              </a:ext>
-            </a:extLst>
-          </p:cNvPr>
-          <p:cNvSpPr>
-            <a:spLocks noGrp="1"/>
-          </p:cNvSpPr>
-          <p:nvPr>
-            <p:ph idx="1"/>
           </p:nvPr>
         </p:nvSpPr>
         <p:spPr>
           <a:xfrm>
-            <a:off x="1451579" y="2015732"/>
-            <a:ext cx="9603275" cy="4037749"/>
+            <a:off x="1451579" y="804519"/>
+            <a:ext cx="9603275" cy="1049235"/>
           </a:xfrm>
         </p:spPr>
         <p:txBody>
-          <a:bodyPr/>
-          <a:lstStyle/>
-          <a:p>
-            <a:r>
-              <a:rPr lang="en-US" dirty="0"/>
-              <a:t>This process is something that can extend on our simulations. </a:t>
-            </a:r>
-          </a:p>
-          <a:p>
-            <a:pPr lvl="1"/>
-            <a:r>
-              <a:rPr lang="en-US" dirty="0"/>
-              <a:t>The test statistics are defined by some model, usually a normal distribution. </a:t>
-            </a:r>
-          </a:p>
-          <a:p>
-            <a:pPr lvl="1"/>
-            <a:r>
-              <a:rPr lang="en-US" dirty="0"/>
-              <a:t>We can generate multiple samples can tabulate where they lie. </a:t>
-            </a:r>
-          </a:p>
-          <a:p>
-            <a:r>
-              <a:rPr lang="en-US" dirty="0"/>
-              <a:t>If the p-value is the probability of the effect being random, we can count that. </a:t>
-            </a:r>
-          </a:p>
-          <a:p>
-            <a:pPr lvl="1"/>
-            <a:r>
-              <a:rPr lang="en-US" dirty="0"/>
-              <a:t>Generate many trials and count the number of times that randomness yielded a result. </a:t>
-            </a:r>
-          </a:p>
-          <a:p>
-            <a:r>
-              <a:rPr lang="en-US" dirty="0"/>
-              <a:t>This process is mostly generic – the process is the same, the details vary. </a:t>
-            </a:r>
-          </a:p>
-          <a:p>
-            <a:pPr lvl="1"/>
-            <a:r>
-              <a:rPr lang="en-US" dirty="0"/>
-              <a:t>The textbook has an example of inheritance and classes that we can hopefully use. </a:t>
-            </a:r>
-          </a:p>
-          <a:p>
-            <a:pPr lvl="1"/>
-            <a:r>
-              <a:rPr lang="en-US" dirty="0"/>
-              <a:t>We can rotate test statistics and models to test almost anything!</a:t>
-            </a:r>
-          </a:p>
-          <a:p>
-            <a:r>
-              <a:rPr lang="en-US" dirty="0"/>
-              <a:t>The important part is framing the problem correctly. </a:t>
-            </a:r>
-          </a:p>
-        </p:txBody>
-      </p:sp>
+          <a:bodyPr>
+            <a:normAutofit/>
+          </a:bodyPr>
+          <a:lstStyle/>
+          <a:p>
+            <a:r>
+              <a:rPr lang="en-US" dirty="0"/>
+              <a:t>Effects Flashback – Cohen’s Effect Size</a:t>
+            </a:r>
+          </a:p>
+        </p:txBody>
+      </p:sp>
+      <p:sp>
+        <p:nvSpPr>
+          <p:cNvPr id="3" name="Content Placeholder 2">
+            <a:extLst>
+              <a:ext uri="{FF2B5EF4-FFF2-40B4-BE49-F238E27FC236}">
+                <a16:creationId xmlns:a16="http://schemas.microsoft.com/office/drawing/2014/main" id="{1F71D939-A10B-21DB-D934-F4F7A82E8C42}"/>
+              </a:ext>
+            </a:extLst>
+          </p:cNvPr>
+          <p:cNvSpPr>
+            <a:spLocks noGrp="1"/>
+          </p:cNvSpPr>
+          <p:nvPr>
+            <p:ph idx="1"/>
+          </p:nvPr>
+        </p:nvSpPr>
+        <p:spPr>
+          <a:xfrm>
+            <a:off x="1451579" y="2015734"/>
+            <a:ext cx="7089668" cy="4037747"/>
+          </a:xfrm>
+        </p:spPr>
+        <p:txBody>
+          <a:bodyPr>
+            <a:normAutofit/>
+          </a:bodyPr>
+          <a:lstStyle/>
+          <a:p>
+            <a:r>
+              <a:rPr lang="en-US" dirty="0"/>
+              <a:t>Effects are just differences between samples. </a:t>
+            </a:r>
+          </a:p>
+          <a:p>
+            <a:r>
+              <a:rPr lang="en-US" dirty="0"/>
+              <a:t>Effect size is very good for showing how big of a difference there is between groups.</a:t>
+            </a:r>
+          </a:p>
+          <a:p>
+            <a:pPr lvl="1"/>
+            <a:r>
+              <a:rPr lang="en-US" dirty="0"/>
+              <a:t>How ”big” is the difference between A and B</a:t>
+            </a:r>
+          </a:p>
+          <a:p>
+            <a:r>
+              <a:rPr lang="en-US" dirty="0"/>
+              <a:t>Easy to calculate, symmetrical, comparable across studies. </a:t>
+            </a:r>
+          </a:p>
+          <a:p>
+            <a:r>
+              <a:rPr lang="en-US" dirty="0"/>
+              <a:t>Downside – the value doesn’t have obvious meaning. </a:t>
+            </a:r>
+          </a:p>
+          <a:p>
+            <a:r>
+              <a:rPr lang="en-US" dirty="0"/>
+              <a:t>Table is a list of approximate significance, by Cohen himself. </a:t>
+            </a:r>
+          </a:p>
+          <a:p>
+            <a:r>
+              <a:rPr lang="en-US" dirty="0"/>
+              <a:t>Book’s author a huge proponent of effect size!</a:t>
+            </a:r>
+          </a:p>
+        </p:txBody>
+      </p:sp>
+      <p:pic>
+        <p:nvPicPr>
+          <p:cNvPr id="4" name="Picture 3">
+            <a:extLst>
+              <a:ext uri="{FF2B5EF4-FFF2-40B4-BE49-F238E27FC236}">
+                <a16:creationId xmlns:a16="http://schemas.microsoft.com/office/drawing/2014/main" id="{EB62C5B9-5FA2-D563-844D-D905B8775149}"/>
+              </a:ext>
+            </a:extLst>
+          </p:cNvPr>
+          <p:cNvPicPr>
+            <a:picLocks noChangeAspect="1"/>
+          </p:cNvPicPr>
+          <p:nvPr/>
+        </p:nvPicPr>
+        <p:blipFill>
+          <a:blip r:embed="rId2"/>
+          <a:stretch>
+            <a:fillRect/>
+          </a:stretch>
+        </p:blipFill>
+        <p:spPr>
+          <a:xfrm>
+            <a:off x="8541247" y="2015734"/>
+            <a:ext cx="2727388" cy="4479127"/>
+          </a:xfrm>
+          <a:prstGeom prst="rect">
+            <a:avLst/>
+          </a:prstGeom>
+        </p:spPr>
+      </p:pic>
     </p:spTree>
     <p:extLst>
       <p:ext uri="{BB962C8B-B14F-4D97-AF65-F5344CB8AC3E}">
-        <p14:creationId xmlns:p14="http://schemas.microsoft.com/office/powerpoint/2010/main" val="4262855181"/>
+        <p14:creationId xmlns:p14="http://schemas.microsoft.com/office/powerpoint/2010/main" val="2455635162"/>
       </p:ext>
     </p:extLst>
   </p:cSld>
@@ -5385,7 +5326,7 @@
           <p:cNvPr id="2" name="Title 1">
             <a:extLst>
               <a:ext uri="{FF2B5EF4-FFF2-40B4-BE49-F238E27FC236}">
-                <a16:creationId xmlns:a16="http://schemas.microsoft.com/office/drawing/2014/main" id="{5024A5B8-7CFF-BB67-7707-243CC55E79FC}"/>
+                <a16:creationId xmlns:a16="http://schemas.microsoft.com/office/drawing/2014/main" id="{22F8F6B6-A700-23AE-D6C2-580B93E058C9}"/>
               </a:ext>
             </a:extLst>
           </p:cNvPr>
@@ -5403,7 +5344,7 @@
           <a:p>
             <a:r>
               <a:rPr lang="en-US" dirty="0"/>
-              <a:t>Specific Implementations</a:t>
+              <a:t>Inferencing Effects</a:t>
             </a:r>
           </a:p>
         </p:txBody>
@@ -5413,7 +5354,426 @@
           <p:cNvPr id="3" name="Content Placeholder 2">
             <a:extLst>
               <a:ext uri="{FF2B5EF4-FFF2-40B4-BE49-F238E27FC236}">
-                <a16:creationId xmlns:a16="http://schemas.microsoft.com/office/drawing/2014/main" id="{80EE99A2-3424-F371-D82A-D5709FF413A4}"/>
+                <a16:creationId xmlns:a16="http://schemas.microsoft.com/office/drawing/2014/main" id="{BEE2A5EC-D8B7-F419-D2BC-B1C3F32F2DF3}"/>
+              </a:ext>
+            </a:extLst>
+          </p:cNvPr>
+          <p:cNvSpPr>
+            <a:spLocks noGrp="1"/>
+          </p:cNvSpPr>
+          <p:nvPr>
+            <p:ph idx="1"/>
+          </p:nvPr>
+        </p:nvSpPr>
+        <p:spPr>
+          <a:xfrm>
+            <a:off x="1451579" y="1853754"/>
+            <a:ext cx="9603275" cy="4095101"/>
+          </a:xfrm>
+        </p:spPr>
+        <p:txBody>
+          <a:bodyPr>
+            <a:normAutofit lnSpcReduction="10000"/>
+          </a:bodyPr>
+          <a:lstStyle/>
+          <a:p>
+            <a:r>
+              <a:rPr lang="en-US" dirty="0"/>
+              <a:t>One big thing we want to do in stats is project these effects to a population. </a:t>
+            </a:r>
+          </a:p>
+          <a:p>
+            <a:pPr lvl="1"/>
+            <a:r>
+              <a:rPr lang="en-US" dirty="0"/>
+              <a:t>If people treated with drugs live longer than people in control group, is that difference real?</a:t>
+            </a:r>
+          </a:p>
+          <a:p>
+            <a:pPr lvl="1"/>
+            <a:r>
+              <a:rPr lang="en-US" dirty="0"/>
+              <a:t>If we tutor one group of students extra, is their grade change due to randomness or learning? </a:t>
+            </a:r>
+          </a:p>
+          <a:p>
+            <a:r>
+              <a:rPr lang="en-US" dirty="0"/>
+              <a:t>Like with generalizing, this isn’t direct, it is probabilistic. </a:t>
+            </a:r>
+          </a:p>
+          <a:p>
+            <a:pPr lvl="1"/>
+            <a:r>
+              <a:rPr lang="en-US" dirty="0"/>
+              <a:t>We have natural variance in data, and each sample may differ slightly normally. </a:t>
+            </a:r>
+          </a:p>
+          <a:p>
+            <a:pPr lvl="1"/>
+            <a:r>
+              <a:rPr lang="en-US" dirty="0"/>
+              <a:t>Depending on sample size, we might see swings in means that are random. </a:t>
+            </a:r>
+          </a:p>
+          <a:p>
+            <a:pPr lvl="1"/>
+            <a:r>
+              <a:rPr lang="en-US" dirty="0"/>
+              <a:t>Real life things are often limited in sample size, so variations can be big. </a:t>
+            </a:r>
+          </a:p>
+          <a:p>
+            <a:r>
+              <a:rPr lang="en-US" dirty="0"/>
+              <a:t>So… if we see some effect in our samples, can we trust that effect is in the population? </a:t>
+            </a:r>
+          </a:p>
+          <a:p>
+            <a:pPr lvl="1"/>
+            <a:r>
+              <a:rPr lang="en-US" dirty="0"/>
+              <a:t>Is what we see in our samples real? </a:t>
+            </a:r>
+          </a:p>
+          <a:p>
+            <a:pPr lvl="1"/>
+            <a:r>
+              <a:rPr lang="en-US" dirty="0"/>
+              <a:t>Our hypothesis test will give us a probability it was due to random variation. </a:t>
+            </a:r>
+          </a:p>
+        </p:txBody>
+      </p:sp>
+    </p:spTree>
+    <p:extLst>
+      <p:ext uri="{BB962C8B-B14F-4D97-AF65-F5344CB8AC3E}">
+        <p14:creationId xmlns:p14="http://schemas.microsoft.com/office/powerpoint/2010/main" val="2153975072"/>
+      </p:ext>
+    </p:extLst>
+  </p:cSld>
+  <p:clrMapOvr>
+    <a:masterClrMapping/>
+  </p:clrMapOvr>
+</p:sld>
+</file>
+
+<file path=ppt/slides/slide18.xml><?xml version="1.0" encoding="utf-8"?>
+<p:sld xmlns:a="http://schemas.openxmlformats.org/drawingml/2006/main" xmlns:r="http://schemas.openxmlformats.org/officeDocument/2006/relationships" xmlns:p="http://schemas.openxmlformats.org/presentationml/2006/main">
+  <p:cSld>
+    <p:spTree>
+      <p:nvGrpSpPr>
+        <p:cNvPr id="1" name="">
+          <a:extLst>
+            <a:ext uri="{FF2B5EF4-FFF2-40B4-BE49-F238E27FC236}">
+              <a16:creationId xmlns:a16="http://schemas.microsoft.com/office/drawing/2014/main" id="{F39E827A-F36A-E2CA-36D2-E27215414F24}"/>
+            </a:ext>
+          </a:extLst>
+        </p:cNvPr>
+        <p:cNvGrpSpPr/>
+        <p:nvPr/>
+      </p:nvGrpSpPr>
+      <p:grpSpPr>
+        <a:xfrm>
+          <a:off x="0" y="0"/>
+          <a:ext cx="0" cy="0"/>
+          <a:chOff x="0" y="0"/>
+          <a:chExt cx="0" cy="0"/>
+        </a:xfrm>
+      </p:grpSpPr>
+      <p:sp>
+        <p:nvSpPr>
+          <p:cNvPr id="2" name="Title 1">
+            <a:extLst>
+              <a:ext uri="{FF2B5EF4-FFF2-40B4-BE49-F238E27FC236}">
+                <a16:creationId xmlns:a16="http://schemas.microsoft.com/office/drawing/2014/main" id="{40A6A509-3720-8CB2-D880-D93688039566}"/>
+              </a:ext>
+            </a:extLst>
+          </p:cNvPr>
+          <p:cNvSpPr>
+            <a:spLocks noGrp="1"/>
+          </p:cNvSpPr>
+          <p:nvPr>
+            <p:ph type="title"/>
+          </p:nvPr>
+        </p:nvSpPr>
+        <p:spPr/>
+        <p:txBody>
+          <a:bodyPr/>
+          <a:lstStyle/>
+          <a:p>
+            <a:r>
+              <a:rPr lang="en-US" dirty="0"/>
+              <a:t>What’s a Hypothesis Test?</a:t>
+            </a:r>
+          </a:p>
+        </p:txBody>
+      </p:sp>
+      <p:sp>
+        <p:nvSpPr>
+          <p:cNvPr id="3" name="Content Placeholder 2">
+            <a:extLst>
+              <a:ext uri="{FF2B5EF4-FFF2-40B4-BE49-F238E27FC236}">
+                <a16:creationId xmlns:a16="http://schemas.microsoft.com/office/drawing/2014/main" id="{7897E578-0879-9E1F-8B10-E0832E0C7299}"/>
+              </a:ext>
+            </a:extLst>
+          </p:cNvPr>
+          <p:cNvSpPr>
+            <a:spLocks noGrp="1"/>
+          </p:cNvSpPr>
+          <p:nvPr>
+            <p:ph idx="1"/>
+          </p:nvPr>
+        </p:nvSpPr>
+        <p:spPr>
+          <a:xfrm>
+            <a:off x="1451579" y="1933904"/>
+            <a:ext cx="9603275" cy="4119578"/>
+          </a:xfrm>
+        </p:spPr>
+        <p:txBody>
+          <a:bodyPr/>
+          <a:lstStyle/>
+          <a:p>
+            <a:r>
+              <a:rPr lang="en-US" dirty="0"/>
+              <a:t>A hypothesis test evaluates two mutually exclusive statements about a population to determine which statement the sample data best supports. </a:t>
+            </a:r>
+          </a:p>
+          <a:p>
+            <a:pPr lvl="1"/>
+            <a:r>
+              <a:rPr lang="en-US" dirty="0"/>
+              <a:t>Null Hypothesis: The effect does not exist in the population.</a:t>
+            </a:r>
+          </a:p>
+          <a:p>
+            <a:pPr lvl="1"/>
+            <a:r>
+              <a:rPr lang="en-US" dirty="0"/>
+              <a:t>Alternative Hypothesis: The effect does exist in the population.</a:t>
+            </a:r>
+          </a:p>
+          <a:p>
+            <a:pPr lvl="1"/>
+            <a:r>
+              <a:rPr lang="en-US" dirty="0"/>
+              <a:t>Effect = difference. Specifically, here it is the difference we see between the samples. </a:t>
+            </a:r>
+          </a:p>
+          <a:p>
+            <a:r>
+              <a:rPr lang="en-US" dirty="0"/>
+              <a:t>Hypothesis testing lets us say that effects have statistical significance, indicating that an effect in sample data also likely exists in the population after accounting for:</a:t>
+            </a:r>
+          </a:p>
+          <a:p>
+            <a:pPr lvl="1"/>
+            <a:r>
+              <a:rPr lang="en-US" dirty="0"/>
+              <a:t>Random sampling error.</a:t>
+            </a:r>
+          </a:p>
+          <a:p>
+            <a:pPr lvl="1"/>
+            <a:r>
+              <a:rPr lang="en-US" dirty="0"/>
+              <a:t>Variability in the data. </a:t>
+            </a:r>
+          </a:p>
+          <a:p>
+            <a:pPr lvl="1"/>
+            <a:r>
+              <a:rPr lang="en-US" dirty="0"/>
+              <a:t>Sample size. </a:t>
+            </a:r>
+          </a:p>
+          <a:p>
+            <a:endParaRPr lang="en-US" dirty="0"/>
+          </a:p>
+        </p:txBody>
+      </p:sp>
+    </p:spTree>
+    <p:extLst>
+      <p:ext uri="{BB962C8B-B14F-4D97-AF65-F5344CB8AC3E}">
+        <p14:creationId xmlns:p14="http://schemas.microsoft.com/office/powerpoint/2010/main" val="93985515"/>
+      </p:ext>
+    </p:extLst>
+  </p:cSld>
+  <p:clrMapOvr>
+    <a:masterClrMapping/>
+  </p:clrMapOvr>
+</p:sld>
+</file>
+
+<file path=ppt/slides/slide19.xml><?xml version="1.0" encoding="utf-8"?>
+<p:sld xmlns:a="http://schemas.openxmlformats.org/drawingml/2006/main" xmlns:r="http://schemas.openxmlformats.org/officeDocument/2006/relationships" xmlns:p="http://schemas.openxmlformats.org/presentationml/2006/main">
+  <p:cSld>
+    <p:spTree>
+      <p:nvGrpSpPr>
+        <p:cNvPr id="1" name=""/>
+        <p:cNvGrpSpPr/>
+        <p:nvPr/>
+      </p:nvGrpSpPr>
+      <p:grpSpPr>
+        <a:xfrm>
+          <a:off x="0" y="0"/>
+          <a:ext cx="0" cy="0"/>
+          <a:chOff x="0" y="0"/>
+          <a:chExt cx="0" cy="0"/>
+        </a:xfrm>
+      </p:grpSpPr>
+      <p:sp>
+        <p:nvSpPr>
+          <p:cNvPr id="2" name="Title 1">
+            <a:extLst>
+              <a:ext uri="{FF2B5EF4-FFF2-40B4-BE49-F238E27FC236}">
+                <a16:creationId xmlns:a16="http://schemas.microsoft.com/office/drawing/2014/main" id="{FA40493A-F1BC-7E49-1897-3A5238079639}"/>
+              </a:ext>
+            </a:extLst>
+          </p:cNvPr>
+          <p:cNvSpPr>
+            <a:spLocks noGrp="1"/>
+          </p:cNvSpPr>
+          <p:nvPr>
+            <p:ph type="title"/>
+          </p:nvPr>
+        </p:nvSpPr>
+        <p:spPr/>
+        <p:txBody>
+          <a:bodyPr/>
+          <a:lstStyle/>
+          <a:p>
+            <a:r>
+              <a:rPr lang="en-US" dirty="0"/>
+              <a:t>Don’t Get too Confident</a:t>
+            </a:r>
+          </a:p>
+        </p:txBody>
+      </p:sp>
+      <p:sp>
+        <p:nvSpPr>
+          <p:cNvPr id="3" name="Content Placeholder 2">
+            <a:extLst>
+              <a:ext uri="{FF2B5EF4-FFF2-40B4-BE49-F238E27FC236}">
+                <a16:creationId xmlns:a16="http://schemas.microsoft.com/office/drawing/2014/main" id="{29AD3248-E13C-1595-6D51-ED37B4A2964C}"/>
+              </a:ext>
+            </a:extLst>
+          </p:cNvPr>
+          <p:cNvSpPr>
+            <a:spLocks noGrp="1"/>
+          </p:cNvSpPr>
+          <p:nvPr>
+            <p:ph idx="1"/>
+          </p:nvPr>
+        </p:nvSpPr>
+        <p:spPr>
+          <a:xfrm>
+            <a:off x="1451579" y="2015732"/>
+            <a:ext cx="9603275" cy="4037749"/>
+          </a:xfrm>
+        </p:spPr>
+        <p:txBody>
+          <a:bodyPr/>
+          <a:lstStyle/>
+          <a:p>
+            <a:r>
+              <a:rPr lang="en-US" dirty="0"/>
+              <a:t>Like with generalizing to a population, this is probabilistic. </a:t>
+            </a:r>
+          </a:p>
+          <a:p>
+            <a:r>
+              <a:rPr lang="en-US" dirty="0"/>
+              <a:t>Our findings here are evidence, not assertions. </a:t>
+            </a:r>
+          </a:p>
+          <a:p>
+            <a:pPr lvl="1"/>
+            <a:r>
+              <a:rPr lang="en-US" dirty="0"/>
+              <a:t>E.g. if we do a hypothesis test that shows an effect is real, that’s only an indicator. </a:t>
+            </a:r>
+          </a:p>
+          <a:p>
+            <a:r>
+              <a:rPr lang="en-US" dirty="0"/>
+              <a:t>To make solid findings, we probably want several pieces of evidence. </a:t>
+            </a:r>
+          </a:p>
+          <a:p>
+            <a:pPr lvl="1"/>
+            <a:r>
+              <a:rPr lang="en-US" dirty="0"/>
+              <a:t>More is better, as we’ll see…</a:t>
+            </a:r>
+          </a:p>
+        </p:txBody>
+      </p:sp>
+    </p:spTree>
+    <p:extLst>
+      <p:ext uri="{BB962C8B-B14F-4D97-AF65-F5344CB8AC3E}">
+        <p14:creationId xmlns:p14="http://schemas.microsoft.com/office/powerpoint/2010/main" val="1526678658"/>
+      </p:ext>
+    </p:extLst>
+  </p:cSld>
+  <p:clrMapOvr>
+    <a:masterClrMapping/>
+  </p:clrMapOvr>
+</p:sld>
+</file>
+
+<file path=ppt/slides/slide2.xml><?xml version="1.0" encoding="utf-8"?>
+<p:sld xmlns:a="http://schemas.openxmlformats.org/drawingml/2006/main" xmlns:r="http://schemas.openxmlformats.org/officeDocument/2006/relationships" xmlns:p="http://schemas.openxmlformats.org/presentationml/2006/main" show="0">
+  <p:cSld>
+    <p:spTree>
+      <p:nvGrpSpPr>
+        <p:cNvPr id="1" name=""/>
+        <p:cNvGrpSpPr/>
+        <p:nvPr/>
+      </p:nvGrpSpPr>
+      <p:grpSpPr>
+        <a:xfrm>
+          <a:off x="0" y="0"/>
+          <a:ext cx="0" cy="0"/>
+          <a:chOff x="0" y="0"/>
+          <a:chExt cx="0" cy="0"/>
+        </a:xfrm>
+      </p:grpSpPr>
+      <p:sp>
+        <p:nvSpPr>
+          <p:cNvPr id="2" name="Title 1">
+            <a:extLst>
+              <a:ext uri="{FF2B5EF4-FFF2-40B4-BE49-F238E27FC236}">
+                <a16:creationId xmlns:a16="http://schemas.microsoft.com/office/drawing/2014/main" id="{A1DD02C9-0C88-0BE4-1A88-940B67D116A2}"/>
+              </a:ext>
+            </a:extLst>
+          </p:cNvPr>
+          <p:cNvSpPr>
+            <a:spLocks noGrp="1"/>
+          </p:cNvSpPr>
+          <p:nvPr>
+            <p:ph type="title"/>
+          </p:nvPr>
+        </p:nvSpPr>
+        <p:spPr/>
+        <p:txBody>
+          <a:bodyPr/>
+          <a:lstStyle/>
+          <a:p>
+            <a:r>
+              <a:rPr lang="en-US" dirty="0"/>
+              <a:t>Test Framework</a:t>
+            </a:r>
+          </a:p>
+        </p:txBody>
+      </p:sp>
+      <p:sp>
+        <p:nvSpPr>
+          <p:cNvPr id="3" name="Content Placeholder 2">
+            <a:extLst>
+              <a:ext uri="{FF2B5EF4-FFF2-40B4-BE49-F238E27FC236}">
+                <a16:creationId xmlns:a16="http://schemas.microsoft.com/office/drawing/2014/main" id="{F55A1DC5-25F7-06F8-61A3-08440ACA8013}"/>
               </a:ext>
             </a:extLst>
           </p:cNvPr>
@@ -5436,6 +5796,763 @@
           <a:p>
             <a:r>
               <a:rPr lang="en-US" dirty="0"/>
+              <a:t>The structure of a hypothesis test is mostly the same each time. </a:t>
+            </a:r>
+          </a:p>
+          <a:p>
+            <a:pPr lvl="1"/>
+            <a:r>
+              <a:rPr lang="en-US" dirty="0"/>
+              <a:t>We generally only need to change the test stat and the simulation process. </a:t>
+            </a:r>
+          </a:p>
+          <a:p>
+            <a:r>
+              <a:rPr lang="en-US" dirty="0"/>
+              <a:t>Test statistic – the effect that is observed in the sample. </a:t>
+            </a:r>
+          </a:p>
+          <a:p>
+            <a:pPr lvl="1"/>
+            <a:r>
+              <a:rPr lang="en-US" dirty="0"/>
+              <a:t>We saw this happen; we want to check if there’s any change that randomness yielded it. </a:t>
+            </a:r>
+          </a:p>
+          <a:p>
+            <a:pPr lvl="1"/>
+            <a:r>
+              <a:rPr lang="en-US" dirty="0"/>
+              <a:t>Usually something like a difference in means, but can be almost anything. </a:t>
+            </a:r>
+          </a:p>
+          <a:p>
+            <a:r>
+              <a:rPr lang="en-US" dirty="0"/>
+              <a:t>Simulation – we need to do many trial runs, to observe the results. </a:t>
+            </a:r>
+          </a:p>
+          <a:p>
+            <a:pPr lvl="1"/>
+            <a:r>
+              <a:rPr lang="en-US" dirty="0"/>
+              <a:t>This will basically be a test of whatever check yielded the test statistic. </a:t>
+            </a:r>
+          </a:p>
+          <a:p>
+            <a:pPr lvl="1"/>
+            <a:r>
+              <a:rPr lang="en-US" dirty="0"/>
+              <a:t>Permutation – for differences between group, reshuffle and see if effect happens. </a:t>
+            </a:r>
+          </a:p>
+          <a:p>
+            <a:pPr lvl="1"/>
+            <a:r>
+              <a:rPr lang="en-US" dirty="0"/>
+              <a:t>For other things, we can just replace it – more later…. </a:t>
+            </a:r>
+          </a:p>
+        </p:txBody>
+      </p:sp>
+    </p:spTree>
+    <p:extLst>
+      <p:ext uri="{BB962C8B-B14F-4D97-AF65-F5344CB8AC3E}">
+        <p14:creationId xmlns:p14="http://schemas.microsoft.com/office/powerpoint/2010/main" val="4033547872"/>
+      </p:ext>
+    </p:extLst>
+  </p:cSld>
+  <p:clrMapOvr>
+    <a:masterClrMapping/>
+  </p:clrMapOvr>
+</p:sld>
+</file>
+
+<file path=ppt/slides/slide20.xml><?xml version="1.0" encoding="utf-8"?>
+<p:sld xmlns:a="http://schemas.openxmlformats.org/drawingml/2006/main" xmlns:r="http://schemas.openxmlformats.org/officeDocument/2006/relationships" xmlns:p="http://schemas.openxmlformats.org/presentationml/2006/main">
+  <p:cSld>
+    <p:spTree>
+      <p:nvGrpSpPr>
+        <p:cNvPr id="1" name=""/>
+        <p:cNvGrpSpPr/>
+        <p:nvPr/>
+      </p:nvGrpSpPr>
+      <p:grpSpPr>
+        <a:xfrm>
+          <a:off x="0" y="0"/>
+          <a:ext cx="0" cy="0"/>
+          <a:chOff x="0" y="0"/>
+          <a:chExt cx="0" cy="0"/>
+        </a:xfrm>
+      </p:grpSpPr>
+      <p:sp>
+        <p:nvSpPr>
+          <p:cNvPr id="2" name="Title 1">
+            <a:extLst>
+              <a:ext uri="{FF2B5EF4-FFF2-40B4-BE49-F238E27FC236}">
+                <a16:creationId xmlns:a16="http://schemas.microsoft.com/office/drawing/2014/main" id="{AE07D908-A850-3560-95FD-8C539921A59D}"/>
+              </a:ext>
+            </a:extLst>
+          </p:cNvPr>
+          <p:cNvSpPr>
+            <a:spLocks noGrp="1"/>
+          </p:cNvSpPr>
+          <p:nvPr>
+            <p:ph type="title"/>
+          </p:nvPr>
+        </p:nvSpPr>
+        <p:spPr/>
+        <p:txBody>
+          <a:bodyPr/>
+          <a:lstStyle/>
+          <a:p>
+            <a:r>
+              <a:rPr lang="en-US" dirty="0"/>
+              <a:t>Hypothesis Testing From Scratch</a:t>
+            </a:r>
+          </a:p>
+        </p:txBody>
+      </p:sp>
+      <p:sp>
+        <p:nvSpPr>
+          <p:cNvPr id="3" name="Content Placeholder 2">
+            <a:extLst>
+              <a:ext uri="{FF2B5EF4-FFF2-40B4-BE49-F238E27FC236}">
+                <a16:creationId xmlns:a16="http://schemas.microsoft.com/office/drawing/2014/main" id="{D2544162-9761-6E7C-99FE-70C4B3473F0B}"/>
+              </a:ext>
+            </a:extLst>
+          </p:cNvPr>
+          <p:cNvSpPr>
+            <a:spLocks noGrp="1"/>
+          </p:cNvSpPr>
+          <p:nvPr>
+            <p:ph idx="1"/>
+          </p:nvPr>
+        </p:nvSpPr>
+        <p:spPr>
+          <a:xfrm>
+            <a:off x="1451579" y="1853754"/>
+            <a:ext cx="9603275" cy="4199727"/>
+          </a:xfrm>
+        </p:spPr>
+        <p:txBody>
+          <a:bodyPr>
+            <a:normAutofit/>
+          </a:bodyPr>
+          <a:lstStyle/>
+          <a:p>
+            <a:r>
+              <a:rPr lang="en-US" dirty="0"/>
+              <a:t>We can use fast computers and coding </a:t>
+            </a:r>
+            <a:r>
+              <a:rPr lang="en-US" dirty="0" err="1"/>
+              <a:t>skillz</a:t>
+            </a:r>
+            <a:r>
+              <a:rPr lang="en-US" dirty="0"/>
+              <a:t> to do some hypothesis testing from scratch. </a:t>
+            </a:r>
+          </a:p>
+          <a:p>
+            <a:r>
+              <a:rPr lang="en-US" dirty="0"/>
+              <a:t>To start, we see some effect – such as a difference in our samples. </a:t>
+            </a:r>
+          </a:p>
+          <a:p>
+            <a:r>
+              <a:rPr lang="en-US" dirty="0"/>
+              <a:t>We can do a sort of two-part check:</a:t>
+            </a:r>
+          </a:p>
+          <a:p>
+            <a:pPr lvl="1"/>
+            <a:r>
+              <a:rPr lang="en-US" dirty="0"/>
+              <a:t>Comparison between two things (e.g. sample means). </a:t>
+            </a:r>
+          </a:p>
+          <a:p>
+            <a:pPr lvl="1"/>
+            <a:r>
+              <a:rPr lang="en-US" dirty="0"/>
+              <a:t>Generalization to the population. </a:t>
+            </a:r>
+          </a:p>
+          <a:p>
+            <a:r>
+              <a:rPr lang="en-US" dirty="0"/>
+              <a:t>Our hypothesis test answers the question, “Given this effect we see in our sample, what is the probability of the same effect existing in the population by chance (randomly)?”. </a:t>
+            </a:r>
+          </a:p>
+          <a:p>
+            <a:pPr lvl="1"/>
+            <a:r>
+              <a:rPr lang="en-US" dirty="0"/>
+              <a:t>We see X thing in the sample data (the effect). </a:t>
+            </a:r>
+          </a:p>
+          <a:p>
+            <a:pPr lvl="1"/>
+            <a:r>
+              <a:rPr lang="en-US" dirty="0"/>
+              <a:t>Is effect ‘real’ in the population or could it just be randomness due to sample and variance?</a:t>
+            </a:r>
+          </a:p>
+        </p:txBody>
+      </p:sp>
+    </p:spTree>
+    <p:extLst>
+      <p:ext uri="{BB962C8B-B14F-4D97-AF65-F5344CB8AC3E}">
+        <p14:creationId xmlns:p14="http://schemas.microsoft.com/office/powerpoint/2010/main" val="3725665083"/>
+      </p:ext>
+    </p:extLst>
+  </p:cSld>
+  <p:clrMapOvr>
+    <a:masterClrMapping/>
+  </p:clrMapOvr>
+</p:sld>
+</file>
+
+<file path=ppt/slides/slide21.xml><?xml version="1.0" encoding="utf-8"?>
+<p:sld xmlns:a="http://schemas.openxmlformats.org/drawingml/2006/main" xmlns:r="http://schemas.openxmlformats.org/officeDocument/2006/relationships" xmlns:p="http://schemas.openxmlformats.org/presentationml/2006/main">
+  <p:cSld>
+    <p:spTree>
+      <p:nvGrpSpPr>
+        <p:cNvPr id="1" name=""/>
+        <p:cNvGrpSpPr/>
+        <p:nvPr/>
+      </p:nvGrpSpPr>
+      <p:grpSpPr>
+        <a:xfrm>
+          <a:off x="0" y="0"/>
+          <a:ext cx="0" cy="0"/>
+          <a:chOff x="0" y="0"/>
+          <a:chExt cx="0" cy="0"/>
+        </a:xfrm>
+      </p:grpSpPr>
+      <p:sp>
+        <p:nvSpPr>
+          <p:cNvPr id="2" name="Title 1">
+            <a:extLst>
+              <a:ext uri="{FF2B5EF4-FFF2-40B4-BE49-F238E27FC236}">
+                <a16:creationId xmlns:a16="http://schemas.microsoft.com/office/drawing/2014/main" id="{42DBD3D8-17EC-4727-F753-F8A1F5E9A88E}"/>
+              </a:ext>
+            </a:extLst>
+          </p:cNvPr>
+          <p:cNvSpPr>
+            <a:spLocks noGrp="1"/>
+          </p:cNvSpPr>
+          <p:nvPr>
+            <p:ph type="title"/>
+          </p:nvPr>
+        </p:nvSpPr>
+        <p:spPr/>
+        <p:txBody>
+          <a:bodyPr/>
+          <a:lstStyle/>
+          <a:p>
+            <a:r>
+              <a:rPr lang="en-US" dirty="0"/>
+              <a:t>Realistic Example</a:t>
+            </a:r>
+          </a:p>
+        </p:txBody>
+      </p:sp>
+      <p:sp>
+        <p:nvSpPr>
+          <p:cNvPr id="3" name="Content Placeholder 2">
+            <a:extLst>
+              <a:ext uri="{FF2B5EF4-FFF2-40B4-BE49-F238E27FC236}">
+                <a16:creationId xmlns:a16="http://schemas.microsoft.com/office/drawing/2014/main" id="{65A4BDE6-2576-A2D0-0903-C569C03FF09B}"/>
+              </a:ext>
+            </a:extLst>
+          </p:cNvPr>
+          <p:cNvSpPr>
+            <a:spLocks noGrp="1"/>
+          </p:cNvSpPr>
+          <p:nvPr>
+            <p:ph idx="1"/>
+          </p:nvPr>
+        </p:nvSpPr>
+        <p:spPr>
+          <a:xfrm>
+            <a:off x="1451579" y="1933903"/>
+            <a:ext cx="9603275" cy="4119577"/>
+          </a:xfrm>
+        </p:spPr>
+        <p:txBody>
+          <a:bodyPr/>
+          <a:lstStyle/>
+          <a:p>
+            <a:r>
+              <a:rPr lang="en-US" dirty="0"/>
+              <a:t>We are conducting a drug trial and have two separate samples:</a:t>
+            </a:r>
+          </a:p>
+          <a:p>
+            <a:pPr lvl="1"/>
+            <a:r>
+              <a:rPr lang="en-US" dirty="0"/>
+              <a:t>Treatment group – count 31, average life expectancy 12.5 years. </a:t>
+            </a:r>
+          </a:p>
+          <a:p>
+            <a:pPr lvl="1"/>
+            <a:r>
+              <a:rPr lang="en-US" dirty="0"/>
+              <a:t>Control group – count 39, average life expectancy 11.1 years. </a:t>
+            </a:r>
+          </a:p>
+          <a:p>
+            <a:r>
+              <a:rPr lang="en-US" dirty="0"/>
+              <a:t>The treated people live longer, but is that difference significant? </a:t>
+            </a:r>
+          </a:p>
+          <a:p>
+            <a:pPr lvl="1"/>
+            <a:r>
+              <a:rPr lang="en-US" dirty="0"/>
+              <a:t>Given the sample size and variance of data, could the observed sample effect be random? </a:t>
+            </a:r>
+          </a:p>
+          <a:p>
+            <a:r>
+              <a:rPr lang="en-US" dirty="0"/>
+              <a:t>This is a probabilistic decision. </a:t>
+            </a:r>
+          </a:p>
+          <a:p>
+            <a:pPr lvl="1"/>
+            <a:r>
+              <a:rPr lang="en-US" dirty="0"/>
+              <a:t>The effect we see in the sample could be real, or could be just random variation. </a:t>
+            </a:r>
+          </a:p>
+          <a:p>
+            <a:pPr lvl="1"/>
+            <a:r>
+              <a:rPr lang="en-US" dirty="0"/>
+              <a:t>The hypothesis test tests the likelihood it is random. </a:t>
+            </a:r>
+          </a:p>
+          <a:p>
+            <a:r>
+              <a:rPr lang="en-US" dirty="0"/>
+              <a:t>If the likelihood this effect is random is low enough, we judge it to be significant - real. </a:t>
+            </a:r>
+          </a:p>
+        </p:txBody>
+      </p:sp>
+    </p:spTree>
+    <p:extLst>
+      <p:ext uri="{BB962C8B-B14F-4D97-AF65-F5344CB8AC3E}">
+        <p14:creationId xmlns:p14="http://schemas.microsoft.com/office/powerpoint/2010/main" val="488682165"/>
+      </p:ext>
+    </p:extLst>
+  </p:cSld>
+  <p:clrMapOvr>
+    <a:masterClrMapping/>
+  </p:clrMapOvr>
+</p:sld>
+</file>
+
+<file path=ppt/slides/slide22.xml><?xml version="1.0" encoding="utf-8"?>
+<p:sld xmlns:a="http://schemas.openxmlformats.org/drawingml/2006/main" xmlns:r="http://schemas.openxmlformats.org/officeDocument/2006/relationships" xmlns:p="http://schemas.openxmlformats.org/presentationml/2006/main">
+  <p:cSld>
+    <p:spTree>
+      <p:nvGrpSpPr>
+        <p:cNvPr id="1" name=""/>
+        <p:cNvGrpSpPr/>
+        <p:nvPr/>
+      </p:nvGrpSpPr>
+      <p:grpSpPr>
+        <a:xfrm>
+          <a:off x="0" y="0"/>
+          <a:ext cx="0" cy="0"/>
+          <a:chOff x="0" y="0"/>
+          <a:chExt cx="0" cy="0"/>
+        </a:xfrm>
+      </p:grpSpPr>
+      <p:sp>
+        <p:nvSpPr>
+          <p:cNvPr id="2" name="Title 1">
+            <a:extLst>
+              <a:ext uri="{FF2B5EF4-FFF2-40B4-BE49-F238E27FC236}">
+                <a16:creationId xmlns:a16="http://schemas.microsoft.com/office/drawing/2014/main" id="{E238217B-E04E-E5EE-ACB7-19C5A0E3622D}"/>
+              </a:ext>
+            </a:extLst>
+          </p:cNvPr>
+          <p:cNvSpPr>
+            <a:spLocks noGrp="1"/>
+          </p:cNvSpPr>
+          <p:nvPr>
+            <p:ph type="title"/>
+          </p:nvPr>
+        </p:nvSpPr>
+        <p:spPr/>
+        <p:txBody>
+          <a:bodyPr/>
+          <a:lstStyle/>
+          <a:p>
+            <a:r>
+              <a:rPr lang="en-US" dirty="0"/>
+              <a:t>Build a Hypothesis</a:t>
+            </a:r>
+          </a:p>
+        </p:txBody>
+      </p:sp>
+      <p:sp>
+        <p:nvSpPr>
+          <p:cNvPr id="3" name="Content Placeholder 2">
+            <a:extLst>
+              <a:ext uri="{FF2B5EF4-FFF2-40B4-BE49-F238E27FC236}">
+                <a16:creationId xmlns:a16="http://schemas.microsoft.com/office/drawing/2014/main" id="{B7DD69C7-73D7-A47B-3140-75A889372834}"/>
+              </a:ext>
+            </a:extLst>
+          </p:cNvPr>
+          <p:cNvSpPr>
+            <a:spLocks noGrp="1"/>
+          </p:cNvSpPr>
+          <p:nvPr>
+            <p:ph idx="1"/>
+          </p:nvPr>
+        </p:nvSpPr>
+        <p:spPr>
+          <a:xfrm>
+            <a:off x="1451579" y="1853755"/>
+            <a:ext cx="9603275" cy="4199726"/>
+          </a:xfrm>
+        </p:spPr>
+        <p:txBody>
+          <a:bodyPr>
+            <a:normAutofit lnSpcReduction="10000"/>
+          </a:bodyPr>
+          <a:lstStyle/>
+          <a:p>
+            <a:pPr marL="457200" indent="-457200">
+              <a:buFont typeface="+mj-lt"/>
+              <a:buAutoNum type="arabicPeriod"/>
+            </a:pPr>
+            <a:r>
+              <a:rPr lang="en-US" dirty="0"/>
+              <a:t>Select a test statistic – the thing calculated. </a:t>
+            </a:r>
+          </a:p>
+          <a:p>
+            <a:pPr marL="914400" lvl="1" indent="-457200">
+              <a:buFont typeface="+mj-lt"/>
+              <a:buAutoNum type="arabicPeriod"/>
+            </a:pPr>
+            <a:r>
+              <a:rPr lang="en-US" dirty="0"/>
+              <a:t>For the life expectancy this would be mean life expectancy of the samples. </a:t>
+            </a:r>
+          </a:p>
+          <a:p>
+            <a:pPr marL="457200" indent="-457200">
+              <a:buFont typeface="+mj-lt"/>
+              <a:buAutoNum type="arabicPeriod"/>
+            </a:pPr>
+            <a:r>
+              <a:rPr lang="en-US" dirty="0"/>
+              <a:t>Define null hypothesis – assertion that this thing is not true. </a:t>
+            </a:r>
+          </a:p>
+          <a:p>
+            <a:pPr marL="914400" lvl="1" indent="-457200">
+              <a:buFont typeface="+mj-lt"/>
+              <a:buAutoNum type="arabicPeriod"/>
+            </a:pPr>
+            <a:r>
+              <a:rPr lang="en-US" dirty="0"/>
+              <a:t>There is no difference between the population means of treatment and control. </a:t>
+            </a:r>
+          </a:p>
+          <a:p>
+            <a:pPr marL="457200" indent="-457200">
+              <a:buFont typeface="+mj-lt"/>
+              <a:buAutoNum type="arabicPeriod"/>
+            </a:pPr>
+            <a:r>
+              <a:rPr lang="en-US" dirty="0"/>
+              <a:t>Calculate the p-value – the likelihood the null hypothesis is true. </a:t>
+            </a:r>
+          </a:p>
+          <a:p>
+            <a:pPr marL="914400" lvl="1" indent="-457200">
+              <a:buFont typeface="+mj-lt"/>
+              <a:buAutoNum type="arabicPeriod"/>
+            </a:pPr>
+            <a:r>
+              <a:rPr lang="en-US" dirty="0"/>
+              <a:t>Probability treatment and control populations are the same and effect is random variation.</a:t>
+            </a:r>
+          </a:p>
+          <a:p>
+            <a:pPr marL="914400" lvl="1" indent="-457200">
+              <a:buFont typeface="+mj-lt"/>
+              <a:buAutoNum type="arabicPeriod"/>
+            </a:pPr>
+            <a:r>
+              <a:rPr lang="en-US" dirty="0"/>
+              <a:t>We can do simulating here, but we need to build the right model to generate tests. </a:t>
+            </a:r>
+          </a:p>
+          <a:p>
+            <a:pPr marL="457200" indent="-457200">
+              <a:buFont typeface="+mj-lt"/>
+              <a:buAutoNum type="arabicPeriod"/>
+            </a:pPr>
+            <a:r>
+              <a:rPr lang="en-US" dirty="0"/>
+              <a:t>Interpret the result – is the likelihood of it being random low enough? </a:t>
+            </a:r>
+          </a:p>
+          <a:p>
+            <a:pPr marL="914400" lvl="1" indent="-457200">
+              <a:buFont typeface="+mj-lt"/>
+              <a:buAutoNum type="arabicPeriod"/>
+            </a:pPr>
+            <a:r>
+              <a:rPr lang="en-US" dirty="0"/>
+              <a:t>If the probability of the treatment and control populations being the same is very low, we can conclude the drug actually made the two populations differ. </a:t>
+            </a:r>
+          </a:p>
+        </p:txBody>
+      </p:sp>
+    </p:spTree>
+    <p:extLst>
+      <p:ext uri="{BB962C8B-B14F-4D97-AF65-F5344CB8AC3E}">
+        <p14:creationId xmlns:p14="http://schemas.microsoft.com/office/powerpoint/2010/main" val="353130190"/>
+      </p:ext>
+    </p:extLst>
+  </p:cSld>
+  <p:clrMapOvr>
+    <a:masterClrMapping/>
+  </p:clrMapOvr>
+</p:sld>
+</file>
+
+<file path=ppt/slides/slide23.xml><?xml version="1.0" encoding="utf-8"?>
+<p:sld xmlns:a="http://schemas.openxmlformats.org/drawingml/2006/main" xmlns:r="http://schemas.openxmlformats.org/officeDocument/2006/relationships" xmlns:p="http://schemas.openxmlformats.org/presentationml/2006/main">
+  <p:cSld>
+    <p:spTree>
+      <p:nvGrpSpPr>
+        <p:cNvPr id="1" name=""/>
+        <p:cNvGrpSpPr/>
+        <p:nvPr/>
+      </p:nvGrpSpPr>
+      <p:grpSpPr>
+        <a:xfrm>
+          <a:off x="0" y="0"/>
+          <a:ext cx="0" cy="0"/>
+          <a:chOff x="0" y="0"/>
+          <a:chExt cx="0" cy="0"/>
+        </a:xfrm>
+      </p:grpSpPr>
+      <p:sp>
+        <p:nvSpPr>
+          <p:cNvPr id="2" name="Title 1">
+            <a:extLst>
+              <a:ext uri="{FF2B5EF4-FFF2-40B4-BE49-F238E27FC236}">
+                <a16:creationId xmlns:a16="http://schemas.microsoft.com/office/drawing/2014/main" id="{CA6CB23A-5CF3-B067-AA4C-9714A220A757}"/>
+              </a:ext>
+            </a:extLst>
+          </p:cNvPr>
+          <p:cNvSpPr>
+            <a:spLocks noGrp="1"/>
+          </p:cNvSpPr>
+          <p:nvPr>
+            <p:ph type="title"/>
+          </p:nvPr>
+        </p:nvSpPr>
+        <p:spPr/>
+        <p:txBody>
+          <a:bodyPr/>
+          <a:lstStyle/>
+          <a:p>
+            <a:r>
+              <a:rPr lang="en-US" dirty="0"/>
+              <a:t>Ok, so… Do it!</a:t>
+            </a:r>
+          </a:p>
+        </p:txBody>
+      </p:sp>
+      <p:sp>
+        <p:nvSpPr>
+          <p:cNvPr id="3" name="Content Placeholder 2">
+            <a:extLst>
+              <a:ext uri="{FF2B5EF4-FFF2-40B4-BE49-F238E27FC236}">
+                <a16:creationId xmlns:a16="http://schemas.microsoft.com/office/drawing/2014/main" id="{D669C50B-D96E-F8FE-9E8B-AAED4A2FB926}"/>
+              </a:ext>
+            </a:extLst>
+          </p:cNvPr>
+          <p:cNvSpPr>
+            <a:spLocks noGrp="1"/>
+          </p:cNvSpPr>
+          <p:nvPr>
+            <p:ph idx="1"/>
+          </p:nvPr>
+        </p:nvSpPr>
+        <p:spPr>
+          <a:xfrm>
+            <a:off x="1451579" y="2015732"/>
+            <a:ext cx="9603275" cy="4037749"/>
+          </a:xfrm>
+        </p:spPr>
+        <p:txBody>
+          <a:bodyPr/>
+          <a:lstStyle/>
+          <a:p>
+            <a:r>
+              <a:rPr lang="en-US" dirty="0"/>
+              <a:t>This process is something that can extend on our simulations. </a:t>
+            </a:r>
+          </a:p>
+          <a:p>
+            <a:pPr lvl="1"/>
+            <a:r>
+              <a:rPr lang="en-US" dirty="0"/>
+              <a:t>The test statistics are defined by some model, usually a normal distribution. </a:t>
+            </a:r>
+          </a:p>
+          <a:p>
+            <a:pPr lvl="1"/>
+            <a:r>
+              <a:rPr lang="en-US" dirty="0"/>
+              <a:t>We can generate multiple samples can tabulate where they lie. </a:t>
+            </a:r>
+          </a:p>
+          <a:p>
+            <a:r>
+              <a:rPr lang="en-US" dirty="0"/>
+              <a:t>If the p-value is the probability of the effect being random, we can count that. </a:t>
+            </a:r>
+          </a:p>
+          <a:p>
+            <a:pPr lvl="1"/>
+            <a:r>
+              <a:rPr lang="en-US" dirty="0"/>
+              <a:t>Generate many trials and count the number of times that randomness yielded a result. </a:t>
+            </a:r>
+          </a:p>
+          <a:p>
+            <a:r>
+              <a:rPr lang="en-US" dirty="0"/>
+              <a:t>This process is mostly generic – the process is the same, the details vary. </a:t>
+            </a:r>
+          </a:p>
+          <a:p>
+            <a:pPr lvl="1"/>
+            <a:r>
+              <a:rPr lang="en-US" dirty="0"/>
+              <a:t>The textbook has an example of inheritance and classes that we can hopefully use. </a:t>
+            </a:r>
+          </a:p>
+          <a:p>
+            <a:pPr lvl="1"/>
+            <a:r>
+              <a:rPr lang="en-US" dirty="0"/>
+              <a:t>We can rotate test statistics and models to test almost anything!</a:t>
+            </a:r>
+          </a:p>
+          <a:p>
+            <a:r>
+              <a:rPr lang="en-US" dirty="0"/>
+              <a:t>The important part is framing the problem correctly. </a:t>
+            </a:r>
+          </a:p>
+        </p:txBody>
+      </p:sp>
+    </p:spTree>
+    <p:extLst>
+      <p:ext uri="{BB962C8B-B14F-4D97-AF65-F5344CB8AC3E}">
+        <p14:creationId xmlns:p14="http://schemas.microsoft.com/office/powerpoint/2010/main" val="4262855181"/>
+      </p:ext>
+    </p:extLst>
+  </p:cSld>
+  <p:clrMapOvr>
+    <a:masterClrMapping/>
+  </p:clrMapOvr>
+</p:sld>
+</file>
+
+<file path=ppt/slides/slide24.xml><?xml version="1.0" encoding="utf-8"?>
+<p:sld xmlns:a="http://schemas.openxmlformats.org/drawingml/2006/main" xmlns:r="http://schemas.openxmlformats.org/officeDocument/2006/relationships" xmlns:p="http://schemas.openxmlformats.org/presentationml/2006/main">
+  <p:cSld>
+    <p:spTree>
+      <p:nvGrpSpPr>
+        <p:cNvPr id="1" name=""/>
+        <p:cNvGrpSpPr/>
+        <p:nvPr/>
+      </p:nvGrpSpPr>
+      <p:grpSpPr>
+        <a:xfrm>
+          <a:off x="0" y="0"/>
+          <a:ext cx="0" cy="0"/>
+          <a:chOff x="0" y="0"/>
+          <a:chExt cx="0" cy="0"/>
+        </a:xfrm>
+      </p:grpSpPr>
+      <p:sp>
+        <p:nvSpPr>
+          <p:cNvPr id="2" name="Title 1">
+            <a:extLst>
+              <a:ext uri="{FF2B5EF4-FFF2-40B4-BE49-F238E27FC236}">
+                <a16:creationId xmlns:a16="http://schemas.microsoft.com/office/drawing/2014/main" id="{5024A5B8-7CFF-BB67-7707-243CC55E79FC}"/>
+              </a:ext>
+            </a:extLst>
+          </p:cNvPr>
+          <p:cNvSpPr>
+            <a:spLocks noGrp="1"/>
+          </p:cNvSpPr>
+          <p:nvPr>
+            <p:ph type="title"/>
+          </p:nvPr>
+        </p:nvSpPr>
+        <p:spPr/>
+        <p:txBody>
+          <a:bodyPr/>
+          <a:lstStyle/>
+          <a:p>
+            <a:r>
+              <a:rPr lang="en-US" dirty="0"/>
+              <a:t>Specific Implementations</a:t>
+            </a:r>
+          </a:p>
+        </p:txBody>
+      </p:sp>
+      <p:sp>
+        <p:nvSpPr>
+          <p:cNvPr id="3" name="Content Placeholder 2">
+            <a:extLst>
+              <a:ext uri="{FF2B5EF4-FFF2-40B4-BE49-F238E27FC236}">
+                <a16:creationId xmlns:a16="http://schemas.microsoft.com/office/drawing/2014/main" id="{80EE99A2-3424-F371-D82A-D5709FF413A4}"/>
+              </a:ext>
+            </a:extLst>
+          </p:cNvPr>
+          <p:cNvSpPr>
+            <a:spLocks noGrp="1"/>
+          </p:cNvSpPr>
+          <p:nvPr>
+            <p:ph idx="1"/>
+          </p:nvPr>
+        </p:nvSpPr>
+        <p:spPr>
+          <a:xfrm>
+            <a:off x="1451579" y="1853754"/>
+            <a:ext cx="9603275" cy="4199727"/>
+          </a:xfrm>
+        </p:spPr>
+        <p:txBody>
+          <a:bodyPr/>
+          <a:lstStyle/>
+          <a:p>
+            <a:r>
+              <a:rPr lang="en-US" dirty="0"/>
               <a:t>There are several common-</a:t>
             </a:r>
             <a:r>
@@ -5451,21 +6568,8 @@
             <a:pPr lvl="1"/>
             <a:r>
               <a:rPr lang="en-US" dirty="0"/>
-              <a:t>Things are different – permutation (in book</a:t>
-            </a:r>
-            <a:r>
-              <a:rPr lang="en-US"/>
-              <a:t>), shuffle randomly </a:t>
-            </a:r>
-            <a:r>
-              <a:rPr lang="en-US" dirty="0"/>
-              <a:t>data and </a:t>
-            </a:r>
-            <a:r>
-              <a:rPr lang="en-US"/>
-              <a:t>observe results. </a:t>
-            </a:r>
-            <a:endParaRPr lang="en-US" dirty="0"/>
+              <a:t>Things are different – permutation (in book), shuffle randomly data and observe results. </a:t>
+            </a:r>
           </a:p>
           <a:p>
             <a:pPr lvl="1"/>
@@ -5539,7 +6643,7 @@
 </p:sld>
 </file>
 
-<file path=ppt/slides/slide18.xml><?xml version="1.0" encoding="utf-8"?>
+<file path=ppt/slides/slide25.xml><?xml version="1.0" encoding="utf-8"?>
 <p:sld xmlns:a="http://schemas.openxmlformats.org/drawingml/2006/main" xmlns:r="http://schemas.openxmlformats.org/officeDocument/2006/relationships" xmlns:p="http://schemas.openxmlformats.org/presentationml/2006/main">
   <p:cSld>
     <p:bg>
@@ -5762,1357 +6866,6 @@
 </p:sld>
 </file>
 
-<file path=ppt/slides/slide19.xml><?xml version="1.0" encoding="utf-8"?>
-<p:sld xmlns:a="http://schemas.openxmlformats.org/drawingml/2006/main" xmlns:r="http://schemas.openxmlformats.org/officeDocument/2006/relationships" xmlns:p="http://schemas.openxmlformats.org/presentationml/2006/main">
-  <p:cSld>
-    <p:spTree>
-      <p:nvGrpSpPr>
-        <p:cNvPr id="1" name=""/>
-        <p:cNvGrpSpPr/>
-        <p:nvPr/>
-      </p:nvGrpSpPr>
-      <p:grpSpPr>
-        <a:xfrm>
-          <a:off x="0" y="0"/>
-          <a:ext cx="0" cy="0"/>
-          <a:chOff x="0" y="0"/>
-          <a:chExt cx="0" cy="0"/>
-        </a:xfrm>
-      </p:grpSpPr>
-      <p:sp>
-        <p:nvSpPr>
-          <p:cNvPr id="2" name="Title 1">
-            <a:extLst>
-              <a:ext uri="{FF2B5EF4-FFF2-40B4-BE49-F238E27FC236}">
-                <a16:creationId xmlns:a16="http://schemas.microsoft.com/office/drawing/2014/main" id="{07E36D4B-F13F-C35A-5657-1C98F74F4CEE}"/>
-              </a:ext>
-            </a:extLst>
-          </p:cNvPr>
-          <p:cNvSpPr>
-            <a:spLocks noGrp="1"/>
-          </p:cNvSpPr>
-          <p:nvPr>
-            <p:ph type="title"/>
-          </p:nvPr>
-        </p:nvSpPr>
-        <p:spPr/>
-        <p:txBody>
-          <a:bodyPr/>
-          <a:lstStyle/>
-          <a:p>
-            <a:r>
-              <a:rPr lang="en-US" dirty="0"/>
-              <a:t>The Results - Significance</a:t>
-            </a:r>
-          </a:p>
-        </p:txBody>
-      </p:sp>
-      <p:sp>
-        <p:nvSpPr>
-          <p:cNvPr id="3" name="Content Placeholder 2">
-            <a:extLst>
-              <a:ext uri="{FF2B5EF4-FFF2-40B4-BE49-F238E27FC236}">
-                <a16:creationId xmlns:a16="http://schemas.microsoft.com/office/drawing/2014/main" id="{B0E24597-E550-101E-E565-B0456F471800}"/>
-              </a:ext>
-            </a:extLst>
-          </p:cNvPr>
-          <p:cNvSpPr>
-            <a:spLocks noGrp="1"/>
-          </p:cNvSpPr>
-          <p:nvPr>
-            <p:ph idx="1"/>
-          </p:nvPr>
-        </p:nvSpPr>
-        <p:spPr>
-          <a:xfrm>
-            <a:off x="1451579" y="2015732"/>
-            <a:ext cx="9603275" cy="4037749"/>
-          </a:xfrm>
-        </p:spPr>
-        <p:txBody>
-          <a:bodyPr/>
-          <a:lstStyle/>
-          <a:p>
-            <a:r>
-              <a:rPr lang="en-US" dirty="0"/>
-              <a:t>Hypothesis tests yield an estimate of some effect occurring by chance. </a:t>
-            </a:r>
-          </a:p>
-          <a:p>
-            <a:pPr lvl="1"/>
-            <a:r>
-              <a:rPr lang="en-US" dirty="0"/>
-              <a:t>P value is the probability of this thing happening randomly. </a:t>
-            </a:r>
-          </a:p>
-          <a:p>
-            <a:r>
-              <a:rPr lang="en-US" dirty="0"/>
-              <a:t>The cutoff we set for “good enough” can vary depending on scenario. </a:t>
-            </a:r>
-          </a:p>
-          <a:p>
-            <a:pPr lvl="1"/>
-            <a:r>
-              <a:rPr lang="en-US" dirty="0"/>
-              <a:t>.05, or 5% is a common cutoff. (This isn’t that unlikely…)</a:t>
-            </a:r>
-          </a:p>
-          <a:p>
-            <a:r>
-              <a:rPr lang="en-US" dirty="0"/>
-              <a:t>If the likelihood of randomness &lt; cutoff, the result is “statistically significant”. </a:t>
-            </a:r>
-          </a:p>
-          <a:p>
-            <a:pPr lvl="1"/>
-            <a:r>
-              <a:rPr lang="en-US" dirty="0"/>
-              <a:t>This is irrespective of the size of the effect, it could be small but significant. </a:t>
-            </a:r>
-          </a:p>
-          <a:p>
-            <a:pPr lvl="1"/>
-            <a:r>
-              <a:rPr lang="en-US" dirty="0"/>
-              <a:t>This doesn’t mean it is true, this is just one piece of evidence. </a:t>
-            </a:r>
-          </a:p>
-        </p:txBody>
-      </p:sp>
-    </p:spTree>
-    <p:extLst>
-      <p:ext uri="{BB962C8B-B14F-4D97-AF65-F5344CB8AC3E}">
-        <p14:creationId xmlns:p14="http://schemas.microsoft.com/office/powerpoint/2010/main" val="2787222080"/>
-      </p:ext>
-    </p:extLst>
-  </p:cSld>
-  <p:clrMapOvr>
-    <a:masterClrMapping/>
-  </p:clrMapOvr>
-</p:sld>
-</file>
-
-<file path=ppt/slides/slide2.xml><?xml version="1.0" encoding="utf-8"?>
-<p:sld xmlns:a="http://schemas.openxmlformats.org/drawingml/2006/main" xmlns:r="http://schemas.openxmlformats.org/officeDocument/2006/relationships" xmlns:p="http://schemas.openxmlformats.org/presentationml/2006/main">
-  <p:cSld>
-    <p:spTree>
-      <p:nvGrpSpPr>
-        <p:cNvPr id="1" name=""/>
-        <p:cNvGrpSpPr/>
-        <p:nvPr/>
-      </p:nvGrpSpPr>
-      <p:grpSpPr>
-        <a:xfrm>
-          <a:off x="0" y="0"/>
-          <a:ext cx="0" cy="0"/>
-          <a:chOff x="0" y="0"/>
-          <a:chExt cx="0" cy="0"/>
-        </a:xfrm>
-      </p:grpSpPr>
-      <p:sp>
-        <p:nvSpPr>
-          <p:cNvPr id="2" name="Title 1">
-            <a:extLst>
-              <a:ext uri="{FF2B5EF4-FFF2-40B4-BE49-F238E27FC236}">
-                <a16:creationId xmlns:a16="http://schemas.microsoft.com/office/drawing/2014/main" id="{7115F306-249F-4561-521B-14C45383C528}"/>
-              </a:ext>
-            </a:extLst>
-          </p:cNvPr>
-          <p:cNvSpPr>
-            <a:spLocks noGrp="1"/>
-          </p:cNvSpPr>
-          <p:nvPr>
-            <p:ph type="title"/>
-          </p:nvPr>
-        </p:nvSpPr>
-        <p:spPr/>
-        <p:txBody>
-          <a:bodyPr/>
-          <a:lstStyle/>
-          <a:p>
-            <a:r>
-              <a:rPr lang="en-US" dirty="0"/>
-              <a:t>Some Stuff</a:t>
-            </a:r>
-          </a:p>
-        </p:txBody>
-      </p:sp>
-      <p:sp>
-        <p:nvSpPr>
-          <p:cNvPr id="3" name="Content Placeholder 2">
-            <a:extLst>
-              <a:ext uri="{FF2B5EF4-FFF2-40B4-BE49-F238E27FC236}">
-                <a16:creationId xmlns:a16="http://schemas.microsoft.com/office/drawing/2014/main" id="{6D36FC52-8F69-94EE-32EB-161E1AB831C5}"/>
-              </a:ext>
-            </a:extLst>
-          </p:cNvPr>
-          <p:cNvSpPr>
-            <a:spLocks noGrp="1"/>
-          </p:cNvSpPr>
-          <p:nvPr>
-            <p:ph idx="1"/>
-          </p:nvPr>
-        </p:nvSpPr>
-        <p:spPr>
-          <a:xfrm>
-            <a:off x="1451579" y="1853755"/>
-            <a:ext cx="9603275" cy="4199726"/>
-          </a:xfrm>
-        </p:spPr>
-        <p:txBody>
-          <a:bodyPr>
-            <a:normAutofit lnSpcReduction="10000"/>
-          </a:bodyPr>
-          <a:lstStyle/>
-          <a:p>
-            <a:r>
-              <a:rPr lang="en-US" dirty="0"/>
-              <a:t>Question – in chapter 9 (e.g. 9.2) do the “class…” code parts make sense or no?</a:t>
-            </a:r>
-          </a:p>
-          <a:p>
-            <a:r>
-              <a:rPr lang="en-US" dirty="0"/>
-              <a:t>Today – recap simulation and (maybe) first part of hypothesis testing (&lt;=9.5). </a:t>
-            </a:r>
-          </a:p>
-          <a:p>
-            <a:pPr lvl="1"/>
-            <a:r>
-              <a:rPr lang="en-US" dirty="0"/>
-              <a:t>Game 7. </a:t>
-            </a:r>
-          </a:p>
-          <a:p>
-            <a:pPr lvl="1"/>
-            <a:r>
-              <a:rPr lang="en-US" dirty="0"/>
-              <a:t>More generalization, confidence, and election simulation. </a:t>
-            </a:r>
-          </a:p>
-          <a:p>
-            <a:pPr lvl="1"/>
-            <a:r>
-              <a:rPr lang="en-US" dirty="0"/>
-              <a:t>Hypothesis testing from scratch. </a:t>
-            </a:r>
-          </a:p>
-          <a:p>
-            <a:pPr lvl="1"/>
-            <a:r>
-              <a:rPr lang="en-US" dirty="0"/>
-              <a:t>Depending on what you all know, a bit about classes to make sense of book. </a:t>
-            </a:r>
-          </a:p>
-          <a:p>
-            <a:r>
-              <a:rPr lang="en-US" dirty="0"/>
-              <a:t>Note: we’ll look at the ‘from scratch’ stuff now and worry about t/z/p tests next time. </a:t>
-            </a:r>
-          </a:p>
-          <a:p>
-            <a:r>
-              <a:rPr lang="en-US" dirty="0"/>
-              <a:t>Exam, in a couple of weeks (31):</a:t>
-            </a:r>
-          </a:p>
-          <a:p>
-            <a:pPr lvl="1"/>
-            <a:r>
-              <a:rPr lang="en-US" dirty="0"/>
-              <a:t>Set a cutoff on hypothesis testing (ch9 - we’ll be more specific at the end of the week). </a:t>
-            </a:r>
-          </a:p>
-          <a:p>
-            <a:pPr lvl="1"/>
-            <a:r>
-              <a:rPr lang="en-US" dirty="0"/>
-              <a:t>It’ll involve answering some questions, and submitting some code bits. </a:t>
-            </a:r>
-          </a:p>
-        </p:txBody>
-      </p:sp>
-      <p:pic>
-        <p:nvPicPr>
-          <p:cNvPr id="2050" name="Picture 2" descr="Toronto Blue Jays - Wikipedia">
-            <a:extLst>
-              <a:ext uri="{FF2B5EF4-FFF2-40B4-BE49-F238E27FC236}">
-                <a16:creationId xmlns:a16="http://schemas.microsoft.com/office/drawing/2014/main" id="{906B6302-6014-1A0A-B459-FC61F9795AB8}"/>
-              </a:ext>
-            </a:extLst>
-          </p:cNvPr>
-          <p:cNvPicPr>
-            <a:picLocks noChangeAspect="1" noChangeArrowheads="1"/>
-          </p:cNvPicPr>
-          <p:nvPr/>
-        </p:nvPicPr>
-        <p:blipFill>
-          <a:blip r:embed="rId2">
-            <a:extLst>
-              <a:ext uri="{28A0092B-C50C-407E-A947-70E740481C1C}">
-                <a14:useLocalDpi xmlns:a14="http://schemas.microsoft.com/office/drawing/2010/main" val="0"/>
-              </a:ext>
-            </a:extLst>
-          </a:blip>
-          <a:srcRect/>
-          <a:stretch>
-            <a:fillRect/>
-          </a:stretch>
-        </p:blipFill>
-        <p:spPr bwMode="auto">
-          <a:xfrm>
-            <a:off x="9970474" y="0"/>
-            <a:ext cx="2168759" cy="1870441"/>
-          </a:xfrm>
-          <a:prstGeom prst="rect">
-            <a:avLst/>
-          </a:prstGeom>
-          <a:noFill/>
-          <a:extLst>
-            <a:ext uri="{909E8E84-426E-40DD-AFC4-6F175D3DCCD1}">
-              <a14:hiddenFill xmlns:a14="http://schemas.microsoft.com/office/drawing/2010/main">
-                <a:solidFill>
-                  <a:srgbClr val="FFFFFF"/>
-                </a:solidFill>
-              </a14:hiddenFill>
-            </a:ext>
-          </a:extLst>
-        </p:spPr>
-      </p:pic>
-    </p:spTree>
-    <p:extLst>
-      <p:ext uri="{BB962C8B-B14F-4D97-AF65-F5344CB8AC3E}">
-        <p14:creationId xmlns:p14="http://schemas.microsoft.com/office/powerpoint/2010/main" val="3163518021"/>
-      </p:ext>
-    </p:extLst>
-  </p:cSld>
-  <p:clrMapOvr>
-    <a:masterClrMapping/>
-  </p:clrMapOvr>
-</p:sld>
-</file>
-
-<file path=ppt/slides/slide20.xml><?xml version="1.0" encoding="utf-8"?>
-<p:sld xmlns:a="http://schemas.openxmlformats.org/drawingml/2006/main" xmlns:r="http://schemas.openxmlformats.org/officeDocument/2006/relationships" xmlns:p="http://schemas.openxmlformats.org/presentationml/2006/main">
-  <p:cSld>
-    <p:spTree>
-      <p:nvGrpSpPr>
-        <p:cNvPr id="1" name=""/>
-        <p:cNvGrpSpPr/>
-        <p:nvPr/>
-      </p:nvGrpSpPr>
-      <p:grpSpPr>
-        <a:xfrm>
-          <a:off x="0" y="0"/>
-          <a:ext cx="0" cy="0"/>
-          <a:chOff x="0" y="0"/>
-          <a:chExt cx="0" cy="0"/>
-        </a:xfrm>
-      </p:grpSpPr>
-      <p:sp>
-        <p:nvSpPr>
-          <p:cNvPr id="2" name="Title 1">
-            <a:extLst>
-              <a:ext uri="{FF2B5EF4-FFF2-40B4-BE49-F238E27FC236}">
-                <a16:creationId xmlns:a16="http://schemas.microsoft.com/office/drawing/2014/main" id="{69A39623-527F-9870-5419-C8924A9434CA}"/>
-              </a:ext>
-            </a:extLst>
-          </p:cNvPr>
-          <p:cNvSpPr>
-            <a:spLocks noGrp="1"/>
-          </p:cNvSpPr>
-          <p:nvPr>
-            <p:ph type="title"/>
-          </p:nvPr>
-        </p:nvSpPr>
-        <p:spPr/>
-        <p:txBody>
-          <a:bodyPr/>
-          <a:lstStyle/>
-          <a:p>
-            <a:r>
-              <a:rPr lang="en-US" dirty="0"/>
-              <a:t>Classes and Objects</a:t>
-            </a:r>
-          </a:p>
-        </p:txBody>
-      </p:sp>
-      <p:sp>
-        <p:nvSpPr>
-          <p:cNvPr id="3" name="Content Placeholder 2">
-            <a:extLst>
-              <a:ext uri="{FF2B5EF4-FFF2-40B4-BE49-F238E27FC236}">
-                <a16:creationId xmlns:a16="http://schemas.microsoft.com/office/drawing/2014/main" id="{D58B4E2A-B221-940D-A63F-C080495BCF3C}"/>
-              </a:ext>
-            </a:extLst>
-          </p:cNvPr>
-          <p:cNvSpPr>
-            <a:spLocks noGrp="1"/>
-          </p:cNvSpPr>
-          <p:nvPr>
-            <p:ph idx="1"/>
-          </p:nvPr>
-        </p:nvSpPr>
-        <p:spPr>
-          <a:xfrm>
-            <a:off x="1451579" y="1921566"/>
-            <a:ext cx="9603275" cy="4131916"/>
-          </a:xfrm>
-        </p:spPr>
-        <p:txBody>
-          <a:bodyPr/>
-          <a:lstStyle/>
-          <a:p>
-            <a:r>
-              <a:rPr lang="en-US" dirty="0"/>
-              <a:t>Pretty much everything you use in Python is an object. </a:t>
-            </a:r>
-          </a:p>
-          <a:p>
-            <a:pPr lvl="1"/>
-            <a:r>
-              <a:rPr lang="en-US" dirty="0"/>
-              <a:t>Strings, </a:t>
-            </a:r>
-            <a:r>
-              <a:rPr lang="en-US" dirty="0" err="1"/>
-              <a:t>dataframes</a:t>
-            </a:r>
-            <a:r>
-              <a:rPr lang="en-US" dirty="0"/>
-              <a:t>, integers, </a:t>
-            </a:r>
-            <a:r>
-              <a:rPr lang="en-US" dirty="0" err="1"/>
-              <a:t>etc</a:t>
-            </a:r>
-            <a:r>
-              <a:rPr lang="en-US" dirty="0"/>
-              <a:t>…</a:t>
-            </a:r>
-          </a:p>
-          <a:p>
-            <a:pPr lvl="1"/>
-            <a:r>
-              <a:rPr lang="en-US" dirty="0"/>
-              <a:t>Each variable declaration is (usually) a creation of an object. </a:t>
-            </a:r>
-          </a:p>
-          <a:p>
-            <a:r>
-              <a:rPr lang="en-US" dirty="0"/>
-              <a:t>Objects can be made to do whatever we need, each object has:</a:t>
-            </a:r>
-          </a:p>
-          <a:p>
-            <a:pPr lvl="1"/>
-            <a:r>
-              <a:rPr lang="en-US" dirty="0"/>
-              <a:t>Some things it knows – the data stored in the object. </a:t>
-            </a:r>
-          </a:p>
-          <a:p>
-            <a:pPr lvl="1"/>
-            <a:r>
-              <a:rPr lang="en-US" dirty="0"/>
-              <a:t>Some things it can do – the methods (functions) that can take action. </a:t>
-            </a:r>
-          </a:p>
-          <a:p>
-            <a:r>
-              <a:rPr lang="en-US" dirty="0"/>
-              <a:t>Examples:</a:t>
-            </a:r>
-          </a:p>
-          <a:p>
-            <a:pPr lvl="1"/>
-            <a:r>
-              <a:rPr lang="en-US" dirty="0" err="1"/>
-              <a:t>Dataframe</a:t>
-            </a:r>
-            <a:r>
-              <a:rPr lang="en-US" dirty="0"/>
-              <a:t>: ”things known” – data, “things done” – describe(), info(), </a:t>
-            </a:r>
-            <a:r>
-              <a:rPr lang="en-US" dirty="0" err="1"/>
-              <a:t>etc</a:t>
-            </a:r>
-            <a:r>
-              <a:rPr lang="en-US" dirty="0"/>
-              <a:t>…</a:t>
-            </a:r>
-          </a:p>
-          <a:p>
-            <a:pPr lvl="1"/>
-            <a:r>
-              <a:rPr lang="en-US" dirty="0"/>
-              <a:t>Integer: “Thing known” – data, “things done” – all the operators, </a:t>
-            </a:r>
-            <a:r>
-              <a:rPr lang="en-US" dirty="0" err="1"/>
-              <a:t>etc</a:t>
-            </a:r>
-            <a:r>
-              <a:rPr lang="en-US" dirty="0"/>
-              <a:t>…</a:t>
-            </a:r>
-          </a:p>
-        </p:txBody>
-      </p:sp>
-    </p:spTree>
-    <p:extLst>
-      <p:ext uri="{BB962C8B-B14F-4D97-AF65-F5344CB8AC3E}">
-        <p14:creationId xmlns:p14="http://schemas.microsoft.com/office/powerpoint/2010/main" val="2727267912"/>
-      </p:ext>
-    </p:extLst>
-  </p:cSld>
-  <p:clrMapOvr>
-    <a:masterClrMapping/>
-  </p:clrMapOvr>
-</p:sld>
-</file>
-
-<file path=ppt/slides/slide21.xml><?xml version="1.0" encoding="utf-8"?>
-<p:sld xmlns:a="http://schemas.openxmlformats.org/drawingml/2006/main" xmlns:r="http://schemas.openxmlformats.org/officeDocument/2006/relationships" xmlns:p="http://schemas.openxmlformats.org/presentationml/2006/main">
-  <p:cSld>
-    <p:spTree>
-      <p:nvGrpSpPr>
-        <p:cNvPr id="1" name=""/>
-        <p:cNvGrpSpPr/>
-        <p:nvPr/>
-      </p:nvGrpSpPr>
-      <p:grpSpPr>
-        <a:xfrm>
-          <a:off x="0" y="0"/>
-          <a:ext cx="0" cy="0"/>
-          <a:chOff x="0" y="0"/>
-          <a:chExt cx="0" cy="0"/>
-        </a:xfrm>
-      </p:grpSpPr>
-      <p:sp>
-        <p:nvSpPr>
-          <p:cNvPr id="2" name="Title 1">
-            <a:extLst>
-              <a:ext uri="{FF2B5EF4-FFF2-40B4-BE49-F238E27FC236}">
-                <a16:creationId xmlns:a16="http://schemas.microsoft.com/office/drawing/2014/main" id="{D21D85F9-7601-B74E-3FE9-8D41DF070F3C}"/>
-              </a:ext>
-            </a:extLst>
-          </p:cNvPr>
-          <p:cNvSpPr>
-            <a:spLocks noGrp="1"/>
-          </p:cNvSpPr>
-          <p:nvPr>
-            <p:ph type="title"/>
-          </p:nvPr>
-        </p:nvSpPr>
-        <p:spPr/>
-        <p:txBody>
-          <a:bodyPr/>
-          <a:lstStyle/>
-          <a:p>
-            <a:r>
-              <a:rPr lang="en-US" dirty="0"/>
-              <a:t>Custom Objects (classes)</a:t>
-            </a:r>
-          </a:p>
-        </p:txBody>
-      </p:sp>
-      <p:sp>
-        <p:nvSpPr>
-          <p:cNvPr id="3" name="Content Placeholder 2">
-            <a:extLst>
-              <a:ext uri="{FF2B5EF4-FFF2-40B4-BE49-F238E27FC236}">
-                <a16:creationId xmlns:a16="http://schemas.microsoft.com/office/drawing/2014/main" id="{CCA1E9FE-7152-7C39-1B42-BF4A052B50E1}"/>
-              </a:ext>
-            </a:extLst>
-          </p:cNvPr>
-          <p:cNvSpPr>
-            <a:spLocks noGrp="1"/>
-          </p:cNvSpPr>
-          <p:nvPr>
-            <p:ph idx="1"/>
-          </p:nvPr>
-        </p:nvSpPr>
-        <p:spPr>
-          <a:xfrm>
-            <a:off x="1451579" y="1956097"/>
-            <a:ext cx="9603275" cy="3987503"/>
-          </a:xfrm>
-        </p:spPr>
-        <p:txBody>
-          <a:bodyPr/>
-          <a:lstStyle/>
-          <a:p>
-            <a:r>
-              <a:rPr lang="en-US" dirty="0"/>
-              <a:t>We can create classes that let us use custom objects. </a:t>
-            </a:r>
-          </a:p>
-          <a:p>
-            <a:pPr lvl="1"/>
-            <a:r>
-              <a:rPr lang="en-US" dirty="0"/>
-              <a:t>We can add any other objects to it to store data inside. </a:t>
-            </a:r>
-          </a:p>
-          <a:p>
-            <a:pPr lvl="1"/>
-            <a:r>
-              <a:rPr lang="en-US" dirty="0"/>
-              <a:t>We can create methods (functions) to add functionality. </a:t>
-            </a:r>
-          </a:p>
-          <a:p>
-            <a:r>
-              <a:rPr lang="en-US" dirty="0"/>
-              <a:t>For example – a college registration record. </a:t>
-            </a:r>
-          </a:p>
-          <a:p>
-            <a:pPr lvl="1"/>
-            <a:r>
-              <a:rPr lang="en-US" dirty="0"/>
-              <a:t>Data – student, class, date, grade, status, </a:t>
-            </a:r>
-            <a:r>
-              <a:rPr lang="en-US" dirty="0" err="1"/>
-              <a:t>etc</a:t>
-            </a:r>
-            <a:r>
-              <a:rPr lang="en-US" dirty="0"/>
-              <a:t>…</a:t>
-            </a:r>
-          </a:p>
-          <a:p>
-            <a:pPr lvl="1"/>
-            <a:r>
-              <a:rPr lang="en-US" dirty="0"/>
-              <a:t>Methods – </a:t>
-            </a:r>
-            <a:r>
-              <a:rPr lang="en-US" dirty="0" err="1"/>
-              <a:t>cancelRegistration</a:t>
-            </a:r>
-            <a:r>
-              <a:rPr lang="en-US" dirty="0"/>
-              <a:t>(), print(), </a:t>
-            </a:r>
-            <a:r>
-              <a:rPr lang="en-US" dirty="0" err="1"/>
-              <a:t>changeGrade</a:t>
-            </a:r>
-            <a:r>
-              <a:rPr lang="en-US" dirty="0"/>
-              <a:t>(), </a:t>
-            </a:r>
-            <a:r>
-              <a:rPr lang="en-US" dirty="0" err="1"/>
-              <a:t>changeStatus</a:t>
-            </a:r>
-            <a:r>
-              <a:rPr lang="en-US" dirty="0"/>
-              <a:t>()…</a:t>
-            </a:r>
-          </a:p>
-          <a:p>
-            <a:r>
-              <a:rPr lang="en-US" dirty="0"/>
-              <a:t>Once created we can use them just like anything else. </a:t>
-            </a:r>
-          </a:p>
-          <a:p>
-            <a:pPr lvl="1"/>
-            <a:r>
-              <a:rPr lang="en-US" dirty="0"/>
-              <a:t>Create by calling the constructor, usually in a variable declaration. </a:t>
-            </a:r>
-          </a:p>
-          <a:p>
-            <a:pPr lvl="1"/>
-            <a:r>
-              <a:rPr lang="en-US" dirty="0"/>
-              <a:t>Interact by using functions on those objects – </a:t>
-            </a:r>
-            <a:r>
-              <a:rPr lang="en-US" dirty="0" err="1"/>
-              <a:t>newObject.theNewFunction</a:t>
-            </a:r>
-            <a:r>
-              <a:rPr lang="en-US" dirty="0"/>
-              <a:t>(parameter_1).</a:t>
-            </a:r>
-          </a:p>
-          <a:p>
-            <a:pPr lvl="1"/>
-            <a:endParaRPr lang="en-US" dirty="0"/>
-          </a:p>
-        </p:txBody>
-      </p:sp>
-    </p:spTree>
-    <p:extLst>
-      <p:ext uri="{BB962C8B-B14F-4D97-AF65-F5344CB8AC3E}">
-        <p14:creationId xmlns:p14="http://schemas.microsoft.com/office/powerpoint/2010/main" val="2619415263"/>
-      </p:ext>
-    </p:extLst>
-  </p:cSld>
-  <p:clrMapOvr>
-    <a:masterClrMapping/>
-  </p:clrMapOvr>
-</p:sld>
-</file>
-
-<file path=ppt/slides/slide22.xml><?xml version="1.0" encoding="utf-8"?>
-<p:sld xmlns:a="http://schemas.openxmlformats.org/drawingml/2006/main" xmlns:r="http://schemas.openxmlformats.org/officeDocument/2006/relationships" xmlns:p="http://schemas.openxmlformats.org/presentationml/2006/main">
-  <p:cSld>
-    <p:spTree>
-      <p:nvGrpSpPr>
-        <p:cNvPr id="1" name=""/>
-        <p:cNvGrpSpPr/>
-        <p:nvPr/>
-      </p:nvGrpSpPr>
-      <p:grpSpPr>
-        <a:xfrm>
-          <a:off x="0" y="0"/>
-          <a:ext cx="0" cy="0"/>
-          <a:chOff x="0" y="0"/>
-          <a:chExt cx="0" cy="0"/>
-        </a:xfrm>
-      </p:grpSpPr>
-      <p:sp>
-        <p:nvSpPr>
-          <p:cNvPr id="2" name="Title 1">
-            <a:extLst>
-              <a:ext uri="{FF2B5EF4-FFF2-40B4-BE49-F238E27FC236}">
-                <a16:creationId xmlns:a16="http://schemas.microsoft.com/office/drawing/2014/main" id="{10FA6B79-300D-ABDE-AAC4-F2C91BEE3E7E}"/>
-              </a:ext>
-            </a:extLst>
-          </p:cNvPr>
-          <p:cNvSpPr>
-            <a:spLocks noGrp="1"/>
-          </p:cNvSpPr>
-          <p:nvPr>
-            <p:ph type="title"/>
-          </p:nvPr>
-        </p:nvSpPr>
-        <p:spPr/>
-        <p:txBody>
-          <a:bodyPr/>
-          <a:lstStyle/>
-          <a:p>
-            <a:r>
-              <a:rPr lang="en-US" dirty="0"/>
-              <a:t>Inheritance</a:t>
-            </a:r>
-          </a:p>
-        </p:txBody>
-      </p:sp>
-      <p:sp>
-        <p:nvSpPr>
-          <p:cNvPr id="3" name="Content Placeholder 2">
-            <a:extLst>
-              <a:ext uri="{FF2B5EF4-FFF2-40B4-BE49-F238E27FC236}">
-                <a16:creationId xmlns:a16="http://schemas.microsoft.com/office/drawing/2014/main" id="{E62B541F-B8F9-15D8-BE84-2FB50BA9FE98}"/>
-              </a:ext>
-            </a:extLst>
-          </p:cNvPr>
-          <p:cNvSpPr>
-            <a:spLocks noGrp="1"/>
-          </p:cNvSpPr>
-          <p:nvPr>
-            <p:ph idx="1"/>
-          </p:nvPr>
-        </p:nvSpPr>
-        <p:spPr>
-          <a:xfrm>
-            <a:off x="1451579" y="1934817"/>
-            <a:ext cx="9603275" cy="4118663"/>
-          </a:xfrm>
-        </p:spPr>
-        <p:txBody>
-          <a:bodyPr/>
-          <a:lstStyle/>
-          <a:p>
-            <a:r>
-              <a:rPr lang="en-US" dirty="0"/>
-              <a:t>We have another feature, the one thing that matters in the modern economy, inheritance. </a:t>
-            </a:r>
-          </a:p>
-          <a:p>
-            <a:r>
-              <a:rPr lang="en-US" dirty="0"/>
-              <a:t>Inheritance is a hierarchy with an “is-a” relationship. </a:t>
-            </a:r>
-          </a:p>
-          <a:p>
-            <a:pPr lvl="1"/>
-            <a:r>
-              <a:rPr lang="en-US" dirty="0"/>
-              <a:t>We can define types that share data/methods. </a:t>
-            </a:r>
-          </a:p>
-          <a:p>
-            <a:pPr lvl="1"/>
-            <a:r>
-              <a:rPr lang="en-US" dirty="0"/>
-              <a:t>We can change the different parts as needed. </a:t>
-            </a:r>
-          </a:p>
-          <a:p>
-            <a:pPr lvl="1"/>
-            <a:r>
-              <a:rPr lang="en-US" dirty="0"/>
-              <a:t>We can still access the common stuff directly. </a:t>
-            </a:r>
-          </a:p>
-          <a:p>
-            <a:r>
-              <a:rPr lang="en-US" dirty="0"/>
-              <a:t>Example – a large company with employees.</a:t>
-            </a:r>
-          </a:p>
-          <a:p>
-            <a:pPr lvl="1"/>
-            <a:r>
-              <a:rPr lang="en-US" dirty="0"/>
-              <a:t>Parent class – “Worker”. Common stuff - wage, address, </a:t>
-            </a:r>
-            <a:r>
-              <a:rPr lang="en-US" dirty="0" err="1"/>
-              <a:t>changePay</a:t>
-            </a:r>
-            <a:r>
-              <a:rPr lang="en-US" dirty="0"/>
-              <a:t>, </a:t>
-            </a:r>
-            <a:r>
-              <a:rPr lang="en-US" dirty="0" err="1"/>
-              <a:t>etc</a:t>
-            </a:r>
-            <a:r>
-              <a:rPr lang="en-US" dirty="0"/>
-              <a:t>…</a:t>
-            </a:r>
-          </a:p>
-          <a:p>
-            <a:pPr lvl="1"/>
-            <a:r>
-              <a:rPr lang="en-US" dirty="0"/>
-              <a:t>Children – Full time employee, part time, contractor, temporary. Pay/benefit things change. </a:t>
-            </a:r>
-          </a:p>
-          <a:p>
-            <a:pPr lvl="1"/>
-            <a:r>
-              <a:rPr lang="en-US" dirty="0"/>
-              <a:t>We can leave common stuff in Worker and make specific versions for children. </a:t>
-            </a:r>
-          </a:p>
-        </p:txBody>
-      </p:sp>
-    </p:spTree>
-    <p:extLst>
-      <p:ext uri="{BB962C8B-B14F-4D97-AF65-F5344CB8AC3E}">
-        <p14:creationId xmlns:p14="http://schemas.microsoft.com/office/powerpoint/2010/main" val="2366003626"/>
-      </p:ext>
-    </p:extLst>
-  </p:cSld>
-  <p:clrMapOvr>
-    <a:masterClrMapping/>
-  </p:clrMapOvr>
-</p:sld>
-</file>
-
-<file path=ppt/slides/slide23.xml><?xml version="1.0" encoding="utf-8"?>
-<p:sld xmlns:a="http://schemas.openxmlformats.org/drawingml/2006/main" xmlns:r="http://schemas.openxmlformats.org/officeDocument/2006/relationships" xmlns:p="http://schemas.openxmlformats.org/presentationml/2006/main">
-  <p:cSld>
-    <p:spTree>
-      <p:nvGrpSpPr>
-        <p:cNvPr id="1" name=""/>
-        <p:cNvGrpSpPr/>
-        <p:nvPr/>
-      </p:nvGrpSpPr>
-      <p:grpSpPr>
-        <a:xfrm>
-          <a:off x="0" y="0"/>
-          <a:ext cx="0" cy="0"/>
-          <a:chOff x="0" y="0"/>
-          <a:chExt cx="0" cy="0"/>
-        </a:xfrm>
-      </p:grpSpPr>
-      <p:sp>
-        <p:nvSpPr>
-          <p:cNvPr id="2" name="Title 1">
-            <a:extLst>
-              <a:ext uri="{FF2B5EF4-FFF2-40B4-BE49-F238E27FC236}">
-                <a16:creationId xmlns:a16="http://schemas.microsoft.com/office/drawing/2014/main" id="{E7E59093-B8A2-939C-22E7-540BB26E387E}"/>
-              </a:ext>
-            </a:extLst>
-          </p:cNvPr>
-          <p:cNvSpPr>
-            <a:spLocks noGrp="1"/>
-          </p:cNvSpPr>
-          <p:nvPr>
-            <p:ph type="title"/>
-          </p:nvPr>
-        </p:nvSpPr>
-        <p:spPr>
-          <a:xfrm>
-            <a:off x="7356969" y="804519"/>
-            <a:ext cx="3697885" cy="1049235"/>
-          </a:xfrm>
-        </p:spPr>
-        <p:txBody>
-          <a:bodyPr/>
-          <a:lstStyle/>
-          <a:p>
-            <a:r>
-              <a:rPr lang="en-US" dirty="0"/>
-              <a:t>Simple example</a:t>
-            </a:r>
-          </a:p>
-        </p:txBody>
-      </p:sp>
-      <p:sp>
-        <p:nvSpPr>
-          <p:cNvPr id="3" name="Content Placeholder 2">
-            <a:extLst>
-              <a:ext uri="{FF2B5EF4-FFF2-40B4-BE49-F238E27FC236}">
-                <a16:creationId xmlns:a16="http://schemas.microsoft.com/office/drawing/2014/main" id="{14CD2078-7D52-E760-F8BA-FE9515667799}"/>
-              </a:ext>
-            </a:extLst>
-          </p:cNvPr>
-          <p:cNvSpPr>
-            <a:spLocks noGrp="1"/>
-          </p:cNvSpPr>
-          <p:nvPr>
-            <p:ph idx="1"/>
-          </p:nvPr>
-        </p:nvSpPr>
-        <p:spPr>
-          <a:xfrm>
-            <a:off x="7356969" y="1914940"/>
-            <a:ext cx="4662753" cy="4138542"/>
-          </a:xfrm>
-        </p:spPr>
-        <p:txBody>
-          <a:bodyPr/>
-          <a:lstStyle/>
-          <a:p>
-            <a:r>
-              <a:rPr lang="en-US" dirty="0"/>
-              <a:t>This is s simple example. </a:t>
-            </a:r>
-          </a:p>
-          <a:p>
-            <a:pPr lvl="1"/>
-            <a:r>
-              <a:rPr lang="en-US" dirty="0"/>
-              <a:t>Ignore the green part. </a:t>
-            </a:r>
-          </a:p>
-          <a:p>
-            <a:r>
-              <a:rPr lang="en-US" dirty="0"/>
-              <a:t>An employee is the parent. </a:t>
-            </a:r>
-          </a:p>
-          <a:p>
-            <a:pPr lvl="1"/>
-            <a:r>
-              <a:rPr lang="en-US" dirty="0"/>
-              <a:t>Employees all have names and ID. </a:t>
-            </a:r>
-          </a:p>
-          <a:p>
-            <a:r>
-              <a:rPr lang="en-US" dirty="0"/>
-              <a:t>All employees need pay calculated. </a:t>
-            </a:r>
-          </a:p>
-          <a:p>
-            <a:pPr lvl="1"/>
-            <a:r>
-              <a:rPr lang="en-US" dirty="0"/>
-              <a:t>Each child has a separate method. </a:t>
-            </a:r>
-          </a:p>
-          <a:p>
-            <a:pPr lvl="1"/>
-            <a:r>
-              <a:rPr lang="en-US" dirty="0"/>
-              <a:t>When told to “calc pay” each does it. </a:t>
-            </a:r>
-          </a:p>
-          <a:p>
-            <a:pPr lvl="1"/>
-            <a:r>
-              <a:rPr lang="en-US" dirty="0"/>
-              <a:t>A loop could “calc pay” for all employees, each ’knows’ how to do it.</a:t>
-            </a:r>
-          </a:p>
-        </p:txBody>
-      </p:sp>
-      <p:pic>
-        <p:nvPicPr>
-          <p:cNvPr id="1026" name="Picture 2" descr="Inheritance and Composition: A Python OOP Guide – Real Python">
-            <a:extLst>
-              <a:ext uri="{FF2B5EF4-FFF2-40B4-BE49-F238E27FC236}">
-                <a16:creationId xmlns:a16="http://schemas.microsoft.com/office/drawing/2014/main" id="{9804C9A4-330C-0C23-C912-27DAE6B005FF}"/>
-              </a:ext>
-            </a:extLst>
-          </p:cNvPr>
-          <p:cNvPicPr>
-            <a:picLocks noChangeAspect="1" noChangeArrowheads="1"/>
-          </p:cNvPicPr>
-          <p:nvPr/>
-        </p:nvPicPr>
-        <p:blipFill>
-          <a:blip r:embed="rId2">
-            <a:extLst>
-              <a:ext uri="{28A0092B-C50C-407E-A947-70E740481C1C}">
-                <a14:useLocalDpi xmlns:a14="http://schemas.microsoft.com/office/drawing/2010/main" val="0"/>
-              </a:ext>
-            </a:extLst>
-          </a:blip>
-          <a:srcRect/>
-          <a:stretch>
-            <a:fillRect/>
-          </a:stretch>
-        </p:blipFill>
-        <p:spPr bwMode="auto">
-          <a:xfrm>
-            <a:off x="121144" y="0"/>
-            <a:ext cx="7235825" cy="6858000"/>
-          </a:xfrm>
-          <a:prstGeom prst="rect">
-            <a:avLst/>
-          </a:prstGeom>
-          <a:noFill/>
-          <a:extLst>
-            <a:ext uri="{909E8E84-426E-40DD-AFC4-6F175D3DCCD1}">
-              <a14:hiddenFill xmlns:a14="http://schemas.microsoft.com/office/drawing/2010/main">
-                <a:solidFill>
-                  <a:srgbClr val="FFFFFF"/>
-                </a:solidFill>
-              </a14:hiddenFill>
-            </a:ext>
-          </a:extLst>
-        </p:spPr>
-      </p:pic>
-    </p:spTree>
-    <p:extLst>
-      <p:ext uri="{BB962C8B-B14F-4D97-AF65-F5344CB8AC3E}">
-        <p14:creationId xmlns:p14="http://schemas.microsoft.com/office/powerpoint/2010/main" val="1476462590"/>
-      </p:ext>
-    </p:extLst>
-  </p:cSld>
-  <p:clrMapOvr>
-    <a:masterClrMapping/>
-  </p:clrMapOvr>
-</p:sld>
-</file>
-
-<file path=ppt/slides/slide24.xml><?xml version="1.0" encoding="utf-8"?>
-<p:sld xmlns:a="http://schemas.openxmlformats.org/drawingml/2006/main" xmlns:r="http://schemas.openxmlformats.org/officeDocument/2006/relationships" xmlns:p="http://schemas.openxmlformats.org/presentationml/2006/main">
-  <p:cSld>
-    <p:spTree>
-      <p:nvGrpSpPr>
-        <p:cNvPr id="1" name=""/>
-        <p:cNvGrpSpPr/>
-        <p:nvPr/>
-      </p:nvGrpSpPr>
-      <p:grpSpPr>
-        <a:xfrm>
-          <a:off x="0" y="0"/>
-          <a:ext cx="0" cy="0"/>
-          <a:chOff x="0" y="0"/>
-          <a:chExt cx="0" cy="0"/>
-        </a:xfrm>
-      </p:grpSpPr>
-      <p:sp>
-        <p:nvSpPr>
-          <p:cNvPr id="2" name="Title 1">
-            <a:extLst>
-              <a:ext uri="{FF2B5EF4-FFF2-40B4-BE49-F238E27FC236}">
-                <a16:creationId xmlns:a16="http://schemas.microsoft.com/office/drawing/2014/main" id="{966F776B-DB5A-D724-6587-80DDED57ACFE}"/>
-              </a:ext>
-            </a:extLst>
-          </p:cNvPr>
-          <p:cNvSpPr>
-            <a:spLocks noGrp="1"/>
-          </p:cNvSpPr>
-          <p:nvPr>
-            <p:ph type="title"/>
-          </p:nvPr>
-        </p:nvSpPr>
-        <p:spPr/>
-        <p:txBody>
-          <a:bodyPr/>
-          <a:lstStyle/>
-          <a:p>
-            <a:r>
-              <a:rPr lang="en-US" dirty="0"/>
-              <a:t>In the Book</a:t>
-            </a:r>
-          </a:p>
-        </p:txBody>
-      </p:sp>
-      <p:sp>
-        <p:nvSpPr>
-          <p:cNvPr id="3" name="Content Placeholder 2">
-            <a:extLst>
-              <a:ext uri="{FF2B5EF4-FFF2-40B4-BE49-F238E27FC236}">
-                <a16:creationId xmlns:a16="http://schemas.microsoft.com/office/drawing/2014/main" id="{89B4D29D-B4C1-349F-E12B-5FFF24C75AAE}"/>
-              </a:ext>
-            </a:extLst>
-          </p:cNvPr>
-          <p:cNvSpPr>
-            <a:spLocks noGrp="1"/>
-          </p:cNvSpPr>
-          <p:nvPr>
-            <p:ph idx="1"/>
-          </p:nvPr>
-        </p:nvSpPr>
-        <p:spPr>
-          <a:xfrm>
-            <a:off x="1451579" y="1853754"/>
-            <a:ext cx="9603275" cy="4199727"/>
-          </a:xfrm>
-        </p:spPr>
-        <p:txBody>
-          <a:bodyPr/>
-          <a:lstStyle/>
-          <a:p>
-            <a:r>
-              <a:rPr lang="en-US" dirty="0"/>
-              <a:t>The simulation mechanics are mostly identical. </a:t>
-            </a:r>
-          </a:p>
-          <a:p>
-            <a:r>
-              <a:rPr lang="en-US" dirty="0"/>
-              <a:t>The details of the probability of each round change. </a:t>
-            </a:r>
-          </a:p>
-          <a:p>
-            <a:r>
-              <a:rPr lang="en-US" dirty="0"/>
-              <a:t>The book example shows a simulation inheritance setup:</a:t>
-            </a:r>
-          </a:p>
-          <a:p>
-            <a:pPr lvl="1"/>
-            <a:r>
-              <a:rPr lang="en-US" dirty="0"/>
-              <a:t>We need to redo the testing and tabulating each time. </a:t>
-            </a:r>
-          </a:p>
-          <a:p>
-            <a:pPr lvl="1"/>
-            <a:r>
-              <a:rPr lang="en-US" dirty="0"/>
-              <a:t>The way ‘events’ (the values) are generated changes (different models). </a:t>
-            </a:r>
-          </a:p>
-          <a:p>
-            <a:pPr lvl="1"/>
-            <a:r>
-              <a:rPr lang="en-US" dirty="0"/>
-              <a:t>As long as we can provide the probability part, the rest can happen without change. </a:t>
-            </a:r>
-          </a:p>
-          <a:p>
-            <a:r>
-              <a:rPr lang="en-US" dirty="0"/>
-              <a:t>The parent is a generic simulator harness. </a:t>
-            </a:r>
-          </a:p>
-          <a:p>
-            <a:r>
-              <a:rPr lang="en-US" dirty="0"/>
-              <a:t>The children change the specifics for that scenario. </a:t>
-            </a:r>
-          </a:p>
-          <a:p>
-            <a:r>
-              <a:rPr lang="en-US" dirty="0"/>
-              <a:t>This can be repurposed to almost any application. </a:t>
-            </a:r>
-          </a:p>
-        </p:txBody>
-      </p:sp>
-    </p:spTree>
-    <p:extLst>
-      <p:ext uri="{BB962C8B-B14F-4D97-AF65-F5344CB8AC3E}">
-        <p14:creationId xmlns:p14="http://schemas.microsoft.com/office/powerpoint/2010/main" val="1349325770"/>
-      </p:ext>
-    </p:extLst>
-  </p:cSld>
-  <p:clrMapOvr>
-    <a:masterClrMapping/>
-  </p:clrMapOvr>
-</p:sld>
-</file>
-
-<file path=ppt/slides/slide25.xml><?xml version="1.0" encoding="utf-8"?>
-<p:sld xmlns:a="http://schemas.openxmlformats.org/drawingml/2006/main" xmlns:r="http://schemas.openxmlformats.org/officeDocument/2006/relationships" xmlns:p="http://schemas.openxmlformats.org/presentationml/2006/main">
-  <p:cSld>
-    <p:spTree>
-      <p:nvGrpSpPr>
-        <p:cNvPr id="1" name=""/>
-        <p:cNvGrpSpPr/>
-        <p:nvPr/>
-      </p:nvGrpSpPr>
-      <p:grpSpPr>
-        <a:xfrm>
-          <a:off x="0" y="0"/>
-          <a:ext cx="0" cy="0"/>
-          <a:chOff x="0" y="0"/>
-          <a:chExt cx="0" cy="0"/>
-        </a:xfrm>
-      </p:grpSpPr>
-      <p:sp>
-        <p:nvSpPr>
-          <p:cNvPr id="2" name="Title 1">
-            <a:extLst>
-              <a:ext uri="{FF2B5EF4-FFF2-40B4-BE49-F238E27FC236}">
-                <a16:creationId xmlns:a16="http://schemas.microsoft.com/office/drawing/2014/main" id="{83A886D7-A2E6-F241-1E5D-C97F6B6CA403}"/>
-              </a:ext>
-            </a:extLst>
-          </p:cNvPr>
-          <p:cNvSpPr>
-            <a:spLocks noGrp="1"/>
-          </p:cNvSpPr>
-          <p:nvPr>
-            <p:ph type="title"/>
-          </p:nvPr>
-        </p:nvSpPr>
-        <p:spPr/>
-        <p:txBody>
-          <a:bodyPr/>
-          <a:lstStyle/>
-          <a:p>
-            <a:r>
-              <a:rPr lang="en-US" dirty="0"/>
-              <a:t>Using the Classes</a:t>
-            </a:r>
-          </a:p>
-        </p:txBody>
-      </p:sp>
-      <p:sp>
-        <p:nvSpPr>
-          <p:cNvPr id="3" name="Content Placeholder 2">
-            <a:extLst>
-              <a:ext uri="{FF2B5EF4-FFF2-40B4-BE49-F238E27FC236}">
-                <a16:creationId xmlns:a16="http://schemas.microsoft.com/office/drawing/2014/main" id="{CB5ABC3B-DC40-A260-8E81-147B3D0A70FB}"/>
-              </a:ext>
-            </a:extLst>
-          </p:cNvPr>
-          <p:cNvSpPr>
-            <a:spLocks noGrp="1"/>
-          </p:cNvSpPr>
-          <p:nvPr>
-            <p:ph idx="1"/>
-          </p:nvPr>
-        </p:nvSpPr>
-        <p:spPr>
-          <a:xfrm>
-            <a:off x="1451579" y="1853754"/>
-            <a:ext cx="9603275" cy="4199727"/>
-          </a:xfrm>
-        </p:spPr>
-        <p:txBody>
-          <a:bodyPr/>
-          <a:lstStyle/>
-          <a:p>
-            <a:r>
-              <a:rPr lang="en-US" dirty="0"/>
-              <a:t>We use and take advantage of this all the time. </a:t>
-            </a:r>
-          </a:p>
-          <a:p>
-            <a:pPr lvl="1"/>
-            <a:r>
-              <a:rPr lang="en-US" dirty="0"/>
-              <a:t>Shared functionality – the parent can provide data/functions that are shared. </a:t>
-            </a:r>
-          </a:p>
-          <a:p>
-            <a:pPr lvl="1"/>
-            <a:r>
-              <a:rPr lang="en-US" dirty="0"/>
-              <a:t>Different implementations – each child can implement the same functionality differently. </a:t>
-            </a:r>
-          </a:p>
-          <a:p>
-            <a:r>
-              <a:rPr lang="en-US" dirty="0"/>
-              <a:t>Interchangeability:</a:t>
-            </a:r>
-          </a:p>
-          <a:p>
-            <a:pPr lvl="1"/>
-            <a:r>
-              <a:rPr lang="en-US" dirty="0"/>
-              <a:t>As long as one object can do what is asked of it, it works. </a:t>
-            </a:r>
-          </a:p>
-          <a:p>
-            <a:pPr lvl="1"/>
-            <a:r>
-              <a:rPr lang="en-US" dirty="0"/>
-              <a:t>We can create new objects that work differently, as long as we don’t break other stuff.</a:t>
-            </a:r>
-          </a:p>
-          <a:p>
-            <a:r>
-              <a:rPr lang="en-US" dirty="0"/>
-              <a:t>When we do basic data processing, we can feed most functions data as:</a:t>
-            </a:r>
-          </a:p>
-          <a:p>
-            <a:pPr lvl="1"/>
-            <a:r>
-              <a:rPr lang="en-US" dirty="0" err="1"/>
-              <a:t>Dataframe</a:t>
-            </a:r>
-            <a:r>
-              <a:rPr lang="en-US" dirty="0"/>
-              <a:t>, list, array, series, </a:t>
-            </a:r>
-            <a:r>
-              <a:rPr lang="en-US" dirty="0" err="1"/>
-              <a:t>etc</a:t>
-            </a:r>
-            <a:r>
-              <a:rPr lang="en-US" dirty="0"/>
-              <a:t>…</a:t>
-            </a:r>
-          </a:p>
-          <a:p>
-            <a:pPr lvl="1"/>
-            <a:r>
-              <a:rPr lang="en-US" dirty="0"/>
-              <a:t>All of these can do “storage container” stuff, so we can usually swap them out for each other. </a:t>
-            </a:r>
-          </a:p>
-        </p:txBody>
-      </p:sp>
-    </p:spTree>
-    <p:extLst>
-      <p:ext uri="{BB962C8B-B14F-4D97-AF65-F5344CB8AC3E}">
-        <p14:creationId xmlns:p14="http://schemas.microsoft.com/office/powerpoint/2010/main" val="1354568557"/>
-      </p:ext>
-    </p:extLst>
-  </p:cSld>
-  <p:clrMapOvr>
-    <a:masterClrMapping/>
-  </p:clrMapOvr>
-</p:sld>
-</file>
-
 <file path=ppt/slides/slide26.xml><?xml version="1.0" encoding="utf-8"?>
 <p:sld xmlns:a="http://schemas.openxmlformats.org/drawingml/2006/main" xmlns:r="http://schemas.openxmlformats.org/officeDocument/2006/relationships" xmlns:p="http://schemas.openxmlformats.org/presentationml/2006/main">
   <p:cSld>
@@ -7135,6 +6888,137 @@
           <p:cNvPr id="2" name="Title 1">
             <a:extLst>
               <a:ext uri="{FF2B5EF4-FFF2-40B4-BE49-F238E27FC236}">
+                <a16:creationId xmlns:a16="http://schemas.microsoft.com/office/drawing/2014/main" id="{07E36D4B-F13F-C35A-5657-1C98F74F4CEE}"/>
+              </a:ext>
+            </a:extLst>
+          </p:cNvPr>
+          <p:cNvSpPr>
+            <a:spLocks noGrp="1"/>
+          </p:cNvSpPr>
+          <p:nvPr>
+            <p:ph type="title"/>
+          </p:nvPr>
+        </p:nvSpPr>
+        <p:spPr/>
+        <p:txBody>
+          <a:bodyPr/>
+          <a:lstStyle/>
+          <a:p>
+            <a:r>
+              <a:rPr lang="en-US" dirty="0"/>
+              <a:t>The Results - Significance</a:t>
+            </a:r>
+          </a:p>
+        </p:txBody>
+      </p:sp>
+      <p:sp>
+        <p:nvSpPr>
+          <p:cNvPr id="3" name="Content Placeholder 2">
+            <a:extLst>
+              <a:ext uri="{FF2B5EF4-FFF2-40B4-BE49-F238E27FC236}">
+                <a16:creationId xmlns:a16="http://schemas.microsoft.com/office/drawing/2014/main" id="{B0E24597-E550-101E-E565-B0456F471800}"/>
+              </a:ext>
+            </a:extLst>
+          </p:cNvPr>
+          <p:cNvSpPr>
+            <a:spLocks noGrp="1"/>
+          </p:cNvSpPr>
+          <p:nvPr>
+            <p:ph idx="1"/>
+          </p:nvPr>
+        </p:nvSpPr>
+        <p:spPr>
+          <a:xfrm>
+            <a:off x="1451579" y="2015732"/>
+            <a:ext cx="9603275" cy="4037749"/>
+          </a:xfrm>
+        </p:spPr>
+        <p:txBody>
+          <a:bodyPr/>
+          <a:lstStyle/>
+          <a:p>
+            <a:r>
+              <a:rPr lang="en-US" dirty="0"/>
+              <a:t>Hypothesis tests yield an estimate of some effect occurring by chance. </a:t>
+            </a:r>
+          </a:p>
+          <a:p>
+            <a:pPr lvl="1"/>
+            <a:r>
+              <a:rPr lang="en-US" dirty="0"/>
+              <a:t>P value is the probability of this thing happening randomly. </a:t>
+            </a:r>
+          </a:p>
+          <a:p>
+            <a:r>
+              <a:rPr lang="en-US" dirty="0"/>
+              <a:t>The cutoff we set for “good enough” can vary depending on scenario. </a:t>
+            </a:r>
+          </a:p>
+          <a:p>
+            <a:pPr lvl="1"/>
+            <a:r>
+              <a:rPr lang="en-US" dirty="0"/>
+              <a:t>.05, or 5% is a common cutoff. (This isn’t that unlikely…)</a:t>
+            </a:r>
+          </a:p>
+          <a:p>
+            <a:r>
+              <a:rPr lang="en-US" dirty="0"/>
+              <a:t>If the likelihood of randomness &lt; cutoff, the result is “statistically significant”. </a:t>
+            </a:r>
+          </a:p>
+          <a:p>
+            <a:pPr lvl="1"/>
+            <a:r>
+              <a:rPr lang="en-US" dirty="0"/>
+              <a:t>This is irrespective of the size of the effect, it could be small but significant. </a:t>
+            </a:r>
+          </a:p>
+          <a:p>
+            <a:pPr lvl="1"/>
+            <a:r>
+              <a:rPr lang="en-US" dirty="0"/>
+              <a:t>This doesn’t mean it is true, this is just one piece of evidence. </a:t>
+            </a:r>
+          </a:p>
+        </p:txBody>
+      </p:sp>
+    </p:spTree>
+    <p:extLst>
+      <p:ext uri="{BB962C8B-B14F-4D97-AF65-F5344CB8AC3E}">
+        <p14:creationId xmlns:p14="http://schemas.microsoft.com/office/powerpoint/2010/main" val="2787222080"/>
+      </p:ext>
+    </p:extLst>
+  </p:cSld>
+  <p:clrMapOvr>
+    <a:masterClrMapping/>
+  </p:clrMapOvr>
+</p:sld>
+</file>
+
+<file path=ppt/slides/slide27.xml><?xml version="1.0" encoding="utf-8"?>
+<p:sld xmlns:a="http://schemas.openxmlformats.org/drawingml/2006/main" xmlns:r="http://schemas.openxmlformats.org/officeDocument/2006/relationships" xmlns:p="http://schemas.openxmlformats.org/presentationml/2006/main">
+  <p:cSld>
+    <p:spTree>
+      <p:nvGrpSpPr>
+        <p:cNvPr id="1" name=""/>
+        <p:cNvGrpSpPr/>
+        <p:nvPr/>
+      </p:nvGrpSpPr>
+      <p:grpSpPr>
+        <a:xfrm>
+          <a:off x="0" y="0"/>
+          <a:ext cx="0" cy="0"/>
+          <a:chOff x="0" y="0"/>
+          <a:chExt cx="0" cy="0"/>
+        </a:xfrm>
+      </p:grpSpPr>
+      <p:sp>
+        <p:nvSpPr>
+          <p:cNvPr id="2" name="Title 1">
+            <a:extLst>
+              <a:ext uri="{FF2B5EF4-FFF2-40B4-BE49-F238E27FC236}">
                 <a16:creationId xmlns:a16="http://schemas.microsoft.com/office/drawing/2014/main" id="{A1E5E592-9385-36D1-F5FE-48A55C04A36E}"/>
               </a:ext>
             </a:extLst>
@@ -7233,7 +7117,7 @@
 </p:sld>
 </file>
 
-<file path=ppt/slides/slide27.xml><?xml version="1.0" encoding="utf-8"?>
+<file path=ppt/slides/slide28.xml><?xml version="1.0" encoding="utf-8"?>
 <p:sld xmlns:a="http://schemas.openxmlformats.org/drawingml/2006/main" xmlns:r="http://schemas.openxmlformats.org/officeDocument/2006/relationships" xmlns:p="http://schemas.openxmlformats.org/presentationml/2006/main" show="0">
   <p:cSld>
     <p:spTree>
@@ -7368,7 +7252,7 @@
 </p:sld>
 </file>
 
-<file path=ppt/slides/slide28.xml><?xml version="1.0" encoding="utf-8"?>
+<file path=ppt/slides/slide29.xml><?xml version="1.0" encoding="utf-8"?>
 <p:sld xmlns:a="http://schemas.openxmlformats.org/drawingml/2006/main" xmlns:r="http://schemas.openxmlformats.org/officeDocument/2006/relationships" xmlns:p="http://schemas.openxmlformats.org/presentationml/2006/main">
   <p:cSld>
     <p:spTree>
@@ -7505,7 +7389,154 @@
 </p:sld>
 </file>
 
-<file path=ppt/slides/slide29.xml><?xml version="1.0" encoding="utf-8"?>
+<file path=ppt/slides/slide3.xml><?xml version="1.0" encoding="utf-8"?>
+<p:sld xmlns:a="http://schemas.openxmlformats.org/drawingml/2006/main" xmlns:r="http://schemas.openxmlformats.org/officeDocument/2006/relationships" xmlns:p="http://schemas.openxmlformats.org/presentationml/2006/main" show="0">
+  <p:cSld>
+    <p:spTree>
+      <p:nvGrpSpPr>
+        <p:cNvPr id="1" name=""/>
+        <p:cNvGrpSpPr/>
+        <p:nvPr/>
+      </p:nvGrpSpPr>
+      <p:grpSpPr>
+        <a:xfrm>
+          <a:off x="0" y="0"/>
+          <a:ext cx="0" cy="0"/>
+          <a:chOff x="0" y="0"/>
+          <a:chExt cx="0" cy="0"/>
+        </a:xfrm>
+      </p:grpSpPr>
+      <p:sp>
+        <p:nvSpPr>
+          <p:cNvPr id="2" name="Title 1">
+            <a:extLst>
+              <a:ext uri="{FF2B5EF4-FFF2-40B4-BE49-F238E27FC236}">
+                <a16:creationId xmlns:a16="http://schemas.microsoft.com/office/drawing/2014/main" id="{E27CD1EA-1F2C-E1A3-5092-908F68CC6E9B}"/>
+              </a:ext>
+            </a:extLst>
+          </p:cNvPr>
+          <p:cNvSpPr>
+            <a:spLocks noGrp="1"/>
+          </p:cNvSpPr>
+          <p:nvPr>
+            <p:ph type="title"/>
+          </p:nvPr>
+        </p:nvSpPr>
+        <p:spPr/>
+        <p:txBody>
+          <a:bodyPr/>
+          <a:lstStyle/>
+          <a:p>
+            <a:r>
+              <a:rPr lang="en-US" dirty="0"/>
+              <a:t>Common usages for Hypothesis Tests</a:t>
+            </a:r>
+          </a:p>
+        </p:txBody>
+      </p:sp>
+      <p:sp>
+        <p:nvSpPr>
+          <p:cNvPr id="3" name="Content Placeholder 2">
+            <a:extLst>
+              <a:ext uri="{FF2B5EF4-FFF2-40B4-BE49-F238E27FC236}">
+                <a16:creationId xmlns:a16="http://schemas.microsoft.com/office/drawing/2014/main" id="{E6F1504D-31D2-9D31-C510-5A0B0FFE1DA0}"/>
+              </a:ext>
+            </a:extLst>
+          </p:cNvPr>
+          <p:cNvSpPr>
+            <a:spLocks noGrp="1"/>
+          </p:cNvSpPr>
+          <p:nvPr>
+            <p:ph idx="1"/>
+          </p:nvPr>
+        </p:nvSpPr>
+        <p:spPr>
+          <a:xfrm>
+            <a:off x="1451579" y="1853754"/>
+            <a:ext cx="9603275" cy="4199727"/>
+          </a:xfrm>
+        </p:spPr>
+        <p:txBody>
+          <a:bodyPr/>
+          <a:lstStyle/>
+          <a:p>
+            <a:r>
+              <a:rPr lang="en-US" dirty="0"/>
+              <a:t>Is an improvement effect seen between two groups real or due to randomness. </a:t>
+            </a:r>
+          </a:p>
+          <a:p>
+            <a:pPr lvl="1"/>
+            <a:r>
+              <a:rPr lang="en-US" dirty="0"/>
+              <a:t>E.g. treatment group lives longer in a drug trial, is that due to drug? </a:t>
+            </a:r>
+          </a:p>
+          <a:p>
+            <a:r>
+              <a:rPr lang="en-US" dirty="0"/>
+              <a:t>Do two samples differ in reality, or is it just due to sampling variation. </a:t>
+            </a:r>
+          </a:p>
+          <a:p>
+            <a:pPr lvl="1"/>
+            <a:r>
+              <a:rPr lang="en-US" dirty="0"/>
+              <a:t>Checking BMI between 2 samples – are they different sizes, or just random? </a:t>
+            </a:r>
+          </a:p>
+          <a:p>
+            <a:r>
+              <a:rPr lang="en-US" dirty="0"/>
+              <a:t>Probabilistic outcomes. </a:t>
+            </a:r>
+          </a:p>
+          <a:p>
+            <a:pPr lvl="1"/>
+            <a:r>
+              <a:rPr lang="en-US" dirty="0"/>
+              <a:t>We flipped a coin 100 times and got 60 heads, is that possible with a fair coin? </a:t>
+            </a:r>
+          </a:p>
+          <a:p>
+            <a:r>
+              <a:rPr lang="en-US" dirty="0"/>
+              <a:t>The test gives us an idea of how likely it is that these things happen random. </a:t>
+            </a:r>
+          </a:p>
+          <a:p>
+            <a:pPr lvl="1"/>
+            <a:r>
+              <a:rPr lang="en-US" dirty="0"/>
+              <a:t>If it is very unlikely, we can call our result “statistically significant”. </a:t>
+            </a:r>
+          </a:p>
+          <a:p>
+            <a:pPr lvl="1"/>
+            <a:r>
+              <a:rPr lang="en-US" dirty="0"/>
+              <a:t>E.g. Life expectancy increases by 7.8% with treatment, and that result is trustworthy. </a:t>
+            </a:r>
+          </a:p>
+          <a:p>
+            <a:endParaRPr lang="en-US" dirty="0"/>
+          </a:p>
+        </p:txBody>
+      </p:sp>
+    </p:spTree>
+    <p:extLst>
+      <p:ext uri="{BB962C8B-B14F-4D97-AF65-F5344CB8AC3E}">
+        <p14:creationId xmlns:p14="http://schemas.microsoft.com/office/powerpoint/2010/main" val="3563884863"/>
+      </p:ext>
+    </p:extLst>
+  </p:cSld>
+  <p:clrMapOvr>
+    <a:masterClrMapping/>
+  </p:clrMapOvr>
+</p:sld>
+</file>
+
+<file path=ppt/slides/slide30.xml><?xml version="1.0" encoding="utf-8"?>
 <p:sld xmlns:a="http://schemas.openxmlformats.org/drawingml/2006/main" xmlns:r="http://schemas.openxmlformats.org/officeDocument/2006/relationships" xmlns:p="http://schemas.openxmlformats.org/presentationml/2006/main">
   <p:cSld>
     <p:spTree>
@@ -7653,93 +7684,7 @@
 </p:sld>
 </file>
 
-<file path=ppt/slides/slide3.xml><?xml version="1.0" encoding="utf-8"?>
-<p:sld xmlns:a="http://schemas.openxmlformats.org/drawingml/2006/main" xmlns:r="http://schemas.openxmlformats.org/officeDocument/2006/relationships" xmlns:p="http://schemas.openxmlformats.org/presentationml/2006/main">
-  <p:cSld>
-    <p:spTree>
-      <p:nvGrpSpPr>
-        <p:cNvPr id="1" name=""/>
-        <p:cNvGrpSpPr/>
-        <p:nvPr/>
-      </p:nvGrpSpPr>
-      <p:grpSpPr>
-        <a:xfrm>
-          <a:off x="0" y="0"/>
-          <a:ext cx="0" cy="0"/>
-          <a:chOff x="0" y="0"/>
-          <a:chExt cx="0" cy="0"/>
-        </a:xfrm>
-      </p:grpSpPr>
-      <p:sp>
-        <p:nvSpPr>
-          <p:cNvPr id="2" name="Title 1">
-            <a:extLst>
-              <a:ext uri="{FF2B5EF4-FFF2-40B4-BE49-F238E27FC236}">
-                <a16:creationId xmlns:a16="http://schemas.microsoft.com/office/drawing/2014/main" id="{3FFFB92D-D5B7-5C46-859A-480D5C8782A5}"/>
-              </a:ext>
-            </a:extLst>
-          </p:cNvPr>
-          <p:cNvSpPr>
-            <a:spLocks noGrp="1"/>
-          </p:cNvSpPr>
-          <p:nvPr>
-            <p:ph type="ctrTitle"/>
-          </p:nvPr>
-        </p:nvSpPr>
-        <p:spPr/>
-        <p:txBody>
-          <a:bodyPr/>
-          <a:lstStyle/>
-          <a:p>
-            <a:r>
-              <a:rPr lang="en-US" dirty="0"/>
-              <a:t>Hypothesis Testing</a:t>
-            </a:r>
-          </a:p>
-        </p:txBody>
-      </p:sp>
-      <p:sp>
-        <p:nvSpPr>
-          <p:cNvPr id="3" name="Subtitle 2">
-            <a:extLst>
-              <a:ext uri="{FF2B5EF4-FFF2-40B4-BE49-F238E27FC236}">
-                <a16:creationId xmlns:a16="http://schemas.microsoft.com/office/drawing/2014/main" id="{584CDFCE-A045-3745-9428-AAC7367486DC}"/>
-              </a:ext>
-            </a:extLst>
-          </p:cNvPr>
-          <p:cNvSpPr>
-            <a:spLocks noGrp="1"/>
-          </p:cNvSpPr>
-          <p:nvPr>
-            <p:ph type="subTitle" idx="1"/>
-          </p:nvPr>
-        </p:nvSpPr>
-        <p:spPr/>
-        <p:txBody>
-          <a:bodyPr/>
-          <a:lstStyle/>
-          <a:p>
-            <a:r>
-              <a:rPr lang="en-US" dirty="0"/>
-              <a:t>Does it Matter?</a:t>
-            </a:r>
-          </a:p>
-        </p:txBody>
-      </p:sp>
-    </p:spTree>
-    <p:extLst>
-      <p:ext uri="{BB962C8B-B14F-4D97-AF65-F5344CB8AC3E}">
-        <p14:creationId xmlns:p14="http://schemas.microsoft.com/office/powerpoint/2010/main" val="2997218721"/>
-      </p:ext>
-    </p:extLst>
-  </p:cSld>
-  <p:clrMapOvr>
-    <a:masterClrMapping/>
-  </p:clrMapOvr>
-</p:sld>
-</file>
-
-<file path=ppt/slides/slide30.xml><?xml version="1.0" encoding="utf-8"?>
+<file path=ppt/slides/slide31.xml><?xml version="1.0" encoding="utf-8"?>
 <p:sld xmlns:a="http://schemas.openxmlformats.org/drawingml/2006/main" xmlns:r="http://schemas.openxmlformats.org/officeDocument/2006/relationships" xmlns:p="http://schemas.openxmlformats.org/presentationml/2006/main" show="0">
   <p:cSld>
     <p:bg>
@@ -7924,7 +7869,7 @@
 </p:sld>
 </file>
 
-<file path=ppt/slides/slide31.xml><?xml version="1.0" encoding="utf-8"?>
+<file path=ppt/slides/slide32.xml><?xml version="1.0" encoding="utf-8"?>
 <p:sld xmlns:a="http://schemas.openxmlformats.org/drawingml/2006/main" xmlns:r="http://schemas.openxmlformats.org/officeDocument/2006/relationships" xmlns:p="http://schemas.openxmlformats.org/presentationml/2006/main">
   <p:cSld>
     <p:spTree>
@@ -8058,7 +8003,7 @@
 </p:sld>
 </file>
 
-<file path=ppt/slides/slide32.xml><?xml version="1.0" encoding="utf-8"?>
+<file path=ppt/slides/slide33.xml><?xml version="1.0" encoding="utf-8"?>
 <p:sld xmlns:a="http://schemas.openxmlformats.org/drawingml/2006/main" xmlns:r="http://schemas.openxmlformats.org/officeDocument/2006/relationships" xmlns:p="http://schemas.openxmlformats.org/presentationml/2006/main">
   <p:cSld>
     <p:spTree>
@@ -8185,7 +8130,7 @@
 </p:sld>
 </file>
 
-<file path=ppt/slides/slide33.xml><?xml version="1.0" encoding="utf-8"?>
+<file path=ppt/slides/slide34.xml><?xml version="1.0" encoding="utf-8"?>
 <p:sld xmlns:a="http://schemas.openxmlformats.org/drawingml/2006/main" xmlns:r="http://schemas.openxmlformats.org/officeDocument/2006/relationships" xmlns:p="http://schemas.openxmlformats.org/presentationml/2006/main" show="0">
   <p:cSld>
     <p:spTree>
@@ -8312,143 +8257,6 @@
 </p:sld>
 </file>
 
-<file path=ppt/slides/slide34.xml><?xml version="1.0" encoding="utf-8"?>
-<p:sld xmlns:a="http://schemas.openxmlformats.org/drawingml/2006/main" xmlns:r="http://schemas.openxmlformats.org/officeDocument/2006/relationships" xmlns:p="http://schemas.openxmlformats.org/presentationml/2006/main">
-  <p:cSld>
-    <p:spTree>
-      <p:nvGrpSpPr>
-        <p:cNvPr id="1" name=""/>
-        <p:cNvGrpSpPr/>
-        <p:nvPr/>
-      </p:nvGrpSpPr>
-      <p:grpSpPr>
-        <a:xfrm>
-          <a:off x="0" y="0"/>
-          <a:ext cx="0" cy="0"/>
-          <a:chOff x="0" y="0"/>
-          <a:chExt cx="0" cy="0"/>
-        </a:xfrm>
-      </p:grpSpPr>
-      <p:sp>
-        <p:nvSpPr>
-          <p:cNvPr id="2" name="Title 1">
-            <a:extLst>
-              <a:ext uri="{FF2B5EF4-FFF2-40B4-BE49-F238E27FC236}">
-                <a16:creationId xmlns:a16="http://schemas.microsoft.com/office/drawing/2014/main" id="{A80E8ED4-C6ED-754F-9599-EBCA2583D433}"/>
-              </a:ext>
-            </a:extLst>
-          </p:cNvPr>
-          <p:cNvSpPr>
-            <a:spLocks noGrp="1"/>
-          </p:cNvSpPr>
-          <p:nvPr>
-            <p:ph type="title"/>
-          </p:nvPr>
-        </p:nvSpPr>
-        <p:spPr/>
-        <p:txBody>
-          <a:bodyPr/>
-          <a:lstStyle/>
-          <a:p>
-            <a:r>
-              <a:rPr lang="en-US" dirty="0"/>
-              <a:t>T-Tests</a:t>
-            </a:r>
-          </a:p>
-        </p:txBody>
-      </p:sp>
-      <p:sp>
-        <p:nvSpPr>
-          <p:cNvPr id="3" name="Content Placeholder 2">
-            <a:extLst>
-              <a:ext uri="{FF2B5EF4-FFF2-40B4-BE49-F238E27FC236}">
-                <a16:creationId xmlns:a16="http://schemas.microsoft.com/office/drawing/2014/main" id="{2C609283-AF97-CC4E-8FA2-931D43BA5317}"/>
-              </a:ext>
-            </a:extLst>
-          </p:cNvPr>
-          <p:cNvSpPr>
-            <a:spLocks noGrp="1"/>
-          </p:cNvSpPr>
-          <p:nvPr>
-            <p:ph idx="1"/>
-          </p:nvPr>
-        </p:nvSpPr>
-        <p:spPr>
-          <a:xfrm>
-            <a:off x="746235" y="1853754"/>
-            <a:ext cx="10699532" cy="4199727"/>
-          </a:xfrm>
-        </p:spPr>
-        <p:txBody>
-          <a:bodyPr>
-            <a:normAutofit/>
-          </a:bodyPr>
-          <a:lstStyle/>
-          <a:p>
-            <a:r>
-              <a:rPr lang="en-US" dirty="0"/>
-              <a:t>T-tests allow us to make an estimate of, “is this difference likely real, or could it be due to chance?”</a:t>
-            </a:r>
-          </a:p>
-          <a:p>
-            <a:r>
-              <a:rPr lang="en-US" dirty="0"/>
-              <a:t>Extremely common in basic stats and scientific papers/reports. </a:t>
-            </a:r>
-          </a:p>
-          <a:p>
-            <a:r>
-              <a:rPr lang="en-US" dirty="0"/>
-              <a:t>Weakness – subject to manipulation, becoming less relied on over time. </a:t>
-            </a:r>
-          </a:p>
-          <a:p>
-            <a:r>
-              <a:rPr lang="en-US" dirty="0"/>
-              <a:t>One sample – tests mean against some value.</a:t>
-            </a:r>
-          </a:p>
-          <a:p>
-            <a:r>
-              <a:rPr lang="en-US" dirty="0"/>
-              <a:t>Two sample – tests two means against each other. </a:t>
-            </a:r>
-          </a:p>
-          <a:p>
-            <a:r>
-              <a:rPr lang="en-US" dirty="0"/>
-              <a:t>Sidedness:</a:t>
-            </a:r>
-          </a:p>
-          <a:p>
-            <a:pPr lvl="1"/>
-            <a:r>
-              <a:rPr lang="en-US" dirty="0"/>
-              <a:t>One side tests if lesser/greater.</a:t>
-            </a:r>
-          </a:p>
-          <a:p>
-            <a:pPr lvl="1"/>
-            <a:r>
-              <a:rPr lang="en-US" dirty="0"/>
-              <a:t>Two-sided tests if different at all. </a:t>
-            </a:r>
-          </a:p>
-        </p:txBody>
-      </p:sp>
-    </p:spTree>
-    <p:extLst>
-      <p:ext uri="{BB962C8B-B14F-4D97-AF65-F5344CB8AC3E}">
-        <p14:creationId xmlns:p14="http://schemas.microsoft.com/office/powerpoint/2010/main" val="201004784"/>
-      </p:ext>
-    </p:extLst>
-  </p:cSld>
-  <p:clrMapOvr>
-    <a:masterClrMapping/>
-  </p:clrMapOvr>
-</p:sld>
-</file>
-
 <file path=ppt/slides/slide35.xml><?xml version="1.0" encoding="utf-8"?>
 <p:sld xmlns:a="http://schemas.openxmlformats.org/drawingml/2006/main" xmlns:r="http://schemas.openxmlformats.org/officeDocument/2006/relationships" xmlns:p="http://schemas.openxmlformats.org/presentationml/2006/main">
   <p:cSld>
@@ -8468,6 +8276,143 @@
       </p:grpSpPr>
       <p:sp>
         <p:nvSpPr>
+          <p:cNvPr id="2" name="Title 1">
+            <a:extLst>
+              <a:ext uri="{FF2B5EF4-FFF2-40B4-BE49-F238E27FC236}">
+                <a16:creationId xmlns:a16="http://schemas.microsoft.com/office/drawing/2014/main" id="{A80E8ED4-C6ED-754F-9599-EBCA2583D433}"/>
+              </a:ext>
+            </a:extLst>
+          </p:cNvPr>
+          <p:cNvSpPr>
+            <a:spLocks noGrp="1"/>
+          </p:cNvSpPr>
+          <p:nvPr>
+            <p:ph type="title"/>
+          </p:nvPr>
+        </p:nvSpPr>
+        <p:spPr/>
+        <p:txBody>
+          <a:bodyPr/>
+          <a:lstStyle/>
+          <a:p>
+            <a:r>
+              <a:rPr lang="en-US" dirty="0"/>
+              <a:t>T-Tests</a:t>
+            </a:r>
+          </a:p>
+        </p:txBody>
+      </p:sp>
+      <p:sp>
+        <p:nvSpPr>
+          <p:cNvPr id="3" name="Content Placeholder 2">
+            <a:extLst>
+              <a:ext uri="{FF2B5EF4-FFF2-40B4-BE49-F238E27FC236}">
+                <a16:creationId xmlns:a16="http://schemas.microsoft.com/office/drawing/2014/main" id="{2C609283-AF97-CC4E-8FA2-931D43BA5317}"/>
+              </a:ext>
+            </a:extLst>
+          </p:cNvPr>
+          <p:cNvSpPr>
+            <a:spLocks noGrp="1"/>
+          </p:cNvSpPr>
+          <p:nvPr>
+            <p:ph idx="1"/>
+          </p:nvPr>
+        </p:nvSpPr>
+        <p:spPr>
+          <a:xfrm>
+            <a:off x="746235" y="1853754"/>
+            <a:ext cx="10699532" cy="4199727"/>
+          </a:xfrm>
+        </p:spPr>
+        <p:txBody>
+          <a:bodyPr>
+            <a:normAutofit/>
+          </a:bodyPr>
+          <a:lstStyle/>
+          <a:p>
+            <a:r>
+              <a:rPr lang="en-US" dirty="0"/>
+              <a:t>T-tests allow us to make an estimate of, “is this difference likely real, or could it be due to chance?”</a:t>
+            </a:r>
+          </a:p>
+          <a:p>
+            <a:r>
+              <a:rPr lang="en-US" dirty="0"/>
+              <a:t>Extremely common in basic stats and scientific papers/reports. </a:t>
+            </a:r>
+          </a:p>
+          <a:p>
+            <a:r>
+              <a:rPr lang="en-US" dirty="0"/>
+              <a:t>Weakness – subject to manipulation, becoming less relied on over time. </a:t>
+            </a:r>
+          </a:p>
+          <a:p>
+            <a:r>
+              <a:rPr lang="en-US" dirty="0"/>
+              <a:t>One sample – tests mean against some value.</a:t>
+            </a:r>
+          </a:p>
+          <a:p>
+            <a:r>
+              <a:rPr lang="en-US" dirty="0"/>
+              <a:t>Two sample – tests two means against each other. </a:t>
+            </a:r>
+          </a:p>
+          <a:p>
+            <a:r>
+              <a:rPr lang="en-US" dirty="0"/>
+              <a:t>Sidedness:</a:t>
+            </a:r>
+          </a:p>
+          <a:p>
+            <a:pPr lvl="1"/>
+            <a:r>
+              <a:rPr lang="en-US" dirty="0"/>
+              <a:t>One side tests if lesser/greater.</a:t>
+            </a:r>
+          </a:p>
+          <a:p>
+            <a:pPr lvl="1"/>
+            <a:r>
+              <a:rPr lang="en-US" dirty="0"/>
+              <a:t>Two-sided tests if different at all. </a:t>
+            </a:r>
+          </a:p>
+        </p:txBody>
+      </p:sp>
+    </p:spTree>
+    <p:extLst>
+      <p:ext uri="{BB962C8B-B14F-4D97-AF65-F5344CB8AC3E}">
+        <p14:creationId xmlns:p14="http://schemas.microsoft.com/office/powerpoint/2010/main" val="201004784"/>
+      </p:ext>
+    </p:extLst>
+  </p:cSld>
+  <p:clrMapOvr>
+    <a:masterClrMapping/>
+  </p:clrMapOvr>
+</p:sld>
+</file>
+
+<file path=ppt/slides/slide36.xml><?xml version="1.0" encoding="utf-8"?>
+<p:sld xmlns:a="http://schemas.openxmlformats.org/drawingml/2006/main" xmlns:r="http://schemas.openxmlformats.org/officeDocument/2006/relationships" xmlns:p="http://schemas.openxmlformats.org/presentationml/2006/main">
+  <p:cSld>
+    <p:spTree>
+      <p:nvGrpSpPr>
+        <p:cNvPr id="1" name=""/>
+        <p:cNvGrpSpPr/>
+        <p:nvPr/>
+      </p:nvGrpSpPr>
+      <p:grpSpPr>
+        <a:xfrm>
+          <a:off x="0" y="0"/>
+          <a:ext cx="0" cy="0"/>
+          <a:chOff x="0" y="0"/>
+          <a:chExt cx="0" cy="0"/>
+        </a:xfrm>
+      </p:grpSpPr>
+      <p:sp>
+        <p:nvSpPr>
           <p:cNvPr id="4" name="Title 3">
             <a:extLst>
               <a:ext uri="{FF2B5EF4-FFF2-40B4-BE49-F238E27FC236}">
@@ -8482,12 +8427,20 @@
             <p:ph type="title"/>
           </p:nvPr>
         </p:nvSpPr>
-        <p:spPr/>
+        <p:spPr>
+          <a:xfrm>
+            <a:off x="1006030" y="3536846"/>
+            <a:ext cx="1467237" cy="1059305"/>
+          </a:xfrm>
+        </p:spPr>
         <p:txBody>
           <a:bodyPr/>
           <a:lstStyle/>
           <a:p>
-            <a:endParaRPr lang="en-US"/>
+            <a:r>
+              <a:rPr lang="en-US" dirty="0"/>
+              <a:t>Sides</a:t>
+            </a:r>
           </a:p>
         </p:txBody>
       </p:sp>
@@ -8507,12 +8460,26 @@
             <p:ph sz="half" idx="1"/>
           </p:nvPr>
         </p:nvSpPr>
-        <p:spPr/>
+        <p:spPr>
+          <a:xfrm>
+            <a:off x="77002" y="3955982"/>
+            <a:ext cx="4598738" cy="2021305"/>
+          </a:xfrm>
+        </p:spPr>
         <p:txBody>
           <a:bodyPr/>
           <a:lstStyle/>
           <a:p>
-            <a:endParaRPr lang="en-US"/>
+            <a:r>
+              <a:rPr lang="en-US" dirty="0"/>
+              <a:t>Check the examples in 9.3 and 9.4, they show this in the simulation. </a:t>
+            </a:r>
+          </a:p>
+          <a:p>
+            <a:r>
+              <a:rPr lang="en-US" dirty="0"/>
+              <a:t>We need a different test depending on what difference we need. </a:t>
+            </a:r>
           </a:p>
         </p:txBody>
       </p:sp>
@@ -8648,7 +8615,7 @@
 </p:sld>
 </file>
 
-<file path=ppt/slides/slide36.xml><?xml version="1.0" encoding="utf-8"?>
+<file path=ppt/slides/slide37.xml><?xml version="1.0" encoding="utf-8"?>
 <p:sld xmlns:a="http://schemas.openxmlformats.org/drawingml/2006/main" xmlns:r="http://schemas.openxmlformats.org/officeDocument/2006/relationships" xmlns:p="http://schemas.openxmlformats.org/presentationml/2006/main">
   <p:cSld>
     <p:spTree>
@@ -8740,6 +8707,12 @@
             </a:r>
           </a:p>
           <a:p>
+            <a:r>
+              <a:rPr lang="en-US" dirty="0"/>
+              <a:t>Test has more assumptions, so if our data follows that, it is a good option. </a:t>
+            </a:r>
+          </a:p>
+          <a:p>
             <a:endParaRPr lang="en-US" dirty="0"/>
           </a:p>
           <a:p>
@@ -8763,7 +8736,7 @@
 </p:sld>
 </file>
 
-<file path=ppt/slides/slide37.xml><?xml version="1.0" encoding="utf-8"?>
+<file path=ppt/slides/slide38.xml><?xml version="1.0" encoding="utf-8"?>
 <p:sld xmlns:a="http://schemas.openxmlformats.org/drawingml/2006/main" xmlns:r="http://schemas.openxmlformats.org/officeDocument/2006/relationships" xmlns:p="http://schemas.openxmlformats.org/presentationml/2006/main">
   <p:cSld>
     <p:bg>
@@ -9164,7 +9137,7 @@
 </p:sld>
 </file>
 
-<file path=ppt/slides/slide38.xml><?xml version="1.0" encoding="utf-8"?>
+<file path=ppt/slides/slide39.xml><?xml version="1.0" encoding="utf-8"?>
 <p:sld xmlns:a="http://schemas.openxmlformats.org/drawingml/2006/main" xmlns:r="http://schemas.openxmlformats.org/officeDocument/2006/relationships" xmlns:p="http://schemas.openxmlformats.org/presentationml/2006/main">
   <p:cSld>
     <p:spTree>
@@ -9291,7 +9264,160 @@
 </p:sld>
 </file>
 
-<file path=ppt/slides/slide39.xml><?xml version="1.0" encoding="utf-8"?>
+<file path=ppt/slides/slide4.xml><?xml version="1.0" encoding="utf-8"?>
+<p:sld xmlns:a="http://schemas.openxmlformats.org/drawingml/2006/main" xmlns:r="http://schemas.openxmlformats.org/officeDocument/2006/relationships" xmlns:p="http://schemas.openxmlformats.org/presentationml/2006/main">
+  <p:cSld>
+    <p:spTree>
+      <p:nvGrpSpPr>
+        <p:cNvPr id="1" name=""/>
+        <p:cNvGrpSpPr/>
+        <p:nvPr/>
+      </p:nvGrpSpPr>
+      <p:grpSpPr>
+        <a:xfrm>
+          <a:off x="0" y="0"/>
+          <a:ext cx="0" cy="0"/>
+          <a:chOff x="0" y="0"/>
+          <a:chExt cx="0" cy="0"/>
+        </a:xfrm>
+      </p:grpSpPr>
+      <p:sp>
+        <p:nvSpPr>
+          <p:cNvPr id="2" name="Title 1">
+            <a:extLst>
+              <a:ext uri="{FF2B5EF4-FFF2-40B4-BE49-F238E27FC236}">
+                <a16:creationId xmlns:a16="http://schemas.microsoft.com/office/drawing/2014/main" id="{A1A095F2-9DB1-52DE-7C5B-4CE15F40D8BC}"/>
+              </a:ext>
+            </a:extLst>
+          </p:cNvPr>
+          <p:cNvSpPr>
+            <a:spLocks noGrp="1"/>
+          </p:cNvSpPr>
+          <p:nvPr>
+            <p:ph type="title"/>
+          </p:nvPr>
+        </p:nvSpPr>
+        <p:spPr/>
+        <p:txBody>
+          <a:bodyPr/>
+          <a:lstStyle/>
+          <a:p>
+            <a:r>
+              <a:rPr lang="en-US" dirty="0"/>
+              <a:t>Housekeeping</a:t>
+            </a:r>
+          </a:p>
+        </p:txBody>
+      </p:sp>
+      <p:sp>
+        <p:nvSpPr>
+          <p:cNvPr id="3" name="Content Placeholder 2">
+            <a:extLst>
+              <a:ext uri="{FF2B5EF4-FFF2-40B4-BE49-F238E27FC236}">
+                <a16:creationId xmlns:a16="http://schemas.microsoft.com/office/drawing/2014/main" id="{6037197C-335A-ACAD-2CD4-FD1C4AA65621}"/>
+              </a:ext>
+            </a:extLst>
+          </p:cNvPr>
+          <p:cNvSpPr>
+            <a:spLocks noGrp="1"/>
+          </p:cNvSpPr>
+          <p:nvPr>
+            <p:ph idx="1"/>
+          </p:nvPr>
+        </p:nvSpPr>
+        <p:spPr>
+          <a:xfrm>
+            <a:off x="1451579" y="1853754"/>
+            <a:ext cx="9603275" cy="4199727"/>
+          </a:xfrm>
+        </p:spPr>
+        <p:txBody>
+          <a:bodyPr>
+            <a:normAutofit lnSpcReduction="10000"/>
+          </a:bodyPr>
+          <a:lstStyle/>
+          <a:p>
+            <a:r>
+              <a:rPr lang="en-US" dirty="0"/>
+              <a:t>Disclaimer – stuff on old housekeeping slides doesn’t apply. </a:t>
+            </a:r>
+          </a:p>
+          <a:p>
+            <a:pPr lvl="1"/>
+            <a:r>
+              <a:rPr lang="en-US" dirty="0"/>
+              <a:t>Sometimes I save the new updates before updating. Pleases ignore the ones I don’t show. </a:t>
+            </a:r>
+          </a:p>
+          <a:p>
+            <a:r>
+              <a:rPr lang="en-US" dirty="0"/>
+              <a:t>Less stuff for you!</a:t>
+            </a:r>
+          </a:p>
+          <a:p>
+            <a:pPr lvl="1"/>
+            <a:r>
+              <a:rPr lang="en-US" dirty="0"/>
+              <a:t>We’ll kill a quiz, not an assignment, that’s more sensible.</a:t>
+            </a:r>
+          </a:p>
+          <a:p>
+            <a:pPr lvl="1"/>
+            <a:r>
+              <a:rPr lang="en-US" dirty="0"/>
+              <a:t>I need the day more than anything, we lose several to holidays.  </a:t>
+            </a:r>
+          </a:p>
+          <a:p>
+            <a:pPr lvl="1"/>
+            <a:r>
+              <a:rPr lang="en-US" dirty="0"/>
+              <a:t>I believe the quiz marks are pretty good, so that helps you all. Tell me if you have an issue. </a:t>
+            </a:r>
+          </a:p>
+          <a:p>
+            <a:r>
+              <a:rPr lang="en-US" dirty="0"/>
+              <a:t>Moved stuff for you?</a:t>
+            </a:r>
+          </a:p>
+          <a:p>
+            <a:pPr lvl="1"/>
+            <a:r>
+              <a:rPr lang="en-US" dirty="0"/>
+              <a:t>Is it ok if the test is moved from Friday 31 to Monday 3? </a:t>
+            </a:r>
+          </a:p>
+          <a:p>
+            <a:r>
+              <a:rPr lang="en-US" dirty="0"/>
+              <a:t>Other stuff for you, more hypothesis test simulation stuff. </a:t>
+            </a:r>
+          </a:p>
+          <a:p>
+            <a:pPr lvl="1"/>
+            <a:r>
+              <a:rPr lang="en-US" dirty="0"/>
+              <a:t>Hypothesis test review, specific tests, usage, p-hacking, practice, practice, practice. </a:t>
+            </a:r>
+          </a:p>
+        </p:txBody>
+      </p:sp>
+    </p:spTree>
+    <p:extLst>
+      <p:ext uri="{BB962C8B-B14F-4D97-AF65-F5344CB8AC3E}">
+        <p14:creationId xmlns:p14="http://schemas.microsoft.com/office/powerpoint/2010/main" val="3845626842"/>
+      </p:ext>
+    </p:extLst>
+  </p:cSld>
+  <p:clrMapOvr>
+    <a:masterClrMapping/>
+  </p:clrMapOvr>
+</p:sld>
+</file>
+
+<file path=ppt/slides/slide40.xml><?xml version="1.0" encoding="utf-8"?>
 <p:sld xmlns:a="http://schemas.openxmlformats.org/drawingml/2006/main" xmlns:r="http://schemas.openxmlformats.org/officeDocument/2006/relationships" xmlns:p="http://schemas.openxmlformats.org/presentationml/2006/main" show="0">
   <p:cSld>
     <p:spTree>
@@ -9468,259 +9594,6 @@
 </p:sld>
 </file>
 
-<file path=ppt/slides/slide4.xml><?xml version="1.0" encoding="utf-8"?>
-<p:sld xmlns:a="http://schemas.openxmlformats.org/drawingml/2006/main" xmlns:r="http://schemas.openxmlformats.org/officeDocument/2006/relationships" xmlns:p="http://schemas.openxmlformats.org/presentationml/2006/main" show="0">
-  <p:cSld>
-    <p:spTree>
-      <p:nvGrpSpPr>
-        <p:cNvPr id="1" name=""/>
-        <p:cNvGrpSpPr/>
-        <p:nvPr/>
-      </p:nvGrpSpPr>
-      <p:grpSpPr>
-        <a:xfrm>
-          <a:off x="0" y="0"/>
-          <a:ext cx="0" cy="0"/>
-          <a:chOff x="0" y="0"/>
-          <a:chExt cx="0" cy="0"/>
-        </a:xfrm>
-      </p:grpSpPr>
-      <p:sp>
-        <p:nvSpPr>
-          <p:cNvPr id="2" name="Title 1">
-            <a:extLst>
-              <a:ext uri="{FF2B5EF4-FFF2-40B4-BE49-F238E27FC236}">
-                <a16:creationId xmlns:a16="http://schemas.microsoft.com/office/drawing/2014/main" id="{3D63269E-AAC3-61F0-A2DB-867CAE780FF4}"/>
-              </a:ext>
-            </a:extLst>
-          </p:cNvPr>
-          <p:cNvSpPr>
-            <a:spLocks noGrp="1"/>
-          </p:cNvSpPr>
-          <p:nvPr>
-            <p:ph type="title"/>
-          </p:nvPr>
-        </p:nvSpPr>
-        <p:spPr/>
-        <p:txBody>
-          <a:bodyPr/>
-          <a:lstStyle/>
-          <a:p>
-            <a:r>
-              <a:rPr lang="en-US" dirty="0"/>
-              <a:t>Hypothesis Test</a:t>
-            </a:r>
-          </a:p>
-        </p:txBody>
-      </p:sp>
-      <p:sp>
-        <p:nvSpPr>
-          <p:cNvPr id="3" name="Content Placeholder 2">
-            <a:extLst>
-              <a:ext uri="{FF2B5EF4-FFF2-40B4-BE49-F238E27FC236}">
-                <a16:creationId xmlns:a16="http://schemas.microsoft.com/office/drawing/2014/main" id="{A78F8A65-87BC-7150-5EF4-ED6622A95FE8}"/>
-              </a:ext>
-            </a:extLst>
-          </p:cNvPr>
-          <p:cNvSpPr>
-            <a:spLocks noGrp="1"/>
-          </p:cNvSpPr>
-          <p:nvPr>
-            <p:ph idx="1"/>
-          </p:nvPr>
-        </p:nvSpPr>
-        <p:spPr/>
-        <p:txBody>
-          <a:bodyPr/>
-          <a:lstStyle/>
-          <a:p>
-            <a:r>
-              <a:rPr lang="en-US" dirty="0"/>
-              <a:t>Hypothesis testing is a reasonably large topic. </a:t>
-            </a:r>
-          </a:p>
-        </p:txBody>
-      </p:sp>
-    </p:spTree>
-    <p:extLst>
-      <p:ext uri="{BB962C8B-B14F-4D97-AF65-F5344CB8AC3E}">
-        <p14:creationId xmlns:p14="http://schemas.microsoft.com/office/powerpoint/2010/main" val="2539723738"/>
-      </p:ext>
-    </p:extLst>
-  </p:cSld>
-  <p:clrMapOvr>
-    <a:masterClrMapping/>
-  </p:clrMapOvr>
-</p:sld>
-</file>
-
-<file path=ppt/slides/slide40.xml><?xml version="1.0" encoding="utf-8"?>
-<p:sld xmlns:a="http://schemas.openxmlformats.org/drawingml/2006/main" xmlns:r="http://schemas.openxmlformats.org/officeDocument/2006/relationships" xmlns:p="http://schemas.openxmlformats.org/presentationml/2006/main">
-  <p:cSld>
-    <p:spTree>
-      <p:nvGrpSpPr>
-        <p:cNvPr id="1" name=""/>
-        <p:cNvGrpSpPr/>
-        <p:nvPr/>
-      </p:nvGrpSpPr>
-      <p:grpSpPr>
-        <a:xfrm>
-          <a:off x="0" y="0"/>
-          <a:ext cx="0" cy="0"/>
-          <a:chOff x="0" y="0"/>
-          <a:chExt cx="0" cy="0"/>
-        </a:xfrm>
-      </p:grpSpPr>
-      <p:sp>
-        <p:nvSpPr>
-          <p:cNvPr id="2" name="Title 1">
-            <a:extLst>
-              <a:ext uri="{FF2B5EF4-FFF2-40B4-BE49-F238E27FC236}">
-                <a16:creationId xmlns:a16="http://schemas.microsoft.com/office/drawing/2014/main" id="{5F240032-86EE-D042-A41F-F73A666B9CB7}"/>
-              </a:ext>
-            </a:extLst>
-          </p:cNvPr>
-          <p:cNvSpPr>
-            <a:spLocks noGrp="1"/>
-          </p:cNvSpPr>
-          <p:nvPr>
-            <p:ph type="title"/>
-          </p:nvPr>
-        </p:nvSpPr>
-        <p:spPr/>
-        <p:txBody>
-          <a:bodyPr/>
-          <a:lstStyle/>
-          <a:p>
-            <a:r>
-              <a:rPr lang="en-US" dirty="0"/>
-              <a:t>Test Assumptions – Parametric </a:t>
-            </a:r>
-            <a:r>
-              <a:rPr lang="en-US" dirty="0" err="1"/>
-              <a:t>TEst</a:t>
-            </a:r>
-            <a:endParaRPr lang="en-US" dirty="0"/>
-          </a:p>
-        </p:txBody>
-      </p:sp>
-      <p:sp>
-        <p:nvSpPr>
-          <p:cNvPr id="3" name="Content Placeholder 2">
-            <a:extLst>
-              <a:ext uri="{FF2B5EF4-FFF2-40B4-BE49-F238E27FC236}">
-                <a16:creationId xmlns:a16="http://schemas.microsoft.com/office/drawing/2014/main" id="{38AA6E6A-2A74-D642-A764-13B0702EDB9D}"/>
-              </a:ext>
-            </a:extLst>
-          </p:cNvPr>
-          <p:cNvSpPr>
-            <a:spLocks noGrp="1"/>
-          </p:cNvSpPr>
-          <p:nvPr>
-            <p:ph idx="1"/>
-          </p:nvPr>
-        </p:nvSpPr>
-        <p:spPr>
-          <a:xfrm>
-            <a:off x="1451579" y="2015732"/>
-            <a:ext cx="9603275" cy="4171708"/>
-          </a:xfrm>
-        </p:spPr>
-        <p:txBody>
-          <a:bodyPr>
-            <a:normAutofit lnSpcReduction="10000"/>
-          </a:bodyPr>
-          <a:lstStyle/>
-          <a:p>
-            <a:r>
-              <a:rPr lang="en-US" dirty="0"/>
-              <a:t>Data is normally distributed. </a:t>
-            </a:r>
-          </a:p>
-          <a:p>
-            <a:pPr lvl="1"/>
-            <a:r>
-              <a:rPr lang="en-US" dirty="0"/>
-              <a:t>Central limit theorem (more on this later) – as you get more data, samples of many things become more normal. </a:t>
-            </a:r>
-          </a:p>
-          <a:p>
-            <a:pPr lvl="1"/>
-            <a:r>
-              <a:rPr lang="en-US" dirty="0"/>
-              <a:t>Non-normal data can sometimes be transformed (e.g. log income from last week)</a:t>
-            </a:r>
-          </a:p>
-          <a:p>
-            <a:r>
-              <a:rPr lang="en-US" dirty="0"/>
-              <a:t>Equal variance:</a:t>
-            </a:r>
-          </a:p>
-          <a:p>
-            <a:pPr lvl="1"/>
-            <a:r>
-              <a:rPr lang="en-US" dirty="0"/>
-              <a:t>Argument in </a:t>
-            </a:r>
-            <a:r>
-              <a:rPr lang="en-US" dirty="0" err="1"/>
-              <a:t>scipy</a:t>
-            </a:r>
-            <a:r>
-              <a:rPr lang="en-US" dirty="0"/>
-              <a:t> t-test. </a:t>
-            </a:r>
-          </a:p>
-          <a:p>
-            <a:pPr lvl="1"/>
-            <a:r>
-              <a:rPr lang="en-US" dirty="0"/>
-              <a:t>Normal t-test assumes true, Welch’s does not. </a:t>
-            </a:r>
-          </a:p>
-          <a:p>
-            <a:r>
-              <a:rPr lang="en-US" dirty="0"/>
-              <a:t>Observations are independent. </a:t>
-            </a:r>
-          </a:p>
-          <a:p>
-            <a:r>
-              <a:rPr lang="en-US" dirty="0"/>
-              <a:t>No/minimal outliers. </a:t>
-            </a:r>
-          </a:p>
-          <a:p>
-            <a:pPr lvl="1"/>
-            <a:r>
-              <a:rPr lang="en-US" dirty="0"/>
-              <a:t>There’s a “trim” option to take out outliers in the </a:t>
-            </a:r>
-            <a:r>
-              <a:rPr lang="en-US" dirty="0" err="1"/>
-              <a:t>scipy</a:t>
-            </a:r>
-            <a:r>
-              <a:rPr lang="en-US" dirty="0"/>
-              <a:t> stuff. </a:t>
-            </a:r>
-          </a:p>
-        </p:txBody>
-      </p:sp>
-    </p:spTree>
-    <p:extLst>
-      <p:ext uri="{BB962C8B-B14F-4D97-AF65-F5344CB8AC3E}">
-        <p14:creationId xmlns:p14="http://schemas.microsoft.com/office/powerpoint/2010/main" val="3336447634"/>
-      </p:ext>
-    </p:extLst>
-  </p:cSld>
-  <p:clrMapOvr>
-    <a:masterClrMapping/>
-  </p:clrMapOvr>
-</p:sld>
-</file>
-
 <file path=ppt/slides/slide41.xml><?xml version="1.0" encoding="utf-8"?>
 <p:sld xmlns:a="http://schemas.openxmlformats.org/drawingml/2006/main" xmlns:r="http://schemas.openxmlformats.org/officeDocument/2006/relationships" xmlns:p="http://schemas.openxmlformats.org/presentationml/2006/main">
   <p:cSld>
@@ -9743,7 +9616,7 @@
           <p:cNvPr id="2" name="Title 1">
             <a:extLst>
               <a:ext uri="{FF2B5EF4-FFF2-40B4-BE49-F238E27FC236}">
-                <a16:creationId xmlns:a16="http://schemas.microsoft.com/office/drawing/2014/main" id="{C16DE78B-CAB7-B840-A8D2-2FF5E9523193}"/>
+                <a16:creationId xmlns:a16="http://schemas.microsoft.com/office/drawing/2014/main" id="{5F240032-86EE-D042-A41F-F73A666B9CB7}"/>
               </a:ext>
             </a:extLst>
           </p:cNvPr>
@@ -9761,8 +9634,13 @@
           <a:p>
             <a:r>
               <a:rPr lang="en-US" dirty="0"/>
-              <a:t>Other Tests</a:t>
-            </a:r>
+              <a:t>Test Assumptions – Parametric </a:t>
+            </a:r>
+            <a:r>
+              <a:rPr lang="en-US" dirty="0" err="1"/>
+              <a:t>TEst</a:t>
+            </a:r>
+            <a:endParaRPr lang="en-US" dirty="0"/>
           </a:p>
         </p:txBody>
       </p:sp>
@@ -9771,7 +9649,7 @@
           <p:cNvPr id="3" name="Content Placeholder 2">
             <a:extLst>
               <a:ext uri="{FF2B5EF4-FFF2-40B4-BE49-F238E27FC236}">
-                <a16:creationId xmlns:a16="http://schemas.microsoft.com/office/drawing/2014/main" id="{7F83A866-680A-0A46-BAC5-898B2DB87A2D}"/>
+                <a16:creationId xmlns:a16="http://schemas.microsoft.com/office/drawing/2014/main" id="{38AA6E6A-2A74-D642-A764-13B0702EDB9D}"/>
               </a:ext>
             </a:extLst>
           </p:cNvPr>
@@ -9782,34 +9660,90 @@
             <p:ph idx="1"/>
           </p:nvPr>
         </p:nvSpPr>
-        <p:spPr/>
-        <p:txBody>
-          <a:bodyPr/>
-          <a:lstStyle/>
-          <a:p>
-            <a:r>
-              <a:rPr lang="en-US" dirty="0"/>
-              <a:t>There are many other statistical tests that can be useful in other scenarios. </a:t>
-            </a:r>
-          </a:p>
-          <a:p>
-            <a:r>
-              <a:rPr lang="en-US" dirty="0"/>
-              <a:t>We can look one up based on our scenario, if needed. Some common ones:</a:t>
-            </a:r>
-          </a:p>
-          <a:p>
-            <a:pPr lvl="1"/>
-            <a:r>
-              <a:rPr lang="en-US" dirty="0"/>
-              <a:t>ANOVA (analysis of variance) – Test means of 3+ groups. </a:t>
-            </a:r>
-          </a:p>
-          <a:p>
-            <a:pPr lvl="1"/>
-            <a:r>
-              <a:rPr lang="en-US" dirty="0"/>
-              <a:t>Mann-Whitney – T-test equivalent with no assumption of distributions. </a:t>
+        <p:spPr>
+          <a:xfrm>
+            <a:off x="1451579" y="2015732"/>
+            <a:ext cx="9603275" cy="4171708"/>
+          </a:xfrm>
+        </p:spPr>
+        <p:txBody>
+          <a:bodyPr>
+            <a:normAutofit lnSpcReduction="10000"/>
+          </a:bodyPr>
+          <a:lstStyle/>
+          <a:p>
+            <a:r>
+              <a:rPr lang="en-US" dirty="0"/>
+              <a:t>Data is normally distributed. </a:t>
+            </a:r>
+          </a:p>
+          <a:p>
+            <a:pPr lvl="1"/>
+            <a:r>
+              <a:rPr lang="en-US" dirty="0"/>
+              <a:t>Central limit theorem (more on this later) – as you get more data, samples of many things become more normal. </a:t>
+            </a:r>
+          </a:p>
+          <a:p>
+            <a:pPr lvl="1"/>
+            <a:r>
+              <a:rPr lang="en-US" dirty="0"/>
+              <a:t>Non-normal data can sometimes be transformed (e.g. log income from last week)</a:t>
+            </a:r>
+          </a:p>
+          <a:p>
+            <a:r>
+              <a:rPr lang="en-US" dirty="0"/>
+              <a:t>Equal variance:</a:t>
+            </a:r>
+          </a:p>
+          <a:p>
+            <a:pPr lvl="1"/>
+            <a:r>
+              <a:rPr lang="en-US" dirty="0"/>
+              <a:t>Argument in </a:t>
+            </a:r>
+            <a:r>
+              <a:rPr lang="en-US" dirty="0" err="1"/>
+              <a:t>scipy</a:t>
+            </a:r>
+            <a:r>
+              <a:rPr lang="en-US" dirty="0"/>
+              <a:t> t-test. </a:t>
+            </a:r>
+          </a:p>
+          <a:p>
+            <a:pPr lvl="1"/>
+            <a:r>
+              <a:rPr lang="en-US" dirty="0"/>
+              <a:t>Normal t-test assumes true, Welch’s does not. </a:t>
+            </a:r>
+          </a:p>
+          <a:p>
+            <a:r>
+              <a:rPr lang="en-US" dirty="0"/>
+              <a:t>Observations are independent. </a:t>
+            </a:r>
+          </a:p>
+          <a:p>
+            <a:r>
+              <a:rPr lang="en-US" dirty="0"/>
+              <a:t>No/minimal outliers. </a:t>
+            </a:r>
+          </a:p>
+          <a:p>
+            <a:pPr lvl="1"/>
+            <a:r>
+              <a:rPr lang="en-US" dirty="0"/>
+              <a:t>There’s a “trim” option to take out outliers in the </a:t>
+            </a:r>
+            <a:r>
+              <a:rPr lang="en-US" dirty="0" err="1"/>
+              <a:t>scipy</a:t>
+            </a:r>
+            <a:r>
+              <a:rPr lang="en-US" dirty="0"/>
+              <a:t> stuff. </a:t>
             </a:r>
           </a:p>
         </p:txBody>
@@ -9817,7 +9751,7 @@
     </p:spTree>
     <p:extLst>
       <p:ext uri="{BB962C8B-B14F-4D97-AF65-F5344CB8AC3E}">
-        <p14:creationId xmlns:p14="http://schemas.microsoft.com/office/powerpoint/2010/main" val="1530674256"/>
+        <p14:creationId xmlns:p14="http://schemas.microsoft.com/office/powerpoint/2010/main" val="3336447634"/>
       </p:ext>
     </p:extLst>
   </p:cSld>
@@ -9830,30 +9764,6 @@
 <file path=ppt/slides/slide42.xml><?xml version="1.0" encoding="utf-8"?>
 <p:sld xmlns:a="http://schemas.openxmlformats.org/drawingml/2006/main" xmlns:r="http://schemas.openxmlformats.org/officeDocument/2006/relationships" xmlns:p="http://schemas.openxmlformats.org/presentationml/2006/main">
   <p:cSld>
-    <p:bg>
-      <p:bgPr>
-        <a:gradFill rotWithShape="1">
-          <a:gsLst>
-            <a:gs pos="0">
-              <a:schemeClr val="bg2">
-                <a:tint val="94000"/>
-                <a:satMod val="80000"/>
-                <a:lumMod val="106000"/>
-              </a:schemeClr>
-            </a:gs>
-            <a:gs pos="100000">
-              <a:schemeClr val="bg2">
-                <a:shade val="80000"/>
-              </a:schemeClr>
-            </a:gs>
-          </a:gsLst>
-          <a:path path="circle">
-            <a:fillToRect l="43000" r="43000" b="100000"/>
-          </a:path>
-        </a:gradFill>
-        <a:effectLst/>
-      </p:bgPr>
-    </p:bg>
     <p:spTree>
       <p:nvGrpSpPr>
         <p:cNvPr id="1" name=""/>
@@ -9873,7 +9783,7 @@
           <p:cNvPr id="2" name="Title 1">
             <a:extLst>
               <a:ext uri="{FF2B5EF4-FFF2-40B4-BE49-F238E27FC236}">
-                <a16:creationId xmlns:a16="http://schemas.microsoft.com/office/drawing/2014/main" id="{D6A034D5-E952-294B-AC81-5584708DAFFB}"/>
+                <a16:creationId xmlns:a16="http://schemas.microsoft.com/office/drawing/2014/main" id="{C16DE78B-CAB7-B840-A8D2-2FF5E9523193}"/>
               </a:ext>
             </a:extLst>
           </p:cNvPr>
@@ -9882,213 +9792,119 @@
           </p:cNvSpPr>
           <p:nvPr>
             <p:ph type="title"/>
+          </p:nvPr>
+        </p:nvSpPr>
+        <p:spPr/>
+        <p:txBody>
+          <a:bodyPr/>
+          <a:lstStyle/>
+          <a:p>
+            <a:r>
+              <a:rPr lang="en-US" dirty="0"/>
+              <a:t>Other Tests</a:t>
+            </a:r>
+          </a:p>
+        </p:txBody>
+      </p:sp>
+      <p:sp>
+        <p:nvSpPr>
+          <p:cNvPr id="3" name="Content Placeholder 2">
+            <a:extLst>
+              <a:ext uri="{FF2B5EF4-FFF2-40B4-BE49-F238E27FC236}">
+                <a16:creationId xmlns:a16="http://schemas.microsoft.com/office/drawing/2014/main" id="{7F83A866-680A-0A46-BAC5-898B2DB87A2D}"/>
+              </a:ext>
+            </a:extLst>
+          </p:cNvPr>
+          <p:cNvSpPr>
+            <a:spLocks noGrp="1"/>
+          </p:cNvSpPr>
+          <p:nvPr>
+            <p:ph idx="1"/>
           </p:nvPr>
         </p:nvSpPr>
         <p:spPr>
           <a:xfrm>
-            <a:off x="1451579" y="804519"/>
-            <a:ext cx="9603275" cy="1049235"/>
+            <a:off x="1451579" y="1853753"/>
+            <a:ext cx="9603275" cy="4199727"/>
           </a:xfrm>
         </p:spPr>
         <p:txBody>
           <a:bodyPr>
-            <a:normAutofit/>
+            <a:normAutofit lnSpcReduction="10000"/>
           </a:bodyPr>
           <a:lstStyle/>
           <a:p>
             <a:r>
               <a:rPr lang="en-US" dirty="0"/>
-              <a:t>Demise of Hypothesis Testing</a:t>
-            </a:r>
-          </a:p>
-        </p:txBody>
-      </p:sp>
-      <p:pic>
-        <p:nvPicPr>
-          <p:cNvPr id="8194" name="Picture 2" descr="Graphical user interface, text, application, email&#10;&#10;Description automatically generated">
-            <a:extLst>
-              <a:ext uri="{FF2B5EF4-FFF2-40B4-BE49-F238E27FC236}">
-                <a16:creationId xmlns:a16="http://schemas.microsoft.com/office/drawing/2014/main" id="{843CC31A-A8D8-D94B-BE98-048586839791}"/>
-              </a:ext>
-            </a:extLst>
-          </p:cNvPr>
-          <p:cNvPicPr>
-            <a:picLocks noChangeAspect="1" noChangeArrowheads="1"/>
-          </p:cNvPicPr>
-          <p:nvPr/>
-        </p:nvPicPr>
-        <p:blipFill>
-          <a:blip r:embed="rId2">
-            <a:extLst>
-              <a:ext uri="{28A0092B-C50C-407E-A947-70E740481C1C}">
-                <a14:useLocalDpi xmlns:a14="http://schemas.microsoft.com/office/drawing/2010/main" val="0"/>
-              </a:ext>
-            </a:extLst>
-          </a:blip>
-          <a:stretch>
-            <a:fillRect/>
-          </a:stretch>
-        </p:blipFill>
-        <p:spPr bwMode="auto">
-          <a:xfrm>
-            <a:off x="191739" y="2111065"/>
-            <a:ext cx="6038708" cy="2979095"/>
-          </a:xfrm>
-          <a:prstGeom prst="rect">
-            <a:avLst/>
-          </a:prstGeom>
-          <a:noFill/>
-          <a:extLst>
-            <a:ext uri="{909E8E84-426E-40DD-AFC4-6F175D3DCCD1}">
-              <a14:hiddenFill xmlns:a14="http://schemas.microsoft.com/office/drawing/2010/main">
-                <a:solidFill>
-                  <a:srgbClr val="FFFFFF"/>
-                </a:solidFill>
-              </a14:hiddenFill>
-            </a:ext>
-          </a:extLst>
-        </p:spPr>
-      </p:pic>
-      <p:sp>
-        <p:nvSpPr>
-          <p:cNvPr id="3" name="Content Placeholder 2">
-            <a:extLst>
-              <a:ext uri="{FF2B5EF4-FFF2-40B4-BE49-F238E27FC236}">
-                <a16:creationId xmlns:a16="http://schemas.microsoft.com/office/drawing/2014/main" id="{F7E53707-A64A-6E40-9F66-E23093385A9E}"/>
-              </a:ext>
-            </a:extLst>
-          </p:cNvPr>
-          <p:cNvSpPr>
-            <a:spLocks noGrp="1"/>
-          </p:cNvSpPr>
-          <p:nvPr>
-            <p:ph idx="1"/>
-          </p:nvPr>
-        </p:nvSpPr>
-        <p:spPr>
-          <a:xfrm>
-            <a:off x="6230447" y="1853755"/>
-            <a:ext cx="5769814" cy="4199726"/>
-          </a:xfrm>
-        </p:spPr>
-        <p:txBody>
-          <a:bodyPr>
-            <a:normAutofit fontScale="92500"/>
-          </a:bodyPr>
-          <a:lstStyle/>
-          <a:p>
-            <a:pPr>
-              <a:lnSpc>
-                <a:spcPct val="110000"/>
-              </a:lnSpc>
-            </a:pPr>
-            <a:r>
-              <a:rPr lang="en-US" sz="1800" dirty="0"/>
-              <a:t>P-values are (somewhat) on their way out. </a:t>
-            </a:r>
-          </a:p>
-          <a:p>
-            <a:pPr lvl="1">
-              <a:lnSpc>
-                <a:spcPct val="110000"/>
-              </a:lnSpc>
-            </a:pPr>
-            <a:r>
-              <a:rPr lang="en-US" dirty="0"/>
-              <a:t>Banned from some medical journals as too easy to pass. </a:t>
-            </a:r>
-          </a:p>
-          <a:p>
-            <a:pPr lvl="1">
-              <a:lnSpc>
-                <a:spcPct val="110000"/>
-              </a:lnSpc>
-            </a:pPr>
-            <a:r>
-              <a:rPr lang="en-US" dirty="0"/>
-              <a:t>NHST = null </a:t>
+              <a:t>There are many other statistical tests that can be useful in other scenarios. </a:t>
+            </a:r>
+          </a:p>
+          <a:p>
+            <a:pPr lvl="1"/>
+            <a:r>
+              <a:rPr lang="en-US" dirty="0"/>
+              <a:t>We’ll look at a couple next week in more detail. </a:t>
+            </a:r>
+          </a:p>
+          <a:p>
+            <a:r>
+              <a:rPr lang="en-US" dirty="0"/>
+              <a:t>We can look one up based on our scenario, if needed. Some common ones:</a:t>
+            </a:r>
+          </a:p>
+          <a:p>
+            <a:pPr lvl="1"/>
+            <a:r>
+              <a:rPr lang="en-US" dirty="0"/>
+              <a:t>ANOVA (analysis of variance) – Test means of 3+ groups. </a:t>
+            </a:r>
+          </a:p>
+          <a:p>
+            <a:pPr lvl="1"/>
+            <a:r>
+              <a:rPr lang="en-US" dirty="0"/>
+              <a:t>Chi2 – dealing with discreet data expectations. </a:t>
+            </a:r>
+          </a:p>
+          <a:p>
+            <a:pPr lvl="1"/>
+            <a:r>
+              <a:rPr lang="en-US" dirty="0"/>
+              <a:t>Mann-Whitney – T-test equivalent with no assumption of distributions. </a:t>
+            </a:r>
+          </a:p>
+          <a:p>
+            <a:r>
+              <a:rPr lang="en-US" dirty="0"/>
+              <a:t>For most of these we can call their function directly in </a:t>
             </a:r>
             <a:r>
               <a:rPr lang="en-US" dirty="0" err="1"/>
-              <a:t>hyp</a:t>
-            </a:r>
-            <a:r>
-              <a:rPr lang="en-US" dirty="0"/>
-              <a:t>. significance testing. </a:t>
-            </a:r>
-          </a:p>
-          <a:p>
-            <a:pPr>
-              <a:lnSpc>
-                <a:spcPct val="110000"/>
-              </a:lnSpc>
-            </a:pPr>
-            <a:r>
-              <a:rPr lang="en-US" sz="1800" dirty="0"/>
-              <a:t>Unfortunately, and surprisingly, there’s no perfect alternative. </a:t>
-            </a:r>
-          </a:p>
-          <a:p>
-            <a:pPr>
-              <a:lnSpc>
-                <a:spcPct val="110000"/>
-              </a:lnSpc>
-            </a:pPr>
-            <a:r>
-              <a:rPr lang="en-US" sz="1800" dirty="0"/>
-              <a:t>What do we do???</a:t>
-            </a:r>
-          </a:p>
-          <a:p>
-            <a:pPr lvl="1">
-              <a:lnSpc>
-                <a:spcPct val="110000"/>
-              </a:lnSpc>
-            </a:pPr>
-            <a:r>
-              <a:rPr lang="en-US" dirty="0"/>
-              <a:t>Effect size. </a:t>
-            </a:r>
-          </a:p>
-          <a:p>
-            <a:pPr lvl="1">
-              <a:lnSpc>
-                <a:spcPct val="110000"/>
-              </a:lnSpc>
-            </a:pPr>
-            <a:r>
-              <a:rPr lang="en-US" dirty="0"/>
-              <a:t>Estimate mean with standard error and confidence intervals. </a:t>
-            </a:r>
-          </a:p>
-          <a:p>
-            <a:pPr lvl="1">
-              <a:lnSpc>
-                <a:spcPct val="110000"/>
-              </a:lnSpc>
-            </a:pPr>
-            <a:r>
-              <a:rPr lang="en-US" dirty="0"/>
-              <a:t>Bayesian estimation (we </a:t>
-            </a:r>
-            <a:r>
-              <a:rPr lang="en-US" i="1" dirty="0"/>
-              <a:t>might</a:t>
-            </a:r>
-            <a:r>
-              <a:rPr lang="en-US" dirty="0"/>
-              <a:t> touch on this later)</a:t>
-            </a:r>
-          </a:p>
-          <a:p>
-            <a:pPr>
-              <a:lnSpc>
-                <a:spcPct val="110000"/>
-              </a:lnSpc>
-            </a:pPr>
-            <a:r>
-              <a:rPr lang="en-US" dirty="0"/>
-              <a:t>Real statisticians are actively debating this – we don’t have a firm answer. </a:t>
+              <a:t>scipy</a:t>
+            </a:r>
+            <a:r>
+              <a:rPr lang="en-US" dirty="0"/>
+              <a:t>. </a:t>
+            </a:r>
+          </a:p>
+          <a:p>
+            <a:pPr lvl="1"/>
+            <a:r>
+              <a:rPr lang="en-US" dirty="0"/>
+              <a:t>Will run the test based on the calculations, with assumptions inbuilt.</a:t>
+            </a:r>
+          </a:p>
+          <a:p>
+            <a:r>
+              <a:rPr lang="en-US" dirty="0"/>
+              <a:t>Our simulation loops are generic versions of this – we can build anything. </a:t>
+            </a:r>
+          </a:p>
+          <a:p>
+            <a:pPr lvl="1"/>
+            <a:r>
+              <a:rPr lang="en-US" dirty="0"/>
+              <a:t>We don’t need to know the test theory as long as we have the probability model. </a:t>
             </a:r>
           </a:p>
         </p:txBody>
@@ -10096,7 +9912,7 @@
     </p:spTree>
     <p:extLst>
       <p:ext uri="{BB962C8B-B14F-4D97-AF65-F5344CB8AC3E}">
-        <p14:creationId xmlns:p14="http://schemas.microsoft.com/office/powerpoint/2010/main" val="2551124561"/>
+        <p14:creationId xmlns:p14="http://schemas.microsoft.com/office/powerpoint/2010/main" val="1530674256"/>
       </p:ext>
     </p:extLst>
   </p:cSld>
@@ -10152,7 +9968,7 @@
           <p:cNvPr id="2" name="Title 1">
             <a:extLst>
               <a:ext uri="{FF2B5EF4-FFF2-40B4-BE49-F238E27FC236}">
-                <a16:creationId xmlns:a16="http://schemas.microsoft.com/office/drawing/2014/main" id="{AA861DA4-0DF2-D249-9DDF-0D62D36A5841}"/>
+                <a16:creationId xmlns:a16="http://schemas.microsoft.com/office/drawing/2014/main" id="{D6A034D5-E952-294B-AC81-5584708DAFFB}"/>
               </a:ext>
             </a:extLst>
           </p:cNvPr>
@@ -10177,49 +9993,17 @@
           <a:p>
             <a:r>
               <a:rPr lang="en-US" dirty="0"/>
-              <a:t>P Hacking</a:t>
-            </a:r>
-          </a:p>
-        </p:txBody>
-      </p:sp>
-      <p:sp>
-        <p:nvSpPr>
-          <p:cNvPr id="3" name="Content Placeholder 2">
-            <a:extLst>
-              <a:ext uri="{FF2B5EF4-FFF2-40B4-BE49-F238E27FC236}">
-                <a16:creationId xmlns:a16="http://schemas.microsoft.com/office/drawing/2014/main" id="{05C14BC6-77F4-534E-A32E-70385FECA69B}"/>
-              </a:ext>
-            </a:extLst>
-          </p:cNvPr>
-          <p:cNvSpPr>
-            <a:spLocks noGrp="1"/>
-          </p:cNvSpPr>
-          <p:nvPr>
-            <p:ph idx="1"/>
-          </p:nvPr>
-        </p:nvSpPr>
-        <p:spPr>
-          <a:xfrm>
-            <a:off x="1451579" y="2015734"/>
-            <a:ext cx="5622284" cy="3450613"/>
-          </a:xfrm>
-        </p:spPr>
-        <p:txBody>
-          <a:bodyPr>
-            <a:normAutofit/>
-          </a:bodyPr>
-          <a:lstStyle/>
-          <a:p>
-            <a:endParaRPr lang="en-US"/>
+              <a:t>Demise of Hypothesis Testing</a:t>
+            </a:r>
           </a:p>
         </p:txBody>
       </p:sp>
       <p:pic>
         <p:nvPicPr>
-          <p:cNvPr id="2050" name="Picture 2" descr="A Useful Urinal Etiquette Guide For All Men, Everywhere - Mandatory">
+          <p:cNvPr id="8194" name="Picture 2" descr="Graphical user interface, text, application, email&#10;&#10;Description automatically generated">
             <a:extLst>
               <a:ext uri="{FF2B5EF4-FFF2-40B4-BE49-F238E27FC236}">
-                <a16:creationId xmlns:a16="http://schemas.microsoft.com/office/drawing/2014/main" id="{28D2CAA2-1578-214A-8E05-B00489994910}"/>
+                <a16:creationId xmlns:a16="http://schemas.microsoft.com/office/drawing/2014/main" id="{843CC31A-A8D8-D94B-BE98-048586839791}"/>
               </a:ext>
             </a:extLst>
           </p:cNvPr>
@@ -10242,8 +10026,8 @@
         </p:blipFill>
         <p:spPr bwMode="auto">
           <a:xfrm>
-            <a:off x="160637" y="2015734"/>
-            <a:ext cx="6422388" cy="3612593"/>
+            <a:off x="191739" y="2111065"/>
+            <a:ext cx="6038708" cy="2979095"/>
           </a:xfrm>
           <a:prstGeom prst="rect">
             <a:avLst/>
@@ -10260,57 +10044,154 @@
           </a:extLst>
         </p:spPr>
       </p:pic>
-      <p:pic>
-        <p:nvPicPr>
-          <p:cNvPr id="2052" name="Picture 4" descr="A Look into Computer Hacking - WORT 89.9 FM">
+      <p:sp>
+        <p:nvSpPr>
+          <p:cNvPr id="3" name="Content Placeholder 2">
             <a:extLst>
               <a:ext uri="{FF2B5EF4-FFF2-40B4-BE49-F238E27FC236}">
-                <a16:creationId xmlns:a16="http://schemas.microsoft.com/office/drawing/2014/main" id="{15F358B1-FC4A-244D-AA90-5BBAAA1F7F68}"/>
+                <a16:creationId xmlns:a16="http://schemas.microsoft.com/office/drawing/2014/main" id="{F7E53707-A64A-6E40-9F66-E23093385A9E}"/>
               </a:ext>
             </a:extLst>
           </p:cNvPr>
-          <p:cNvPicPr>
-            <a:picLocks noChangeAspect="1" noChangeArrowheads="1"/>
-          </p:cNvPicPr>
-          <p:nvPr/>
-        </p:nvPicPr>
-        <p:blipFill>
-          <a:blip r:embed="rId3">
-            <a:extLst>
-              <a:ext uri="{28A0092B-C50C-407E-A947-70E740481C1C}">
-                <a14:useLocalDpi xmlns:a14="http://schemas.microsoft.com/office/drawing/2010/main" val="0"/>
-              </a:ext>
-            </a:extLst>
-          </a:blip>
-          <a:srcRect/>
-          <a:stretch>
-            <a:fillRect/>
-          </a:stretch>
-        </p:blipFill>
-        <p:spPr bwMode="auto">
+          <p:cNvSpPr>
+            <a:spLocks noGrp="1"/>
+          </p:cNvSpPr>
+          <p:nvPr>
+            <p:ph idx="1"/>
+          </p:nvPr>
+        </p:nvSpPr>
+        <p:spPr>
           <a:xfrm>
-            <a:off x="6789656" y="2107248"/>
-            <a:ext cx="5241707" cy="4577757"/>
+            <a:off x="6230447" y="1853755"/>
+            <a:ext cx="5769814" cy="4199726"/>
           </a:xfrm>
-          <a:prstGeom prst="rect">
-            <a:avLst/>
-          </a:prstGeom>
-          <a:noFill/>
-          <a:extLst>
-            <a:ext uri="{909E8E84-426E-40DD-AFC4-6F175D3DCCD1}">
-              <a14:hiddenFill xmlns:a14="http://schemas.microsoft.com/office/drawing/2010/main">
-                <a:solidFill>
-                  <a:srgbClr val="FFFFFF"/>
-                </a:solidFill>
-              </a14:hiddenFill>
-            </a:ext>
-          </a:extLst>
         </p:spPr>
-      </p:pic>
+        <p:txBody>
+          <a:bodyPr>
+            <a:normAutofit fontScale="92500"/>
+          </a:bodyPr>
+          <a:lstStyle/>
+          <a:p>
+            <a:pPr>
+              <a:lnSpc>
+                <a:spcPct val="110000"/>
+              </a:lnSpc>
+            </a:pPr>
+            <a:r>
+              <a:rPr lang="en-US" sz="1800" dirty="0"/>
+              <a:t>P-values are (somewhat) on their way out. </a:t>
+            </a:r>
+          </a:p>
+          <a:p>
+            <a:pPr lvl="1">
+              <a:lnSpc>
+                <a:spcPct val="110000"/>
+              </a:lnSpc>
+            </a:pPr>
+            <a:r>
+              <a:rPr lang="en-US" dirty="0"/>
+              <a:t>Banned from some medical journals as too easy to pass. </a:t>
+            </a:r>
+          </a:p>
+          <a:p>
+            <a:pPr lvl="1">
+              <a:lnSpc>
+                <a:spcPct val="110000"/>
+              </a:lnSpc>
+            </a:pPr>
+            <a:r>
+              <a:rPr lang="en-US" dirty="0"/>
+              <a:t>NHST = null </a:t>
+            </a:r>
+            <a:r>
+              <a:rPr lang="en-US" dirty="0" err="1"/>
+              <a:t>hyp</a:t>
+            </a:r>
+            <a:r>
+              <a:rPr lang="en-US" dirty="0"/>
+              <a:t>. significance testing. </a:t>
+            </a:r>
+          </a:p>
+          <a:p>
+            <a:pPr>
+              <a:lnSpc>
+                <a:spcPct val="110000"/>
+              </a:lnSpc>
+            </a:pPr>
+            <a:r>
+              <a:rPr lang="en-US" sz="1800" dirty="0"/>
+              <a:t>Unfortunately, and surprisingly, there’s no perfect alternative. </a:t>
+            </a:r>
+          </a:p>
+          <a:p>
+            <a:pPr>
+              <a:lnSpc>
+                <a:spcPct val="110000"/>
+              </a:lnSpc>
+            </a:pPr>
+            <a:r>
+              <a:rPr lang="en-US" sz="1800" dirty="0"/>
+              <a:t>What do we do???</a:t>
+            </a:r>
+          </a:p>
+          <a:p>
+            <a:pPr lvl="1">
+              <a:lnSpc>
+                <a:spcPct val="110000"/>
+              </a:lnSpc>
+            </a:pPr>
+            <a:r>
+              <a:rPr lang="en-US" dirty="0"/>
+              <a:t>Effect size. </a:t>
+            </a:r>
+          </a:p>
+          <a:p>
+            <a:pPr lvl="1">
+              <a:lnSpc>
+                <a:spcPct val="110000"/>
+              </a:lnSpc>
+            </a:pPr>
+            <a:r>
+              <a:rPr lang="en-US" dirty="0"/>
+              <a:t>Estimate mean with standard error and confidence intervals. </a:t>
+            </a:r>
+          </a:p>
+          <a:p>
+            <a:pPr lvl="1">
+              <a:lnSpc>
+                <a:spcPct val="110000"/>
+              </a:lnSpc>
+            </a:pPr>
+            <a:r>
+              <a:rPr lang="en-US" dirty="0"/>
+              <a:t>Bayesian estimation (we </a:t>
+            </a:r>
+            <a:r>
+              <a:rPr lang="en-US" i="1" dirty="0"/>
+              <a:t>might</a:t>
+            </a:r>
+            <a:r>
+              <a:rPr lang="en-US" dirty="0"/>
+              <a:t> touch on this later)</a:t>
+            </a:r>
+          </a:p>
+          <a:p>
+            <a:pPr>
+              <a:lnSpc>
+                <a:spcPct val="110000"/>
+              </a:lnSpc>
+            </a:pPr>
+            <a:r>
+              <a:rPr lang="en-US" dirty="0"/>
+              <a:t>Real statisticians are actively debating this – we don’t have a firm answer. </a:t>
+            </a:r>
+          </a:p>
+        </p:txBody>
+      </p:sp>
     </p:spTree>
     <p:extLst>
       <p:ext uri="{BB962C8B-B14F-4D97-AF65-F5344CB8AC3E}">
-        <p14:creationId xmlns:p14="http://schemas.microsoft.com/office/powerpoint/2010/main" val="3269594207"/>
+        <p14:creationId xmlns:p14="http://schemas.microsoft.com/office/powerpoint/2010/main" val="2551124561"/>
       </p:ext>
     </p:extLst>
   </p:cSld>
@@ -10321,160 +10202,6 @@
 </file>
 
 <file path=ppt/slides/slide44.xml><?xml version="1.0" encoding="utf-8"?>
-<p:sld xmlns:a="http://schemas.openxmlformats.org/drawingml/2006/main" xmlns:r="http://schemas.openxmlformats.org/officeDocument/2006/relationships" xmlns:p="http://schemas.openxmlformats.org/presentationml/2006/main">
-  <p:cSld>
-    <p:spTree>
-      <p:nvGrpSpPr>
-        <p:cNvPr id="1" name=""/>
-        <p:cNvGrpSpPr/>
-        <p:nvPr/>
-      </p:nvGrpSpPr>
-      <p:grpSpPr>
-        <a:xfrm>
-          <a:off x="0" y="0"/>
-          <a:ext cx="0" cy="0"/>
-          <a:chOff x="0" y="0"/>
-          <a:chExt cx="0" cy="0"/>
-        </a:xfrm>
-      </p:grpSpPr>
-      <p:sp>
-        <p:nvSpPr>
-          <p:cNvPr id="2" name="Title 1">
-            <a:extLst>
-              <a:ext uri="{FF2B5EF4-FFF2-40B4-BE49-F238E27FC236}">
-                <a16:creationId xmlns:a16="http://schemas.microsoft.com/office/drawing/2014/main" id="{8D48E8B3-406C-794A-B1EF-BCB803974BCE}"/>
-              </a:ext>
-            </a:extLst>
-          </p:cNvPr>
-          <p:cNvSpPr>
-            <a:spLocks noGrp="1"/>
-          </p:cNvSpPr>
-          <p:nvPr>
-            <p:ph type="title"/>
-          </p:nvPr>
-        </p:nvSpPr>
-        <p:spPr/>
-        <p:txBody>
-          <a:bodyPr/>
-          <a:lstStyle/>
-          <a:p>
-            <a:r>
-              <a:rPr lang="en-US" dirty="0"/>
-              <a:t>What is P-Hacking?</a:t>
-            </a:r>
-          </a:p>
-        </p:txBody>
-      </p:sp>
-      <p:sp>
-        <p:nvSpPr>
-          <p:cNvPr id="3" name="Content Placeholder 2">
-            <a:extLst>
-              <a:ext uri="{FF2B5EF4-FFF2-40B4-BE49-F238E27FC236}">
-                <a16:creationId xmlns:a16="http://schemas.microsoft.com/office/drawing/2014/main" id="{F9B6F98D-1784-EC4E-A263-DBC24CE4E93A}"/>
-              </a:ext>
-            </a:extLst>
-          </p:cNvPr>
-          <p:cNvSpPr>
-            <a:spLocks noGrp="1"/>
-          </p:cNvSpPr>
-          <p:nvPr>
-            <p:ph idx="1"/>
-          </p:nvPr>
-        </p:nvSpPr>
-        <p:spPr>
-          <a:xfrm>
-            <a:off x="1451579" y="1853754"/>
-            <a:ext cx="9603275" cy="4287273"/>
-          </a:xfrm>
-        </p:spPr>
-        <p:txBody>
-          <a:bodyPr>
-            <a:normAutofit/>
-          </a:bodyPr>
-          <a:lstStyle/>
-          <a:p>
-            <a:r>
-              <a:rPr lang="en-US" dirty="0"/>
-              <a:t>Generally, we (the royal one) are looking to demonstrate significance:</a:t>
-            </a:r>
-          </a:p>
-          <a:p>
-            <a:pPr lvl="1"/>
-            <a:r>
-              <a:rPr lang="en-US" dirty="0"/>
-              <a:t>This drug works – the people who took it live longer.</a:t>
-            </a:r>
-          </a:p>
-          <a:p>
-            <a:pPr lvl="1"/>
-            <a:r>
-              <a:rPr lang="en-US" dirty="0"/>
-              <a:t>This thing I noticed in my thesis is real – some effect is due to a real thing, not randomness.</a:t>
-            </a:r>
-          </a:p>
-          <a:p>
-            <a:pPr lvl="1"/>
-            <a:r>
-              <a:rPr lang="en-US" dirty="0"/>
-              <a:t>This difference matters – group A really is different from group B. </a:t>
-            </a:r>
-          </a:p>
-          <a:p>
-            <a:r>
-              <a:rPr lang="en-US" dirty="0"/>
-              <a:t>95% confidence is only 19 times out of 20. </a:t>
-            </a:r>
-          </a:p>
-          <a:p>
-            <a:r>
-              <a:rPr lang="en-US" dirty="0"/>
-              <a:t>If we just want to show something is significant:</a:t>
-            </a:r>
-          </a:p>
-          <a:p>
-            <a:pPr lvl="1"/>
-            <a:r>
-              <a:rPr lang="en-US" dirty="0"/>
-              <a:t>Manipulate variables</a:t>
-            </a:r>
-          </a:p>
-          <a:p>
-            <a:pPr lvl="1"/>
-            <a:r>
-              <a:rPr lang="en-US" dirty="0"/>
-              <a:t>Repeat testing with different details</a:t>
-            </a:r>
-          </a:p>
-          <a:p>
-            <a:pPr lvl="1"/>
-            <a:r>
-              <a:rPr lang="en-US" dirty="0"/>
-              <a:t>Find a small p</a:t>
-            </a:r>
-          </a:p>
-          <a:p>
-            <a:pPr lvl="1"/>
-            <a:r>
-              <a:rPr lang="en-US" dirty="0"/>
-              <a:t>Publish!!!!!!!</a:t>
-            </a:r>
-          </a:p>
-        </p:txBody>
-      </p:sp>
-    </p:spTree>
-    <p:extLst>
-      <p:ext uri="{BB962C8B-B14F-4D97-AF65-F5344CB8AC3E}">
-        <p14:creationId xmlns:p14="http://schemas.microsoft.com/office/powerpoint/2010/main" val="2930291580"/>
-      </p:ext>
-    </p:extLst>
-  </p:cSld>
-  <p:clrMapOvr>
-    <a:masterClrMapping/>
-  </p:clrMapOvr>
-</p:sld>
-</file>
-
-<file path=ppt/slides/slide45.xml><?xml version="1.0" encoding="utf-8"?>
 <p:sld xmlns:a="http://schemas.openxmlformats.org/drawingml/2006/main" xmlns:r="http://schemas.openxmlformats.org/officeDocument/2006/relationships" xmlns:p="http://schemas.openxmlformats.org/presentationml/2006/main">
   <p:cSld>
     <p:bg>
@@ -10520,7 +10247,7 @@
           <p:cNvPr id="2" name="Title 1">
             <a:extLst>
               <a:ext uri="{FF2B5EF4-FFF2-40B4-BE49-F238E27FC236}">
-                <a16:creationId xmlns:a16="http://schemas.microsoft.com/office/drawing/2014/main" id="{722F0982-DE8D-644B-8D71-399253321296}"/>
+                <a16:creationId xmlns:a16="http://schemas.microsoft.com/office/drawing/2014/main" id="{AA861DA4-0DF2-D249-9DDF-0D62D36A5841}"/>
               </a:ext>
             </a:extLst>
           </p:cNvPr>
@@ -10545,6 +10272,382 @@
           <a:p>
             <a:r>
               <a:rPr lang="en-US" dirty="0"/>
+              <a:t>P Hacking</a:t>
+            </a:r>
+          </a:p>
+        </p:txBody>
+      </p:sp>
+      <p:sp>
+        <p:nvSpPr>
+          <p:cNvPr id="3" name="Content Placeholder 2">
+            <a:extLst>
+              <a:ext uri="{FF2B5EF4-FFF2-40B4-BE49-F238E27FC236}">
+                <a16:creationId xmlns:a16="http://schemas.microsoft.com/office/drawing/2014/main" id="{05C14BC6-77F4-534E-A32E-70385FECA69B}"/>
+              </a:ext>
+            </a:extLst>
+          </p:cNvPr>
+          <p:cNvSpPr>
+            <a:spLocks noGrp="1"/>
+          </p:cNvSpPr>
+          <p:nvPr>
+            <p:ph idx="1"/>
+          </p:nvPr>
+        </p:nvSpPr>
+        <p:spPr>
+          <a:xfrm>
+            <a:off x="1451579" y="2015734"/>
+            <a:ext cx="5622284" cy="3450613"/>
+          </a:xfrm>
+        </p:spPr>
+        <p:txBody>
+          <a:bodyPr>
+            <a:normAutofit/>
+          </a:bodyPr>
+          <a:lstStyle/>
+          <a:p>
+            <a:endParaRPr lang="en-US"/>
+          </a:p>
+        </p:txBody>
+      </p:sp>
+      <p:pic>
+        <p:nvPicPr>
+          <p:cNvPr id="2050" name="Picture 2" descr="A Useful Urinal Etiquette Guide For All Men, Everywhere - Mandatory">
+            <a:extLst>
+              <a:ext uri="{FF2B5EF4-FFF2-40B4-BE49-F238E27FC236}">
+                <a16:creationId xmlns:a16="http://schemas.microsoft.com/office/drawing/2014/main" id="{28D2CAA2-1578-214A-8E05-B00489994910}"/>
+              </a:ext>
+            </a:extLst>
+          </p:cNvPr>
+          <p:cNvPicPr>
+            <a:picLocks noChangeAspect="1" noChangeArrowheads="1"/>
+          </p:cNvPicPr>
+          <p:nvPr/>
+        </p:nvPicPr>
+        <p:blipFill>
+          <a:blip r:embed="rId2">
+            <a:extLst>
+              <a:ext uri="{28A0092B-C50C-407E-A947-70E740481C1C}">
+                <a14:useLocalDpi xmlns:a14="http://schemas.microsoft.com/office/drawing/2010/main" val="0"/>
+              </a:ext>
+            </a:extLst>
+          </a:blip>
+          <a:stretch>
+            <a:fillRect/>
+          </a:stretch>
+        </p:blipFill>
+        <p:spPr bwMode="auto">
+          <a:xfrm>
+            <a:off x="160637" y="2015734"/>
+            <a:ext cx="6422388" cy="3612593"/>
+          </a:xfrm>
+          <a:prstGeom prst="rect">
+            <a:avLst/>
+          </a:prstGeom>
+          <a:noFill/>
+          <a:extLst>
+            <a:ext uri="{909E8E84-426E-40DD-AFC4-6F175D3DCCD1}">
+              <a14:hiddenFill xmlns:a14="http://schemas.microsoft.com/office/drawing/2010/main">
+                <a:solidFill>
+                  <a:srgbClr val="FFFFFF"/>
+                </a:solidFill>
+              </a14:hiddenFill>
+            </a:ext>
+          </a:extLst>
+        </p:spPr>
+      </p:pic>
+      <p:pic>
+        <p:nvPicPr>
+          <p:cNvPr id="2052" name="Picture 4" descr="A Look into Computer Hacking - WORT 89.9 FM">
+            <a:extLst>
+              <a:ext uri="{FF2B5EF4-FFF2-40B4-BE49-F238E27FC236}">
+                <a16:creationId xmlns:a16="http://schemas.microsoft.com/office/drawing/2014/main" id="{15F358B1-FC4A-244D-AA90-5BBAAA1F7F68}"/>
+              </a:ext>
+            </a:extLst>
+          </p:cNvPr>
+          <p:cNvPicPr>
+            <a:picLocks noChangeAspect="1" noChangeArrowheads="1"/>
+          </p:cNvPicPr>
+          <p:nvPr/>
+        </p:nvPicPr>
+        <p:blipFill>
+          <a:blip r:embed="rId3">
+            <a:extLst>
+              <a:ext uri="{28A0092B-C50C-407E-A947-70E740481C1C}">
+                <a14:useLocalDpi xmlns:a14="http://schemas.microsoft.com/office/drawing/2010/main" val="0"/>
+              </a:ext>
+            </a:extLst>
+          </a:blip>
+          <a:srcRect/>
+          <a:stretch>
+            <a:fillRect/>
+          </a:stretch>
+        </p:blipFill>
+        <p:spPr bwMode="auto">
+          <a:xfrm>
+            <a:off x="6789656" y="2107248"/>
+            <a:ext cx="5241707" cy="4577757"/>
+          </a:xfrm>
+          <a:prstGeom prst="rect">
+            <a:avLst/>
+          </a:prstGeom>
+          <a:noFill/>
+          <a:extLst>
+            <a:ext uri="{909E8E84-426E-40DD-AFC4-6F175D3DCCD1}">
+              <a14:hiddenFill xmlns:a14="http://schemas.microsoft.com/office/drawing/2010/main">
+                <a:solidFill>
+                  <a:srgbClr val="FFFFFF"/>
+                </a:solidFill>
+              </a14:hiddenFill>
+            </a:ext>
+          </a:extLst>
+        </p:spPr>
+      </p:pic>
+    </p:spTree>
+    <p:extLst>
+      <p:ext uri="{BB962C8B-B14F-4D97-AF65-F5344CB8AC3E}">
+        <p14:creationId xmlns:p14="http://schemas.microsoft.com/office/powerpoint/2010/main" val="3269594207"/>
+      </p:ext>
+    </p:extLst>
+  </p:cSld>
+  <p:clrMapOvr>
+    <a:masterClrMapping/>
+  </p:clrMapOvr>
+</p:sld>
+</file>
+
+<file path=ppt/slides/slide45.xml><?xml version="1.0" encoding="utf-8"?>
+<p:sld xmlns:a="http://schemas.openxmlformats.org/drawingml/2006/main" xmlns:r="http://schemas.openxmlformats.org/officeDocument/2006/relationships" xmlns:p="http://schemas.openxmlformats.org/presentationml/2006/main">
+  <p:cSld>
+    <p:spTree>
+      <p:nvGrpSpPr>
+        <p:cNvPr id="1" name=""/>
+        <p:cNvGrpSpPr/>
+        <p:nvPr/>
+      </p:nvGrpSpPr>
+      <p:grpSpPr>
+        <a:xfrm>
+          <a:off x="0" y="0"/>
+          <a:ext cx="0" cy="0"/>
+          <a:chOff x="0" y="0"/>
+          <a:chExt cx="0" cy="0"/>
+        </a:xfrm>
+      </p:grpSpPr>
+      <p:sp>
+        <p:nvSpPr>
+          <p:cNvPr id="2" name="Title 1">
+            <a:extLst>
+              <a:ext uri="{FF2B5EF4-FFF2-40B4-BE49-F238E27FC236}">
+                <a16:creationId xmlns:a16="http://schemas.microsoft.com/office/drawing/2014/main" id="{8D48E8B3-406C-794A-B1EF-BCB803974BCE}"/>
+              </a:ext>
+            </a:extLst>
+          </p:cNvPr>
+          <p:cNvSpPr>
+            <a:spLocks noGrp="1"/>
+          </p:cNvSpPr>
+          <p:nvPr>
+            <p:ph type="title"/>
+          </p:nvPr>
+        </p:nvSpPr>
+        <p:spPr/>
+        <p:txBody>
+          <a:bodyPr/>
+          <a:lstStyle/>
+          <a:p>
+            <a:r>
+              <a:rPr lang="en-US" dirty="0"/>
+              <a:t>What is P-Hacking?</a:t>
+            </a:r>
+          </a:p>
+        </p:txBody>
+      </p:sp>
+      <p:sp>
+        <p:nvSpPr>
+          <p:cNvPr id="3" name="Content Placeholder 2">
+            <a:extLst>
+              <a:ext uri="{FF2B5EF4-FFF2-40B4-BE49-F238E27FC236}">
+                <a16:creationId xmlns:a16="http://schemas.microsoft.com/office/drawing/2014/main" id="{F9B6F98D-1784-EC4E-A263-DBC24CE4E93A}"/>
+              </a:ext>
+            </a:extLst>
+          </p:cNvPr>
+          <p:cNvSpPr>
+            <a:spLocks noGrp="1"/>
+          </p:cNvSpPr>
+          <p:nvPr>
+            <p:ph idx="1"/>
+          </p:nvPr>
+        </p:nvSpPr>
+        <p:spPr>
+          <a:xfrm>
+            <a:off x="1451579" y="1853754"/>
+            <a:ext cx="9603275" cy="4287273"/>
+          </a:xfrm>
+        </p:spPr>
+        <p:txBody>
+          <a:bodyPr>
+            <a:normAutofit/>
+          </a:bodyPr>
+          <a:lstStyle/>
+          <a:p>
+            <a:r>
+              <a:rPr lang="en-US" dirty="0"/>
+              <a:t>Generally, we (the royal one) are looking to demonstrate significance:</a:t>
+            </a:r>
+          </a:p>
+          <a:p>
+            <a:pPr lvl="1"/>
+            <a:r>
+              <a:rPr lang="en-US" dirty="0"/>
+              <a:t>This drug works – the people who took it live longer.</a:t>
+            </a:r>
+          </a:p>
+          <a:p>
+            <a:pPr lvl="1"/>
+            <a:r>
+              <a:rPr lang="en-US" dirty="0"/>
+              <a:t>This thing I noticed in my thesis is real – some effect is due to a real thing, not randomness.</a:t>
+            </a:r>
+          </a:p>
+          <a:p>
+            <a:pPr lvl="1"/>
+            <a:r>
+              <a:rPr lang="en-US" dirty="0"/>
+              <a:t>This difference matters – group A really is different from group B. </a:t>
+            </a:r>
+          </a:p>
+          <a:p>
+            <a:r>
+              <a:rPr lang="en-US" dirty="0"/>
+              <a:t>95% confidence is only 19 times out of 20. </a:t>
+            </a:r>
+          </a:p>
+          <a:p>
+            <a:r>
+              <a:rPr lang="en-US" dirty="0"/>
+              <a:t>If we just want to show something is significant:</a:t>
+            </a:r>
+          </a:p>
+          <a:p>
+            <a:pPr lvl="1"/>
+            <a:r>
+              <a:rPr lang="en-US" dirty="0"/>
+              <a:t>Manipulate variables</a:t>
+            </a:r>
+          </a:p>
+          <a:p>
+            <a:pPr lvl="1"/>
+            <a:r>
+              <a:rPr lang="en-US" dirty="0"/>
+              <a:t>Repeat testing with different details (test stats, sample size, </a:t>
+            </a:r>
+            <a:r>
+              <a:rPr lang="en-US" dirty="0" err="1"/>
+              <a:t>etc</a:t>
+            </a:r>
+            <a:r>
+              <a:rPr lang="en-US" dirty="0"/>
+              <a:t>…) </a:t>
+            </a:r>
+          </a:p>
+          <a:p>
+            <a:pPr lvl="1"/>
+            <a:r>
+              <a:rPr lang="en-US" dirty="0"/>
+              <a:t>Find a small p</a:t>
+            </a:r>
+          </a:p>
+          <a:p>
+            <a:pPr lvl="1"/>
+            <a:r>
+              <a:rPr lang="en-US" dirty="0"/>
+              <a:t>Publish!!!!!!!</a:t>
+            </a:r>
+          </a:p>
+        </p:txBody>
+      </p:sp>
+    </p:spTree>
+    <p:extLst>
+      <p:ext uri="{BB962C8B-B14F-4D97-AF65-F5344CB8AC3E}">
+        <p14:creationId xmlns:p14="http://schemas.microsoft.com/office/powerpoint/2010/main" val="2930291580"/>
+      </p:ext>
+    </p:extLst>
+  </p:cSld>
+  <p:clrMapOvr>
+    <a:masterClrMapping/>
+  </p:clrMapOvr>
+</p:sld>
+</file>
+
+<file path=ppt/slides/slide46.xml><?xml version="1.0" encoding="utf-8"?>
+<p:sld xmlns:a="http://schemas.openxmlformats.org/drawingml/2006/main" xmlns:r="http://schemas.openxmlformats.org/officeDocument/2006/relationships" xmlns:p="http://schemas.openxmlformats.org/presentationml/2006/main">
+  <p:cSld>
+    <p:bg>
+      <p:bgPr>
+        <a:gradFill rotWithShape="1">
+          <a:gsLst>
+            <a:gs pos="0">
+              <a:schemeClr val="bg2">
+                <a:tint val="94000"/>
+                <a:satMod val="80000"/>
+                <a:lumMod val="106000"/>
+              </a:schemeClr>
+            </a:gs>
+            <a:gs pos="100000">
+              <a:schemeClr val="bg2">
+                <a:shade val="80000"/>
+              </a:schemeClr>
+            </a:gs>
+          </a:gsLst>
+          <a:path path="circle">
+            <a:fillToRect l="43000" r="43000" b="100000"/>
+          </a:path>
+        </a:gradFill>
+        <a:effectLst/>
+      </p:bgPr>
+    </p:bg>
+    <p:spTree>
+      <p:nvGrpSpPr>
+        <p:cNvPr id="1" name=""/>
+        <p:cNvGrpSpPr/>
+        <p:nvPr/>
+      </p:nvGrpSpPr>
+      <p:grpSpPr>
+        <a:xfrm>
+          <a:off x="0" y="0"/>
+          <a:ext cx="0" cy="0"/>
+          <a:chOff x="0" y="0"/>
+          <a:chExt cx="0" cy="0"/>
+        </a:xfrm>
+      </p:grpSpPr>
+      <p:sp>
+        <p:nvSpPr>
+          <p:cNvPr id="2" name="Title 1">
+            <a:extLst>
+              <a:ext uri="{FF2B5EF4-FFF2-40B4-BE49-F238E27FC236}">
+                <a16:creationId xmlns:a16="http://schemas.microsoft.com/office/drawing/2014/main" id="{722F0982-DE8D-644B-8D71-399253321296}"/>
+              </a:ext>
+            </a:extLst>
+          </p:cNvPr>
+          <p:cNvSpPr>
+            <a:spLocks noGrp="1"/>
+          </p:cNvSpPr>
+          <p:nvPr>
+            <p:ph type="title"/>
+          </p:nvPr>
+        </p:nvSpPr>
+        <p:spPr>
+          <a:xfrm>
+            <a:off x="1451579" y="804519"/>
+            <a:ext cx="9603275" cy="1049235"/>
+          </a:xfrm>
+        </p:spPr>
+        <p:txBody>
+          <a:bodyPr>
+            <a:normAutofit/>
+          </a:bodyPr>
+          <a:lstStyle/>
+          <a:p>
+            <a:r>
+              <a:rPr lang="en-US" dirty="0"/>
               <a:t>Data Dredging</a:t>
             </a:r>
           </a:p>
@@ -10568,8 +10671,8 @@
         </p:nvSpPr>
         <p:spPr>
           <a:xfrm>
-            <a:off x="723662" y="1931651"/>
-            <a:ext cx="6024381" cy="4037747"/>
+            <a:off x="413886" y="1931651"/>
+            <a:ext cx="6334157" cy="4199642"/>
           </a:xfrm>
         </p:spPr>
         <p:txBody>
@@ -10678,158 +10781,6 @@
 </p:sld>
 </file>
 
-<file path=ppt/slides/slide46.xml><?xml version="1.0" encoding="utf-8"?>
-<p:sld xmlns:a="http://schemas.openxmlformats.org/drawingml/2006/main" xmlns:r="http://schemas.openxmlformats.org/officeDocument/2006/relationships" xmlns:p="http://schemas.openxmlformats.org/presentationml/2006/main">
-  <p:cSld>
-    <p:spTree>
-      <p:nvGrpSpPr>
-        <p:cNvPr id="1" name=""/>
-        <p:cNvGrpSpPr/>
-        <p:nvPr/>
-      </p:nvGrpSpPr>
-      <p:grpSpPr>
-        <a:xfrm>
-          <a:off x="0" y="0"/>
-          <a:ext cx="0" cy="0"/>
-          <a:chOff x="0" y="0"/>
-          <a:chExt cx="0" cy="0"/>
-        </a:xfrm>
-      </p:grpSpPr>
-      <p:sp>
-        <p:nvSpPr>
-          <p:cNvPr id="2" name="Title 1">
-            <a:extLst>
-              <a:ext uri="{FF2B5EF4-FFF2-40B4-BE49-F238E27FC236}">
-                <a16:creationId xmlns:a16="http://schemas.microsoft.com/office/drawing/2014/main" id="{BE41156D-A56A-0842-B741-09E6D744E59F}"/>
-              </a:ext>
-            </a:extLst>
-          </p:cNvPr>
-          <p:cNvSpPr>
-            <a:spLocks noGrp="1"/>
-          </p:cNvSpPr>
-          <p:nvPr>
-            <p:ph type="title"/>
-          </p:nvPr>
-        </p:nvSpPr>
-        <p:spPr/>
-        <p:txBody>
-          <a:bodyPr/>
-          <a:lstStyle/>
-          <a:p>
-            <a:r>
-              <a:rPr lang="en-US" dirty="0"/>
-              <a:t>Don’t be a P Hacker (Unless Maybe if grant Funding Depends on it)</a:t>
-            </a:r>
-          </a:p>
-        </p:txBody>
-      </p:sp>
-      <p:sp>
-        <p:nvSpPr>
-          <p:cNvPr id="3" name="Content Placeholder 2">
-            <a:extLst>
-              <a:ext uri="{FF2B5EF4-FFF2-40B4-BE49-F238E27FC236}">
-                <a16:creationId xmlns:a16="http://schemas.microsoft.com/office/drawing/2014/main" id="{09C2E57C-E69A-784E-B887-A6B8D10B924B}"/>
-              </a:ext>
-            </a:extLst>
-          </p:cNvPr>
-          <p:cNvSpPr>
-            <a:spLocks noGrp="1"/>
-          </p:cNvSpPr>
-          <p:nvPr>
-            <p:ph idx="1"/>
-          </p:nvPr>
-        </p:nvSpPr>
-        <p:spPr>
-          <a:xfrm>
-            <a:off x="1451579" y="2015732"/>
-            <a:ext cx="9603275" cy="4037749"/>
-          </a:xfrm>
-        </p:spPr>
-        <p:txBody>
-          <a:bodyPr/>
-          <a:lstStyle/>
-          <a:p>
-            <a:r>
-              <a:rPr lang="en-US" dirty="0"/>
-              <a:t>Share process, not just results. </a:t>
-            </a:r>
-          </a:p>
-          <a:p>
-            <a:r>
-              <a:rPr lang="en-US" dirty="0"/>
-              <a:t>Look for multiple metrics of significance that agree with each other. </a:t>
-            </a:r>
-          </a:p>
-          <a:p>
-            <a:r>
-              <a:rPr lang="en-US" dirty="0"/>
-              <a:t>Just “don’t” – avoid searching for ways to force data to show what you want. </a:t>
-            </a:r>
-          </a:p>
-          <a:p>
-            <a:pPr lvl="1"/>
-            <a:r>
-              <a:rPr lang="en-US" dirty="0"/>
-              <a:t>P hacking usually involves extra work – changing test statistics, filtering data, </a:t>
-            </a:r>
-            <a:r>
-              <a:rPr lang="en-US" dirty="0" err="1"/>
-              <a:t>etc</a:t>
-            </a:r>
-            <a:r>
-              <a:rPr lang="en-US" dirty="0"/>
-              <a:t>…</a:t>
-            </a:r>
-          </a:p>
-          <a:p>
-            <a:pPr lvl="1"/>
-            <a:r>
-              <a:rPr lang="en-US" dirty="0"/>
-              <a:t>If an experiment is well designed, we live with the results. </a:t>
-            </a:r>
-          </a:p>
-          <a:p>
-            <a:r>
-              <a:rPr lang="en-US" dirty="0"/>
-              <a:t>This is a malicious application of stats – we should be offended!!!!!</a:t>
-            </a:r>
-          </a:p>
-          <a:p>
-            <a:pPr lvl="1"/>
-            <a:r>
-              <a:rPr lang="en-US" dirty="0"/>
-              <a:t>Biologists, doctors, </a:t>
-            </a:r>
-            <a:r>
-              <a:rPr lang="en-US" dirty="0" err="1"/>
-              <a:t>etc</a:t>
-            </a:r>
-            <a:r>
-              <a:rPr lang="en-US" dirty="0"/>
-              <a:t>… misuse our precious math to make their crap sciences look legit. </a:t>
-            </a:r>
-          </a:p>
-          <a:p>
-            <a:r>
-              <a:rPr lang="en-US" dirty="0"/>
-              <a:t>If you need to show your research shows significance, then hack away at your p. </a:t>
-            </a:r>
-          </a:p>
-        </p:txBody>
-      </p:sp>
-    </p:spTree>
-    <p:extLst>
-      <p:ext uri="{BB962C8B-B14F-4D97-AF65-F5344CB8AC3E}">
-        <p14:creationId xmlns:p14="http://schemas.microsoft.com/office/powerpoint/2010/main" val="1179250358"/>
-      </p:ext>
-    </p:extLst>
-  </p:cSld>
-  <p:clrMapOvr>
-    <a:masterClrMapping/>
-  </p:clrMapOvr>
-</p:sld>
-</file>
-
 <file path=ppt/slides/slide47.xml><?xml version="1.0" encoding="utf-8"?>
 <p:sld xmlns:a="http://schemas.openxmlformats.org/drawingml/2006/main" xmlns:r="http://schemas.openxmlformats.org/officeDocument/2006/relationships" xmlns:p="http://schemas.openxmlformats.org/presentationml/2006/main">
   <p:cSld>
@@ -10852,7 +10803,7 @@
           <p:cNvPr id="2" name="Title 1">
             <a:extLst>
               <a:ext uri="{FF2B5EF4-FFF2-40B4-BE49-F238E27FC236}">
-                <a16:creationId xmlns:a16="http://schemas.microsoft.com/office/drawing/2014/main" id="{0335BE2D-F548-0127-319A-2B53F05C6ED9}"/>
+                <a16:creationId xmlns:a16="http://schemas.microsoft.com/office/drawing/2014/main" id="{BE41156D-A56A-0842-B741-09E6D744E59F}"/>
               </a:ext>
             </a:extLst>
           </p:cNvPr>
@@ -10870,7 +10821,7 @@
           <a:p>
             <a:r>
               <a:rPr lang="en-US" dirty="0"/>
-              <a:t>Hypothesis tests and you!</a:t>
+              <a:t>Don’t be a P Hacker (Unless Maybe if grant Funding Depends on it)</a:t>
             </a:r>
           </a:p>
         </p:txBody>
@@ -10880,7 +10831,7 @@
           <p:cNvPr id="3" name="Content Placeholder 2">
             <a:extLst>
               <a:ext uri="{FF2B5EF4-FFF2-40B4-BE49-F238E27FC236}">
-                <a16:creationId xmlns:a16="http://schemas.microsoft.com/office/drawing/2014/main" id="{36EABB56-8944-BD49-D204-10BA7A987AED}"/>
+                <a16:creationId xmlns:a16="http://schemas.microsoft.com/office/drawing/2014/main" id="{09C2E57C-E69A-784E-B887-A6B8D10B924B}"/>
               </a:ext>
             </a:extLst>
           </p:cNvPr>
@@ -10893,8 +10844,8 @@
         </p:nvSpPr>
         <p:spPr>
           <a:xfrm>
-            <a:off x="1451579" y="1853755"/>
-            <a:ext cx="9603275" cy="4199726"/>
+            <a:off x="1451579" y="2015732"/>
+            <a:ext cx="9603275" cy="4037749"/>
           </a:xfrm>
         </p:spPr>
         <p:txBody>
@@ -10903,41 +10854,26 @@
           <a:p>
             <a:r>
               <a:rPr lang="en-US" dirty="0"/>
-              <a:t>These hypothesis tests are specific parametric applications of our simulation loops. </a:t>
-            </a:r>
-          </a:p>
-          <a:p>
-            <a:pPr lvl="1"/>
-            <a:r>
-              <a:rPr lang="en-US" dirty="0"/>
-              <a:t>Each hypothesis tests says, “out of N trials how many…”</a:t>
-            </a:r>
-          </a:p>
-          <a:p>
-            <a:pPr lvl="1"/>
-            <a:r>
-              <a:rPr lang="en-US" dirty="0"/>
-              <a:t>E.g. out of 100 times, how many will randomly show a difference in life exp. </a:t>
-            </a:r>
-          </a:p>
-          <a:p>
-            <a:pPr lvl="1"/>
-            <a:r>
-              <a:rPr lang="en-US" dirty="0"/>
-              <a:t>Or, what is the probability of this difference being due to random selection. </a:t>
-            </a:r>
-          </a:p>
-          <a:p>
-            <a:r>
-              <a:rPr lang="en-US" dirty="0"/>
-              <a:t>If we can create some function for one trial/round we can run this directly.  </a:t>
-            </a:r>
-          </a:p>
-          <a:p>
-            <a:pPr lvl="1"/>
-            <a:r>
-              <a:rPr lang="en-US" dirty="0"/>
-              <a:t>Analytical distribution, probability function, </a:t>
+              <a:t>Share process, not just results. </a:t>
+            </a:r>
+          </a:p>
+          <a:p>
+            <a:r>
+              <a:rPr lang="en-US" dirty="0"/>
+              <a:t>Look for multiple metrics of significance that agree with each other. </a:t>
+            </a:r>
+          </a:p>
+          <a:p>
+            <a:r>
+              <a:rPr lang="en-US" dirty="0"/>
+              <a:t>Just “don’t” – avoid searching for ways to force data to show what you want. </a:t>
+            </a:r>
+          </a:p>
+          <a:p>
+            <a:pPr lvl="1"/>
+            <a:r>
+              <a:rPr lang="en-US" dirty="0"/>
+              <a:t>P hacking usually involves extra work – changing test statistics, filtering data, </a:t>
             </a:r>
             <a:r>
               <a:rPr lang="en-US" dirty="0" err="1"/>
@@ -10952,20 +10888,34 @@
             <a:pPr lvl="1"/>
             <a:r>
               <a:rPr lang="en-US" dirty="0"/>
-              <a:t>Hypothesis tests rely on assumptions since they didn’t have computers. </a:t>
-            </a:r>
-          </a:p>
-          <a:p>
-            <a:r>
-              <a:rPr lang="en-US" dirty="0"/>
-              <a:t>Our loops are flexible, we can do hypothesis tests and more. </a:t>
-            </a:r>
-          </a:p>
-          <a:p>
-            <a:pPr lvl="1"/>
-            <a:r>
-              <a:rPr lang="en-US" dirty="0"/>
-              <a:t>This is actually very cool and big, we can do much of inferential stats with these two things. </a:t>
+              <a:t>If an experiment is well designed, we live with the results. </a:t>
+            </a:r>
+          </a:p>
+          <a:p>
+            <a:r>
+              <a:rPr lang="en-US" dirty="0"/>
+              <a:t>This is a malicious application of stats – we should be offended!!!!!</a:t>
+            </a:r>
+          </a:p>
+          <a:p>
+            <a:pPr lvl="1"/>
+            <a:r>
+              <a:rPr lang="en-US" dirty="0"/>
+              <a:t>Biologists, doctors, </a:t>
+            </a:r>
+            <a:r>
+              <a:rPr lang="en-US" dirty="0" err="1"/>
+              <a:t>etc</a:t>
+            </a:r>
+            <a:r>
+              <a:rPr lang="en-US" dirty="0"/>
+              <a:t>… misuse our precious math to make their crap sciences look legit. </a:t>
+            </a:r>
+          </a:p>
+          <a:p>
+            <a:r>
+              <a:rPr lang="en-US" dirty="0"/>
+              <a:t>If you need to show your research shows significance, then hack away at your p. </a:t>
             </a:r>
           </a:p>
         </p:txBody>
@@ -10973,7 +10923,257 @@
     </p:spTree>
     <p:extLst>
       <p:ext uri="{BB962C8B-B14F-4D97-AF65-F5344CB8AC3E}">
-        <p14:creationId xmlns:p14="http://schemas.microsoft.com/office/powerpoint/2010/main" val="3089929506"/>
+        <p14:creationId xmlns:p14="http://schemas.microsoft.com/office/powerpoint/2010/main" val="1179250358"/>
+      </p:ext>
+    </p:extLst>
+  </p:cSld>
+  <p:clrMapOvr>
+    <a:masterClrMapping/>
+  </p:clrMapOvr>
+</p:sld>
+</file>
+
+<file path=ppt/slides/slide48.xml><?xml version="1.0" encoding="utf-8"?>
+<p:sld xmlns:a="http://schemas.openxmlformats.org/drawingml/2006/main" xmlns:r="http://schemas.openxmlformats.org/officeDocument/2006/relationships" xmlns:p="http://schemas.openxmlformats.org/presentationml/2006/main">
+  <p:cSld>
+    <p:spTree>
+      <p:nvGrpSpPr>
+        <p:cNvPr id="1" name=""/>
+        <p:cNvGrpSpPr/>
+        <p:nvPr/>
+      </p:nvGrpSpPr>
+      <p:grpSpPr>
+        <a:xfrm>
+          <a:off x="0" y="0"/>
+          <a:ext cx="0" cy="0"/>
+          <a:chOff x="0" y="0"/>
+          <a:chExt cx="0" cy="0"/>
+        </a:xfrm>
+      </p:grpSpPr>
+      <p:sp>
+        <p:nvSpPr>
+          <p:cNvPr id="2" name="Title 1">
+            <a:extLst>
+              <a:ext uri="{FF2B5EF4-FFF2-40B4-BE49-F238E27FC236}">
+                <a16:creationId xmlns:a16="http://schemas.microsoft.com/office/drawing/2014/main" id="{87A09831-7E84-56B1-A8CD-FAD283E9CEE8}"/>
+              </a:ext>
+            </a:extLst>
+          </p:cNvPr>
+          <p:cNvSpPr>
+            <a:spLocks noGrp="1"/>
+          </p:cNvSpPr>
+          <p:nvPr>
+            <p:ph type="title"/>
+          </p:nvPr>
+        </p:nvSpPr>
+        <p:spPr/>
+        <p:txBody>
+          <a:bodyPr/>
+          <a:lstStyle/>
+          <a:p>
+            <a:r>
+              <a:rPr lang="en-US" dirty="0"/>
+              <a:t>.05 is Arbitrary</a:t>
+            </a:r>
+          </a:p>
+        </p:txBody>
+      </p:sp>
+      <p:sp>
+        <p:nvSpPr>
+          <p:cNvPr id="3" name="Content Placeholder 2">
+            <a:extLst>
+              <a:ext uri="{FF2B5EF4-FFF2-40B4-BE49-F238E27FC236}">
+                <a16:creationId xmlns:a16="http://schemas.microsoft.com/office/drawing/2014/main" id="{D2D6DA83-67FA-CB88-7DBE-95788FFFB03F}"/>
+              </a:ext>
+            </a:extLst>
+          </p:cNvPr>
+          <p:cNvSpPr>
+            <a:spLocks noGrp="1"/>
+          </p:cNvSpPr>
+          <p:nvPr>
+            <p:ph idx="1"/>
+          </p:nvPr>
+        </p:nvSpPr>
+        <p:spPr>
+          <a:xfrm>
+            <a:off x="1451579" y="1853753"/>
+            <a:ext cx="9603275" cy="4199727"/>
+          </a:xfrm>
+        </p:spPr>
+        <p:txBody>
+          <a:bodyPr/>
+          <a:lstStyle/>
+          <a:p>
+            <a:r>
+              <a:rPr lang="en-US" dirty="0"/>
+              <a:t>.05 is the ‘standard’ p value that is almost always taken as a default. </a:t>
+            </a:r>
+          </a:p>
+          <a:p>
+            <a:pPr lvl="1"/>
+            <a:r>
+              <a:rPr lang="en-US" dirty="0"/>
+              <a:t>When I learned science stuff in jr. high this was an unexplained rule. </a:t>
+            </a:r>
+          </a:p>
+          <a:p>
+            <a:r>
+              <a:rPr lang="en-US" dirty="0"/>
+              <a:t>.05 means that there is a 5% chance that the effect could occur randomly. </a:t>
+            </a:r>
+          </a:p>
+          <a:p>
+            <a:pPr lvl="1"/>
+            <a:r>
+              <a:rPr lang="en-US" dirty="0"/>
+              <a:t>That’s not really very unlikely in many situations. </a:t>
+            </a:r>
+          </a:p>
+          <a:p>
+            <a:r>
+              <a:rPr lang="en-US" dirty="0"/>
+              <a:t>Depending on what we are dealing with, other cutoffs may make sense. </a:t>
+            </a:r>
+          </a:p>
+          <a:p>
+            <a:r>
+              <a:rPr lang="en-US" dirty="0"/>
+              <a:t>Book gives a good order-of-magnitude based rule of thumb:</a:t>
+            </a:r>
+          </a:p>
+          <a:p>
+            <a:pPr lvl="1"/>
+            <a:r>
+              <a:rPr lang="en-US" dirty="0"/>
+              <a:t>&lt; 1% is very unlikely to occur by chance. </a:t>
+            </a:r>
+          </a:p>
+          <a:p>
+            <a:pPr lvl="1"/>
+            <a:r>
+              <a:rPr lang="en-US" dirty="0"/>
+              <a:t>&gt; 10% is likely to occur by chance. </a:t>
+            </a:r>
+          </a:p>
+          <a:p>
+            <a:pPr lvl="1"/>
+            <a:r>
+              <a:rPr lang="en-US" dirty="0"/>
+              <a:t>1% to 10% are plausible to occur by chance, and require more detailed examination. </a:t>
+            </a:r>
+          </a:p>
+        </p:txBody>
+      </p:sp>
+    </p:spTree>
+    <p:extLst>
+      <p:ext uri="{BB962C8B-B14F-4D97-AF65-F5344CB8AC3E}">
+        <p14:creationId xmlns:p14="http://schemas.microsoft.com/office/powerpoint/2010/main" val="1532189894"/>
+      </p:ext>
+    </p:extLst>
+  </p:cSld>
+  <p:clrMapOvr>
+    <a:masterClrMapping/>
+  </p:clrMapOvr>
+</p:sld>
+</file>
+
+<file path=ppt/slides/slide49.xml><?xml version="1.0" encoding="utf-8"?>
+<p:sld xmlns:a="http://schemas.openxmlformats.org/drawingml/2006/main" xmlns:r="http://schemas.openxmlformats.org/officeDocument/2006/relationships" xmlns:p="http://schemas.openxmlformats.org/presentationml/2006/main">
+  <p:cSld>
+    <p:spTree>
+      <p:nvGrpSpPr>
+        <p:cNvPr id="1" name=""/>
+        <p:cNvGrpSpPr/>
+        <p:nvPr/>
+      </p:nvGrpSpPr>
+      <p:grpSpPr>
+        <a:xfrm>
+          <a:off x="0" y="0"/>
+          <a:ext cx="0" cy="0"/>
+          <a:chOff x="0" y="0"/>
+          <a:chExt cx="0" cy="0"/>
+        </a:xfrm>
+      </p:grpSpPr>
+      <p:sp>
+        <p:nvSpPr>
+          <p:cNvPr id="2" name="Title 1">
+            <a:extLst>
+              <a:ext uri="{FF2B5EF4-FFF2-40B4-BE49-F238E27FC236}">
+                <a16:creationId xmlns:a16="http://schemas.microsoft.com/office/drawing/2014/main" id="{86997495-5BBD-FBAA-72DB-9E98F2E8AB63}"/>
+              </a:ext>
+            </a:extLst>
+          </p:cNvPr>
+          <p:cNvSpPr>
+            <a:spLocks noGrp="1"/>
+          </p:cNvSpPr>
+          <p:nvPr>
+            <p:ph type="title"/>
+          </p:nvPr>
+        </p:nvSpPr>
+        <p:spPr/>
+        <p:txBody>
+          <a:bodyPr/>
+          <a:lstStyle/>
+          <a:p>
+            <a:r>
+              <a:rPr lang="en-US" dirty="0"/>
+              <a:t>What does P Really mean</a:t>
+            </a:r>
+          </a:p>
+        </p:txBody>
+      </p:sp>
+      <p:sp>
+        <p:nvSpPr>
+          <p:cNvPr id="3" name="Content Placeholder 2">
+            <a:extLst>
+              <a:ext uri="{FF2B5EF4-FFF2-40B4-BE49-F238E27FC236}">
+                <a16:creationId xmlns:a16="http://schemas.microsoft.com/office/drawing/2014/main" id="{ACF8EA6A-16CA-A4ED-727E-348D1853BF7F}"/>
+              </a:ext>
+            </a:extLst>
+          </p:cNvPr>
+          <p:cNvSpPr>
+            <a:spLocks noGrp="1"/>
+          </p:cNvSpPr>
+          <p:nvPr>
+            <p:ph idx="1"/>
+          </p:nvPr>
+        </p:nvSpPr>
+        <p:spPr/>
+        <p:txBody>
+          <a:bodyPr/>
+          <a:lstStyle/>
+          <a:p>
+            <a:r>
+              <a:rPr lang="en-US" dirty="0"/>
+              <a:t>The P value shows us one important source of error. </a:t>
+            </a:r>
+          </a:p>
+          <a:p>
+            <a:pPr lvl="1"/>
+            <a:r>
+              <a:rPr lang="en-US" dirty="0"/>
+              <a:t>Probability that the effect seen appears real but is fake (doesn’t hold in population). </a:t>
+            </a:r>
+          </a:p>
+          <a:p>
+            <a:r>
+              <a:rPr lang="en-US" dirty="0"/>
+              <a:t>Is there any other way that we could be wrong?...</a:t>
+            </a:r>
+          </a:p>
+          <a:p>
+            <a:pPr lvl="1"/>
+            <a:r>
+              <a:rPr lang="en-US" dirty="0"/>
+              <a:t>What if a drug works but we observe in a sample that it doesn’t?</a:t>
+            </a:r>
+          </a:p>
+        </p:txBody>
+      </p:sp>
+    </p:spTree>
+    <p:extLst>
+      <p:ext uri="{BB962C8B-B14F-4D97-AF65-F5344CB8AC3E}">
+        <p14:creationId xmlns:p14="http://schemas.microsoft.com/office/powerpoint/2010/main" val="1231486871"/>
       </p:ext>
     </p:extLst>
   </p:cSld>
@@ -11005,7 +11205,7 @@
           <p:cNvPr id="2" name="Title 1">
             <a:extLst>
               <a:ext uri="{FF2B5EF4-FFF2-40B4-BE49-F238E27FC236}">
-                <a16:creationId xmlns:a16="http://schemas.microsoft.com/office/drawing/2014/main" id="{F722AA3E-BBBE-94A6-DAF1-85773DBEE918}"/>
+                <a16:creationId xmlns:a16="http://schemas.microsoft.com/office/drawing/2014/main" id="{E809C108-238D-1FEB-4C0B-7DFF2179134D}"/>
               </a:ext>
             </a:extLst>
           </p:cNvPr>
@@ -11023,7 +11223,7 @@
           <a:p>
             <a:r>
               <a:rPr lang="en-US" dirty="0"/>
-              <a:t>Recall - Estimation</a:t>
+              <a:t>Don’t Get Scammed By my Exam</a:t>
             </a:r>
           </a:p>
         </p:txBody>
@@ -11033,7 +11233,7 @@
           <p:cNvPr id="3" name="Content Placeholder 2">
             <a:extLst>
               <a:ext uri="{FF2B5EF4-FFF2-40B4-BE49-F238E27FC236}">
-                <a16:creationId xmlns:a16="http://schemas.microsoft.com/office/drawing/2014/main" id="{080A01FD-7DDA-A8D2-8DC7-479583D5F684}"/>
+                <a16:creationId xmlns:a16="http://schemas.microsoft.com/office/drawing/2014/main" id="{E51C96AE-CE40-DB86-B929-A3476F568228}"/>
               </a:ext>
             </a:extLst>
           </p:cNvPr>
@@ -11044,19 +11244,382 @@
             <p:ph idx="1"/>
           </p:nvPr>
         </p:nvSpPr>
-        <p:spPr/>
+        <p:spPr>
+          <a:xfrm>
+            <a:off x="1451579" y="2015732"/>
+            <a:ext cx="9603275" cy="4037749"/>
+          </a:xfrm>
+        </p:spPr>
         <p:txBody>
           <a:bodyPr/>
           <a:lstStyle/>
           <a:p>
-            <a:endParaRPr lang="en-US"/>
+            <a:r>
+              <a:rPr lang="en-US" dirty="0"/>
+              <a:t>Contents: chapters 1-9 (hypothesis testing). </a:t>
+            </a:r>
+          </a:p>
+          <a:p>
+            <a:pPr lvl="1"/>
+            <a:r>
+              <a:rPr lang="en-US" dirty="0"/>
+              <a:t>Big things: basic stats, distributions, histogram/</a:t>
+            </a:r>
+            <a:r>
+              <a:rPr lang="en-US" dirty="0" err="1"/>
+              <a:t>pmf</a:t>
+            </a:r>
+            <a:r>
+              <a:rPr lang="en-US" dirty="0"/>
+              <a:t>/pdf/</a:t>
+            </a:r>
+            <a:r>
+              <a:rPr lang="en-US" dirty="0" err="1"/>
+              <a:t>cdf</a:t>
+            </a:r>
+            <a:r>
+              <a:rPr lang="en-US" dirty="0"/>
+              <a:t>, analytical distributions, error, models, correlation, estimation, hypothesis testing. </a:t>
+            </a:r>
+          </a:p>
+          <a:p>
+            <a:r>
+              <a:rPr lang="en-US" dirty="0"/>
+              <a:t>Types of stuff:</a:t>
+            </a:r>
+          </a:p>
+          <a:p>
+            <a:pPr lvl="1"/>
+            <a:r>
+              <a:rPr lang="en-US" dirty="0"/>
+              <a:t>Multiple choice and short answer on theory. </a:t>
+            </a:r>
+          </a:p>
+          <a:p>
+            <a:pPr lvl="1"/>
+            <a:r>
+              <a:rPr lang="en-US" dirty="0"/>
+              <a:t>‘Calculate this’ </a:t>
+            </a:r>
+          </a:p>
+          <a:p>
+            <a:pPr lvl="1"/>
+            <a:r>
+              <a:rPr lang="en-US" dirty="0"/>
+              <a:t>Provide a function body. </a:t>
+            </a:r>
+          </a:p>
+          <a:p>
+            <a:r>
+              <a:rPr lang="en-US" dirty="0"/>
+              <a:t>I’ll write a slightly more detailed guide this weekend. </a:t>
+            </a:r>
+          </a:p>
+          <a:p>
+            <a:endParaRPr lang="en-US" dirty="0"/>
           </a:p>
         </p:txBody>
       </p:sp>
     </p:spTree>
     <p:extLst>
       <p:ext uri="{BB962C8B-B14F-4D97-AF65-F5344CB8AC3E}">
-        <p14:creationId xmlns:p14="http://schemas.microsoft.com/office/powerpoint/2010/main" val="1056623766"/>
+        <p14:creationId xmlns:p14="http://schemas.microsoft.com/office/powerpoint/2010/main" val="2987906701"/>
+      </p:ext>
+    </p:extLst>
+  </p:cSld>
+  <p:clrMapOvr>
+    <a:masterClrMapping/>
+  </p:clrMapOvr>
+</p:sld>
+</file>
+
+<file path=ppt/slides/slide50.xml><?xml version="1.0" encoding="utf-8"?>
+<p:sld xmlns:a="http://schemas.openxmlformats.org/drawingml/2006/main" xmlns:r="http://schemas.openxmlformats.org/officeDocument/2006/relationships" xmlns:p="http://schemas.openxmlformats.org/presentationml/2006/main">
+  <p:cSld>
+    <p:spTree>
+      <p:nvGrpSpPr>
+        <p:cNvPr id="1" name=""/>
+        <p:cNvGrpSpPr/>
+        <p:nvPr/>
+      </p:nvGrpSpPr>
+      <p:grpSpPr>
+        <a:xfrm>
+          <a:off x="0" y="0"/>
+          <a:ext cx="0" cy="0"/>
+          <a:chOff x="0" y="0"/>
+          <a:chExt cx="0" cy="0"/>
+        </a:xfrm>
+      </p:grpSpPr>
+      <p:sp>
+        <p:nvSpPr>
+          <p:cNvPr id="2" name="Title 1">
+            <a:extLst>
+              <a:ext uri="{FF2B5EF4-FFF2-40B4-BE49-F238E27FC236}">
+                <a16:creationId xmlns:a16="http://schemas.microsoft.com/office/drawing/2014/main" id="{0335BE2D-F548-0127-319A-2B53F05C6ED9}"/>
+              </a:ext>
+            </a:extLst>
+          </p:cNvPr>
+          <p:cNvSpPr>
+            <a:spLocks noGrp="1"/>
+          </p:cNvSpPr>
+          <p:nvPr>
+            <p:ph type="title"/>
+          </p:nvPr>
+        </p:nvSpPr>
+        <p:spPr/>
+        <p:txBody>
+          <a:bodyPr/>
+          <a:lstStyle/>
+          <a:p>
+            <a:r>
+              <a:rPr lang="en-US" dirty="0"/>
+              <a:t>Hypothesis tests and you!</a:t>
+            </a:r>
+          </a:p>
+        </p:txBody>
+      </p:sp>
+      <p:sp>
+        <p:nvSpPr>
+          <p:cNvPr id="3" name="Content Placeholder 2">
+            <a:extLst>
+              <a:ext uri="{FF2B5EF4-FFF2-40B4-BE49-F238E27FC236}">
+                <a16:creationId xmlns:a16="http://schemas.microsoft.com/office/drawing/2014/main" id="{36EABB56-8944-BD49-D204-10BA7A987AED}"/>
+              </a:ext>
+            </a:extLst>
+          </p:cNvPr>
+          <p:cNvSpPr>
+            <a:spLocks noGrp="1"/>
+          </p:cNvSpPr>
+          <p:nvPr>
+            <p:ph idx="1"/>
+          </p:nvPr>
+        </p:nvSpPr>
+        <p:spPr>
+          <a:xfrm>
+            <a:off x="1451579" y="1853755"/>
+            <a:ext cx="9603275" cy="4199726"/>
+          </a:xfrm>
+        </p:spPr>
+        <p:txBody>
+          <a:bodyPr/>
+          <a:lstStyle/>
+          <a:p>
+            <a:r>
+              <a:rPr lang="en-US" dirty="0"/>
+              <a:t>These hypothesis tests are specific parametric applications of our simulation loops. </a:t>
+            </a:r>
+          </a:p>
+          <a:p>
+            <a:pPr lvl="1"/>
+            <a:r>
+              <a:rPr lang="en-US" dirty="0"/>
+              <a:t>Each hypothesis tests says, “out of N trials how many…”</a:t>
+            </a:r>
+          </a:p>
+          <a:p>
+            <a:pPr lvl="1"/>
+            <a:r>
+              <a:rPr lang="en-US" dirty="0"/>
+              <a:t>E.g. out of 100 times, how many will randomly show a difference in life exp. </a:t>
+            </a:r>
+          </a:p>
+          <a:p>
+            <a:pPr lvl="1"/>
+            <a:r>
+              <a:rPr lang="en-US" dirty="0"/>
+              <a:t>Or, what is the probability of this difference being due to random selection. </a:t>
+            </a:r>
+          </a:p>
+          <a:p>
+            <a:r>
+              <a:rPr lang="en-US" dirty="0"/>
+              <a:t>If we can create some function for one trial/round we can run this directly.  </a:t>
+            </a:r>
+          </a:p>
+          <a:p>
+            <a:pPr lvl="1"/>
+            <a:r>
+              <a:rPr lang="en-US" dirty="0"/>
+              <a:t>Analytical distribution, probability function, </a:t>
+            </a:r>
+            <a:r>
+              <a:rPr lang="en-US" dirty="0" err="1"/>
+              <a:t>etc</a:t>
+            </a:r>
+            <a:r>
+              <a:rPr lang="en-US" dirty="0"/>
+              <a:t>…</a:t>
+            </a:r>
+          </a:p>
+          <a:p>
+            <a:pPr lvl="1"/>
+            <a:r>
+              <a:rPr lang="en-US" dirty="0"/>
+              <a:t>Hypothesis test formulas rely on assumptions since they didn’t have computers. </a:t>
+            </a:r>
+          </a:p>
+          <a:p>
+            <a:r>
+              <a:rPr lang="en-US" dirty="0"/>
+              <a:t>Our loops are flexible, we can do hypothesis tests and more. </a:t>
+            </a:r>
+          </a:p>
+          <a:p>
+            <a:pPr lvl="1"/>
+            <a:r>
+              <a:rPr lang="en-US" dirty="0"/>
+              <a:t>This is actually very cool and big, we can do much of inferential stats with these two things. </a:t>
+            </a:r>
+          </a:p>
+        </p:txBody>
+      </p:sp>
+    </p:spTree>
+    <p:extLst>
+      <p:ext uri="{BB962C8B-B14F-4D97-AF65-F5344CB8AC3E}">
+        <p14:creationId xmlns:p14="http://schemas.microsoft.com/office/powerpoint/2010/main" val="3089929506"/>
+      </p:ext>
+    </p:extLst>
+  </p:cSld>
+  <p:clrMapOvr>
+    <a:masterClrMapping/>
+  </p:clrMapOvr>
+</p:sld>
+</file>
+
+<file path=ppt/slides/slide51.xml><?xml version="1.0" encoding="utf-8"?>
+<p:sld xmlns:a="http://schemas.openxmlformats.org/drawingml/2006/main" xmlns:r="http://schemas.openxmlformats.org/officeDocument/2006/relationships" xmlns:p="http://schemas.openxmlformats.org/presentationml/2006/main">
+  <p:cSld>
+    <p:spTree>
+      <p:nvGrpSpPr>
+        <p:cNvPr id="1" name=""/>
+        <p:cNvGrpSpPr/>
+        <p:nvPr/>
+      </p:nvGrpSpPr>
+      <p:grpSpPr>
+        <a:xfrm>
+          <a:off x="0" y="0"/>
+          <a:ext cx="0" cy="0"/>
+          <a:chOff x="0" y="0"/>
+          <a:chExt cx="0" cy="0"/>
+        </a:xfrm>
+      </p:grpSpPr>
+      <p:sp>
+        <p:nvSpPr>
+          <p:cNvPr id="2" name="Title 1">
+            <a:extLst>
+              <a:ext uri="{FF2B5EF4-FFF2-40B4-BE49-F238E27FC236}">
+                <a16:creationId xmlns:a16="http://schemas.microsoft.com/office/drawing/2014/main" id="{B4BF4EF1-D8B6-7402-0B52-AD514C7592DA}"/>
+              </a:ext>
+            </a:extLst>
+          </p:cNvPr>
+          <p:cNvSpPr>
+            <a:spLocks noGrp="1"/>
+          </p:cNvSpPr>
+          <p:nvPr>
+            <p:ph type="title"/>
+          </p:nvPr>
+        </p:nvSpPr>
+        <p:spPr/>
+        <p:txBody>
+          <a:bodyPr/>
+          <a:lstStyle/>
+          <a:p>
+            <a:r>
+              <a:rPr lang="en-US" dirty="0"/>
+              <a:t>Key Model Bits…</a:t>
+            </a:r>
+          </a:p>
+        </p:txBody>
+      </p:sp>
+      <p:sp>
+        <p:nvSpPr>
+          <p:cNvPr id="3" name="Content Placeholder 2">
+            <a:extLst>
+              <a:ext uri="{FF2B5EF4-FFF2-40B4-BE49-F238E27FC236}">
+                <a16:creationId xmlns:a16="http://schemas.microsoft.com/office/drawing/2014/main" id="{5E7B347B-78E9-C7B0-1AFC-E5F83D3A02B8}"/>
+              </a:ext>
+            </a:extLst>
+          </p:cNvPr>
+          <p:cNvSpPr>
+            <a:spLocks noGrp="1"/>
+          </p:cNvSpPr>
+          <p:nvPr>
+            <p:ph idx="1"/>
+          </p:nvPr>
+        </p:nvSpPr>
+        <p:spPr>
+          <a:xfrm>
+            <a:off x="1451579" y="1853754"/>
+            <a:ext cx="9603275" cy="4199727"/>
+          </a:xfrm>
+        </p:spPr>
+        <p:txBody>
+          <a:bodyPr/>
+          <a:lstStyle/>
+          <a:p>
+            <a:r>
+              <a:rPr lang="en-US" dirty="0"/>
+              <a:t>Some parts of the model idea are really important as we move to ML. </a:t>
+            </a:r>
+          </a:p>
+          <a:p>
+            <a:r>
+              <a:rPr lang="en-US" dirty="0"/>
+              <a:t>Create a model – the analytical model is our expectation of what this data will look like. </a:t>
+            </a:r>
+          </a:p>
+          <a:p>
+            <a:pPr lvl="1"/>
+            <a:r>
+              <a:rPr lang="en-US" dirty="0"/>
+              <a:t>We create it from the patterns of the old data. </a:t>
+            </a:r>
+          </a:p>
+          <a:p>
+            <a:r>
+              <a:rPr lang="en-US" dirty="0"/>
+              <a:t>Once a model exists, we can use it to make predictions for future data. </a:t>
+            </a:r>
+          </a:p>
+          <a:p>
+            <a:r>
+              <a:rPr lang="en-US" dirty="0"/>
+              <a:t>Our predictions can be used to figure stuff out, probabilistically: </a:t>
+            </a:r>
+          </a:p>
+          <a:p>
+            <a:pPr lvl="1"/>
+            <a:r>
+              <a:rPr lang="en-US" dirty="0"/>
+              <a:t>Generalizing from a sample to a population. </a:t>
+            </a:r>
+          </a:p>
+          <a:p>
+            <a:pPr lvl="1"/>
+            <a:r>
+              <a:rPr lang="en-US" dirty="0"/>
+              <a:t>Comparing distributions/values in a hypothesis test. </a:t>
+            </a:r>
+          </a:p>
+          <a:p>
+            <a:r>
+              <a:rPr lang="en-US" dirty="0"/>
+              <a:t>Our predictions will be better with a better fit between model and reality. </a:t>
+            </a:r>
+          </a:p>
+          <a:p>
+            <a:pPr lvl="1"/>
+            <a:r>
+              <a:rPr lang="en-US" dirty="0"/>
+              <a:t>The closer our data follows the pattern we assign, the better (less error, more conf.). </a:t>
+            </a:r>
+          </a:p>
+        </p:txBody>
+      </p:sp>
+    </p:spTree>
+    <p:extLst>
+      <p:ext uri="{BB962C8B-B14F-4D97-AF65-F5344CB8AC3E}">
+        <p14:creationId xmlns:p14="http://schemas.microsoft.com/office/powerpoint/2010/main" val="4142961316"/>
       </p:ext>
     </p:extLst>
   </p:cSld>
@@ -11088,7 +11651,7 @@
           <p:cNvPr id="2" name="Title 1">
             <a:extLst>
               <a:ext uri="{FF2B5EF4-FFF2-40B4-BE49-F238E27FC236}">
-                <a16:creationId xmlns:a16="http://schemas.microsoft.com/office/drawing/2014/main" id="{53C9C203-8EA9-7410-B8BA-9D9CB018ECB0}"/>
+                <a16:creationId xmlns:a16="http://schemas.microsoft.com/office/drawing/2014/main" id="{1FDA8813-E3D4-DF1E-4830-6613CBC2274A}"/>
               </a:ext>
             </a:extLst>
           </p:cNvPr>
@@ -11097,12 +11660,40 @@
           </p:cNvSpPr>
           <p:nvPr>
             <p:ph type="title"/>
+          </p:nvPr>
+        </p:nvSpPr>
+        <p:spPr/>
+        <p:txBody>
+          <a:bodyPr/>
+          <a:lstStyle/>
+          <a:p>
+            <a:r>
+              <a:rPr lang="en-US" dirty="0"/>
+              <a:t>Don’t get Scammed by my Exam, cont.</a:t>
+            </a:r>
+          </a:p>
+        </p:txBody>
+      </p:sp>
+      <p:sp>
+        <p:nvSpPr>
+          <p:cNvPr id="3" name="Content Placeholder 2">
+            <a:extLst>
+              <a:ext uri="{FF2B5EF4-FFF2-40B4-BE49-F238E27FC236}">
+                <a16:creationId xmlns:a16="http://schemas.microsoft.com/office/drawing/2014/main" id="{52F49FE2-BEC6-4840-6C44-57DA9313FF3C}"/>
+              </a:ext>
+            </a:extLst>
+          </p:cNvPr>
+          <p:cNvSpPr>
+            <a:spLocks noGrp="1"/>
+          </p:cNvSpPr>
+          <p:nvPr>
+            <p:ph idx="1"/>
           </p:nvPr>
         </p:nvSpPr>
         <p:spPr>
           <a:xfrm>
-            <a:off x="1" y="804519"/>
-            <a:ext cx="3549650" cy="1049235"/>
+            <a:off x="1451579" y="1930400"/>
+            <a:ext cx="9603275" cy="4123081"/>
           </a:xfrm>
         </p:spPr>
         <p:txBody>
@@ -11111,139 +11702,71 @@
           <a:p>
             <a:r>
               <a:rPr lang="en-US" dirty="0"/>
-              <a:t>Recall - Estimation</a:t>
-            </a:r>
-          </a:p>
-        </p:txBody>
-      </p:sp>
-      <p:sp>
-        <p:nvSpPr>
-          <p:cNvPr id="3" name="Content Placeholder 2">
-            <a:extLst>
-              <a:ext uri="{FF2B5EF4-FFF2-40B4-BE49-F238E27FC236}">
-                <a16:creationId xmlns:a16="http://schemas.microsoft.com/office/drawing/2014/main" id="{7684DE7B-31AB-063F-8BC5-23E4889972D6}"/>
-              </a:ext>
-            </a:extLst>
-          </p:cNvPr>
-          <p:cNvSpPr>
-            <a:spLocks noGrp="1"/>
-          </p:cNvSpPr>
-          <p:nvPr>
-            <p:ph idx="1"/>
-          </p:nvPr>
-        </p:nvSpPr>
-        <p:spPr>
-          <a:xfrm>
-            <a:off x="0" y="2015732"/>
-            <a:ext cx="3549651" cy="4037749"/>
-          </a:xfrm>
-        </p:spPr>
-        <p:txBody>
-          <a:bodyPr/>
-          <a:lstStyle/>
-          <a:p>
-            <a:r>
-              <a:rPr lang="en-US" dirty="0"/>
-              <a:t>We looked at estimating for a population from a sample. </a:t>
-            </a:r>
-          </a:p>
-          <a:p>
-            <a:pPr lvl="1"/>
-            <a:r>
-              <a:rPr lang="en-US" dirty="0"/>
-              <a:t>Take sample, calculate stats.</a:t>
-            </a:r>
-          </a:p>
-          <a:p>
-            <a:pPr lvl="1"/>
-            <a:r>
-              <a:rPr lang="en-US" dirty="0"/>
-              <a:t>Make model, run trials.</a:t>
-            </a:r>
-          </a:p>
-          <a:p>
-            <a:r>
-              <a:rPr lang="en-US" dirty="0"/>
-              <a:t>Conclusions are probabilistic. </a:t>
-            </a:r>
-          </a:p>
-          <a:p>
-            <a:pPr lvl="1"/>
-            <a:r>
-              <a:rPr lang="en-US" dirty="0"/>
-              <a:t>We have uncertainty. </a:t>
-            </a:r>
-          </a:p>
-          <a:p>
-            <a:r>
-              <a:rPr lang="en-US" dirty="0"/>
-              <a:t>Conclusions have confidence intervals. </a:t>
-            </a:r>
-          </a:p>
-          <a:p>
-            <a:pPr lvl="1"/>
-            <a:r>
-              <a:rPr lang="en-US" dirty="0"/>
-              <a:t>Indication of prediction acc.</a:t>
-            </a:r>
-          </a:p>
-          <a:p>
-            <a:pPr lvl="1"/>
-            <a:endParaRPr lang="en-US" dirty="0"/>
-          </a:p>
-        </p:txBody>
-      </p:sp>
-      <p:pic>
-        <p:nvPicPr>
-          <p:cNvPr id="3076" name="Picture 4" descr="Can't find the CLT? Fundamental Statistics for Machine Learning: Part 1 |  by Abhishek Divekar | Medium">
-            <a:extLst>
-              <a:ext uri="{FF2B5EF4-FFF2-40B4-BE49-F238E27FC236}">
-                <a16:creationId xmlns:a16="http://schemas.microsoft.com/office/drawing/2014/main" id="{B0F902A8-0C2E-0F8C-1A06-AA40FDFF5048}"/>
-              </a:ext>
-            </a:extLst>
-          </p:cNvPr>
-          <p:cNvPicPr>
-            <a:picLocks noChangeAspect="1" noChangeArrowheads="1"/>
-          </p:cNvPicPr>
-          <p:nvPr/>
-        </p:nvPicPr>
-        <p:blipFill>
-          <a:blip r:embed="rId2">
-            <a:extLst>
-              <a:ext uri="{28A0092B-C50C-407E-A947-70E740481C1C}">
-                <a14:useLocalDpi xmlns:a14="http://schemas.microsoft.com/office/drawing/2010/main" val="0"/>
-              </a:ext>
-            </a:extLst>
-          </a:blip>
-          <a:srcRect/>
-          <a:stretch>
-            <a:fillRect/>
-          </a:stretch>
-        </p:blipFill>
-        <p:spPr bwMode="auto">
-          <a:xfrm>
-            <a:off x="3549650" y="0"/>
-            <a:ext cx="8642350" cy="6858000"/>
-          </a:xfrm>
-          <a:prstGeom prst="rect">
-            <a:avLst/>
-          </a:prstGeom>
-          <a:noFill/>
-          <a:extLst>
-            <a:ext uri="{909E8E84-426E-40DD-AFC4-6F175D3DCCD1}">
-              <a14:hiddenFill xmlns:a14="http://schemas.microsoft.com/office/drawing/2010/main">
-                <a:solidFill>
-                  <a:srgbClr val="FFFFFF"/>
-                </a:solidFill>
-              </a14:hiddenFill>
-            </a:ext>
-          </a:extLst>
-        </p:spPr>
-      </p:pic>
+              <a:t>Know:</a:t>
+            </a:r>
+          </a:p>
+          <a:p>
+            <a:pPr lvl="1"/>
+            <a:r>
+              <a:rPr lang="en-US" dirty="0"/>
+              <a:t>Major concepts. </a:t>
+            </a:r>
+          </a:p>
+          <a:p>
+            <a:pPr lvl="1"/>
+            <a:r>
+              <a:rPr lang="en-US" dirty="0"/>
+              <a:t>How things relate to each other (e.g. pdf, histogram, </a:t>
+            </a:r>
+            <a:r>
+              <a:rPr lang="en-US" dirty="0" err="1"/>
+              <a:t>cdf</a:t>
+            </a:r>
+            <a:r>
+              <a:rPr lang="en-US" dirty="0"/>
+              <a:t>, relationship). </a:t>
+            </a:r>
+          </a:p>
+          <a:p>
+            <a:pPr lvl="1"/>
+            <a:r>
+              <a:rPr lang="en-US" dirty="0"/>
+              <a:t>Usage (e.g. why would someone need this in real life). </a:t>
+            </a:r>
+          </a:p>
+          <a:p>
+            <a:pPr lvl="1"/>
+            <a:r>
+              <a:rPr lang="en-US" dirty="0"/>
+              <a:t>Logistics of cloning and submitting. </a:t>
+            </a:r>
+          </a:p>
+          <a:p>
+            <a:r>
+              <a:rPr lang="en-US" dirty="0"/>
+              <a:t>Don’t need to know:</a:t>
+            </a:r>
+          </a:p>
+          <a:p>
+            <a:pPr lvl="1"/>
+            <a:r>
+              <a:rPr lang="en-US" dirty="0"/>
+              <a:t>You don’t really need to memorize definitions or similar.  </a:t>
+            </a:r>
+          </a:p>
+          <a:p>
+            <a:pPr lvl="1"/>
+            <a:r>
+              <a:rPr lang="en-US" dirty="0"/>
+              <a:t>You don’t need to manually calculate anything without using code. </a:t>
+            </a:r>
+          </a:p>
+        </p:txBody>
+      </p:sp>
     </p:spTree>
     <p:extLst>
       <p:ext uri="{BB962C8B-B14F-4D97-AF65-F5344CB8AC3E}">
-        <p14:creationId xmlns:p14="http://schemas.microsoft.com/office/powerpoint/2010/main" val="3637465867"/>
+        <p14:creationId xmlns:p14="http://schemas.microsoft.com/office/powerpoint/2010/main" val="1127807364"/>
       </p:ext>
     </p:extLst>
   </p:cSld>
@@ -11275,7 +11798,7 @@
           <p:cNvPr id="2" name="Title 1">
             <a:extLst>
               <a:ext uri="{FF2B5EF4-FFF2-40B4-BE49-F238E27FC236}">
-                <a16:creationId xmlns:a16="http://schemas.microsoft.com/office/drawing/2014/main" id="{8EB41484-7549-9AD6-8858-9D7B52369AE9}"/>
+                <a16:creationId xmlns:a16="http://schemas.microsoft.com/office/drawing/2014/main" id="{06AD0F69-FF2D-0D56-CF59-ACACCF7D258D}"/>
               </a:ext>
             </a:extLst>
           </p:cNvPr>
@@ -11293,7 +11816,7 @@
           <a:p>
             <a:r>
               <a:rPr lang="en-US" dirty="0"/>
-              <a:t>Making Predictions</a:t>
+              <a:t>Don’t get Scammed by my Exam, cont.</a:t>
             </a:r>
           </a:p>
         </p:txBody>
@@ -11303,7 +11826,7 @@
           <p:cNvPr id="3" name="Content Placeholder 2">
             <a:extLst>
               <a:ext uri="{FF2B5EF4-FFF2-40B4-BE49-F238E27FC236}">
-                <a16:creationId xmlns:a16="http://schemas.microsoft.com/office/drawing/2014/main" id="{CF20F2D4-8597-0E59-306A-60B9146921D6}"/>
+                <a16:creationId xmlns:a16="http://schemas.microsoft.com/office/drawing/2014/main" id="{0143A913-A9BD-A460-A448-9EE7C57333F1}"/>
               </a:ext>
             </a:extLst>
           </p:cNvPr>
@@ -11316,8 +11839,8 @@
         </p:nvSpPr>
         <p:spPr>
           <a:xfrm>
-            <a:off x="7714650" y="2015732"/>
-            <a:ext cx="4066672" cy="4037749"/>
+            <a:off x="1451579" y="1853754"/>
+            <a:ext cx="9603275" cy="4199727"/>
           </a:xfrm>
         </p:spPr>
         <p:txBody>
@@ -11326,50 +11849,371 @@
           <a:p>
             <a:r>
               <a:rPr lang="en-US" dirty="0"/>
-              <a:t>When generalizing, we have a range and a likelihood. </a:t>
-            </a:r>
-          </a:p>
-          <a:p>
-            <a:r>
-              <a:rPr lang="en-US" dirty="0"/>
-              <a:t>Errors stem from:</a:t>
-            </a:r>
-          </a:p>
-          <a:p>
-            <a:pPr lvl="1"/>
-            <a:r>
-              <a:rPr lang="en-US" dirty="0"/>
-              <a:t>Sampling. </a:t>
-            </a:r>
-          </a:p>
-          <a:p>
-            <a:pPr lvl="1"/>
-            <a:r>
-              <a:rPr lang="en-US" dirty="0"/>
-              <a:t>Sampling bias. </a:t>
-            </a:r>
-          </a:p>
-          <a:p>
-            <a:pPr lvl="1"/>
-            <a:r>
-              <a:rPr lang="en-US" dirty="0"/>
-              <a:t>Measurement error. </a:t>
-            </a:r>
-          </a:p>
-          <a:p>
-            <a:r>
-              <a:rPr lang="en-US" dirty="0"/>
-              <a:t>Some errors are beyond us. </a:t>
+              <a:t>Know how to do:</a:t>
+            </a:r>
+          </a:p>
+          <a:p>
+            <a:pPr lvl="1"/>
+            <a:r>
+              <a:rPr lang="en-US" dirty="0"/>
+              <a:t>Utilize the major objects we touched on (</a:t>
+            </a:r>
+            <a:r>
+              <a:rPr lang="en-US" dirty="0" err="1"/>
+              <a:t>dataframes</a:t>
+            </a:r>
+            <a:r>
+              <a:rPr lang="en-US" dirty="0"/>
+              <a:t>, analytical </a:t>
+            </a:r>
+            <a:r>
+              <a:rPr lang="en-US" dirty="0" err="1"/>
+              <a:t>dists</a:t>
+            </a:r>
+            <a:r>
+              <a:rPr lang="en-US" dirty="0"/>
+              <a:t>, </a:t>
+            </a:r>
+            <a:r>
+              <a:rPr lang="en-US" dirty="0" err="1"/>
+              <a:t>thinkstats</a:t>
+            </a:r>
+            <a:r>
+              <a:rPr lang="en-US" dirty="0"/>
+              <a:t>, charts). </a:t>
+            </a:r>
+          </a:p>
+          <a:p>
+            <a:pPr lvl="2"/>
+            <a:r>
+              <a:rPr lang="en-US" dirty="0"/>
+              <a:t>Including changing parameters, requiring looking at documentation. </a:t>
+            </a:r>
+          </a:p>
+          <a:p>
+            <a:pPr lvl="1"/>
+            <a:r>
+              <a:rPr lang="en-US" dirty="0"/>
+              <a:t>Explore and describe data – you get some data, can you find ‘stuff’. </a:t>
+            </a:r>
+          </a:p>
+          <a:p>
+            <a:pPr lvl="2"/>
+            <a:r>
+              <a:rPr lang="en-US" dirty="0"/>
+              <a:t>Outliers, range, distributions, </a:t>
+            </a:r>
+            <a:r>
+              <a:rPr lang="en-US" dirty="0" err="1"/>
+              <a:t>etc</a:t>
+            </a:r>
+            <a:r>
+              <a:rPr lang="en-US" dirty="0"/>
+              <a:t>…</a:t>
+            </a:r>
+          </a:p>
+          <a:p>
+            <a:pPr lvl="1"/>
+            <a:r>
+              <a:rPr lang="en-US" dirty="0"/>
+              <a:t>Relate that to the meaning of the original data. (e.g. if # of customers is exponential, what does that mean?)</a:t>
+            </a:r>
+          </a:p>
+          <a:p>
+            <a:pPr lvl="1"/>
+            <a:r>
+              <a:rPr lang="en-US" dirty="0"/>
+              <a:t>Make a function from spec – the input/outputs are provided, you need to make the innards. </a:t>
+            </a:r>
+          </a:p>
+          <a:p>
+            <a:r>
+              <a:rPr lang="en-US" dirty="0"/>
+              <a:t>If I give you a dataset can you tell (and show) me all about it? </a:t>
+            </a:r>
+          </a:p>
+        </p:txBody>
+      </p:sp>
+    </p:spTree>
+    <p:extLst>
+      <p:ext uri="{BB962C8B-B14F-4D97-AF65-F5344CB8AC3E}">
+        <p14:creationId xmlns:p14="http://schemas.microsoft.com/office/powerpoint/2010/main" val="1338355578"/>
+      </p:ext>
+    </p:extLst>
+  </p:cSld>
+  <p:clrMapOvr>
+    <a:masterClrMapping/>
+  </p:clrMapOvr>
+</p:sld>
+</file>
+
+<file path=ppt/slides/slide8.xml><?xml version="1.0" encoding="utf-8"?>
+<p:sld xmlns:a="http://schemas.openxmlformats.org/drawingml/2006/main" xmlns:r="http://schemas.openxmlformats.org/officeDocument/2006/relationships" xmlns:p="http://schemas.openxmlformats.org/presentationml/2006/main" show="0">
+  <p:cSld>
+    <p:spTree>
+      <p:nvGrpSpPr>
+        <p:cNvPr id="1" name=""/>
+        <p:cNvGrpSpPr/>
+        <p:nvPr/>
+      </p:nvGrpSpPr>
+      <p:grpSpPr>
+        <a:xfrm>
+          <a:off x="0" y="0"/>
+          <a:ext cx="0" cy="0"/>
+          <a:chOff x="0" y="0"/>
+          <a:chExt cx="0" cy="0"/>
+        </a:xfrm>
+      </p:grpSpPr>
+      <p:sp>
+        <p:nvSpPr>
+          <p:cNvPr id="2" name="Title 1">
+            <a:extLst>
+              <a:ext uri="{FF2B5EF4-FFF2-40B4-BE49-F238E27FC236}">
+                <a16:creationId xmlns:a16="http://schemas.microsoft.com/office/drawing/2014/main" id="{AC3B9CDF-EFA5-1EEC-025C-66087F9C02F8}"/>
+              </a:ext>
+            </a:extLst>
+          </p:cNvPr>
+          <p:cNvSpPr>
+            <a:spLocks noGrp="1"/>
+          </p:cNvSpPr>
+          <p:nvPr>
+            <p:ph type="title"/>
+          </p:nvPr>
+        </p:nvSpPr>
+        <p:spPr/>
+        <p:txBody>
+          <a:bodyPr/>
+          <a:lstStyle/>
+          <a:p>
+            <a:r>
+              <a:rPr lang="en-US" dirty="0"/>
+              <a:t>Housekeeping:</a:t>
+            </a:r>
+          </a:p>
+        </p:txBody>
+      </p:sp>
+      <p:sp>
+        <p:nvSpPr>
+          <p:cNvPr id="3" name="Content Placeholder 2">
+            <a:extLst>
+              <a:ext uri="{FF2B5EF4-FFF2-40B4-BE49-F238E27FC236}">
+                <a16:creationId xmlns:a16="http://schemas.microsoft.com/office/drawing/2014/main" id="{D13F83CA-0EE3-BB5B-E653-DC3E53702C1A}"/>
+              </a:ext>
+            </a:extLst>
+          </p:cNvPr>
+          <p:cNvSpPr>
+            <a:spLocks noGrp="1"/>
+          </p:cNvSpPr>
+          <p:nvPr>
+            <p:ph idx="1"/>
+          </p:nvPr>
+        </p:nvSpPr>
+        <p:spPr/>
+        <p:txBody>
+          <a:bodyPr/>
+          <a:lstStyle/>
+          <a:p>
+            <a:r>
+              <a:rPr lang="en-US" dirty="0"/>
+              <a:t>Assignment – date extended to Monday, noon. </a:t>
+            </a:r>
+          </a:p>
+          <a:p>
+            <a:r>
+              <a:rPr lang="en-US" dirty="0"/>
+              <a:t>Quiz – We can do it on the 11</a:t>
+            </a:r>
+            <a:r>
+              <a:rPr lang="en-US" baseline="30000" dirty="0"/>
+              <a:t>th</a:t>
+            </a:r>
+            <a:r>
+              <a:rPr lang="en-US" dirty="0"/>
+              <a:t> , let me know if that poses a problem. </a:t>
+            </a:r>
+          </a:p>
+          <a:p>
+            <a:pPr lvl="1"/>
+            <a:r>
+              <a:rPr lang="en-US" dirty="0"/>
+              <a:t>Estimating and testing. </a:t>
+            </a:r>
+          </a:p>
+          <a:p>
+            <a:r>
+              <a:rPr lang="en-US" dirty="0"/>
+              <a:t>Today:</a:t>
+            </a:r>
+          </a:p>
+          <a:p>
+            <a:pPr lvl="1"/>
+            <a:r>
+              <a:rPr lang="en-US"/>
+              <a:t>Hypothesis testing. </a:t>
+            </a:r>
+            <a:endParaRPr lang="en-US" dirty="0"/>
+          </a:p>
+        </p:txBody>
+      </p:sp>
+    </p:spTree>
+    <p:extLst>
+      <p:ext uri="{BB962C8B-B14F-4D97-AF65-F5344CB8AC3E}">
+        <p14:creationId xmlns:p14="http://schemas.microsoft.com/office/powerpoint/2010/main" val="1578407356"/>
+      </p:ext>
+    </p:extLst>
+  </p:cSld>
+  <p:clrMapOvr>
+    <a:masterClrMapping/>
+  </p:clrMapOvr>
+</p:sld>
+</file>
+
+<file path=ppt/slides/slide9.xml><?xml version="1.0" encoding="utf-8"?>
+<p:sld xmlns:a="http://schemas.openxmlformats.org/drawingml/2006/main" xmlns:r="http://schemas.openxmlformats.org/officeDocument/2006/relationships" xmlns:p="http://schemas.openxmlformats.org/presentationml/2006/main">
+  <p:cSld>
+    <p:spTree>
+      <p:nvGrpSpPr>
+        <p:cNvPr id="1" name=""/>
+        <p:cNvGrpSpPr/>
+        <p:nvPr/>
+      </p:nvGrpSpPr>
+      <p:grpSpPr>
+        <a:xfrm>
+          <a:off x="0" y="0"/>
+          <a:ext cx="0" cy="0"/>
+          <a:chOff x="0" y="0"/>
+          <a:chExt cx="0" cy="0"/>
+        </a:xfrm>
+      </p:grpSpPr>
+      <p:sp>
+        <p:nvSpPr>
+          <p:cNvPr id="2" name="Title 1">
+            <a:extLst>
+              <a:ext uri="{FF2B5EF4-FFF2-40B4-BE49-F238E27FC236}">
+                <a16:creationId xmlns:a16="http://schemas.microsoft.com/office/drawing/2014/main" id="{7115F306-249F-4561-521B-14C45383C528}"/>
+              </a:ext>
+            </a:extLst>
+          </p:cNvPr>
+          <p:cNvSpPr>
+            <a:spLocks noGrp="1"/>
+          </p:cNvSpPr>
+          <p:nvPr>
+            <p:ph type="title"/>
+          </p:nvPr>
+        </p:nvSpPr>
+        <p:spPr/>
+        <p:txBody>
+          <a:bodyPr/>
+          <a:lstStyle/>
+          <a:p>
+            <a:r>
+              <a:rPr lang="en-US" dirty="0"/>
+              <a:t>Some Stuff</a:t>
+            </a:r>
+          </a:p>
+        </p:txBody>
+      </p:sp>
+      <p:sp>
+        <p:nvSpPr>
+          <p:cNvPr id="3" name="Content Placeholder 2">
+            <a:extLst>
+              <a:ext uri="{FF2B5EF4-FFF2-40B4-BE49-F238E27FC236}">
+                <a16:creationId xmlns:a16="http://schemas.microsoft.com/office/drawing/2014/main" id="{6D36FC52-8F69-94EE-32EB-161E1AB831C5}"/>
+              </a:ext>
+            </a:extLst>
+          </p:cNvPr>
+          <p:cNvSpPr>
+            <a:spLocks noGrp="1"/>
+          </p:cNvSpPr>
+          <p:nvPr>
+            <p:ph idx="1"/>
+          </p:nvPr>
+        </p:nvSpPr>
+        <p:spPr>
+          <a:xfrm>
+            <a:off x="1451579" y="1853755"/>
+            <a:ext cx="9603275" cy="4199726"/>
+          </a:xfrm>
+        </p:spPr>
+        <p:txBody>
+          <a:bodyPr>
+            <a:normAutofit lnSpcReduction="10000"/>
+          </a:bodyPr>
+          <a:lstStyle/>
+          <a:p>
+            <a:r>
+              <a:rPr lang="en-US" dirty="0"/>
+              <a:t>Question – in chapter 9 (e.g. 9.2) do the “class…” code parts make sense or no?</a:t>
+            </a:r>
+          </a:p>
+          <a:p>
+            <a:r>
+              <a:rPr lang="en-US" dirty="0"/>
+              <a:t>Today – recap simulation and (maybe) first part of hypothesis testing (&lt;=9.5). </a:t>
+            </a:r>
+          </a:p>
+          <a:p>
+            <a:pPr lvl="1"/>
+            <a:r>
+              <a:rPr lang="en-US" dirty="0"/>
+              <a:t>Game 7. </a:t>
+            </a:r>
+          </a:p>
+          <a:p>
+            <a:pPr lvl="1"/>
+            <a:r>
+              <a:rPr lang="en-US" dirty="0"/>
+              <a:t>More generalization, confidence, and election simulation. </a:t>
+            </a:r>
+          </a:p>
+          <a:p>
+            <a:pPr lvl="1"/>
+            <a:r>
+              <a:rPr lang="en-US" dirty="0"/>
+              <a:t>Hypothesis testing from scratch. </a:t>
+            </a:r>
+          </a:p>
+          <a:p>
+            <a:pPr lvl="1"/>
+            <a:r>
+              <a:rPr lang="en-US" dirty="0"/>
+              <a:t>Depending on what you all know, a bit about classes to make sense of book. </a:t>
+            </a:r>
+          </a:p>
+          <a:p>
+            <a:r>
+              <a:rPr lang="en-US" dirty="0"/>
+              <a:t>Note: we’ll look at the ‘from scratch’ stuff now and worry about t/z/p tests next time. </a:t>
+            </a:r>
+          </a:p>
+          <a:p>
+            <a:r>
+              <a:rPr lang="en-US" dirty="0"/>
+              <a:t>Exam, in a couple of weeks (31):</a:t>
+            </a:r>
+          </a:p>
+          <a:p>
+            <a:pPr lvl="1"/>
+            <a:r>
+              <a:rPr lang="en-US" dirty="0"/>
+              <a:t>Set a cutoff on hypothesis testing (ch9 - we’ll be more specific at the end of the week). </a:t>
+            </a:r>
+          </a:p>
+          <a:p>
+            <a:pPr lvl="1"/>
+            <a:r>
+              <a:rPr lang="en-US" dirty="0"/>
+              <a:t>It’ll involve answering some questions, and submitting some code bits. </a:t>
             </a:r>
           </a:p>
         </p:txBody>
       </p:sp>
       <p:pic>
         <p:nvPicPr>
-          <p:cNvPr id="4" name="Picture 2" descr="Chapter 10 Confidence Intervals | Introduction to Statistics and Data  Science">
+          <p:cNvPr id="2050" name="Picture 2" descr="Toronto Blue Jays - Wikipedia">
             <a:extLst>
               <a:ext uri="{FF2B5EF4-FFF2-40B4-BE49-F238E27FC236}">
-                <a16:creationId xmlns:a16="http://schemas.microsoft.com/office/drawing/2014/main" id="{3FB6E4FC-E947-EA3D-3069-097DD3CC5739}"/>
+                <a16:creationId xmlns:a16="http://schemas.microsoft.com/office/drawing/2014/main" id="{906B6302-6014-1A0A-B459-FC61F9795AB8}"/>
               </a:ext>
             </a:extLst>
           </p:cNvPr>
@@ -11393,8 +12237,8 @@
         </p:blipFill>
         <p:spPr bwMode="auto">
           <a:xfrm>
-            <a:off x="0" y="1853754"/>
-            <a:ext cx="7714650" cy="4408371"/>
+            <a:off x="9970474" y="0"/>
+            <a:ext cx="2168759" cy="1870441"/>
           </a:xfrm>
           <a:prstGeom prst="rect">
             <a:avLst/>
@@ -11414,318 +12258,7 @@
     </p:spTree>
     <p:extLst>
       <p:ext uri="{BB962C8B-B14F-4D97-AF65-F5344CB8AC3E}">
-        <p14:creationId xmlns:p14="http://schemas.microsoft.com/office/powerpoint/2010/main" val="3203570768"/>
-      </p:ext>
-    </p:extLst>
-  </p:cSld>
-  <p:clrMapOvr>
-    <a:masterClrMapping/>
-  </p:clrMapOvr>
-</p:sld>
-</file>
-
-<file path=ppt/slides/slide8.xml><?xml version="1.0" encoding="utf-8"?>
-<p:sld xmlns:a="http://schemas.openxmlformats.org/drawingml/2006/main" xmlns:r="http://schemas.openxmlformats.org/officeDocument/2006/relationships" xmlns:p="http://schemas.openxmlformats.org/presentationml/2006/main">
-  <p:cSld>
-    <p:spTree>
-      <p:nvGrpSpPr>
-        <p:cNvPr id="1" name=""/>
-        <p:cNvGrpSpPr/>
-        <p:nvPr/>
-      </p:nvGrpSpPr>
-      <p:grpSpPr>
-        <a:xfrm>
-          <a:off x="0" y="0"/>
-          <a:ext cx="0" cy="0"/>
-          <a:chOff x="0" y="0"/>
-          <a:chExt cx="0" cy="0"/>
-        </a:xfrm>
-      </p:grpSpPr>
-      <p:sp>
-        <p:nvSpPr>
-          <p:cNvPr id="2" name="Title 1">
-            <a:extLst>
-              <a:ext uri="{FF2B5EF4-FFF2-40B4-BE49-F238E27FC236}">
-                <a16:creationId xmlns:a16="http://schemas.microsoft.com/office/drawing/2014/main" id="{A9BE8D9D-350C-FFC8-8E60-05F536113D49}"/>
-              </a:ext>
-            </a:extLst>
-          </p:cNvPr>
-          <p:cNvSpPr>
-            <a:spLocks noGrp="1"/>
-          </p:cNvSpPr>
-          <p:nvPr>
-            <p:ph type="title"/>
-          </p:nvPr>
-        </p:nvSpPr>
-        <p:spPr/>
-        <p:txBody>
-          <a:bodyPr/>
-          <a:lstStyle/>
-          <a:p>
-            <a:r>
-              <a:rPr lang="en-US" dirty="0"/>
-              <a:t>Using Simulations</a:t>
-            </a:r>
-          </a:p>
-        </p:txBody>
-      </p:sp>
-      <p:sp>
-        <p:nvSpPr>
-          <p:cNvPr id="3" name="Content Placeholder 2">
-            <a:extLst>
-              <a:ext uri="{FF2B5EF4-FFF2-40B4-BE49-F238E27FC236}">
-                <a16:creationId xmlns:a16="http://schemas.microsoft.com/office/drawing/2014/main" id="{6F01357A-84A4-884F-00D0-13CDFD37E2A6}"/>
-              </a:ext>
-            </a:extLst>
-          </p:cNvPr>
-          <p:cNvSpPr>
-            <a:spLocks noGrp="1"/>
-          </p:cNvSpPr>
-          <p:nvPr>
-            <p:ph idx="1"/>
-          </p:nvPr>
-        </p:nvSpPr>
-        <p:spPr>
-          <a:xfrm>
-            <a:off x="1451579" y="2015732"/>
-            <a:ext cx="9603275" cy="3932681"/>
-          </a:xfrm>
-        </p:spPr>
-        <p:txBody>
-          <a:bodyPr/>
-          <a:lstStyle/>
-          <a:p>
-            <a:r>
-              <a:rPr lang="en-US" dirty="0"/>
-              <a:t>We can do this with our simulation loops. </a:t>
-            </a:r>
-          </a:p>
-          <a:p>
-            <a:pPr lvl="1"/>
-            <a:r>
-              <a:rPr lang="en-US" dirty="0"/>
-              <a:t>We have a model for data expectations (analytical distribution) made from sample. </a:t>
-            </a:r>
-          </a:p>
-          <a:p>
-            <a:pPr lvl="1"/>
-            <a:r>
-              <a:rPr lang="en-US" dirty="0"/>
-              <a:t>We can generate many new samples from that distribution. </a:t>
-            </a:r>
-          </a:p>
-          <a:p>
-            <a:pPr lvl="1"/>
-            <a:r>
-              <a:rPr lang="en-US" dirty="0"/>
-              <a:t>We can count where the results of those samples fall. </a:t>
-            </a:r>
-          </a:p>
-          <a:p>
-            <a:r>
-              <a:rPr lang="en-US" dirty="0"/>
-              <a:t>These counts are an estimate of what we can expect going forward. </a:t>
-            </a:r>
-          </a:p>
-          <a:p>
-            <a:pPr lvl="1"/>
-            <a:r>
-              <a:rPr lang="en-US" dirty="0"/>
-              <a:t>The more clustered they are, the more confident we are in predictions. </a:t>
-            </a:r>
-          </a:p>
-          <a:p>
-            <a:pPr lvl="1"/>
-            <a:r>
-              <a:rPr lang="en-US" dirty="0"/>
-              <a:t>The range that 90/95/99% fall into is our confidence interval. </a:t>
-            </a:r>
-          </a:p>
-          <a:p>
-            <a:r>
-              <a:rPr lang="en-US" dirty="0"/>
-              <a:t>As long as we have some model of the distribution, we can do the same thing. </a:t>
-            </a:r>
-          </a:p>
-        </p:txBody>
-      </p:sp>
-    </p:spTree>
-    <p:extLst>
-      <p:ext uri="{BB962C8B-B14F-4D97-AF65-F5344CB8AC3E}">
-        <p14:creationId xmlns:p14="http://schemas.microsoft.com/office/powerpoint/2010/main" val="3630232877"/>
-      </p:ext>
-    </p:extLst>
-  </p:cSld>
-  <p:clrMapOvr>
-    <a:masterClrMapping/>
-  </p:clrMapOvr>
-</p:sld>
-</file>
-
-<file path=ppt/slides/slide9.xml><?xml version="1.0" encoding="utf-8"?>
-<p:sld xmlns:a="http://schemas.openxmlformats.org/drawingml/2006/main" xmlns:r="http://schemas.openxmlformats.org/officeDocument/2006/relationships" xmlns:p="http://schemas.openxmlformats.org/presentationml/2006/main">
-  <p:cSld>
-    <p:spTree>
-      <p:nvGrpSpPr>
-        <p:cNvPr id="1" name="">
-          <a:extLst>
-            <a:ext uri="{FF2B5EF4-FFF2-40B4-BE49-F238E27FC236}">
-              <a16:creationId xmlns:a16="http://schemas.microsoft.com/office/drawing/2014/main" id="{1C237FF7-4E14-DB4F-0428-DA9C7B428F28}"/>
-            </a:ext>
-          </a:extLst>
-        </p:cNvPr>
-        <p:cNvGrpSpPr/>
-        <p:nvPr/>
-      </p:nvGrpSpPr>
-      <p:grpSpPr>
-        <a:xfrm>
-          <a:off x="0" y="0"/>
-          <a:ext cx="0" cy="0"/>
-          <a:chOff x="0" y="0"/>
-          <a:chExt cx="0" cy="0"/>
-        </a:xfrm>
-      </p:grpSpPr>
-      <p:sp>
-        <p:nvSpPr>
-          <p:cNvPr id="2" name="Title 1">
-            <a:extLst>
-              <a:ext uri="{FF2B5EF4-FFF2-40B4-BE49-F238E27FC236}">
-                <a16:creationId xmlns:a16="http://schemas.microsoft.com/office/drawing/2014/main" id="{A4D52962-0069-5970-7E60-5D3767C89133}"/>
-              </a:ext>
-            </a:extLst>
-          </p:cNvPr>
-          <p:cNvSpPr>
-            <a:spLocks noGrp="1"/>
-          </p:cNvSpPr>
-          <p:nvPr>
-            <p:ph type="title"/>
-          </p:nvPr>
-        </p:nvSpPr>
-        <p:spPr>
-          <a:xfrm>
-            <a:off x="1451579" y="804519"/>
-            <a:ext cx="9603275" cy="1049235"/>
-          </a:xfrm>
-        </p:spPr>
-        <p:txBody>
-          <a:bodyPr>
-            <a:normAutofit/>
-          </a:bodyPr>
-          <a:lstStyle/>
-          <a:p>
-            <a:r>
-              <a:rPr lang="en-US" dirty="0"/>
-              <a:t>Effects Flashback – Cohen’s Effect Size</a:t>
-            </a:r>
-          </a:p>
-        </p:txBody>
-      </p:sp>
-      <p:sp>
-        <p:nvSpPr>
-          <p:cNvPr id="3" name="Content Placeholder 2">
-            <a:extLst>
-              <a:ext uri="{FF2B5EF4-FFF2-40B4-BE49-F238E27FC236}">
-                <a16:creationId xmlns:a16="http://schemas.microsoft.com/office/drawing/2014/main" id="{1F71D939-A10B-21DB-D934-F4F7A82E8C42}"/>
-              </a:ext>
-            </a:extLst>
-          </p:cNvPr>
-          <p:cNvSpPr>
-            <a:spLocks noGrp="1"/>
-          </p:cNvSpPr>
-          <p:nvPr>
-            <p:ph idx="1"/>
-          </p:nvPr>
-        </p:nvSpPr>
-        <p:spPr>
-          <a:xfrm>
-            <a:off x="1451579" y="2015734"/>
-            <a:ext cx="7089668" cy="4037747"/>
-          </a:xfrm>
-        </p:spPr>
-        <p:txBody>
-          <a:bodyPr>
-            <a:normAutofit/>
-          </a:bodyPr>
-          <a:lstStyle/>
-          <a:p>
-            <a:r>
-              <a:rPr lang="en-US" dirty="0"/>
-              <a:t>Effects are just differences between samples. </a:t>
-            </a:r>
-          </a:p>
-          <a:p>
-            <a:r>
-              <a:rPr lang="en-US" dirty="0"/>
-              <a:t>Effect size is very good for showing how big of a difference there is between groups.</a:t>
-            </a:r>
-          </a:p>
-          <a:p>
-            <a:pPr lvl="1"/>
-            <a:r>
-              <a:rPr lang="en-US" dirty="0"/>
-              <a:t>How ”big” is the difference between A and B</a:t>
-            </a:r>
-          </a:p>
-          <a:p>
-            <a:r>
-              <a:rPr lang="en-US" dirty="0"/>
-              <a:t>Easy to calculate, symmetrical, comparable across studies. </a:t>
-            </a:r>
-          </a:p>
-          <a:p>
-            <a:r>
-              <a:rPr lang="en-US" dirty="0"/>
-              <a:t>Downside – the value doesn’t have obvious meaning. </a:t>
-            </a:r>
-          </a:p>
-          <a:p>
-            <a:r>
-              <a:rPr lang="en-US" dirty="0"/>
-              <a:t>Table is a list of approximate significance, by Cohen himself. </a:t>
-            </a:r>
-          </a:p>
-          <a:p>
-            <a:r>
-              <a:rPr lang="en-US" dirty="0"/>
-              <a:t>Book’s author a huge proponent of effect size!</a:t>
-            </a:r>
-          </a:p>
-        </p:txBody>
-      </p:sp>
-      <p:pic>
-        <p:nvPicPr>
-          <p:cNvPr id="4" name="Picture 3">
-            <a:extLst>
-              <a:ext uri="{FF2B5EF4-FFF2-40B4-BE49-F238E27FC236}">
-                <a16:creationId xmlns:a16="http://schemas.microsoft.com/office/drawing/2014/main" id="{EB62C5B9-5FA2-D563-844D-D905B8775149}"/>
-              </a:ext>
-            </a:extLst>
-          </p:cNvPr>
-          <p:cNvPicPr>
-            <a:picLocks noChangeAspect="1"/>
-          </p:cNvPicPr>
-          <p:nvPr/>
-        </p:nvPicPr>
-        <p:blipFill>
-          <a:blip r:embed="rId2"/>
-          <a:stretch>
-            <a:fillRect/>
-          </a:stretch>
-        </p:blipFill>
-        <p:spPr>
-          <a:xfrm>
-            <a:off x="8541247" y="2015734"/>
-            <a:ext cx="2727388" cy="4479127"/>
-          </a:xfrm>
-          <a:prstGeom prst="rect">
-            <a:avLst/>
-          </a:prstGeom>
-        </p:spPr>
-      </p:pic>
-    </p:spTree>
-    <p:extLst>
-      <p:ext uri="{BB962C8B-B14F-4D97-AF65-F5344CB8AC3E}">
-        <p14:creationId xmlns:p14="http://schemas.microsoft.com/office/powerpoint/2010/main" val="2455635162"/>
+        <p14:creationId xmlns:p14="http://schemas.microsoft.com/office/powerpoint/2010/main" val="3163518021"/>
       </p:ext>
     </p:extLst>
   </p:cSld>
